--- a/decks/day4/module-3-workflow-fundamentals.pptx
+++ b/decks/day4/module-3-workflow-fundamentals.pptx
@@ -23,9 +23,10 @@
     <p:sldId id="271" r:id="rId17"/>
     <p:sldId id="272" r:id="rId18"/>
     <p:sldId id="273" r:id="rId19"/>
+    <p:sldId id="274" r:id="rId20"/>
   </p:sldIdLst>
   <p:notesMasterIdLst>
-    <p:notesMasterId r:id="rId20"/>
+    <p:notesMasterId r:id="rId21"/>
   </p:notesMasterIdLst>
   <p:sldSz cx="9144000" cy="5143500"/>
   <p:notesSz cx="5143500" cy="9144000"/>
@@ -608,8 +609,8 @@
           <a:p>
             <a:r>
               <a:rPr lang="en-US" dirty="0"/>
-              <a:t>• Distinct from the WorkflowEvent stream on the previous slide — this is OpenTelemetry span-based tracing (workflow.build, workflow.run, executor.process, edge_group.process, message.send) for external tools like Aspire Dashboard or Application Insights, not something you consume programmatically in your own workflow code. edge_group.delivery_status is the practical payoff for today's lab: it tells you exactly why a message didn't arrive — including a conditional edge whose condition evaluated false.
-• GROUNDING SOURCE: https://learn.microsoft.com/en-us/agent-framework/workflows/observability</a:t>
+              <a:t>• Every workflow event uses a unified WorkflowEvent class with a type discriminator in Python. request_info is the human-in-the-loop hook covered next. Custom events (WorkflowEvent(type=..., data=...)) let executors emit domain-specific signals.
+• GROUNDING SOURCE: https://learn.microsoft.com/en-us/agent-framework/concepts/workflows/events</a:t>
             </a:r>
             <a:endParaRPr lang="en-US" dirty="0"/>
           </a:p>
@@ -697,8 +698,8 @@
           <a:p>
             <a:r>
               <a:rPr lang="en-US" dirty="0"/>
-              <a:t>• This is the mechanism Module 4 builds its "per-agent vs. shared memory" content on top of. State isolation matters: reusing one workflow-builder/executor instance across unrelated runs leaks state between them — wrap construction in a helper function so each run gets fresh instances.
-• GROUNDING SOURCE: https://learn.microsoft.com/en-us/agent-framework/concepts/workflows/state</a:t>
+              <a:t>• Distinct from the WorkflowEvent stream on the previous slide — this is OpenTelemetry span-based tracing (workflow.build, workflow.run, executor.process, edge_group.process, message.send) for external tools like Aspire Dashboard or Application Insights, not something you consume programmatically in your own workflow code. edge_group.delivery_status is the practical payoff for today's lab: it tells you exactly why a message didn't arrive — including a conditional edge whose condition evaluated false.
+• GROUNDING SOURCE: https://learn.microsoft.com/en-us/agent-framework/workflows/observability</a:t>
             </a:r>
             <a:endParaRPr lang="en-US" dirty="0"/>
           </a:p>
@@ -786,8 +787,8 @@
           <a:p>
             <a:r>
               <a:rPr lang="en-US" dirty="0"/>
-              <a:t>• ctx.request_info() pauses the workflow and emits a request_info event; the framework routes the eventual response back to the same executor's @response_handler automatically, matched by request/response type annotations.
-• GROUNDING SOURCE: https://learn.microsoft.com/en-us/agent-framework/workflows/human-in-the-loop</a:t>
+              <a:t>• This is the mechanism Module 4 builds its "per-agent vs. shared memory" content on top of. State isolation matters: reusing one workflow-builder/executor instance across unrelated runs leaks state between them — wrap construction in a helper function so each run gets fresh instances.
+• GROUNDING SOURCE: https://learn.microsoft.com/en-us/agent-framework/concepts/workflows/state</a:t>
             </a:r>
             <a:endParaRPr lang="en-US" dirty="0"/>
           </a:p>
@@ -875,7 +876,7 @@
           <a:p>
             <a:r>
               <a:rPr lang="en-US" dirty="0"/>
-              <a:t>• This is the multi-agent-workflow version of Day 3's single-agent approval_mode — same underlying request/response mechanism, now surfacing through a workflow's event stream instead of a single agent.run() loop.
+              <a:t>• ctx.request_info() pauses the workflow and emits a request_info event; the framework routes the eventual response back to the same executor's @response_handler automatically, matched by request/response type annotations.
 • GROUNDING SOURCE: https://learn.microsoft.com/en-us/agent-framework/workflows/human-in-the-loop</a:t>
             </a:r>
             <a:endParaRPr lang="en-US" dirty="0"/>
@@ -964,8 +965,8 @@
           <a:p>
             <a:r>
               <a:rPr lang="en-US" dirty="0"/>
-              <a:t>• Created at the end of every superstep — this is exactly why the superstep model matters. A checkpoint captures everything needed to resume, including in-flight human-in-the-loop requests.
-• GROUNDING SOURCE: https://learn.microsoft.com/en-us/agent-framework/workflows/checkpoints</a:t>
+              <a:t>• This is the multi-agent-workflow version of Day 3's single-agent approval_mode — same underlying request/response mechanism, now surfacing through a workflow's event stream instead of a single agent.run() loop.
+• GROUNDING SOURCE: https://learn.microsoft.com/en-us/agent-framework/workflows/human-in-the-loop</a:t>
             </a:r>
             <a:endParaRPr lang="en-US" dirty="0"/>
           </a:p>
@@ -1053,7 +1054,7 @@
           <a:p>
             <a:r>
               <a:rPr lang="en-US" dirty="0"/>
-              <a:t>• Flag the version-specific behavior clearly since it changes what "replayable" means in earlier Python releases — worth a note if attendees are on an older version.
+              <a:t>• Created at the end of every superstep — this is exactly why the superstep model matters. A checkpoint captures everything needed to resume, including in-flight human-in-the-loop requests.
 • GROUNDING SOURCE: https://learn.microsoft.com/en-us/agent-framework/workflows/checkpoints</a:t>
             </a:r>
             <a:endParaRPr lang="en-US" dirty="0"/>
@@ -1142,8 +1143,8 @@
           <a:p>
             <a:r>
               <a:rPr lang="en-US" dirty="0"/>
-              <a:t>• Per this workshop's decision: teach WorkflowBuilder as primary; mention the functional API honestly, including its experimental status, and flag it as worth revisiting once it's no longer experimental. Do not build the lab on it.
-• GROUNDING SOURCE: https://learn.microsoft.com/en-us/agent-framework/concepts/workflows/</a:t>
+              <a:t>• Flag the version-specific behavior clearly since it changes what "replayable" means in earlier Python releases — worth a note if attendees are on an older version.
+• GROUNDING SOURCE: https://learn.microsoft.com/en-us/agent-framework/workflows/checkpoints</a:t>
             </a:r>
             <a:endParaRPr lang="en-US" dirty="0"/>
           </a:p>
@@ -1231,8 +1232,8 @@
           <a:p>
             <a:r>
               <a:rPr lang="en-US" dirty="0"/>
-              <a:t>• Flag this the same way Day 3 flagged Agent Hooks — real, documented, and deliberately out of scope for a code-first week. Mention only; do not teach YAML syntax or build any lab content on it.
-• GROUNDING SOURCE: https://learn.microsoft.com/en-us/agent-framework/workflows/declarative</a:t>
+              <a:t>• Per this workshop's decision: teach WorkflowBuilder as primary; mention the functional API honestly, including its experimental status, and flag it as worth revisiting once it's no longer experimental. Do not build the lab on it.
+• GROUNDING SOURCE: https://learn.microsoft.com/en-us/agent-framework/concepts/workflows/</a:t>
             </a:r>
             <a:endParaRPr lang="en-US" dirty="0"/>
           </a:p>
@@ -1320,12 +1321,8 @@
           <a:p>
             <a:r>
               <a:rPr lang="en-US" dirty="0"/>
-              <a:t>• Ask attendees to name the two building blocks a Critic-to-Planner revision loop needs. Answer: a conditional edge (this module) plus a counter in workflow state (also this module) — no prebuilt orchestration pattern from Module 2 supports the loop-back directly.
-• GROUNDING SOURCE: https://learn.microsoft.com/en-us/agent-framework/concepts/workflows/
-• GROUNDING SOURCE: https://learn.microsoft.com/en-us/agent-framework/workflows/human-in-the-loop
-• GROUNDING SOURCE: https://learn.microsoft.com/en-us/agent-framework/workflows/checkpoints
-• GROUNDING SOURCE: https://learn.microsoft.com/en-us/agent-framework/workflows/visualization
-• GROUNDING SOURCE: https://learn.microsoft.com/en-us/agent-framework/workflows/observability</a:t>
+              <a:t>• Flag this the same way Day 3 flagged Agent Hooks — real, documented, and deliberately out of scope for a code-first week. Mention only; do not teach YAML syntax or build any lab content on it.
+• GROUNDING SOURCE: https://learn.microsoft.com/en-us/agent-framework/workflows/declarative</a:t>
             </a:r>
             <a:endParaRPr lang="en-US" dirty="0"/>
           </a:p>
@@ -1349,6 +1346,99 @@
             <a:fld id="{F7021451-1387-4CA6-816F-3879F97B5CBC}" type="slidenum">
               <a:rPr lang="en-US"/>
               <a:t>18</a:t>
+            </a:fld>
+            <a:endParaRPr lang="en-US"/>
+          </a:p>
+        </p:txBody>
+      </p:sp>
+    </p:spTree>
+    <p:extLst>
+      <p:ext uri="{BB962C8B-B14F-4D97-AF65-F5344CB8AC3E}">
+        <p14:creationId xmlns:p14="http://schemas.microsoft.com/office/powerpoint/2010/main" val="1024086991"/>
+      </p:ext>
+    </p:extLst>
+  </p:cSld>
+  <p:clrMapOvr>
+    <a:masterClrMapping/>
+  </p:clrMapOvr>
+</p:notes>
+</file>
+
+<file path=ppt/notesSlides/notesSlide19.xml><?xml version="1.0" encoding="utf-8"?>
+<p:notes xmlns:a="http://schemas.openxmlformats.org/drawingml/2006/main" xmlns:r="http://schemas.openxmlformats.org/officeDocument/2006/relationships" xmlns:p="http://schemas.openxmlformats.org/presentationml/2006/main">
+  <p:cSld>
+    <p:spTree>
+      <p:nvGrpSpPr>
+        <p:cNvPr id="1" name=""/>
+        <p:cNvGrpSpPr/>
+        <p:nvPr/>
+      </p:nvGrpSpPr>
+      <p:grpSpPr>
+        <a:xfrm>
+          <a:off x="0" y="0"/>
+          <a:ext cx="0" cy="0"/>
+          <a:chOff x="0" y="0"/>
+          <a:chExt cx="0" cy="0"/>
+        </a:xfrm>
+      </p:grpSpPr>
+      <p:sp>
+        <p:nvSpPr>
+          <p:cNvPr id="2" name="Slide Image Placeholder 1"/>
+          <p:cNvSpPr>
+            <a:spLocks noGrp="1" noRot="1" noChangeAspect="1"/>
+          </p:cNvSpPr>
+          <p:nvPr>
+            <p:ph type="sldImg"/>
+          </p:nvPr>
+        </p:nvSpPr>
+        <p:spPr/>
+      </p:sp>
+      <p:sp>
+        <p:nvSpPr>
+          <p:cNvPr id="3" name="Notes Placeholder 2"/>
+          <p:cNvSpPr>
+            <a:spLocks noGrp="1"/>
+          </p:cNvSpPr>
+          <p:nvPr>
+            <p:ph type="body" idx="1"/>
+          </p:nvPr>
+        </p:nvSpPr>
+        <p:spPr/>
+        <p:txBody>
+          <a:bodyPr/>
+          <a:lstStyle/>
+          <a:p>
+            <a:r>
+              <a:rPr lang="en-US" dirty="0"/>
+              <a:t>• Ask attendees to name the two building blocks a Critic-to-Planner revision loop needs. Answer: a conditional edge (this module) plus a counter in workflow state (also this module) — no prebuilt orchestration pattern from Module 2 supports the loop-back directly.
+• GROUNDING SOURCE: https://learn.microsoft.com/en-us/agent-framework/concepts/workflows/
+• GROUNDING SOURCE: https://learn.microsoft.com/en-us/agent-framework/workflows/human-in-the-loop
+• GROUNDING SOURCE: https://learn.microsoft.com/en-us/agent-framework/workflows/checkpoints
+• GROUNDING SOURCE: https://learn.microsoft.com/en-us/agent-framework/workflows/visualization
+• GROUNDING SOURCE: https://learn.microsoft.com/en-us/agent-framework/workflows/observability</a:t>
+            </a:r>
+            <a:endParaRPr lang="en-US" dirty="0"/>
+          </a:p>
+        </p:txBody>
+      </p:sp>
+      <p:sp>
+        <p:nvSpPr>
+          <p:cNvPr id="4" name="Slide Number Placeholder 3"/>
+          <p:cNvSpPr>
+            <a:spLocks noGrp="1"/>
+          </p:cNvSpPr>
+          <p:nvPr>
+            <p:ph type="sldNum" sz="quarter" idx="10"/>
+          </p:nvPr>
+        </p:nvSpPr>
+        <p:spPr/>
+        <p:txBody>
+          <a:bodyPr/>
+          <a:lstStyle/>
+          <a:p>
+            <a:fld id="{F7021451-1387-4CA6-816F-3879F97B5CBC}" type="slidenum">
+              <a:rPr lang="en-US"/>
+              <a:t>19</a:t>
             </a:fld>
             <a:endParaRPr lang="en-US"/>
           </a:p>
@@ -1858,8 +1948,8 @@
           <a:p>
             <a:r>
               <a:rPr lang="en-US" dirty="0"/>
-              <a:t>• A modified Pregel model (Bulk Synchronous Parallel). This is why Concurrent's parallel agents actually run at the same time, and why checkpoints are reliable — they only need to capture state at these well-defined boundaries.
-• GROUNDING SOURCE: https://learn.microsoft.com/en-us/agent-framework/concepts/workflows/builder-and-execution</a:t>
+              <a:t>• Placeholder marker slide — the runbook has full narration, setup, and fallback plan. Graph-building code is copied (not imported) from labs/day4/python/solutions/part_b_graph.py, the worked answer to this afternoon's Part B1 exercise, with the Part B2 guardrail fix already applied so the optional live run is safe.
+• GROUNDING SOURCE: https://learn.microsoft.com/en-us/agent-framework/workflows/visualization</a:t>
             </a:r>
             <a:endParaRPr lang="en-US" dirty="0"/>
           </a:p>
@@ -1947,7 +2037,7 @@
           <a:p>
             <a:r>
               <a:rPr lang="en-US" dirty="0"/>
-              <a:t>• Three concrete guarantees the BSP model buys you. The fan-out caveat is worth stating: a long-running branch blocks the whole superstep from advancing, even if a parallel branch finished quickly — consolidate sequential steps into one executor if you need truly independent timing.
+              <a:t>• A modified Pregel model (Bulk Synchronous Parallel). This is why Concurrent's parallel agents actually run at the same time, and why checkpoints are reliable — they only need to capture state at these well-defined boundaries.
 • GROUNDING SOURCE: https://learn.microsoft.com/en-us/agent-framework/concepts/workflows/builder-and-execution</a:t>
             </a:r>
             <a:endParaRPr lang="en-US" dirty="0"/>
@@ -2036,8 +2126,8 @@
           <a:p>
             <a:r>
               <a:rPr lang="en-US" dirty="0"/>
-              <a:t>• Every workflow event uses a unified WorkflowEvent class with a type discriminator in Python. request_info is the human-in-the-loop hook covered next. Custom events (WorkflowEvent(type=..., data=...)) let executors emit domain-specific signals.
-• GROUNDING SOURCE: https://learn.microsoft.com/en-us/agent-framework/concepts/workflows/events</a:t>
+              <a:t>• Three concrete guarantees the BSP model buys you. The fan-out caveat is worth stating: a long-running branch blocks the whole superstep from advancing, even if a parallel branch finished quickly — consolidate sequential steps into one executor if you need truly independent timing.
+• GROUNDING SOURCE: https://learn.microsoft.com/en-us/agent-framework/concepts/workflows/builder-and-execution</a:t>
             </a:r>
             <a:endParaRPr lang="en-US" dirty="0"/>
           </a:p>
@@ -2750,7 +2840,7 @@
               <a:buNone/>
             </a:pPr>
             <a:r>
-              <a:rPr lang="en-US" sz="2500" b="1" dirty="0">
+              <a:rPr lang="en-US" sz="2800" b="1" dirty="0">
                 <a:solidFill>
                   <a:srgbClr val="1E2761"/>
                 </a:solidFill>
@@ -2758,15 +2848,933 @@
                 <a:ea typeface="Calibri" pitchFamily="34" charset="-122"/>
                 <a:cs typeface="Calibri" pitchFamily="34" charset="-120"/>
               </a:rPr>
-              <a:t>Debugging with edge delivery status</a:t>
-            </a:r>
-            <a:endParaRPr lang="en-US" sz="2500" dirty="0"/>
+              <a:t>Events give you observability</a:t>
+            </a:r>
+            <a:endParaRPr lang="en-US" sz="2800" dirty="0"/>
           </a:p>
         </p:txBody>
       </p:sp>
       <p:graphicFrame>
         <p:nvGraphicFramePr>
           <p:cNvPr id="11" name="Table 0"/>
+          <p:cNvGraphicFramePr>
+            <a:graphicFrameLocks noGrp="1"/>
+          </p:cNvGraphicFramePr>
+          <p:nvPr>
+            <p:extLst>
+              <p:ext uri="{D42A27DB-BD31-4B8C-83A1-F6EECF244321}">
+                <p14:modId xmlns:p14="http://schemas.microsoft.com/office/powerpoint/2010/main" val="1579011935"/>
+              </p:ext>
+            </p:extLst>
+          </p:nvPr>
+        </p:nvGraphicFramePr>
+        <p:xfrm>
+          <a:off x="365760" y="1078992"/>
+          <a:ext cx="8412480" cy="914400"/>
+        </p:xfrm>
+        <a:graphic>
+          <a:graphicData uri="http://schemas.openxmlformats.org/drawingml/2006/table">
+            <a:tbl>
+              <a:tblPr/>
+              <a:tblGrid>
+                <a:gridCol w="4023360"/>
+                <a:gridCol w="4389120"/>
+              </a:tblGrid>
+              <a:tr h="658368">
+                <a:tc>
+                  <a:txBody>
+                    <a:bodyPr/>
+                    <a:lstStyle/>
+                    <a:p>
+                      <a:pPr indent="0" marL="0">
+                        <a:buNone/>
+                      </a:pPr>
+                      <a:r>
+                        <a:rPr lang="en-US" sz="1100" b="1" dirty="0">
+                          <a:solidFill>
+                            <a:srgbClr val="FFFFFF"/>
+                          </a:solidFill>
+                          <a:latin typeface="Calibri" pitchFamily="34" charset="0"/>
+                          <a:ea typeface="Calibri" pitchFamily="34" charset="-122"/>
+                          <a:cs typeface="Calibri" pitchFamily="34" charset="-120"/>
+                        </a:rPr>
+                        <a:t>Event type</a:t>
+                      </a:r>
+                      <a:endParaRPr lang="en-US" sz="1100" dirty="0">
+                        <a:latin typeface="Calibri" charset="0"/>
+                        <a:ea typeface="Calibri" charset="0"/>
+                        <a:cs typeface="Calibri" charset="0"/>
+                      </a:endParaRPr>
+                    </a:p>
+                  </a:txBody>
+                  <a:tcPr marL="54864" marR="54864" marT="54864" marB="54864" anchor="ctr">
+                    <a:lnL w="6350" cap="flat" cmpd="sng" algn="ctr">
+                      <a:solidFill>
+                        <a:srgbClr val="D1D5DB"/>
+                      </a:solidFill>
+                      <a:prstDash val="solid"/>
+                      <a:round/>
+                      <a:headEnd type="none" w="med" len="med"/>
+                      <a:tailEnd type="none" w="med" len="med"/>
+                    </a:lnL>
+                    <a:lnR w="6350" cap="flat" cmpd="sng" algn="ctr">
+                      <a:solidFill>
+                        <a:srgbClr val="D1D5DB"/>
+                      </a:solidFill>
+                      <a:prstDash val="solid"/>
+                      <a:round/>
+                      <a:headEnd type="none" w="med" len="med"/>
+                      <a:tailEnd type="none" w="med" len="med"/>
+                    </a:lnR>
+                    <a:lnT w="6350" cap="flat" cmpd="sng" algn="ctr">
+                      <a:solidFill>
+                        <a:srgbClr val="D1D5DB"/>
+                      </a:solidFill>
+                      <a:prstDash val="solid"/>
+                      <a:round/>
+                      <a:headEnd type="none" w="med" len="med"/>
+                      <a:tailEnd type="none" w="med" len="med"/>
+                    </a:lnT>
+                    <a:lnB w="6350" cap="flat" cmpd="sng" algn="ctr">
+                      <a:solidFill>
+                        <a:srgbClr val="D1D5DB"/>
+                      </a:solidFill>
+                      <a:prstDash val="solid"/>
+                      <a:round/>
+                      <a:headEnd type="none" w="med" len="med"/>
+                      <a:tailEnd type="none" w="med" len="med"/>
+                    </a:lnB>
+                    <a:solidFill>
+                      <a:srgbClr val="1E2761"/>
+                    </a:solidFill>
+                  </a:tcPr>
+                </a:tc>
+                <a:tc>
+                  <a:txBody>
+                    <a:bodyPr/>
+                    <a:lstStyle/>
+                    <a:p>
+                      <a:pPr indent="0" marL="0">
+                        <a:buNone/>
+                      </a:pPr>
+                      <a:r>
+                        <a:rPr lang="en-US" sz="1100" b="1" dirty="0">
+                          <a:solidFill>
+                            <a:srgbClr val="FFFFFF"/>
+                          </a:solidFill>
+                          <a:latin typeface="Calibri" pitchFamily="34" charset="0"/>
+                          <a:ea typeface="Calibri" pitchFamily="34" charset="-122"/>
+                          <a:cs typeface="Calibri" pitchFamily="34" charset="-120"/>
+                        </a:rPr>
+                        <a:t>Meaning</a:t>
+                      </a:r>
+                      <a:endParaRPr lang="en-US" sz="1100" dirty="0">
+                        <a:latin typeface="Calibri" charset="0"/>
+                        <a:ea typeface="Calibri" charset="0"/>
+                        <a:cs typeface="Calibri" charset="0"/>
+                      </a:endParaRPr>
+                    </a:p>
+                  </a:txBody>
+                  <a:tcPr marL="54864" marR="54864" marT="54864" marB="54864" anchor="ctr">
+                    <a:lnL w="6350" cap="flat" cmpd="sng" algn="ctr">
+                      <a:solidFill>
+                        <a:srgbClr val="D1D5DB"/>
+                      </a:solidFill>
+                      <a:prstDash val="solid"/>
+                      <a:round/>
+                      <a:headEnd type="none" w="med" len="med"/>
+                      <a:tailEnd type="none" w="med" len="med"/>
+                    </a:lnL>
+                    <a:lnR w="6350" cap="flat" cmpd="sng" algn="ctr">
+                      <a:solidFill>
+                        <a:srgbClr val="D1D5DB"/>
+                      </a:solidFill>
+                      <a:prstDash val="solid"/>
+                      <a:round/>
+                      <a:headEnd type="none" w="med" len="med"/>
+                      <a:tailEnd type="none" w="med" len="med"/>
+                    </a:lnR>
+                    <a:lnT w="6350" cap="flat" cmpd="sng" algn="ctr">
+                      <a:solidFill>
+                        <a:srgbClr val="D1D5DB"/>
+                      </a:solidFill>
+                      <a:prstDash val="solid"/>
+                      <a:round/>
+                      <a:headEnd type="none" w="med" len="med"/>
+                      <a:tailEnd type="none" w="med" len="med"/>
+                    </a:lnT>
+                    <a:lnB w="6350" cap="flat" cmpd="sng" algn="ctr">
+                      <a:solidFill>
+                        <a:srgbClr val="D1D5DB"/>
+                      </a:solidFill>
+                      <a:prstDash val="solid"/>
+                      <a:round/>
+                      <a:headEnd type="none" w="med" len="med"/>
+                      <a:tailEnd type="none" w="med" len="med"/>
+                    </a:lnB>
+                    <a:solidFill>
+                      <a:srgbClr val="1E2761"/>
+                    </a:solidFill>
+                  </a:tcPr>
+                </a:tc>
+              </a:tr>
+              <a:tr h="658368">
+                <a:tc>
+                  <a:txBody>
+                    <a:bodyPr/>
+                    <a:lstStyle/>
+                    <a:p>
+                      <a:pPr indent="0" marL="0">
+                        <a:buNone/>
+                      </a:pPr>
+                      <a:r>
+                        <a:rPr lang="en-US" sz="1100" dirty="0">
+                          <a:solidFill>
+                            <a:srgbClr val="212121"/>
+                          </a:solidFill>
+                          <a:latin typeface="Calibri" pitchFamily="34" charset="0"/>
+                          <a:ea typeface="Calibri" pitchFamily="34" charset="-122"/>
+                          <a:cs typeface="Calibri" pitchFamily="34" charset="-120"/>
+                        </a:rPr>
+                        <a:t>output / intermediate</a:t>
+                      </a:r>
+                      <a:endParaRPr lang="en-US" sz="1100" dirty="0">
+                        <a:latin typeface="Calibri" charset="0"/>
+                        <a:ea typeface="Calibri" charset="0"/>
+                        <a:cs typeface="Calibri" charset="0"/>
+                      </a:endParaRPr>
+                    </a:p>
+                  </a:txBody>
+                  <a:tcPr marL="54864" marR="54864" marT="54864" marB="54864" anchor="ctr">
+                    <a:lnL w="6350" cap="flat" cmpd="sng" algn="ctr">
+                      <a:solidFill>
+                        <a:srgbClr val="D1D5DB"/>
+                      </a:solidFill>
+                      <a:prstDash val="solid"/>
+                      <a:round/>
+                      <a:headEnd type="none" w="med" len="med"/>
+                      <a:tailEnd type="none" w="med" len="med"/>
+                    </a:lnL>
+                    <a:lnR w="6350" cap="flat" cmpd="sng" algn="ctr">
+                      <a:solidFill>
+                        <a:srgbClr val="D1D5DB"/>
+                      </a:solidFill>
+                      <a:prstDash val="solid"/>
+                      <a:round/>
+                      <a:headEnd type="none" w="med" len="med"/>
+                      <a:tailEnd type="none" w="med" len="med"/>
+                    </a:lnR>
+                    <a:lnT w="6350" cap="flat" cmpd="sng" algn="ctr">
+                      <a:solidFill>
+                        <a:srgbClr val="D1D5DB"/>
+                      </a:solidFill>
+                      <a:prstDash val="solid"/>
+                      <a:round/>
+                      <a:headEnd type="none" w="med" len="med"/>
+                      <a:tailEnd type="none" w="med" len="med"/>
+                    </a:lnT>
+                    <a:lnB w="6350" cap="flat" cmpd="sng" algn="ctr">
+                      <a:solidFill>
+                        <a:srgbClr val="D1D5DB"/>
+                      </a:solidFill>
+                      <a:prstDash val="solid"/>
+                      <a:round/>
+                      <a:headEnd type="none" w="med" len="med"/>
+                      <a:tailEnd type="none" w="med" len="med"/>
+                    </a:lnB>
+                    <a:solidFill>
+                      <a:srgbClr val="FFFFFF"/>
+                    </a:solidFill>
+                  </a:tcPr>
+                </a:tc>
+                <a:tc>
+                  <a:txBody>
+                    <a:bodyPr/>
+                    <a:lstStyle/>
+                    <a:p>
+                      <a:pPr indent="0" marL="0">
+                        <a:buNone/>
+                      </a:pPr>
+                      <a:r>
+                        <a:rPr lang="en-US" sz="1100" dirty="0">
+                          <a:solidFill>
+                            <a:srgbClr val="212121"/>
+                          </a:solidFill>
+                          <a:latin typeface="Calibri" pitchFamily="34" charset="0"/>
+                          <a:ea typeface="Calibri" pitchFamily="34" charset="-122"/>
+                          <a:cs typeface="Calibri" pitchFamily="34" charset="-120"/>
+                        </a:rPr>
+                        <a:t>Terminal vs. observational workflow output</a:t>
+                      </a:r>
+                      <a:endParaRPr lang="en-US" sz="1100" dirty="0">
+                        <a:latin typeface="Calibri" charset="0"/>
+                        <a:ea typeface="Calibri" charset="0"/>
+                        <a:cs typeface="Calibri" charset="0"/>
+                      </a:endParaRPr>
+                    </a:p>
+                  </a:txBody>
+                  <a:tcPr marL="54864" marR="54864" marT="54864" marB="54864" anchor="ctr">
+                    <a:lnL w="6350" cap="flat" cmpd="sng" algn="ctr">
+                      <a:solidFill>
+                        <a:srgbClr val="D1D5DB"/>
+                      </a:solidFill>
+                      <a:prstDash val="solid"/>
+                      <a:round/>
+                      <a:headEnd type="none" w="med" len="med"/>
+                      <a:tailEnd type="none" w="med" len="med"/>
+                    </a:lnL>
+                    <a:lnR w="6350" cap="flat" cmpd="sng" algn="ctr">
+                      <a:solidFill>
+                        <a:srgbClr val="D1D5DB"/>
+                      </a:solidFill>
+                      <a:prstDash val="solid"/>
+                      <a:round/>
+                      <a:headEnd type="none" w="med" len="med"/>
+                      <a:tailEnd type="none" w="med" len="med"/>
+                    </a:lnR>
+                    <a:lnT w="6350" cap="flat" cmpd="sng" algn="ctr">
+                      <a:solidFill>
+                        <a:srgbClr val="D1D5DB"/>
+                      </a:solidFill>
+                      <a:prstDash val="solid"/>
+                      <a:round/>
+                      <a:headEnd type="none" w="med" len="med"/>
+                      <a:tailEnd type="none" w="med" len="med"/>
+                    </a:lnT>
+                    <a:lnB w="6350" cap="flat" cmpd="sng" algn="ctr">
+                      <a:solidFill>
+                        <a:srgbClr val="D1D5DB"/>
+                      </a:solidFill>
+                      <a:prstDash val="solid"/>
+                      <a:round/>
+                      <a:headEnd type="none" w="med" len="med"/>
+                      <a:tailEnd type="none" w="med" len="med"/>
+                    </a:lnB>
+                    <a:solidFill>
+                      <a:srgbClr val="FFFFFF"/>
+                    </a:solidFill>
+                  </a:tcPr>
+                </a:tc>
+              </a:tr>
+              <a:tr h="658368">
+                <a:tc>
+                  <a:txBody>
+                    <a:bodyPr/>
+                    <a:lstStyle/>
+                    <a:p>
+                      <a:pPr indent="0" marL="0">
+                        <a:buNone/>
+                      </a:pPr>
+                      <a:r>
+                        <a:rPr lang="en-US" sz="1100" dirty="0">
+                          <a:solidFill>
+                            <a:srgbClr val="212121"/>
+                          </a:solidFill>
+                          <a:latin typeface="Calibri" pitchFamily="34" charset="0"/>
+                          <a:ea typeface="Calibri" pitchFamily="34" charset="-122"/>
+                          <a:cs typeface="Calibri" pitchFamily="34" charset="-120"/>
+                        </a:rPr>
+                        <a:t>executor_invoked / executor_completed / executor_failed</a:t>
+                      </a:r>
+                      <a:endParaRPr lang="en-US" sz="1100" dirty="0">
+                        <a:latin typeface="Calibri" charset="0"/>
+                        <a:ea typeface="Calibri" charset="0"/>
+                        <a:cs typeface="Calibri" charset="0"/>
+                      </a:endParaRPr>
+                    </a:p>
+                  </a:txBody>
+                  <a:tcPr marL="54864" marR="54864" marT="54864" marB="54864" anchor="ctr">
+                    <a:lnL w="6350" cap="flat" cmpd="sng" algn="ctr">
+                      <a:solidFill>
+                        <a:srgbClr val="D1D5DB"/>
+                      </a:solidFill>
+                      <a:prstDash val="solid"/>
+                      <a:round/>
+                      <a:headEnd type="none" w="med" len="med"/>
+                      <a:tailEnd type="none" w="med" len="med"/>
+                    </a:lnL>
+                    <a:lnR w="6350" cap="flat" cmpd="sng" algn="ctr">
+                      <a:solidFill>
+                        <a:srgbClr val="D1D5DB"/>
+                      </a:solidFill>
+                      <a:prstDash val="solid"/>
+                      <a:round/>
+                      <a:headEnd type="none" w="med" len="med"/>
+                      <a:tailEnd type="none" w="med" len="med"/>
+                    </a:lnR>
+                    <a:lnT w="6350" cap="flat" cmpd="sng" algn="ctr">
+                      <a:solidFill>
+                        <a:srgbClr val="D1D5DB"/>
+                      </a:solidFill>
+                      <a:prstDash val="solid"/>
+                      <a:round/>
+                      <a:headEnd type="none" w="med" len="med"/>
+                      <a:tailEnd type="none" w="med" len="med"/>
+                    </a:lnT>
+                    <a:lnB w="6350" cap="flat" cmpd="sng" algn="ctr">
+                      <a:solidFill>
+                        <a:srgbClr val="D1D5DB"/>
+                      </a:solidFill>
+                      <a:prstDash val="solid"/>
+                      <a:round/>
+                      <a:headEnd type="none" w="med" len="med"/>
+                      <a:tailEnd type="none" w="med" len="med"/>
+                    </a:lnB>
+                    <a:solidFill>
+                      <a:srgbClr val="F3F4F6"/>
+                    </a:solidFill>
+                  </a:tcPr>
+                </a:tc>
+                <a:tc>
+                  <a:txBody>
+                    <a:bodyPr/>
+                    <a:lstStyle/>
+                    <a:p>
+                      <a:pPr indent="0" marL="0">
+                        <a:buNone/>
+                      </a:pPr>
+                      <a:r>
+                        <a:rPr lang="en-US" sz="1100" dirty="0">
+                          <a:solidFill>
+                            <a:srgbClr val="212121"/>
+                          </a:solidFill>
+                          <a:latin typeface="Calibri" pitchFamily="34" charset="0"/>
+                          <a:ea typeface="Calibri" pitchFamily="34" charset="-122"/>
+                          <a:cs typeface="Calibri" pitchFamily="34" charset="-120"/>
+                        </a:rPr>
+                        <a:t>Per-executor lifecycle</a:t>
+                      </a:r>
+                      <a:endParaRPr lang="en-US" sz="1100" dirty="0">
+                        <a:latin typeface="Calibri" charset="0"/>
+                        <a:ea typeface="Calibri" charset="0"/>
+                        <a:cs typeface="Calibri" charset="0"/>
+                      </a:endParaRPr>
+                    </a:p>
+                  </a:txBody>
+                  <a:tcPr marL="54864" marR="54864" marT="54864" marB="54864" anchor="ctr">
+                    <a:lnL w="6350" cap="flat" cmpd="sng" algn="ctr">
+                      <a:solidFill>
+                        <a:srgbClr val="D1D5DB"/>
+                      </a:solidFill>
+                      <a:prstDash val="solid"/>
+                      <a:round/>
+                      <a:headEnd type="none" w="med" len="med"/>
+                      <a:tailEnd type="none" w="med" len="med"/>
+                    </a:lnL>
+                    <a:lnR w="6350" cap="flat" cmpd="sng" algn="ctr">
+                      <a:solidFill>
+                        <a:srgbClr val="D1D5DB"/>
+                      </a:solidFill>
+                      <a:prstDash val="solid"/>
+                      <a:round/>
+                      <a:headEnd type="none" w="med" len="med"/>
+                      <a:tailEnd type="none" w="med" len="med"/>
+                    </a:lnR>
+                    <a:lnT w="6350" cap="flat" cmpd="sng" algn="ctr">
+                      <a:solidFill>
+                        <a:srgbClr val="D1D5DB"/>
+                      </a:solidFill>
+                      <a:prstDash val="solid"/>
+                      <a:round/>
+                      <a:headEnd type="none" w="med" len="med"/>
+                      <a:tailEnd type="none" w="med" len="med"/>
+                    </a:lnT>
+                    <a:lnB w="6350" cap="flat" cmpd="sng" algn="ctr">
+                      <a:solidFill>
+                        <a:srgbClr val="D1D5DB"/>
+                      </a:solidFill>
+                      <a:prstDash val="solid"/>
+                      <a:round/>
+                      <a:headEnd type="none" w="med" len="med"/>
+                      <a:tailEnd type="none" w="med" len="med"/>
+                    </a:lnB>
+                    <a:solidFill>
+                      <a:srgbClr val="F3F4F6"/>
+                    </a:solidFill>
+                  </a:tcPr>
+                </a:tc>
+              </a:tr>
+              <a:tr h="658368">
+                <a:tc>
+                  <a:txBody>
+                    <a:bodyPr/>
+                    <a:lstStyle/>
+                    <a:p>
+                      <a:pPr indent="0" marL="0">
+                        <a:buNone/>
+                      </a:pPr>
+                      <a:r>
+                        <a:rPr lang="en-US" sz="1100" dirty="0">
+                          <a:solidFill>
+                            <a:srgbClr val="212121"/>
+                          </a:solidFill>
+                          <a:latin typeface="Calibri" pitchFamily="34" charset="0"/>
+                          <a:ea typeface="Calibri" pitchFamily="34" charset="-122"/>
+                          <a:cs typeface="Calibri" pitchFamily="34" charset="-120"/>
+                        </a:rPr>
+                        <a:t>superstep_started / superstep_completed</a:t>
+                      </a:r>
+                      <a:endParaRPr lang="en-US" sz="1100" dirty="0">
+                        <a:latin typeface="Calibri" charset="0"/>
+                        <a:ea typeface="Calibri" charset="0"/>
+                        <a:cs typeface="Calibri" charset="0"/>
+                      </a:endParaRPr>
+                    </a:p>
+                  </a:txBody>
+                  <a:tcPr marL="54864" marR="54864" marT="54864" marB="54864" anchor="ctr">
+                    <a:lnL w="6350" cap="flat" cmpd="sng" algn="ctr">
+                      <a:solidFill>
+                        <a:srgbClr val="D1D5DB"/>
+                      </a:solidFill>
+                      <a:prstDash val="solid"/>
+                      <a:round/>
+                      <a:headEnd type="none" w="med" len="med"/>
+                      <a:tailEnd type="none" w="med" len="med"/>
+                    </a:lnL>
+                    <a:lnR w="6350" cap="flat" cmpd="sng" algn="ctr">
+                      <a:solidFill>
+                        <a:srgbClr val="D1D5DB"/>
+                      </a:solidFill>
+                      <a:prstDash val="solid"/>
+                      <a:round/>
+                      <a:headEnd type="none" w="med" len="med"/>
+                      <a:tailEnd type="none" w="med" len="med"/>
+                    </a:lnR>
+                    <a:lnT w="6350" cap="flat" cmpd="sng" algn="ctr">
+                      <a:solidFill>
+                        <a:srgbClr val="D1D5DB"/>
+                      </a:solidFill>
+                      <a:prstDash val="solid"/>
+                      <a:round/>
+                      <a:headEnd type="none" w="med" len="med"/>
+                      <a:tailEnd type="none" w="med" len="med"/>
+                    </a:lnT>
+                    <a:lnB w="6350" cap="flat" cmpd="sng" algn="ctr">
+                      <a:solidFill>
+                        <a:srgbClr val="D1D5DB"/>
+                      </a:solidFill>
+                      <a:prstDash val="solid"/>
+                      <a:round/>
+                      <a:headEnd type="none" w="med" len="med"/>
+                      <a:tailEnd type="none" w="med" len="med"/>
+                    </a:lnB>
+                    <a:solidFill>
+                      <a:srgbClr val="FFFFFF"/>
+                    </a:solidFill>
+                  </a:tcPr>
+                </a:tc>
+                <a:tc>
+                  <a:txBody>
+                    <a:bodyPr/>
+                    <a:lstStyle/>
+                    <a:p>
+                      <a:pPr indent="0" marL="0">
+                        <a:buNone/>
+                      </a:pPr>
+                      <a:r>
+                        <a:rPr lang="en-US" sz="1100" dirty="0">
+                          <a:solidFill>
+                            <a:srgbClr val="212121"/>
+                          </a:solidFill>
+                          <a:latin typeface="Calibri" pitchFamily="34" charset="0"/>
+                          <a:ea typeface="Calibri" pitchFamily="34" charset="-122"/>
+                          <a:cs typeface="Calibri" pitchFamily="34" charset="-120"/>
+                        </a:rPr>
+                        <a:t>Superstep boundaries</a:t>
+                      </a:r>
+                      <a:endParaRPr lang="en-US" sz="1100" dirty="0">
+                        <a:latin typeface="Calibri" charset="0"/>
+                        <a:ea typeface="Calibri" charset="0"/>
+                        <a:cs typeface="Calibri" charset="0"/>
+                      </a:endParaRPr>
+                    </a:p>
+                  </a:txBody>
+                  <a:tcPr marL="54864" marR="54864" marT="54864" marB="54864" anchor="ctr">
+                    <a:lnL w="6350" cap="flat" cmpd="sng" algn="ctr">
+                      <a:solidFill>
+                        <a:srgbClr val="D1D5DB"/>
+                      </a:solidFill>
+                      <a:prstDash val="solid"/>
+                      <a:round/>
+                      <a:headEnd type="none" w="med" len="med"/>
+                      <a:tailEnd type="none" w="med" len="med"/>
+                    </a:lnL>
+                    <a:lnR w="6350" cap="flat" cmpd="sng" algn="ctr">
+                      <a:solidFill>
+                        <a:srgbClr val="D1D5DB"/>
+                      </a:solidFill>
+                      <a:prstDash val="solid"/>
+                      <a:round/>
+                      <a:headEnd type="none" w="med" len="med"/>
+                      <a:tailEnd type="none" w="med" len="med"/>
+                    </a:lnR>
+                    <a:lnT w="6350" cap="flat" cmpd="sng" algn="ctr">
+                      <a:solidFill>
+                        <a:srgbClr val="D1D5DB"/>
+                      </a:solidFill>
+                      <a:prstDash val="solid"/>
+                      <a:round/>
+                      <a:headEnd type="none" w="med" len="med"/>
+                      <a:tailEnd type="none" w="med" len="med"/>
+                    </a:lnT>
+                    <a:lnB w="6350" cap="flat" cmpd="sng" algn="ctr">
+                      <a:solidFill>
+                        <a:srgbClr val="D1D5DB"/>
+                      </a:solidFill>
+                      <a:prstDash val="solid"/>
+                      <a:round/>
+                      <a:headEnd type="none" w="med" len="med"/>
+                      <a:tailEnd type="none" w="med" len="med"/>
+                    </a:lnB>
+                    <a:solidFill>
+                      <a:srgbClr val="FFFFFF"/>
+                    </a:solidFill>
+                  </a:tcPr>
+                </a:tc>
+              </a:tr>
+              <a:tr h="658368">
+                <a:tc>
+                  <a:txBody>
+                    <a:bodyPr/>
+                    <a:lstStyle/>
+                    <a:p>
+                      <a:pPr indent="0" marL="0">
+                        <a:buNone/>
+                      </a:pPr>
+                      <a:r>
+                        <a:rPr lang="en-US" sz="1100" dirty="0">
+                          <a:solidFill>
+                            <a:srgbClr val="212121"/>
+                          </a:solidFill>
+                          <a:latin typeface="Calibri" pitchFamily="34" charset="0"/>
+                          <a:ea typeface="Calibri" pitchFamily="34" charset="-122"/>
+                          <a:cs typeface="Calibri" pitchFamily="34" charset="-120"/>
+                        </a:rPr>
+                        <a:t>request_info</a:t>
+                      </a:r>
+                      <a:endParaRPr lang="en-US" sz="1100" dirty="0">
+                        <a:latin typeface="Calibri" charset="0"/>
+                        <a:ea typeface="Calibri" charset="0"/>
+                        <a:cs typeface="Calibri" charset="0"/>
+                      </a:endParaRPr>
+                    </a:p>
+                  </a:txBody>
+                  <a:tcPr marL="54864" marR="54864" marT="54864" marB="54864" anchor="ctr">
+                    <a:lnL w="6350" cap="flat" cmpd="sng" algn="ctr">
+                      <a:solidFill>
+                        <a:srgbClr val="D1D5DB"/>
+                      </a:solidFill>
+                      <a:prstDash val="solid"/>
+                      <a:round/>
+                      <a:headEnd type="none" w="med" len="med"/>
+                      <a:tailEnd type="none" w="med" len="med"/>
+                    </a:lnL>
+                    <a:lnR w="6350" cap="flat" cmpd="sng" algn="ctr">
+                      <a:solidFill>
+                        <a:srgbClr val="D1D5DB"/>
+                      </a:solidFill>
+                      <a:prstDash val="solid"/>
+                      <a:round/>
+                      <a:headEnd type="none" w="med" len="med"/>
+                      <a:tailEnd type="none" w="med" len="med"/>
+                    </a:lnR>
+                    <a:lnT w="6350" cap="flat" cmpd="sng" algn="ctr">
+                      <a:solidFill>
+                        <a:srgbClr val="D1D5DB"/>
+                      </a:solidFill>
+                      <a:prstDash val="solid"/>
+                      <a:round/>
+                      <a:headEnd type="none" w="med" len="med"/>
+                      <a:tailEnd type="none" w="med" len="med"/>
+                    </a:lnT>
+                    <a:lnB w="6350" cap="flat" cmpd="sng" algn="ctr">
+                      <a:solidFill>
+                        <a:srgbClr val="D1D5DB"/>
+                      </a:solidFill>
+                      <a:prstDash val="solid"/>
+                      <a:round/>
+                      <a:headEnd type="none" w="med" len="med"/>
+                      <a:tailEnd type="none" w="med" len="med"/>
+                    </a:lnB>
+                    <a:solidFill>
+                      <a:srgbClr val="F3F4F6"/>
+                    </a:solidFill>
+                  </a:tcPr>
+                </a:tc>
+                <a:tc>
+                  <a:txBody>
+                    <a:bodyPr/>
+                    <a:lstStyle/>
+                    <a:p>
+                      <a:pPr indent="0" marL="0">
+                        <a:buNone/>
+                      </a:pPr>
+                      <a:r>
+                        <a:rPr lang="en-US" sz="1100" dirty="0">
+                          <a:solidFill>
+                            <a:srgbClr val="212121"/>
+                          </a:solidFill>
+                          <a:latin typeface="Calibri" pitchFamily="34" charset="0"/>
+                          <a:ea typeface="Calibri" pitchFamily="34" charset="-122"/>
+                          <a:cs typeface="Calibri" pitchFamily="34" charset="-120"/>
+                        </a:rPr>
+                        <a:t>An executor is requesting external input (human-in-the-loop)</a:t>
+                      </a:r>
+                      <a:endParaRPr lang="en-US" sz="1100" dirty="0">
+                        <a:latin typeface="Calibri" charset="0"/>
+                        <a:ea typeface="Calibri" charset="0"/>
+                        <a:cs typeface="Calibri" charset="0"/>
+                      </a:endParaRPr>
+                    </a:p>
+                  </a:txBody>
+                  <a:tcPr marL="54864" marR="54864" marT="54864" marB="54864" anchor="ctr">
+                    <a:lnL w="6350" cap="flat" cmpd="sng" algn="ctr">
+                      <a:solidFill>
+                        <a:srgbClr val="D1D5DB"/>
+                      </a:solidFill>
+                      <a:prstDash val="solid"/>
+                      <a:round/>
+                      <a:headEnd type="none" w="med" len="med"/>
+                      <a:tailEnd type="none" w="med" len="med"/>
+                    </a:lnL>
+                    <a:lnR w="6350" cap="flat" cmpd="sng" algn="ctr">
+                      <a:solidFill>
+                        <a:srgbClr val="D1D5DB"/>
+                      </a:solidFill>
+                      <a:prstDash val="solid"/>
+                      <a:round/>
+                      <a:headEnd type="none" w="med" len="med"/>
+                      <a:tailEnd type="none" w="med" len="med"/>
+                    </a:lnR>
+                    <a:lnT w="6350" cap="flat" cmpd="sng" algn="ctr">
+                      <a:solidFill>
+                        <a:srgbClr val="D1D5DB"/>
+                      </a:solidFill>
+                      <a:prstDash val="solid"/>
+                      <a:round/>
+                      <a:headEnd type="none" w="med" len="med"/>
+                      <a:tailEnd type="none" w="med" len="med"/>
+                    </a:lnT>
+                    <a:lnB w="6350" cap="flat" cmpd="sng" algn="ctr">
+                      <a:solidFill>
+                        <a:srgbClr val="D1D5DB"/>
+                      </a:solidFill>
+                      <a:prstDash val="solid"/>
+                      <a:round/>
+                      <a:headEnd type="none" w="med" len="med"/>
+                      <a:tailEnd type="none" w="med" len="med"/>
+                    </a:lnB>
+                    <a:solidFill>
+                      <a:srgbClr val="F3F4F6"/>
+                    </a:solidFill>
+                  </a:tcPr>
+                </a:tc>
+              </a:tr>
+            </a:tbl>
+          </a:graphicData>
+        </a:graphic>
+      </p:graphicFrame>
+      <p:sp>
+        <p:nvSpPr>
+          <p:cNvPr id="6" name="Shape 3"/>
+          <p:cNvSpPr/>
+          <p:nvPr/>
+        </p:nvSpPr>
+        <p:spPr>
+          <a:xfrm>
+            <a:off x="365760" y="4773168"/>
+            <a:ext cx="8412480" cy="0"/>
+          </a:xfrm>
+          <a:prstGeom prst="line">
+            <a:avLst/>
+          </a:prstGeom>
+          <a:noFill/>
+          <a:ln w="6350">
+            <a:solidFill>
+              <a:srgbClr val="D1D5DB"/>
+            </a:solidFill>
+            <a:prstDash val="solid"/>
+          </a:ln>
+        </p:spPr>
+      </p:sp>
+      <p:sp>
+        <p:nvSpPr>
+          <p:cNvPr id="7" name="Text 4"/>
+          <p:cNvSpPr/>
+          <p:nvPr/>
+        </p:nvSpPr>
+        <p:spPr>
+          <a:xfrm>
+            <a:off x="384048" y="4818888"/>
+            <a:ext cx="8275320" cy="182880"/>
+          </a:xfrm>
+          <a:prstGeom prst="rect">
+            <a:avLst/>
+          </a:prstGeom>
+          <a:noFill/>
+          <a:ln/>
+        </p:spPr>
+        <p:txBody>
+          <a:bodyPr wrap="square" lIns="0" tIns="0" rIns="0" bIns="0" rtlCol="0" anchor="ctr">
+            <a:normAutofit/>
+          </a:bodyPr>
+          <a:lstStyle/>
+          <a:p>
+            <a:pPr indent="0" marL="0">
+              <a:buNone/>
+            </a:pPr>
+            <a:r>
+              <a:rPr lang="en-US" sz="820" dirty="0">
+                <a:solidFill>
+                  <a:srgbClr val="6B7280"/>
+                </a:solidFill>
+                <a:latin typeface="Calibri" pitchFamily="34" charset="0"/>
+                <a:ea typeface="Calibri" pitchFamily="34" charset="-122"/>
+                <a:cs typeface="Calibri" pitchFamily="34" charset="-120"/>
+              </a:rPr>
+              <a:t>Source: https://learn.microsoft.com/en-us/agent-framework/concepts/workflows/events</a:t>
+            </a:r>
+            <a:endParaRPr lang="en-US" sz="820" dirty="0"/>
+          </a:p>
+        </p:txBody>
+      </p:sp>
+    </p:spTree>
+  </p:cSld>
+  <p:clrMapOvr>
+    <a:masterClrMapping/>
+  </p:clrMapOvr>
+</p:sld>
+</file>
+
+<file path=ppt/slides/slide11.xml><?xml version="1.0" encoding="utf-8"?>
+<p:sld xmlns:a="http://schemas.openxmlformats.org/drawingml/2006/main" xmlns:r="http://schemas.openxmlformats.org/officeDocument/2006/relationships" xmlns:p="http://schemas.openxmlformats.org/presentationml/2006/main">
+  <p:cSld name="Slide 11">
+    <p:bg>
+      <p:bgPr>
+        <a:solidFill>
+          <a:srgbClr val="FFFFFF"/>
+        </a:solidFill>
+      </p:bgPr>
+    </p:bg>
+    <p:spTree>
+      <p:nvGrpSpPr>
+        <p:cNvPr id="1" name=""/>
+        <p:cNvGrpSpPr/>
+        <p:nvPr/>
+      </p:nvGrpSpPr>
+      <p:grpSpPr>
+        <a:xfrm>
+          <a:off x="0" y="0"/>
+          <a:ext cx="0" cy="0"/>
+          <a:chOff x="0" y="0"/>
+          <a:chExt cx="0" cy="0"/>
+        </a:xfrm>
+      </p:grpSpPr>
+      <p:sp>
+        <p:nvSpPr>
+          <p:cNvPr id="2" name="Shape 0"/>
+          <p:cNvSpPr/>
+          <p:nvPr/>
+        </p:nvSpPr>
+        <p:spPr>
+          <a:xfrm>
+            <a:off x="0" y="0"/>
+            <a:ext cx="54864" cy="5143500"/>
+          </a:xfrm>
+          <a:prstGeom prst="rect">
+            <a:avLst/>
+          </a:prstGeom>
+          <a:solidFill>
+            <a:srgbClr val="1E2761"/>
+          </a:solidFill>
+          <a:ln/>
+        </p:spPr>
+      </p:sp>
+      <p:sp>
+        <p:nvSpPr>
+          <p:cNvPr id="3" name="Text 1"/>
+          <p:cNvSpPr/>
+          <p:nvPr/>
+        </p:nvSpPr>
+        <p:spPr>
+          <a:xfrm>
+            <a:off x="5486400" y="256032"/>
+            <a:ext cx="3337560" cy="228600"/>
+          </a:xfrm>
+          <a:prstGeom prst="rect">
+            <a:avLst/>
+          </a:prstGeom>
+          <a:noFill/>
+          <a:ln/>
+        </p:spPr>
+        <p:txBody>
+          <a:bodyPr wrap="square" lIns="0" tIns="0" rIns="0" bIns="0" rtlCol="0" anchor="ctr">
+            <a:normAutofit/>
+          </a:bodyPr>
+          <a:lstStyle/>
+          <a:p>
+            <a:pPr algn="r" indent="0" marL="0">
+              <a:buNone/>
+            </a:pPr>
+            <a:r>
+              <a:rPr lang="en-US" sz="950" dirty="0">
+                <a:solidFill>
+                  <a:srgbClr val="6B7280"/>
+                </a:solidFill>
+                <a:latin typeface="Calibri" pitchFamily="34" charset="0"/>
+                <a:ea typeface="Calibri" pitchFamily="34" charset="-122"/>
+                <a:cs typeface="Calibri" pitchFamily="34" charset="-120"/>
+              </a:rPr>
+              <a:t>Day 4 · Module 3</a:t>
+            </a:r>
+            <a:endParaRPr lang="en-US" sz="950" dirty="0"/>
+          </a:p>
+        </p:txBody>
+      </p:sp>
+      <p:sp>
+        <p:nvSpPr>
+          <p:cNvPr id="4" name="Text 2"/>
+          <p:cNvSpPr/>
+          <p:nvPr/>
+        </p:nvSpPr>
+        <p:spPr>
+          <a:xfrm>
+            <a:off x="365760" y="310896"/>
+            <a:ext cx="6583680" cy="603504"/>
+          </a:xfrm>
+          <a:prstGeom prst="rect">
+            <a:avLst/>
+          </a:prstGeom>
+          <a:noFill/>
+          <a:ln/>
+        </p:spPr>
+        <p:txBody>
+          <a:bodyPr wrap="square" lIns="0" tIns="0" rIns="0" bIns="0" rtlCol="0" anchor="ctr">
+            <a:normAutofit/>
+          </a:bodyPr>
+          <a:lstStyle/>
+          <a:p>
+            <a:pPr indent="0" marL="0">
+              <a:buNone/>
+            </a:pPr>
+            <a:r>
+              <a:rPr lang="en-US" sz="2500" b="1" dirty="0">
+                <a:solidFill>
+                  <a:srgbClr val="1E2761"/>
+                </a:solidFill>
+                <a:latin typeface="Calibri" pitchFamily="34" charset="0"/>
+                <a:ea typeface="Calibri" pitchFamily="34" charset="-122"/>
+                <a:cs typeface="Calibri" pitchFamily="34" charset="-120"/>
+              </a:rPr>
+              <a:t>Debugging with edge delivery status</a:t>
+            </a:r>
+            <a:endParaRPr lang="en-US" sz="2500" dirty="0"/>
+          </a:p>
+        </p:txBody>
+      </p:sp>
+      <p:graphicFrame>
+        <p:nvGraphicFramePr>
+          <p:cNvPr id="12" name="Table 0"/>
           <p:cNvGraphicFramePr>
             <a:graphicFrameLocks noGrp="1"/>
           </p:cNvGraphicFramePr>
@@ -3600,312 +4608,6 @@
 </p:sld>
 </file>
 
-<file path=ppt/slides/slide11.xml><?xml version="1.0" encoding="utf-8"?>
-<p:sld xmlns:a="http://schemas.openxmlformats.org/drawingml/2006/main" xmlns:r="http://schemas.openxmlformats.org/officeDocument/2006/relationships" xmlns:p="http://schemas.openxmlformats.org/presentationml/2006/main">
-  <p:cSld name="Slide 11">
-    <p:bg>
-      <p:bgPr>
-        <a:solidFill>
-          <a:srgbClr val="FFFFFF"/>
-        </a:solidFill>
-      </p:bgPr>
-    </p:bg>
-    <p:spTree>
-      <p:nvGrpSpPr>
-        <p:cNvPr id="1" name=""/>
-        <p:cNvGrpSpPr/>
-        <p:nvPr/>
-      </p:nvGrpSpPr>
-      <p:grpSpPr>
-        <a:xfrm>
-          <a:off x="0" y="0"/>
-          <a:ext cx="0" cy="0"/>
-          <a:chOff x="0" y="0"/>
-          <a:chExt cx="0" cy="0"/>
-        </a:xfrm>
-      </p:grpSpPr>
-      <p:sp>
-        <p:nvSpPr>
-          <p:cNvPr id="2" name="Shape 0"/>
-          <p:cNvSpPr/>
-          <p:nvPr/>
-        </p:nvSpPr>
-        <p:spPr>
-          <a:xfrm>
-            <a:off x="0" y="0"/>
-            <a:ext cx="54864" cy="5143500"/>
-          </a:xfrm>
-          <a:prstGeom prst="rect">
-            <a:avLst/>
-          </a:prstGeom>
-          <a:solidFill>
-            <a:srgbClr val="1E2761"/>
-          </a:solidFill>
-          <a:ln/>
-        </p:spPr>
-      </p:sp>
-      <p:sp>
-        <p:nvSpPr>
-          <p:cNvPr id="3" name="Text 1"/>
-          <p:cNvSpPr/>
-          <p:nvPr/>
-        </p:nvSpPr>
-        <p:spPr>
-          <a:xfrm>
-            <a:off x="5486400" y="256032"/>
-            <a:ext cx="3337560" cy="228600"/>
-          </a:xfrm>
-          <a:prstGeom prst="rect">
-            <a:avLst/>
-          </a:prstGeom>
-          <a:noFill/>
-          <a:ln/>
-        </p:spPr>
-        <p:txBody>
-          <a:bodyPr wrap="square" lIns="0" tIns="0" rIns="0" bIns="0" rtlCol="0" anchor="ctr">
-            <a:normAutofit/>
-          </a:bodyPr>
-          <a:lstStyle/>
-          <a:p>
-            <a:pPr algn="r" indent="0" marL="0">
-              <a:buNone/>
-            </a:pPr>
-            <a:r>
-              <a:rPr lang="en-US" sz="950" dirty="0">
-                <a:solidFill>
-                  <a:srgbClr val="6B7280"/>
-                </a:solidFill>
-                <a:latin typeface="Calibri" pitchFamily="34" charset="0"/>
-                <a:ea typeface="Calibri" pitchFamily="34" charset="-122"/>
-                <a:cs typeface="Calibri" pitchFamily="34" charset="-120"/>
-              </a:rPr>
-              <a:t>Day 4 · Module 3</a:t>
-            </a:r>
-            <a:endParaRPr lang="en-US" sz="950" dirty="0"/>
-          </a:p>
-        </p:txBody>
-      </p:sp>
-      <p:sp>
-        <p:nvSpPr>
-          <p:cNvPr id="4" name="Text 2"/>
-          <p:cNvSpPr/>
-          <p:nvPr/>
-        </p:nvSpPr>
-        <p:spPr>
-          <a:xfrm>
-            <a:off x="365760" y="310896"/>
-            <a:ext cx="6583680" cy="603504"/>
-          </a:xfrm>
-          <a:prstGeom prst="rect">
-            <a:avLst/>
-          </a:prstGeom>
-          <a:noFill/>
-          <a:ln/>
-        </p:spPr>
-        <p:txBody>
-          <a:bodyPr wrap="square" lIns="0" tIns="0" rIns="0" bIns="0" rtlCol="0" anchor="ctr">
-            <a:normAutofit/>
-          </a:bodyPr>
-          <a:lstStyle/>
-          <a:p>
-            <a:pPr indent="0" marL="0">
-              <a:buNone/>
-            </a:pPr>
-            <a:r>
-              <a:rPr lang="en-US" sz="2300" b="1" dirty="0">
-                <a:solidFill>
-                  <a:srgbClr val="1E2761"/>
-                </a:solidFill>
-                <a:latin typeface="Calibri" pitchFamily="34" charset="0"/>
-                <a:ea typeface="Calibri" pitchFamily="34" charset="-122"/>
-                <a:cs typeface="Calibri" pitchFamily="34" charset="-120"/>
-              </a:rPr>
-              <a:t>State: per-executor by default, shared on request</a:t>
-            </a:r>
-            <a:endParaRPr lang="en-US" sz="2300" dirty="0"/>
-          </a:p>
-        </p:txBody>
-      </p:sp>
-      <p:sp>
-        <p:nvSpPr>
-          <p:cNvPr id="5" name="Text 3"/>
-          <p:cNvSpPr/>
-          <p:nvPr/>
-        </p:nvSpPr>
-        <p:spPr>
-          <a:xfrm>
-            <a:off x="502920" y="1170432"/>
-            <a:ext cx="7955280" cy="3520440"/>
-          </a:xfrm>
-          <a:prstGeom prst="rect">
-            <a:avLst/>
-          </a:prstGeom>
-          <a:noFill/>
-          <a:ln/>
-        </p:spPr>
-        <p:txBody>
-          <a:bodyPr wrap="square" lIns="0" tIns="0" rIns="0" bIns="0" rtlCol="0" anchor="t">
-            <a:normAutofit/>
-          </a:bodyPr>
-          <a:lstStyle/>
-          <a:p>
-            <a:pPr marL="342900" indent="-342900">
-              <a:spcAft>
-                <a:spcPts val="1000"/>
-              </a:spcAft>
-              <a:buSzPct val="100000"/>
-              <a:buChar char="•"/>
-            </a:pPr>
-            <a:r>
-              <a:rPr lang="en-US" sz="1600" dirty="0">
-                <a:solidFill>
-                  <a:srgbClr val="212121"/>
-                </a:solidFill>
-                <a:latin typeface="Calibri" pitchFamily="34" charset="0"/>
-                <a:ea typeface="Calibri" pitchFamily="34" charset="-122"/>
-                <a:cs typeface="Calibri" pitchFamily="34" charset="-120"/>
-              </a:rPr>
-              <a:t>ctx.set_state(key, value) / ctx.get_state(key) — private to the writing executor by default</a:t>
-            </a:r>
-            <a:endParaRPr lang="en-US" sz="1600" dirty="0"/>
-          </a:p>
-          <a:p>
-            <a:pPr marL="342900" indent="-342900">
-              <a:spcAft>
-                <a:spcPts val="1000"/>
-              </a:spcAft>
-              <a:buSzPct val="100000"/>
-              <a:buChar char="•"/>
-            </a:pPr>
-            <a:r>
-              <a:rPr lang="en-US" sz="1600" dirty="0">
-                <a:solidFill>
-                  <a:srgbClr val="212121"/>
-                </a:solidFill>
-                <a:latin typeface="Calibri" pitchFamily="34" charset="0"/>
-                <a:ea typeface="Calibri" pitchFamily="34" charset="-122"/>
-                <a:cs typeface="Calibri" pitchFamily="34" charset="-120"/>
-              </a:rPr>
-              <a:t>Use a consistent key (or shared scope) across executors to exchange state that isn't a direct message</a:t>
-            </a:r>
-            <a:endParaRPr lang="en-US" sz="1600" dirty="0"/>
-          </a:p>
-          <a:p>
-            <a:pPr marL="342900" indent="-342900">
-              <a:spcAft>
-                <a:spcPts val="1000"/>
-              </a:spcAft>
-              <a:buSzPct val="100000"/>
-              <a:buChar char="•"/>
-            </a:pPr>
-            <a:r>
-              <a:rPr lang="en-US" sz="1600" dirty="0">
-                <a:solidFill>
-                  <a:srgbClr val="212121"/>
-                </a:solidFill>
-                <a:latin typeface="Calibri" pitchFamily="34" charset="0"/>
-                <a:ea typeface="Calibri" pitchFamily="34" charset="-122"/>
-                <a:cs typeface="Calibri" pitchFamily="34" charset="-120"/>
-              </a:rPr>
-              <a:t>Writes are visible to the writer immediately; other executors see them starting the next superstep</a:t>
-            </a:r>
-            <a:endParaRPr lang="en-US" sz="1600" dirty="0"/>
-          </a:p>
-          <a:p>
-            <a:pPr marL="342900" indent="-342900">
-              <a:spcAft>
-                <a:spcPts val="1000"/>
-              </a:spcAft>
-              <a:buSzPct val="100000"/>
-              <a:buChar char="•"/>
-            </a:pPr>
-            <a:r>
-              <a:rPr lang="en-US" sz="1600" dirty="0">
-                <a:solidFill>
-                  <a:srgbClr val="212121"/>
-                </a:solidFill>
-                <a:latin typeface="Calibri" pitchFamily="34" charset="0"/>
-                <a:ea typeface="Calibri" pitchFamily="34" charset="-122"/>
-                <a:cs typeface="Calibri" pitchFamily="34" charset="-120"/>
-              </a:rPr>
-              <a:t>Isolation risk: reusing one workflow/executor instance across unrelated runs leaks state between them — build fresh instances per run</a:t>
-            </a:r>
-            <a:endParaRPr lang="en-US" sz="1600" dirty="0"/>
-          </a:p>
-        </p:txBody>
-      </p:sp>
-      <p:sp>
-        <p:nvSpPr>
-          <p:cNvPr id="6" name="Shape 4"/>
-          <p:cNvSpPr/>
-          <p:nvPr/>
-        </p:nvSpPr>
-        <p:spPr>
-          <a:xfrm>
-            <a:off x="365760" y="4773168"/>
-            <a:ext cx="8412480" cy="0"/>
-          </a:xfrm>
-          <a:prstGeom prst="line">
-            <a:avLst/>
-          </a:prstGeom>
-          <a:noFill/>
-          <a:ln w="6350">
-            <a:solidFill>
-              <a:srgbClr val="D1D5DB"/>
-            </a:solidFill>
-            <a:prstDash val="solid"/>
-          </a:ln>
-        </p:spPr>
-      </p:sp>
-      <p:sp>
-        <p:nvSpPr>
-          <p:cNvPr id="7" name="Text 5"/>
-          <p:cNvSpPr/>
-          <p:nvPr/>
-        </p:nvSpPr>
-        <p:spPr>
-          <a:xfrm>
-            <a:off x="384048" y="4818888"/>
-            <a:ext cx="8275320" cy="182880"/>
-          </a:xfrm>
-          <a:prstGeom prst="rect">
-            <a:avLst/>
-          </a:prstGeom>
-          <a:noFill/>
-          <a:ln/>
-        </p:spPr>
-        <p:txBody>
-          <a:bodyPr wrap="square" lIns="0" tIns="0" rIns="0" bIns="0" rtlCol="0" anchor="ctr">
-            <a:normAutofit/>
-          </a:bodyPr>
-          <a:lstStyle/>
-          <a:p>
-            <a:pPr indent="0" marL="0">
-              <a:buNone/>
-            </a:pPr>
-            <a:r>
-              <a:rPr lang="en-US" sz="820" dirty="0">
-                <a:solidFill>
-                  <a:srgbClr val="6B7280"/>
-                </a:solidFill>
-                <a:latin typeface="Calibri" pitchFamily="34" charset="0"/>
-                <a:ea typeface="Calibri" pitchFamily="34" charset="-122"/>
-                <a:cs typeface="Calibri" pitchFamily="34" charset="-120"/>
-              </a:rPr>
-              <a:t>Source: https://learn.microsoft.com/en-us/agent-framework/concepts/workflows/state</a:t>
-            </a:r>
-            <a:endParaRPr lang="en-US" sz="820" dirty="0"/>
-          </a:p>
-        </p:txBody>
-      </p:sp>
-    </p:spTree>
-  </p:cSld>
-  <p:clrMapOvr>
-    <a:masterClrMapping/>
-  </p:clrMapOvr>
-</p:sld>
-</file>
-
 <file path=ppt/slides/slide12.xml><?xml version="1.0" encoding="utf-8"?>
 <p:sld xmlns:a="http://schemas.openxmlformats.org/drawingml/2006/main" xmlns:r="http://schemas.openxmlformats.org/officeDocument/2006/relationships" xmlns:p="http://schemas.openxmlformats.org/presentationml/2006/main">
   <p:cSld name="Slide 12">
@@ -4018,7 +4720,7 @@
               <a:buNone/>
             </a:pPr>
             <a:r>
-              <a:rPr lang="en-US" sz="2500" b="1" dirty="0">
+              <a:rPr lang="en-US" sz="2300" b="1" dirty="0">
                 <a:solidFill>
                   <a:srgbClr val="1E2761"/>
                 </a:solidFill>
@@ -4026,9 +4728,9 @@
                 <a:ea typeface="Calibri" pitchFamily="34" charset="-122"/>
                 <a:cs typeface="Calibri" pitchFamily="34" charset="-120"/>
               </a:rPr>
-              <a:t>Human-in-the-loop: request and response</a:t>
-            </a:r>
-            <a:endParaRPr lang="en-US" sz="2500" dirty="0"/>
+              <a:t>State: per-executor by default, shared on request</a:t>
+            </a:r>
+            <a:endParaRPr lang="en-US" sz="2300" dirty="0"/>
           </a:p>
         </p:txBody>
       </p:sp>
@@ -4071,7 +4773,7 @@
                 <a:ea typeface="Calibri" pitchFamily="34" charset="-122"/>
                 <a:cs typeface="Calibri" pitchFamily="34" charset="-120"/>
               </a:rPr>
-              <a:t>ctx.request_info(request_data=..., response_type=...) pauses the workflow and emits a request_info event</a:t>
+              <a:t>ctx.set_state(key, value) / ctx.get_state(key) — private to the writing executor by default</a:t>
             </a:r>
             <a:endParaRPr lang="en-US" sz="1600" dirty="0"/>
           </a:p>
@@ -4092,7 +4794,7 @@
                 <a:ea typeface="Calibri" pitchFamily="34" charset="-122"/>
                 <a:cs typeface="Calibri" pitchFamily="34" charset="-120"/>
               </a:rPr>
-              <a:t>Handle the response with a @response_handler method — the framework matches responses to handlers by type annotation</a:t>
+              <a:t>Use a consistent key (or shared scope) across executors to exchange state that isn't a direct message</a:t>
             </a:r>
             <a:endParaRPr lang="en-US" sz="1600" dirty="0"/>
           </a:p>
@@ -4113,7 +4815,7 @@
                 <a:ea typeface="Calibri" pitchFamily="34" charset="-122"/>
                 <a:cs typeface="Calibri" pitchFamily="34" charset="-120"/>
               </a:rPr>
-              <a:t>This is the exact mechanism a human reviewer, an approval system, or any external system plugs into</a:t>
+              <a:t>Writes are visible to the writer immediately; other executors see them starting the next superstep</a:t>
             </a:r>
             <a:endParaRPr lang="en-US" sz="1600" dirty="0"/>
           </a:p>
@@ -4134,7 +4836,7 @@
                 <a:ea typeface="Calibri" pitchFamily="34" charset="-122"/>
                 <a:cs typeface="Calibri" pitchFamily="34" charset="-120"/>
               </a:rPr>
-              <a:t>Same request/response channel — different payload — is how tool approval works inside a workflow</a:t>
+              <a:t>Isolation risk: reusing one workflow/executor instance across unrelated runs leaks state between them — build fresh instances per run</a:t>
             </a:r>
             <a:endParaRPr lang="en-US" sz="1600" dirty="0"/>
           </a:p>
@@ -4198,7 +4900,7 @@
                 <a:ea typeface="Calibri" pitchFamily="34" charset="-122"/>
                 <a:cs typeface="Calibri" pitchFamily="34" charset="-120"/>
               </a:rPr>
-              <a:t>Source: https://learn.microsoft.com/en-us/agent-framework/workflows/human-in-the-loop</a:t>
+              <a:t>Source: https://learn.microsoft.com/en-us/agent-framework/concepts/workflows/state</a:t>
             </a:r>
             <a:endParaRPr lang="en-US" sz="820" dirty="0"/>
           </a:p>
@@ -4332,7 +5034,7 @@
                 <a:ea typeface="Calibri" pitchFamily="34" charset="-122"/>
                 <a:cs typeface="Calibri" pitchFamily="34" charset="-120"/>
               </a:rPr>
-              <a:t>Tool approval reuses the same channel</a:t>
+              <a:t>Human-in-the-loop: request and response</a:t>
             </a:r>
             <a:endParaRPr lang="en-US" sz="2500" dirty="0"/>
           </a:p>
@@ -4340,39 +5042,14 @@
       </p:sp>
       <p:sp>
         <p:nvSpPr>
-          <p:cNvPr id="5" name="Shape 3"/>
-          <p:cNvSpPr/>
-          <p:nvPr/>
-        </p:nvSpPr>
-        <p:spPr>
-          <a:xfrm>
-            <a:off x="365760" y="1115568"/>
-            <a:ext cx="8412480" cy="2350008"/>
-          </a:xfrm>
-          <a:prstGeom prst="rect">
-            <a:avLst/>
-          </a:prstGeom>
-          <a:solidFill>
-            <a:srgbClr val="1D1E22"/>
-          </a:solidFill>
-          <a:ln w="9525">
-            <a:solidFill>
-              <a:srgbClr val="2A2B2E"/>
-            </a:solidFill>
-            <a:prstDash val="solid"/>
-          </a:ln>
-        </p:spPr>
-      </p:sp>
-      <p:sp>
-        <p:nvSpPr>
-          <p:cNvPr id="6" name="Text 4"/>
-          <p:cNvSpPr/>
-          <p:nvPr/>
-        </p:nvSpPr>
-        <p:spPr>
-          <a:xfrm>
-            <a:off x="502920" y="1207008"/>
-            <a:ext cx="8138160" cy="2167128"/>
+          <p:cNvPr id="5" name="Text 3"/>
+          <p:cNvSpPr/>
+          <p:nvPr/>
+        </p:nvSpPr>
+        <p:spPr>
+          <a:xfrm>
+            <a:off x="502920" y="1170432"/>
+            <a:ext cx="7955280" cy="3520440"/>
           </a:xfrm>
           <a:prstGeom prst="rect">
             <a:avLst/>
@@ -4386,460 +5063,94 @@
           </a:bodyPr>
           <a:lstStyle/>
           <a:p>
-            <a:pPr indent="0" marL="0">
-              <a:buNone/>
-            </a:pPr>
-            <a:r>
-              <a:rPr lang="en-US" sz="950" dirty="0">
-                <a:solidFill>
-                  <a:srgbClr val="A996B6"/>
-                </a:solidFill>
-                <a:latin typeface="Consolas" pitchFamily="34" charset="0"/>
-                <a:ea typeface="Consolas" pitchFamily="34" charset="-122"/>
-                <a:cs typeface="Consolas" pitchFamily="34" charset="-120"/>
-              </a:rPr>
-              <a:t>@tool</a:t>
-            </a:r>
-            <a:pPr indent="0" marL="0">
-              <a:buNone/>
-            </a:pPr>
-            <a:r>
-              <a:rPr lang="en-US" sz="950" dirty="0">
-                <a:solidFill>
-                  <a:srgbClr val="FFFFFF"/>
-                </a:solidFill>
-                <a:latin typeface="Consolas" pitchFamily="34" charset="0"/>
-                <a:ea typeface="Consolas" pitchFamily="34" charset="-122"/>
-                <a:cs typeface="Consolas" pitchFamily="34" charset="-120"/>
-              </a:rPr>
-              <a:t>(approval_mode=</a:t>
-            </a:r>
-            <a:pPr indent="0" marL="0">
-              <a:buNone/>
-            </a:pPr>
-            <a:r>
-              <a:rPr lang="en-US" sz="950" dirty="0">
-                <a:solidFill>
-                  <a:srgbClr val="E4C98A"/>
-                </a:solidFill>
-                <a:latin typeface="Consolas" pitchFamily="34" charset="0"/>
-                <a:ea typeface="Consolas" pitchFamily="34" charset="-122"/>
-                <a:cs typeface="Consolas" pitchFamily="34" charset="-120"/>
-              </a:rPr>
-              <a:t>"always_require"</a:t>
-            </a:r>
-            <a:pPr indent="0" marL="0">
-              <a:buNone/>
-            </a:pPr>
-            <a:r>
-              <a:rPr lang="en-US" sz="950" dirty="0">
-                <a:solidFill>
-                  <a:srgbClr val="FFFFFF"/>
-                </a:solidFill>
-                <a:latin typeface="Consolas" pitchFamily="34" charset="0"/>
-                <a:ea typeface="Consolas" pitchFamily="34" charset="-122"/>
-                <a:cs typeface="Consolas" pitchFamily="34" charset="-120"/>
-              </a:rPr>
-              <a:t>)</a:t>
-            </a:r>
-            <a:endParaRPr lang="en-US" sz="950" dirty="0"/>
-          </a:p>
-          <a:p>
-            <a:pPr indent="0" marL="0">
-              <a:buNone/>
-            </a:pPr>
-            <a:r>
-              <a:rPr lang="en-US" sz="950" dirty="0">
-                <a:solidFill>
-                  <a:srgbClr val="A996B6"/>
-                </a:solidFill>
-                <a:latin typeface="Consolas" pitchFamily="34" charset="0"/>
-                <a:ea typeface="Consolas" pitchFamily="34" charset="-122"/>
-                <a:cs typeface="Consolas" pitchFamily="34" charset="-120"/>
-              </a:rPr>
-              <a:t>def</a:t>
-            </a:r>
-            <a:pPr indent="0" marL="0">
-              <a:buNone/>
-            </a:pPr>
-            <a:r>
-              <a:rPr lang="en-US" sz="950" dirty="0">
-                <a:solidFill>
-                  <a:srgbClr val="FFFFFF"/>
-                </a:solidFill>
-                <a:latin typeface="Consolas" pitchFamily="34" charset="0"/>
-                <a:ea typeface="Consolas" pitchFamily="34" charset="-122"/>
-                <a:cs typeface="Consolas" pitchFamily="34" charset="-120"/>
-              </a:rPr>
-              <a:t> execute_database_query(query: str) -&gt; str:</a:t>
-            </a:r>
-            <a:endParaRPr lang="en-US" sz="950" dirty="0"/>
-          </a:p>
-          <a:p>
-            <a:pPr indent="0" marL="0">
-              <a:buNone/>
-            </a:pPr>
-            <a:r>
-              <a:rPr lang="en-US" sz="950" dirty="0">
-                <a:solidFill>
-                  <a:srgbClr val="FFFFFF"/>
-                </a:solidFill>
-                <a:latin typeface="Consolas" pitchFamily="34" charset="0"/>
-                <a:ea typeface="Consolas" pitchFamily="34" charset="-122"/>
-                <a:cs typeface="Consolas" pitchFamily="34" charset="-120"/>
-              </a:rPr>
-              <a:t>    </a:t>
-            </a:r>
-            <a:pPr indent="0" marL="0">
-              <a:buNone/>
-            </a:pPr>
-            <a:r>
-              <a:rPr lang="en-US" sz="950" dirty="0">
-                <a:solidFill>
-                  <a:srgbClr val="A996B6"/>
-                </a:solidFill>
-                <a:latin typeface="Consolas" pitchFamily="34" charset="0"/>
-                <a:ea typeface="Consolas" pitchFamily="34" charset="-122"/>
-                <a:cs typeface="Consolas" pitchFamily="34" charset="-120"/>
-              </a:rPr>
-              <a:t>return</a:t>
-            </a:r>
-            <a:pPr indent="0" marL="0">
-              <a:buNone/>
-            </a:pPr>
-            <a:r>
-              <a:rPr lang="en-US" sz="950" dirty="0">
-                <a:solidFill>
-                  <a:srgbClr val="FFFFFF"/>
-                </a:solidFill>
-                <a:latin typeface="Consolas" pitchFamily="34" charset="0"/>
-                <a:ea typeface="Consolas" pitchFamily="34" charset="-122"/>
-                <a:cs typeface="Consolas" pitchFamily="34" charset="-120"/>
-              </a:rPr>
-              <a:t> </a:t>
-            </a:r>
-            <a:pPr indent="0" marL="0">
-              <a:buNone/>
-            </a:pPr>
-            <a:r>
-              <a:rPr lang="en-US" sz="950" dirty="0">
-                <a:solidFill>
-                  <a:srgbClr val="E4C98A"/>
-                </a:solidFill>
-                <a:latin typeface="Consolas" pitchFamily="34" charset="0"/>
-                <a:ea typeface="Consolas" pitchFamily="34" charset="-122"/>
-                <a:cs typeface="Consolas" pitchFamily="34" charset="-120"/>
-              </a:rPr>
-              <a:t>f"Query executed successfully: {query}"</a:t>
-            </a:r>
-            <a:endParaRPr lang="en-US" sz="950" dirty="0"/>
-          </a:p>
-          <a:p>
-            <a:pPr indent="0" marL="0">
-              <a:buNone/>
-            </a:pPr>
-            <a:endParaRPr lang="en-US" sz="950" dirty="0"/>
-          </a:p>
-          <a:p>
-            <a:pPr indent="0" marL="0">
-              <a:buNone/>
-            </a:pPr>
-            <a:r>
-              <a:rPr lang="en-US" sz="950" i="1" dirty="0">
-                <a:solidFill>
-                  <a:srgbClr val="666666"/>
-                </a:solidFill>
-                <a:latin typeface="Consolas" pitchFamily="34" charset="0"/>
-                <a:ea typeface="Consolas" pitchFamily="34" charset="-122"/>
-                <a:cs typeface="Consolas" pitchFamily="34" charset="-120"/>
-              </a:rPr>
-              <a:t># The workflow pauses and emits a request_info event carrying a</a:t>
-            </a:r>
-            <a:endParaRPr lang="en-US" sz="950" dirty="0"/>
-          </a:p>
-          <a:p>
-            <a:pPr indent="0" marL="0">
-              <a:buNone/>
-            </a:pPr>
-            <a:r>
-              <a:rPr lang="en-US" sz="950" i="1" dirty="0">
-                <a:solidFill>
-                  <a:srgbClr val="666666"/>
-                </a:solidFill>
-                <a:latin typeface="Consolas" pitchFamily="34" charset="0"/>
-                <a:ea typeface="Consolas" pitchFamily="34" charset="-122"/>
-                <a:cs typeface="Consolas" pitchFamily="34" charset="-120"/>
-              </a:rPr>
-              <a:t># function_approval_request payload when the agent tries to call it</a:t>
-            </a:r>
-            <a:endParaRPr lang="en-US" sz="950" dirty="0"/>
-          </a:p>
-          <a:p>
-            <a:pPr indent="0" marL="0">
-              <a:buNone/>
-            </a:pPr>
-            <a:r>
-              <a:rPr lang="en-US" sz="950" dirty="0">
-                <a:solidFill>
-                  <a:srgbClr val="A996B6"/>
-                </a:solidFill>
-                <a:latin typeface="Consolas" pitchFamily="34" charset="0"/>
-                <a:ea typeface="Consolas" pitchFamily="34" charset="-122"/>
-                <a:cs typeface="Consolas" pitchFamily="34" charset="-120"/>
-              </a:rPr>
-              <a:t>async</a:t>
-            </a:r>
-            <a:pPr indent="0" marL="0">
-              <a:buNone/>
-            </a:pPr>
-            <a:r>
-              <a:rPr lang="en-US" sz="950" dirty="0">
-                <a:solidFill>
-                  <a:srgbClr val="FFFFFF"/>
-                </a:solidFill>
-                <a:latin typeface="Consolas" pitchFamily="34" charset="0"/>
-                <a:ea typeface="Consolas" pitchFamily="34" charset="-122"/>
-                <a:cs typeface="Consolas" pitchFamily="34" charset="-120"/>
-              </a:rPr>
-              <a:t> </a:t>
-            </a:r>
-            <a:pPr indent="0" marL="0">
-              <a:buNone/>
-            </a:pPr>
-            <a:r>
-              <a:rPr lang="en-US" sz="950" dirty="0">
-                <a:solidFill>
-                  <a:srgbClr val="A996B6"/>
-                </a:solidFill>
-                <a:latin typeface="Consolas" pitchFamily="34" charset="0"/>
-                <a:ea typeface="Consolas" pitchFamily="34" charset="-122"/>
-                <a:cs typeface="Consolas" pitchFamily="34" charset="-120"/>
-              </a:rPr>
-              <a:t>for</a:t>
-            </a:r>
-            <a:pPr indent="0" marL="0">
-              <a:buNone/>
-            </a:pPr>
-            <a:r>
-              <a:rPr lang="en-US" sz="950" dirty="0">
-                <a:solidFill>
-                  <a:srgbClr val="FFFFFF"/>
-                </a:solidFill>
-                <a:latin typeface="Consolas" pitchFamily="34" charset="0"/>
-                <a:ea typeface="Consolas" pitchFamily="34" charset="-122"/>
-                <a:cs typeface="Consolas" pitchFamily="34" charset="-120"/>
-              </a:rPr>
-              <a:t> event </a:t>
-            </a:r>
-            <a:pPr indent="0" marL="0">
-              <a:buNone/>
-            </a:pPr>
-            <a:r>
-              <a:rPr lang="en-US" sz="950" dirty="0">
-                <a:solidFill>
-                  <a:srgbClr val="A996B6"/>
-                </a:solidFill>
-                <a:latin typeface="Consolas" pitchFamily="34" charset="0"/>
-                <a:ea typeface="Consolas" pitchFamily="34" charset="-122"/>
-                <a:cs typeface="Consolas" pitchFamily="34" charset="-120"/>
-              </a:rPr>
-              <a:t>in</a:t>
-            </a:r>
-            <a:pPr indent="0" marL="0">
-              <a:buNone/>
-            </a:pPr>
-            <a:r>
-              <a:rPr lang="en-US" sz="950" dirty="0">
-                <a:solidFill>
-                  <a:srgbClr val="FFFFFF"/>
-                </a:solidFill>
-                <a:latin typeface="Consolas" pitchFamily="34" charset="0"/>
-                <a:ea typeface="Consolas" pitchFamily="34" charset="-122"/>
-                <a:cs typeface="Consolas" pitchFamily="34" charset="-120"/>
-              </a:rPr>
-              <a:t> stream:</a:t>
-            </a:r>
-            <a:endParaRPr lang="en-US" sz="950" dirty="0"/>
-          </a:p>
-          <a:p>
-            <a:pPr indent="0" marL="0">
-              <a:buNone/>
-            </a:pPr>
-            <a:r>
-              <a:rPr lang="en-US" sz="950" dirty="0">
-                <a:solidFill>
-                  <a:srgbClr val="FFFFFF"/>
-                </a:solidFill>
-                <a:latin typeface="Consolas" pitchFamily="34" charset="0"/>
-                <a:ea typeface="Consolas" pitchFamily="34" charset="-122"/>
-                <a:cs typeface="Consolas" pitchFamily="34" charset="-120"/>
-              </a:rPr>
-              <a:t>    </a:t>
-            </a:r>
-            <a:pPr indent="0" marL="0">
-              <a:buNone/>
-            </a:pPr>
-            <a:r>
-              <a:rPr lang="en-US" sz="950" dirty="0">
-                <a:solidFill>
-                  <a:srgbClr val="A996B6"/>
-                </a:solidFill>
-                <a:latin typeface="Consolas" pitchFamily="34" charset="0"/>
-                <a:ea typeface="Consolas" pitchFamily="34" charset="-122"/>
-                <a:cs typeface="Consolas" pitchFamily="34" charset="-120"/>
-              </a:rPr>
-              <a:t>if</a:t>
-            </a:r>
-            <a:pPr indent="0" marL="0">
-              <a:buNone/>
-            </a:pPr>
-            <a:r>
-              <a:rPr lang="en-US" sz="950" dirty="0">
-                <a:solidFill>
-                  <a:srgbClr val="FFFFFF"/>
-                </a:solidFill>
-                <a:latin typeface="Consolas" pitchFamily="34" charset="0"/>
-                <a:ea typeface="Consolas" pitchFamily="34" charset="-122"/>
-                <a:cs typeface="Consolas" pitchFamily="34" charset="-120"/>
-              </a:rPr>
-              <a:t> event.type == </a:t>
-            </a:r>
-            <a:pPr indent="0" marL="0">
-              <a:buNone/>
-            </a:pPr>
-            <a:r>
-              <a:rPr lang="en-US" sz="950" dirty="0">
-                <a:solidFill>
-                  <a:srgbClr val="E4C98A"/>
-                </a:solidFill>
-                <a:latin typeface="Consolas" pitchFamily="34" charset="0"/>
-                <a:ea typeface="Consolas" pitchFamily="34" charset="-122"/>
-                <a:cs typeface="Consolas" pitchFamily="34" charset="-120"/>
-              </a:rPr>
-              <a:t>"request_info"</a:t>
-            </a:r>
-            <a:pPr indent="0" marL="0">
-              <a:buNone/>
-            </a:pPr>
-            <a:r>
-              <a:rPr lang="en-US" sz="950" dirty="0">
-                <a:solidFill>
-                  <a:srgbClr val="FFFFFF"/>
-                </a:solidFill>
-                <a:latin typeface="Consolas" pitchFamily="34" charset="0"/>
-                <a:ea typeface="Consolas" pitchFamily="34" charset="-122"/>
-                <a:cs typeface="Consolas" pitchFamily="34" charset="-120"/>
-              </a:rPr>
-              <a:t> </a:t>
-            </a:r>
-            <a:pPr indent="0" marL="0">
-              <a:buNone/>
-            </a:pPr>
-            <a:r>
-              <a:rPr lang="en-US" sz="950" dirty="0">
-                <a:solidFill>
-                  <a:srgbClr val="A996B6"/>
-                </a:solidFill>
-                <a:latin typeface="Consolas" pitchFamily="34" charset="0"/>
-                <a:ea typeface="Consolas" pitchFamily="34" charset="-122"/>
-                <a:cs typeface="Consolas" pitchFamily="34" charset="-120"/>
-              </a:rPr>
-              <a:t>and</a:t>
-            </a:r>
-            <a:pPr indent="0" marL="0">
-              <a:buNone/>
-            </a:pPr>
-            <a:r>
-              <a:rPr lang="en-US" sz="950" dirty="0">
-                <a:solidFill>
-                  <a:srgbClr val="FFFFFF"/>
-                </a:solidFill>
-                <a:latin typeface="Consolas" pitchFamily="34" charset="0"/>
-                <a:ea typeface="Consolas" pitchFamily="34" charset="-122"/>
-                <a:cs typeface="Consolas" pitchFamily="34" charset="-120"/>
-              </a:rPr>
-              <a:t> event.data.type == </a:t>
-            </a:r>
-            <a:pPr indent="0" marL="0">
-              <a:buNone/>
-            </a:pPr>
-            <a:r>
-              <a:rPr lang="en-US" sz="950" dirty="0">
-                <a:solidFill>
-                  <a:srgbClr val="E4C98A"/>
-                </a:solidFill>
-                <a:latin typeface="Consolas" pitchFamily="34" charset="0"/>
-                <a:ea typeface="Consolas" pitchFamily="34" charset="-122"/>
-                <a:cs typeface="Consolas" pitchFamily="34" charset="-120"/>
-              </a:rPr>
-              <a:t>"function_approval_request"</a:t>
-            </a:r>
-            <a:pPr indent="0" marL="0">
-              <a:buNone/>
-            </a:pPr>
-            <a:r>
-              <a:rPr lang="en-US" sz="950" dirty="0">
-                <a:solidFill>
-                  <a:srgbClr val="FFFFFF"/>
-                </a:solidFill>
-                <a:latin typeface="Consolas" pitchFamily="34" charset="0"/>
-                <a:ea typeface="Consolas" pitchFamily="34" charset="-122"/>
-                <a:cs typeface="Consolas" pitchFamily="34" charset="-120"/>
-              </a:rPr>
-              <a:t>:</a:t>
-            </a:r>
-            <a:endParaRPr lang="en-US" sz="950" dirty="0"/>
-          </a:p>
-          <a:p>
-            <a:pPr indent="0" marL="0">
-              <a:buNone/>
-            </a:pPr>
-            <a:r>
-              <a:rPr lang="en-US" sz="950" dirty="0">
-                <a:solidFill>
-                  <a:srgbClr val="FFFFFF"/>
-                </a:solidFill>
-                <a:latin typeface="Consolas" pitchFamily="34" charset="0"/>
-                <a:ea typeface="Consolas" pitchFamily="34" charset="-122"/>
-                <a:cs typeface="Consolas" pitchFamily="34" charset="-120"/>
-              </a:rPr>
-              <a:t>        responses[event.request_id] = event.data.to_function_approval_response(approved=</a:t>
-            </a:r>
-            <a:pPr indent="0" marL="0">
-              <a:buNone/>
-            </a:pPr>
-            <a:r>
-              <a:rPr lang="en-US" sz="950" dirty="0">
-                <a:solidFill>
-                  <a:srgbClr val="A996B6"/>
-                </a:solidFill>
-                <a:latin typeface="Consolas" pitchFamily="34" charset="0"/>
-                <a:ea typeface="Consolas" pitchFamily="34" charset="-122"/>
-                <a:cs typeface="Consolas" pitchFamily="34" charset="-120"/>
-              </a:rPr>
-              <a:t>True</a:t>
-            </a:r>
-            <a:pPr indent="0" marL="0">
-              <a:buNone/>
-            </a:pPr>
-            <a:r>
-              <a:rPr lang="en-US" sz="950" dirty="0">
-                <a:solidFill>
-                  <a:srgbClr val="FFFFFF"/>
-                </a:solidFill>
-                <a:latin typeface="Consolas" pitchFamily="34" charset="0"/>
-                <a:ea typeface="Consolas" pitchFamily="34" charset="-122"/>
-                <a:cs typeface="Consolas" pitchFamily="34" charset="-120"/>
-              </a:rPr>
-              <a:t>)</a:t>
-            </a:r>
-            <a:endParaRPr lang="en-US" sz="950" dirty="0"/>
-          </a:p>
-        </p:txBody>
-      </p:sp>
-      <p:sp>
-        <p:nvSpPr>
-          <p:cNvPr id="7" name="Shape 5"/>
+            <a:pPr marL="342900" indent="-342900">
+              <a:spcAft>
+                <a:spcPts val="1000"/>
+              </a:spcAft>
+              <a:buSzPct val="100000"/>
+              <a:buChar char="•"/>
+            </a:pPr>
+            <a:r>
+              <a:rPr lang="en-US" sz="1600" dirty="0">
+                <a:solidFill>
+                  <a:srgbClr val="212121"/>
+                </a:solidFill>
+                <a:latin typeface="Calibri" pitchFamily="34" charset="0"/>
+                <a:ea typeface="Calibri" pitchFamily="34" charset="-122"/>
+                <a:cs typeface="Calibri" pitchFamily="34" charset="-120"/>
+              </a:rPr>
+              <a:t>ctx.request_info(request_data=..., response_type=...) pauses the workflow and emits a request_info event</a:t>
+            </a:r>
+            <a:endParaRPr lang="en-US" sz="1600" dirty="0"/>
+          </a:p>
+          <a:p>
+            <a:pPr marL="342900" indent="-342900">
+              <a:spcAft>
+                <a:spcPts val="1000"/>
+              </a:spcAft>
+              <a:buSzPct val="100000"/>
+              <a:buChar char="•"/>
+            </a:pPr>
+            <a:r>
+              <a:rPr lang="en-US" sz="1600" dirty="0">
+                <a:solidFill>
+                  <a:srgbClr val="212121"/>
+                </a:solidFill>
+                <a:latin typeface="Calibri" pitchFamily="34" charset="0"/>
+                <a:ea typeface="Calibri" pitchFamily="34" charset="-122"/>
+                <a:cs typeface="Calibri" pitchFamily="34" charset="-120"/>
+              </a:rPr>
+              <a:t>Handle the response with a @response_handler method — the framework matches responses to handlers by type annotation</a:t>
+            </a:r>
+            <a:endParaRPr lang="en-US" sz="1600" dirty="0"/>
+          </a:p>
+          <a:p>
+            <a:pPr marL="342900" indent="-342900">
+              <a:spcAft>
+                <a:spcPts val="1000"/>
+              </a:spcAft>
+              <a:buSzPct val="100000"/>
+              <a:buChar char="•"/>
+            </a:pPr>
+            <a:r>
+              <a:rPr lang="en-US" sz="1600" dirty="0">
+                <a:solidFill>
+                  <a:srgbClr val="212121"/>
+                </a:solidFill>
+                <a:latin typeface="Calibri" pitchFamily="34" charset="0"/>
+                <a:ea typeface="Calibri" pitchFamily="34" charset="-122"/>
+                <a:cs typeface="Calibri" pitchFamily="34" charset="-120"/>
+              </a:rPr>
+              <a:t>This is the exact mechanism a human reviewer, an approval system, or any external system plugs into</a:t>
+            </a:r>
+            <a:endParaRPr lang="en-US" sz="1600" dirty="0"/>
+          </a:p>
+          <a:p>
+            <a:pPr marL="342900" indent="-342900">
+              <a:spcAft>
+                <a:spcPts val="1000"/>
+              </a:spcAft>
+              <a:buSzPct val="100000"/>
+              <a:buChar char="•"/>
+            </a:pPr>
+            <a:r>
+              <a:rPr lang="en-US" sz="1600" dirty="0">
+                <a:solidFill>
+                  <a:srgbClr val="212121"/>
+                </a:solidFill>
+                <a:latin typeface="Calibri" pitchFamily="34" charset="0"/>
+                <a:ea typeface="Calibri" pitchFamily="34" charset="-122"/>
+                <a:cs typeface="Calibri" pitchFamily="34" charset="-120"/>
+              </a:rPr>
+              <a:t>Same request/response channel — different payload — is how tool approval works inside a workflow</a:t>
+            </a:r>
+            <a:endParaRPr lang="en-US" sz="1600" dirty="0"/>
+          </a:p>
+        </p:txBody>
+      </p:sp>
+      <p:sp>
+        <p:nvSpPr>
+          <p:cNvPr id="6" name="Shape 4"/>
           <p:cNvSpPr/>
           <p:nvPr/>
         </p:nvSpPr>
@@ -4862,7 +5173,7 @@
       </p:sp>
       <p:sp>
         <p:nvSpPr>
-          <p:cNvPr id="8" name="Text 6"/>
+          <p:cNvPr id="7" name="Text 5"/>
           <p:cNvSpPr/>
           <p:nvPr/>
         </p:nvSpPr>
@@ -5021,7 +5332,7 @@
               <a:buNone/>
             </a:pPr>
             <a:r>
-              <a:rPr lang="en-US" sz="2800" b="1" dirty="0">
+              <a:rPr lang="en-US" sz="2500" b="1" dirty="0">
                 <a:solidFill>
                   <a:srgbClr val="1E2761"/>
                 </a:solidFill>
@@ -5029,22 +5340,47 @@
                 <a:ea typeface="Calibri" pitchFamily="34" charset="-122"/>
                 <a:cs typeface="Calibri" pitchFamily="34" charset="-120"/>
               </a:rPr>
-              <a:t>Checkpoints: save and resume</a:t>
-            </a:r>
-            <a:endParaRPr lang="en-US" sz="2800" dirty="0"/>
-          </a:p>
-        </p:txBody>
-      </p:sp>
-      <p:sp>
-        <p:nvSpPr>
-          <p:cNvPr id="5" name="Text 3"/>
-          <p:cNvSpPr/>
-          <p:nvPr/>
-        </p:nvSpPr>
-        <p:spPr>
-          <a:xfrm>
-            <a:off x="502920" y="1170432"/>
-            <a:ext cx="7955280" cy="3520440"/>
+              <a:t>Tool approval reuses the same channel</a:t>
+            </a:r>
+            <a:endParaRPr lang="en-US" sz="2500" dirty="0"/>
+          </a:p>
+        </p:txBody>
+      </p:sp>
+      <p:sp>
+        <p:nvSpPr>
+          <p:cNvPr id="5" name="Shape 3"/>
+          <p:cNvSpPr/>
+          <p:nvPr/>
+        </p:nvSpPr>
+        <p:spPr>
+          <a:xfrm>
+            <a:off x="365760" y="1115568"/>
+            <a:ext cx="8412480" cy="2350008"/>
+          </a:xfrm>
+          <a:prstGeom prst="rect">
+            <a:avLst/>
+          </a:prstGeom>
+          <a:solidFill>
+            <a:srgbClr val="1D1E22"/>
+          </a:solidFill>
+          <a:ln w="9525">
+            <a:solidFill>
+              <a:srgbClr val="2A2B2E"/>
+            </a:solidFill>
+            <a:prstDash val="solid"/>
+          </a:ln>
+        </p:spPr>
+      </p:sp>
+      <p:sp>
+        <p:nvSpPr>
+          <p:cNvPr id="6" name="Text 4"/>
+          <p:cNvSpPr/>
+          <p:nvPr/>
+        </p:nvSpPr>
+        <p:spPr>
+          <a:xfrm>
+            <a:off x="502920" y="1207008"/>
+            <a:ext cx="8138160" cy="2167128"/>
           </a:xfrm>
           <a:prstGeom prst="rect">
             <a:avLst/>
@@ -5058,94 +5394,460 @@
           </a:bodyPr>
           <a:lstStyle/>
           <a:p>
-            <a:pPr marL="342900" indent="-342900">
-              <a:spcAft>
-                <a:spcPts val="1000"/>
-              </a:spcAft>
-              <a:buSzPct val="100000"/>
-              <a:buChar char="•"/>
-            </a:pPr>
-            <a:r>
-              <a:rPr lang="en-US" sz="1600" dirty="0">
-                <a:solidFill>
-                  <a:srgbClr val="212121"/>
-                </a:solidFill>
-                <a:latin typeface="Calibri" pitchFamily="34" charset="0"/>
-                <a:ea typeface="Calibri" pitchFamily="34" charset="-122"/>
-                <a:cs typeface="Calibri" pitchFamily="34" charset="-120"/>
-              </a:rPr>
-              <a:t>A checkpoint is created at the end of every superstep, after all its executors finish</a:t>
-            </a:r>
-            <a:endParaRPr lang="en-US" sz="1600" dirty="0"/>
-          </a:p>
-          <a:p>
-            <a:pPr marL="342900" indent="-342900">
-              <a:spcAft>
-                <a:spcPts val="1000"/>
-              </a:spcAft>
-              <a:buSzPct val="100000"/>
-              <a:buChar char="•"/>
-            </a:pPr>
-            <a:r>
-              <a:rPr lang="en-US" sz="1600" dirty="0">
-                <a:solidFill>
-                  <a:srgbClr val="212121"/>
-                </a:solidFill>
-                <a:latin typeface="Calibri" pitchFamily="34" charset="0"/>
-                <a:ea typeface="Calibri" pitchFamily="34" charset="-122"/>
-                <a:cs typeface="Calibri" pitchFamily="34" charset="-120"/>
-              </a:rPr>
-              <a:t>Captures: executor state, pending messages for the next superstep, pending requests and responses, and shared state</a:t>
-            </a:r>
-            <a:endParaRPr lang="en-US" sz="1600" dirty="0"/>
-          </a:p>
-          <a:p>
-            <a:pPr marL="342900" indent="-342900">
-              <a:spcAft>
-                <a:spcPts val="1000"/>
-              </a:spcAft>
-              <a:buSzPct val="100000"/>
-              <a:buChar char="•"/>
-            </a:pPr>
-            <a:r>
-              <a:rPr lang="en-US" sz="1600" dirty="0">
-                <a:solidFill>
-                  <a:srgbClr val="212121"/>
-                </a:solidFill>
-                <a:latin typeface="Calibri" pitchFamily="34" charset="0"/>
-                <a:ea typeface="Calibri" pitchFamily="34" charset="-122"/>
-                <a:cs typeface="Calibri" pitchFamily="34" charset="-120"/>
-              </a:rPr>
-              <a:t>Pending human-in-the-loop requests are re-emitted as request_info events when you restore — you never lose an outstanding approval</a:t>
-            </a:r>
-            <a:endParaRPr lang="en-US" sz="1600" dirty="0"/>
-          </a:p>
-          <a:p>
-            <a:pPr marL="342900" indent="-342900">
-              <a:spcAft>
-                <a:spcPts val="1000"/>
-              </a:spcAft>
-              <a:buSzPct val="100000"/>
-              <a:buChar char="•"/>
-            </a:pPr>
-            <a:r>
-              <a:rPr lang="en-US" sz="1600" dirty="0">
-                <a:solidFill>
-                  <a:srgbClr val="212121"/>
-                </a:solidFill>
-                <a:latin typeface="Calibri" pitchFamily="34" charset="0"/>
-                <a:ea typeface="Calibri" pitchFamily="34" charset="-122"/>
-                <a:cs typeface="Calibri" pitchFamily="34" charset="-120"/>
-              </a:rPr>
-              <a:t>Use cases: long-running workflows, pause/resume across process restarts, audit/compliance snapshots, migrating a run across environments</a:t>
-            </a:r>
-            <a:endParaRPr lang="en-US" sz="1600" dirty="0"/>
-          </a:p>
-        </p:txBody>
-      </p:sp>
-      <p:sp>
-        <p:nvSpPr>
-          <p:cNvPr id="6" name="Shape 4"/>
+            <a:pPr indent="0" marL="0">
+              <a:buNone/>
+            </a:pPr>
+            <a:r>
+              <a:rPr lang="en-US" sz="950" dirty="0">
+                <a:solidFill>
+                  <a:srgbClr val="A996B6"/>
+                </a:solidFill>
+                <a:latin typeface="Consolas" pitchFamily="34" charset="0"/>
+                <a:ea typeface="Consolas" pitchFamily="34" charset="-122"/>
+                <a:cs typeface="Consolas" pitchFamily="34" charset="-120"/>
+              </a:rPr>
+              <a:t>@tool</a:t>
+            </a:r>
+            <a:pPr indent="0" marL="0">
+              <a:buNone/>
+            </a:pPr>
+            <a:r>
+              <a:rPr lang="en-US" sz="950" dirty="0">
+                <a:solidFill>
+                  <a:srgbClr val="FFFFFF"/>
+                </a:solidFill>
+                <a:latin typeface="Consolas" pitchFamily="34" charset="0"/>
+                <a:ea typeface="Consolas" pitchFamily="34" charset="-122"/>
+                <a:cs typeface="Consolas" pitchFamily="34" charset="-120"/>
+              </a:rPr>
+              <a:t>(approval_mode=</a:t>
+            </a:r>
+            <a:pPr indent="0" marL="0">
+              <a:buNone/>
+            </a:pPr>
+            <a:r>
+              <a:rPr lang="en-US" sz="950" dirty="0">
+                <a:solidFill>
+                  <a:srgbClr val="E4C98A"/>
+                </a:solidFill>
+                <a:latin typeface="Consolas" pitchFamily="34" charset="0"/>
+                <a:ea typeface="Consolas" pitchFamily="34" charset="-122"/>
+                <a:cs typeface="Consolas" pitchFamily="34" charset="-120"/>
+              </a:rPr>
+              <a:t>"always_require"</a:t>
+            </a:r>
+            <a:pPr indent="0" marL="0">
+              <a:buNone/>
+            </a:pPr>
+            <a:r>
+              <a:rPr lang="en-US" sz="950" dirty="0">
+                <a:solidFill>
+                  <a:srgbClr val="FFFFFF"/>
+                </a:solidFill>
+                <a:latin typeface="Consolas" pitchFamily="34" charset="0"/>
+                <a:ea typeface="Consolas" pitchFamily="34" charset="-122"/>
+                <a:cs typeface="Consolas" pitchFamily="34" charset="-120"/>
+              </a:rPr>
+              <a:t>)</a:t>
+            </a:r>
+            <a:endParaRPr lang="en-US" sz="950" dirty="0"/>
+          </a:p>
+          <a:p>
+            <a:pPr indent="0" marL="0">
+              <a:buNone/>
+            </a:pPr>
+            <a:r>
+              <a:rPr lang="en-US" sz="950" dirty="0">
+                <a:solidFill>
+                  <a:srgbClr val="A996B6"/>
+                </a:solidFill>
+                <a:latin typeface="Consolas" pitchFamily="34" charset="0"/>
+                <a:ea typeface="Consolas" pitchFamily="34" charset="-122"/>
+                <a:cs typeface="Consolas" pitchFamily="34" charset="-120"/>
+              </a:rPr>
+              <a:t>def</a:t>
+            </a:r>
+            <a:pPr indent="0" marL="0">
+              <a:buNone/>
+            </a:pPr>
+            <a:r>
+              <a:rPr lang="en-US" sz="950" dirty="0">
+                <a:solidFill>
+                  <a:srgbClr val="FFFFFF"/>
+                </a:solidFill>
+                <a:latin typeface="Consolas" pitchFamily="34" charset="0"/>
+                <a:ea typeface="Consolas" pitchFamily="34" charset="-122"/>
+                <a:cs typeface="Consolas" pitchFamily="34" charset="-120"/>
+              </a:rPr>
+              <a:t> execute_database_query(query: str) -&gt; str:</a:t>
+            </a:r>
+            <a:endParaRPr lang="en-US" sz="950" dirty="0"/>
+          </a:p>
+          <a:p>
+            <a:pPr indent="0" marL="0">
+              <a:buNone/>
+            </a:pPr>
+            <a:r>
+              <a:rPr lang="en-US" sz="950" dirty="0">
+                <a:solidFill>
+                  <a:srgbClr val="FFFFFF"/>
+                </a:solidFill>
+                <a:latin typeface="Consolas" pitchFamily="34" charset="0"/>
+                <a:ea typeface="Consolas" pitchFamily="34" charset="-122"/>
+                <a:cs typeface="Consolas" pitchFamily="34" charset="-120"/>
+              </a:rPr>
+              <a:t>    </a:t>
+            </a:r>
+            <a:pPr indent="0" marL="0">
+              <a:buNone/>
+            </a:pPr>
+            <a:r>
+              <a:rPr lang="en-US" sz="950" dirty="0">
+                <a:solidFill>
+                  <a:srgbClr val="A996B6"/>
+                </a:solidFill>
+                <a:latin typeface="Consolas" pitchFamily="34" charset="0"/>
+                <a:ea typeface="Consolas" pitchFamily="34" charset="-122"/>
+                <a:cs typeface="Consolas" pitchFamily="34" charset="-120"/>
+              </a:rPr>
+              <a:t>return</a:t>
+            </a:r>
+            <a:pPr indent="0" marL="0">
+              <a:buNone/>
+            </a:pPr>
+            <a:r>
+              <a:rPr lang="en-US" sz="950" dirty="0">
+                <a:solidFill>
+                  <a:srgbClr val="FFFFFF"/>
+                </a:solidFill>
+                <a:latin typeface="Consolas" pitchFamily="34" charset="0"/>
+                <a:ea typeface="Consolas" pitchFamily="34" charset="-122"/>
+                <a:cs typeface="Consolas" pitchFamily="34" charset="-120"/>
+              </a:rPr>
+              <a:t> </a:t>
+            </a:r>
+            <a:pPr indent="0" marL="0">
+              <a:buNone/>
+            </a:pPr>
+            <a:r>
+              <a:rPr lang="en-US" sz="950" dirty="0">
+                <a:solidFill>
+                  <a:srgbClr val="E4C98A"/>
+                </a:solidFill>
+                <a:latin typeface="Consolas" pitchFamily="34" charset="0"/>
+                <a:ea typeface="Consolas" pitchFamily="34" charset="-122"/>
+                <a:cs typeface="Consolas" pitchFamily="34" charset="-120"/>
+              </a:rPr>
+              <a:t>f"Query executed successfully: {query}"</a:t>
+            </a:r>
+            <a:endParaRPr lang="en-US" sz="950" dirty="0"/>
+          </a:p>
+          <a:p>
+            <a:pPr indent="0" marL="0">
+              <a:buNone/>
+            </a:pPr>
+            <a:endParaRPr lang="en-US" sz="950" dirty="0"/>
+          </a:p>
+          <a:p>
+            <a:pPr indent="0" marL="0">
+              <a:buNone/>
+            </a:pPr>
+            <a:r>
+              <a:rPr lang="en-US" sz="950" i="1" dirty="0">
+                <a:solidFill>
+                  <a:srgbClr val="666666"/>
+                </a:solidFill>
+                <a:latin typeface="Consolas" pitchFamily="34" charset="0"/>
+                <a:ea typeface="Consolas" pitchFamily="34" charset="-122"/>
+                <a:cs typeface="Consolas" pitchFamily="34" charset="-120"/>
+              </a:rPr>
+              <a:t># The workflow pauses and emits a request_info event carrying a</a:t>
+            </a:r>
+            <a:endParaRPr lang="en-US" sz="950" dirty="0"/>
+          </a:p>
+          <a:p>
+            <a:pPr indent="0" marL="0">
+              <a:buNone/>
+            </a:pPr>
+            <a:r>
+              <a:rPr lang="en-US" sz="950" i="1" dirty="0">
+                <a:solidFill>
+                  <a:srgbClr val="666666"/>
+                </a:solidFill>
+                <a:latin typeface="Consolas" pitchFamily="34" charset="0"/>
+                <a:ea typeface="Consolas" pitchFamily="34" charset="-122"/>
+                <a:cs typeface="Consolas" pitchFamily="34" charset="-120"/>
+              </a:rPr>
+              <a:t># function_approval_request payload when the agent tries to call it</a:t>
+            </a:r>
+            <a:endParaRPr lang="en-US" sz="950" dirty="0"/>
+          </a:p>
+          <a:p>
+            <a:pPr indent="0" marL="0">
+              <a:buNone/>
+            </a:pPr>
+            <a:r>
+              <a:rPr lang="en-US" sz="950" dirty="0">
+                <a:solidFill>
+                  <a:srgbClr val="A996B6"/>
+                </a:solidFill>
+                <a:latin typeface="Consolas" pitchFamily="34" charset="0"/>
+                <a:ea typeface="Consolas" pitchFamily="34" charset="-122"/>
+                <a:cs typeface="Consolas" pitchFamily="34" charset="-120"/>
+              </a:rPr>
+              <a:t>async</a:t>
+            </a:r>
+            <a:pPr indent="0" marL="0">
+              <a:buNone/>
+            </a:pPr>
+            <a:r>
+              <a:rPr lang="en-US" sz="950" dirty="0">
+                <a:solidFill>
+                  <a:srgbClr val="FFFFFF"/>
+                </a:solidFill>
+                <a:latin typeface="Consolas" pitchFamily="34" charset="0"/>
+                <a:ea typeface="Consolas" pitchFamily="34" charset="-122"/>
+                <a:cs typeface="Consolas" pitchFamily="34" charset="-120"/>
+              </a:rPr>
+              <a:t> </a:t>
+            </a:r>
+            <a:pPr indent="0" marL="0">
+              <a:buNone/>
+            </a:pPr>
+            <a:r>
+              <a:rPr lang="en-US" sz="950" dirty="0">
+                <a:solidFill>
+                  <a:srgbClr val="A996B6"/>
+                </a:solidFill>
+                <a:latin typeface="Consolas" pitchFamily="34" charset="0"/>
+                <a:ea typeface="Consolas" pitchFamily="34" charset="-122"/>
+                <a:cs typeface="Consolas" pitchFamily="34" charset="-120"/>
+              </a:rPr>
+              <a:t>for</a:t>
+            </a:r>
+            <a:pPr indent="0" marL="0">
+              <a:buNone/>
+            </a:pPr>
+            <a:r>
+              <a:rPr lang="en-US" sz="950" dirty="0">
+                <a:solidFill>
+                  <a:srgbClr val="FFFFFF"/>
+                </a:solidFill>
+                <a:latin typeface="Consolas" pitchFamily="34" charset="0"/>
+                <a:ea typeface="Consolas" pitchFamily="34" charset="-122"/>
+                <a:cs typeface="Consolas" pitchFamily="34" charset="-120"/>
+              </a:rPr>
+              <a:t> event </a:t>
+            </a:r>
+            <a:pPr indent="0" marL="0">
+              <a:buNone/>
+            </a:pPr>
+            <a:r>
+              <a:rPr lang="en-US" sz="950" dirty="0">
+                <a:solidFill>
+                  <a:srgbClr val="A996B6"/>
+                </a:solidFill>
+                <a:latin typeface="Consolas" pitchFamily="34" charset="0"/>
+                <a:ea typeface="Consolas" pitchFamily="34" charset="-122"/>
+                <a:cs typeface="Consolas" pitchFamily="34" charset="-120"/>
+              </a:rPr>
+              <a:t>in</a:t>
+            </a:r>
+            <a:pPr indent="0" marL="0">
+              <a:buNone/>
+            </a:pPr>
+            <a:r>
+              <a:rPr lang="en-US" sz="950" dirty="0">
+                <a:solidFill>
+                  <a:srgbClr val="FFFFFF"/>
+                </a:solidFill>
+                <a:latin typeface="Consolas" pitchFamily="34" charset="0"/>
+                <a:ea typeface="Consolas" pitchFamily="34" charset="-122"/>
+                <a:cs typeface="Consolas" pitchFamily="34" charset="-120"/>
+              </a:rPr>
+              <a:t> stream:</a:t>
+            </a:r>
+            <a:endParaRPr lang="en-US" sz="950" dirty="0"/>
+          </a:p>
+          <a:p>
+            <a:pPr indent="0" marL="0">
+              <a:buNone/>
+            </a:pPr>
+            <a:r>
+              <a:rPr lang="en-US" sz="950" dirty="0">
+                <a:solidFill>
+                  <a:srgbClr val="FFFFFF"/>
+                </a:solidFill>
+                <a:latin typeface="Consolas" pitchFamily="34" charset="0"/>
+                <a:ea typeface="Consolas" pitchFamily="34" charset="-122"/>
+                <a:cs typeface="Consolas" pitchFamily="34" charset="-120"/>
+              </a:rPr>
+              <a:t>    </a:t>
+            </a:r>
+            <a:pPr indent="0" marL="0">
+              <a:buNone/>
+            </a:pPr>
+            <a:r>
+              <a:rPr lang="en-US" sz="950" dirty="0">
+                <a:solidFill>
+                  <a:srgbClr val="A996B6"/>
+                </a:solidFill>
+                <a:latin typeface="Consolas" pitchFamily="34" charset="0"/>
+                <a:ea typeface="Consolas" pitchFamily="34" charset="-122"/>
+                <a:cs typeface="Consolas" pitchFamily="34" charset="-120"/>
+              </a:rPr>
+              <a:t>if</a:t>
+            </a:r>
+            <a:pPr indent="0" marL="0">
+              <a:buNone/>
+            </a:pPr>
+            <a:r>
+              <a:rPr lang="en-US" sz="950" dirty="0">
+                <a:solidFill>
+                  <a:srgbClr val="FFFFFF"/>
+                </a:solidFill>
+                <a:latin typeface="Consolas" pitchFamily="34" charset="0"/>
+                <a:ea typeface="Consolas" pitchFamily="34" charset="-122"/>
+                <a:cs typeface="Consolas" pitchFamily="34" charset="-120"/>
+              </a:rPr>
+              <a:t> event.type == </a:t>
+            </a:r>
+            <a:pPr indent="0" marL="0">
+              <a:buNone/>
+            </a:pPr>
+            <a:r>
+              <a:rPr lang="en-US" sz="950" dirty="0">
+                <a:solidFill>
+                  <a:srgbClr val="E4C98A"/>
+                </a:solidFill>
+                <a:latin typeface="Consolas" pitchFamily="34" charset="0"/>
+                <a:ea typeface="Consolas" pitchFamily="34" charset="-122"/>
+                <a:cs typeface="Consolas" pitchFamily="34" charset="-120"/>
+              </a:rPr>
+              <a:t>"request_info"</a:t>
+            </a:r>
+            <a:pPr indent="0" marL="0">
+              <a:buNone/>
+            </a:pPr>
+            <a:r>
+              <a:rPr lang="en-US" sz="950" dirty="0">
+                <a:solidFill>
+                  <a:srgbClr val="FFFFFF"/>
+                </a:solidFill>
+                <a:latin typeface="Consolas" pitchFamily="34" charset="0"/>
+                <a:ea typeface="Consolas" pitchFamily="34" charset="-122"/>
+                <a:cs typeface="Consolas" pitchFamily="34" charset="-120"/>
+              </a:rPr>
+              <a:t> </a:t>
+            </a:r>
+            <a:pPr indent="0" marL="0">
+              <a:buNone/>
+            </a:pPr>
+            <a:r>
+              <a:rPr lang="en-US" sz="950" dirty="0">
+                <a:solidFill>
+                  <a:srgbClr val="A996B6"/>
+                </a:solidFill>
+                <a:latin typeface="Consolas" pitchFamily="34" charset="0"/>
+                <a:ea typeface="Consolas" pitchFamily="34" charset="-122"/>
+                <a:cs typeface="Consolas" pitchFamily="34" charset="-120"/>
+              </a:rPr>
+              <a:t>and</a:t>
+            </a:r>
+            <a:pPr indent="0" marL="0">
+              <a:buNone/>
+            </a:pPr>
+            <a:r>
+              <a:rPr lang="en-US" sz="950" dirty="0">
+                <a:solidFill>
+                  <a:srgbClr val="FFFFFF"/>
+                </a:solidFill>
+                <a:latin typeface="Consolas" pitchFamily="34" charset="0"/>
+                <a:ea typeface="Consolas" pitchFamily="34" charset="-122"/>
+                <a:cs typeface="Consolas" pitchFamily="34" charset="-120"/>
+              </a:rPr>
+              <a:t> event.data.type == </a:t>
+            </a:r>
+            <a:pPr indent="0" marL="0">
+              <a:buNone/>
+            </a:pPr>
+            <a:r>
+              <a:rPr lang="en-US" sz="950" dirty="0">
+                <a:solidFill>
+                  <a:srgbClr val="E4C98A"/>
+                </a:solidFill>
+                <a:latin typeface="Consolas" pitchFamily="34" charset="0"/>
+                <a:ea typeface="Consolas" pitchFamily="34" charset="-122"/>
+                <a:cs typeface="Consolas" pitchFamily="34" charset="-120"/>
+              </a:rPr>
+              <a:t>"function_approval_request"</a:t>
+            </a:r>
+            <a:pPr indent="0" marL="0">
+              <a:buNone/>
+            </a:pPr>
+            <a:r>
+              <a:rPr lang="en-US" sz="950" dirty="0">
+                <a:solidFill>
+                  <a:srgbClr val="FFFFFF"/>
+                </a:solidFill>
+                <a:latin typeface="Consolas" pitchFamily="34" charset="0"/>
+                <a:ea typeface="Consolas" pitchFamily="34" charset="-122"/>
+                <a:cs typeface="Consolas" pitchFamily="34" charset="-120"/>
+              </a:rPr>
+              <a:t>:</a:t>
+            </a:r>
+            <a:endParaRPr lang="en-US" sz="950" dirty="0"/>
+          </a:p>
+          <a:p>
+            <a:pPr indent="0" marL="0">
+              <a:buNone/>
+            </a:pPr>
+            <a:r>
+              <a:rPr lang="en-US" sz="950" dirty="0">
+                <a:solidFill>
+                  <a:srgbClr val="FFFFFF"/>
+                </a:solidFill>
+                <a:latin typeface="Consolas" pitchFamily="34" charset="0"/>
+                <a:ea typeface="Consolas" pitchFamily="34" charset="-122"/>
+                <a:cs typeface="Consolas" pitchFamily="34" charset="-120"/>
+              </a:rPr>
+              <a:t>        responses[event.request_id] = event.data.to_function_approval_response(approved=</a:t>
+            </a:r>
+            <a:pPr indent="0" marL="0">
+              <a:buNone/>
+            </a:pPr>
+            <a:r>
+              <a:rPr lang="en-US" sz="950" dirty="0">
+                <a:solidFill>
+                  <a:srgbClr val="A996B6"/>
+                </a:solidFill>
+                <a:latin typeface="Consolas" pitchFamily="34" charset="0"/>
+                <a:ea typeface="Consolas" pitchFamily="34" charset="-122"/>
+                <a:cs typeface="Consolas" pitchFamily="34" charset="-120"/>
+              </a:rPr>
+              <a:t>True</a:t>
+            </a:r>
+            <a:pPr indent="0" marL="0">
+              <a:buNone/>
+            </a:pPr>
+            <a:r>
+              <a:rPr lang="en-US" sz="950" dirty="0">
+                <a:solidFill>
+                  <a:srgbClr val="FFFFFF"/>
+                </a:solidFill>
+                <a:latin typeface="Consolas" pitchFamily="34" charset="0"/>
+                <a:ea typeface="Consolas" pitchFamily="34" charset="-122"/>
+                <a:cs typeface="Consolas" pitchFamily="34" charset="-120"/>
+              </a:rPr>
+              <a:t>)</a:t>
+            </a:r>
+            <a:endParaRPr lang="en-US" sz="950" dirty="0"/>
+          </a:p>
+        </p:txBody>
+      </p:sp>
+      <p:sp>
+        <p:nvSpPr>
+          <p:cNvPr id="7" name="Shape 5"/>
           <p:cNvSpPr/>
           <p:nvPr/>
         </p:nvSpPr>
@@ -5168,7 +5870,7 @@
       </p:sp>
       <p:sp>
         <p:nvSpPr>
-          <p:cNvPr id="7" name="Text 5"/>
+          <p:cNvPr id="8" name="Text 6"/>
           <p:cNvSpPr/>
           <p:nvPr/>
         </p:nvSpPr>
@@ -5201,7 +5903,7 @@
                 <a:ea typeface="Calibri" pitchFamily="34" charset="-122"/>
                 <a:cs typeface="Calibri" pitchFamily="34" charset="-120"/>
               </a:rPr>
-              <a:t>Source: https://learn.microsoft.com/en-us/agent-framework/workflows/checkpoints</a:t>
+              <a:t>Source: https://learn.microsoft.com/en-us/agent-framework/workflows/human-in-the-loop</a:t>
             </a:r>
             <a:endParaRPr lang="en-US" sz="820" dirty="0"/>
           </a:p>
@@ -5335,7 +6037,7 @@
                 <a:ea typeface="Calibri" pitchFamily="34" charset="-122"/>
                 <a:cs typeface="Calibri" pitchFamily="34" charset="-120"/>
               </a:rPr>
-              <a:t>Replay: Python 1.13+</a:t>
+              <a:t>Checkpoints: save and resume</a:t>
             </a:r>
             <a:endParaRPr lang="en-US" sz="2800" dirty="0"/>
           </a:p>
@@ -5380,7 +6082,7 @@
                 <a:ea typeface="Calibri" pitchFamily="34" charset="-122"/>
                 <a:cs typeface="Calibri" pitchFamily="34" charset="-120"/>
               </a:rPr>
-              <a:t>Python workflows (1.13.0+) also create an entry checkpoint before the first superstep, recording the original input</a:t>
+              <a:t>A checkpoint is created at the end of every superstep, after all its executors finish</a:t>
             </a:r>
             <a:endParaRPr lang="en-US" sz="1600" dirty="0"/>
           </a:p>
@@ -5401,7 +6103,7 @@
                 <a:ea typeface="Calibri" pitchFamily="34" charset="-122"/>
                 <a:cs typeface="Calibri" pitchFamily="34" charset="-120"/>
               </a:rPr>
-              <a:t>Another entry checkpoint is created when responses to a request_info event are delivered</a:t>
+              <a:t>Captures: executor state, pending messages for the next superstep, pending requests and responses, and shared state</a:t>
             </a:r>
             <a:endParaRPr lang="en-US" sz="1600" dirty="0"/>
           </a:p>
@@ -5422,7 +6124,28 @@
                 <a:ea typeface="Calibri" pitchFamily="34" charset="-122"/>
                 <a:cs typeface="Calibri" pitchFamily="34" charset="-120"/>
               </a:rPr>
-              <a:t>Together, these make a complete workflow run replayable from the start — not just resumable from the last superstep</a:t>
+              <a:t>Pending human-in-the-loop requests are re-emitted as request_info events when you restore — you never lose an outstanding approval</a:t>
+            </a:r>
+            <a:endParaRPr lang="en-US" sz="1600" dirty="0"/>
+          </a:p>
+          <a:p>
+            <a:pPr marL="342900" indent="-342900">
+              <a:spcAft>
+                <a:spcPts val="1000"/>
+              </a:spcAft>
+              <a:buSzPct val="100000"/>
+              <a:buChar char="•"/>
+            </a:pPr>
+            <a:r>
+              <a:rPr lang="en-US" sz="1600" dirty="0">
+                <a:solidFill>
+                  <a:srgbClr val="212121"/>
+                </a:solidFill>
+                <a:latin typeface="Calibri" pitchFamily="34" charset="0"/>
+                <a:ea typeface="Calibri" pitchFamily="34" charset="-122"/>
+                <a:cs typeface="Calibri" pitchFamily="34" charset="-120"/>
+              </a:rPr>
+              <a:t>Use cases: long-running workflows, pause/resume across process restarts, audit/compliance snapshots, migrating a run across environments</a:t>
             </a:r>
             <a:endParaRPr lang="en-US" sz="1600" dirty="0"/>
           </a:p>
@@ -5620,7 +6343,7 @@
                 <a:ea typeface="Calibri" pitchFamily="34" charset="-122"/>
                 <a:cs typeface="Calibri" pitchFamily="34" charset="-120"/>
               </a:rPr>
-              <a:t>A note on the functional API</a:t>
+              <a:t>Replay: Python 1.13+</a:t>
             </a:r>
             <a:endParaRPr lang="en-US" sz="2800" dirty="0"/>
           </a:p>
@@ -5628,39 +6351,14 @@
       </p:sp>
       <p:sp>
         <p:nvSpPr>
-          <p:cNvPr id="5" name="Shape 3"/>
-          <p:cNvSpPr/>
-          <p:nvPr/>
-        </p:nvSpPr>
-        <p:spPr>
-          <a:xfrm>
-            <a:off x="365760" y="1078992"/>
-            <a:ext cx="4114800" cy="3493008"/>
-          </a:xfrm>
-          <a:prstGeom prst="roundRect">
-            <a:avLst/>
-          </a:prstGeom>
-          <a:solidFill>
-            <a:srgbClr val="F3F4F6"/>
-          </a:solidFill>
-          <a:ln w="11430">
-            <a:solidFill>
-              <a:srgbClr val="D1D5DB"/>
-            </a:solidFill>
-            <a:prstDash val="solid"/>
-          </a:ln>
-        </p:spPr>
-      </p:sp>
-      <p:sp>
-        <p:nvSpPr>
-          <p:cNvPr id="6" name="Text 4"/>
-          <p:cNvSpPr/>
-          <p:nvPr/>
-        </p:nvSpPr>
-        <p:spPr>
-          <a:xfrm>
-            <a:off x="566928" y="1298448"/>
-            <a:ext cx="3712464" cy="411480"/>
+          <p:cNvPr id="5" name="Text 3"/>
+          <p:cNvSpPr/>
+          <p:nvPr/>
+        </p:nvSpPr>
+        <p:spPr>
+          <a:xfrm>
+            <a:off x="502920" y="1170432"/>
+            <a:ext cx="7955280" cy="3520440"/>
           </a:xfrm>
           <a:prstGeom prst="rect">
             <a:avLst/>
@@ -5669,58 +6367,41 @@
           <a:ln/>
         </p:spPr>
         <p:txBody>
-          <a:bodyPr wrap="square" lIns="0" tIns="0" rIns="0" bIns="0" rtlCol="0" anchor="ctr">
+          <a:bodyPr wrap="square" lIns="0" tIns="0" rIns="0" bIns="0" rtlCol="0" anchor="t">
             <a:normAutofit/>
           </a:bodyPr>
           <a:lstStyle/>
           <a:p>
-            <a:pPr indent="0" marL="0">
-              <a:buNone/>
-            </a:pPr>
-            <a:r>
-              <a:rPr lang="en-US" sz="2000" b="1" dirty="0">
-                <a:solidFill>
-                  <a:srgbClr val="1E2761"/>
+            <a:pPr marL="342900" indent="-342900">
+              <a:spcAft>
+                <a:spcPts val="1000"/>
+              </a:spcAft>
+              <a:buSzPct val="100000"/>
+              <a:buChar char="•"/>
+            </a:pPr>
+            <a:r>
+              <a:rPr lang="en-US" sz="1600" dirty="0">
+                <a:solidFill>
+                  <a:srgbClr val="212121"/>
                 </a:solidFill>
                 <a:latin typeface="Calibri" pitchFamily="34" charset="0"/>
                 <a:ea typeface="Calibri" pitchFamily="34" charset="-122"/>
                 <a:cs typeface="Calibri" pitchFamily="34" charset="-120"/>
               </a:rPr>
-              <a:t>WorkflowBuilder (today's focus)</a:t>
-            </a:r>
-            <a:endParaRPr lang="en-US" sz="2000" dirty="0"/>
-          </a:p>
-        </p:txBody>
-      </p:sp>
-      <p:sp>
-        <p:nvSpPr>
-          <p:cNvPr id="7" name="Text 5"/>
-          <p:cNvSpPr/>
-          <p:nvPr/>
-        </p:nvSpPr>
-        <p:spPr>
-          <a:xfrm>
-            <a:off x="594360" y="1828800"/>
-            <a:ext cx="3639312" cy="2395728"/>
-          </a:xfrm>
-          <a:prstGeom prst="rect">
-            <a:avLst/>
-          </a:prstGeom>
-          <a:noFill/>
-          <a:ln/>
-        </p:spPr>
-        <p:txBody>
-          <a:bodyPr wrap="square" lIns="381" tIns="381" rIns="381" bIns="381" rtlCol="0" anchor="ctr">
-            <a:normAutofit/>
-          </a:bodyPr>
-          <a:lstStyle/>
+              <a:t>Python workflows (1.13.0+) also create an entry checkpoint before the first superstep, recording the original input</a:t>
+            </a:r>
+            <a:endParaRPr lang="en-US" sz="1600" dirty="0"/>
+          </a:p>
           <a:p>
             <a:pPr marL="342900" indent="-342900">
+              <a:spcAft>
+                <a:spcPts val="1000"/>
+              </a:spcAft>
               <a:buSzPct val="100000"/>
               <a:buChar char="•"/>
             </a:pPr>
             <a:r>
-              <a:rPr lang="en-US" sz="1300" dirty="0">
+              <a:rPr lang="en-US" sz="1600" dirty="0">
                 <a:solidFill>
                   <a:srgbClr val="212121"/>
                 </a:solidFill>
@@ -5728,17 +6409,20 @@
                 <a:ea typeface="Calibri" pitchFamily="34" charset="-122"/>
                 <a:cs typeface="Calibri" pitchFamily="34" charset="-120"/>
               </a:rPr>
-              <a:t>Explicit edges and conditions</a:t>
-            </a:r>
-            <a:endParaRPr lang="en-US" sz="1300" dirty="0"/>
+              <a:t>Another entry checkpoint is created when responses to a request_info event are delivered</a:t>
+            </a:r>
+            <a:endParaRPr lang="en-US" sz="1600" dirty="0"/>
           </a:p>
           <a:p>
             <a:pPr marL="342900" indent="-342900">
+              <a:spcAft>
+                <a:spcPts val="1000"/>
+              </a:spcAft>
               <a:buSzPct val="100000"/>
               <a:buChar char="•"/>
             </a:pPr>
             <a:r>
-              <a:rPr lang="en-US" sz="1300" dirty="0">
+              <a:rPr lang="en-US" sz="1600" dirty="0">
                 <a:solidFill>
                   <a:srgbClr val="212121"/>
                 </a:solidFill>
@@ -5746,177 +6430,15 @@
                 <a:ea typeface="Calibri" pitchFamily="34" charset="-122"/>
                 <a:cs typeface="Calibri" pitchFamily="34" charset="-120"/>
               </a:rPr>
-              <a:t>Fixed graphs, fan-out/fan-in, type-validated routing</a:t>
-            </a:r>
-            <a:endParaRPr lang="en-US" sz="1300" dirty="0"/>
-          </a:p>
-          <a:p>
-            <a:pPr marL="342900" indent="-342900">
-              <a:buSzPct val="100000"/>
-              <a:buChar char="•"/>
-            </a:pPr>
-            <a:r>
-              <a:rPr lang="en-US" sz="1300" dirty="0">
-                <a:solidFill>
-                  <a:srgbClr val="212121"/>
-                </a:solidFill>
-                <a:latin typeface="Calibri" pitchFamily="34" charset="0"/>
-                <a:ea typeface="Calibri" pitchFamily="34" charset="-122"/>
-                <a:cs typeface="Calibri" pitchFamily="34" charset="-120"/>
-              </a:rPr>
-              <a:t>Available in Python, C#, and Go</a:t>
-            </a:r>
-            <a:endParaRPr lang="en-US" sz="1300" dirty="0"/>
-          </a:p>
-        </p:txBody>
-      </p:sp>
-      <p:sp>
-        <p:nvSpPr>
-          <p:cNvPr id="8" name="Shape 6"/>
-          <p:cNvSpPr/>
-          <p:nvPr/>
-        </p:nvSpPr>
-        <p:spPr>
-          <a:xfrm>
-            <a:off x="4663440" y="1078992"/>
-            <a:ext cx="4114800" cy="3493008"/>
-          </a:xfrm>
-          <a:prstGeom prst="roundRect">
-            <a:avLst/>
-          </a:prstGeom>
-          <a:solidFill>
-            <a:srgbClr val="CADCFC"/>
-          </a:solidFill>
-          <a:ln w="11430">
-            <a:solidFill>
-              <a:srgbClr val="1E2761"/>
-            </a:solidFill>
-            <a:prstDash val="solid"/>
-          </a:ln>
-        </p:spPr>
-      </p:sp>
-      <p:sp>
-        <p:nvSpPr>
-          <p:cNvPr id="9" name="Text 7"/>
-          <p:cNvSpPr/>
-          <p:nvPr/>
-        </p:nvSpPr>
-        <p:spPr>
-          <a:xfrm>
-            <a:off x="4864608" y="1298448"/>
-            <a:ext cx="3712464" cy="411480"/>
-          </a:xfrm>
-          <a:prstGeom prst="rect">
-            <a:avLst/>
-          </a:prstGeom>
-          <a:noFill/>
-          <a:ln/>
-        </p:spPr>
-        <p:txBody>
-          <a:bodyPr wrap="square" lIns="0" tIns="0" rIns="0" bIns="0" rtlCol="0" anchor="ctr">
-            <a:normAutofit/>
-          </a:bodyPr>
-          <a:lstStyle/>
-          <a:p>
-            <a:pPr indent="0" marL="0">
-              <a:buNone/>
-            </a:pPr>
-            <a:r>
-              <a:rPr lang="en-US" sz="2000" b="1" dirty="0">
-                <a:solidFill>
-                  <a:srgbClr val="1E2761"/>
-                </a:solidFill>
-                <a:latin typeface="Calibri" pitchFamily="34" charset="0"/>
-                <a:ea typeface="Calibri" pitchFamily="34" charset="-122"/>
-                <a:cs typeface="Calibri" pitchFamily="34" charset="-120"/>
-              </a:rPr>
-              <a:t>@workflow — Python only, EXPERIMENTAL</a:t>
-            </a:r>
-            <a:endParaRPr lang="en-US" sz="2000" dirty="0"/>
-          </a:p>
-        </p:txBody>
-      </p:sp>
-      <p:sp>
-        <p:nvSpPr>
-          <p:cNvPr id="10" name="Text 8"/>
-          <p:cNvSpPr/>
-          <p:nvPr/>
-        </p:nvSpPr>
-        <p:spPr>
-          <a:xfrm>
-            <a:off x="4892040" y="1828800"/>
-            <a:ext cx="3639312" cy="2395728"/>
-          </a:xfrm>
-          <a:prstGeom prst="rect">
-            <a:avLst/>
-          </a:prstGeom>
-          <a:noFill/>
-          <a:ln/>
-        </p:spPr>
-        <p:txBody>
-          <a:bodyPr wrap="square" lIns="381" tIns="381" rIns="381" bIns="381" rtlCol="0" anchor="ctr">
-            <a:normAutofit/>
-          </a:bodyPr>
-          <a:lstStyle/>
-          <a:p>
-            <a:pPr marL="342900" indent="-342900">
-              <a:buSzPct val="100000"/>
-              <a:buChar char="•"/>
-            </a:pPr>
-            <a:r>
-              <a:rPr lang="en-US" sz="1300" dirty="0">
-                <a:solidFill>
-                  <a:srgbClr val="212121"/>
-                </a:solidFill>
-                <a:latin typeface="Calibri" pitchFamily="34" charset="0"/>
-                <a:ea typeface="Calibri" pitchFamily="34" charset="-122"/>
-                <a:cs typeface="Calibri" pitchFamily="34" charset="-120"/>
-              </a:rPr>
-              <a:t>Native Python control flow: if, while, asyncio.gather</a:t>
-            </a:r>
-            <a:endParaRPr lang="en-US" sz="1300" dirty="0"/>
-          </a:p>
-          <a:p>
-            <a:pPr marL="342900" indent="-342900">
-              <a:buSzPct val="100000"/>
-              <a:buChar char="•"/>
-            </a:pPr>
-            <a:r>
-              <a:rPr lang="en-US" sz="1300" dirty="0">
-                <a:solidFill>
-                  <a:srgbClr val="212121"/>
-                </a:solidFill>
-                <a:latin typeface="Calibri" pitchFamily="34" charset="0"/>
-                <a:ea typeface="Calibri" pitchFamily="34" charset="-122"/>
-                <a:cs typeface="Calibri" pitchFamily="34" charset="-120"/>
-              </a:rPr>
-              <a:t>Could simplify a custom revision loop to a plain while — worth revisiting once it's no longer experimental</a:t>
-            </a:r>
-            <a:endParaRPr lang="en-US" sz="1300" dirty="0"/>
-          </a:p>
-          <a:p>
-            <a:pPr marL="342900" indent="-342900">
-              <a:buSzPct val="100000"/>
-              <a:buChar char="•"/>
-            </a:pPr>
-            <a:r>
-              <a:rPr lang="en-US" sz="1300" dirty="0">
-                <a:solidFill>
-                  <a:srgbClr val="212121"/>
-                </a:solidFill>
-                <a:latin typeface="Calibri" pitchFamily="34" charset="0"/>
-                <a:ea typeface="Calibri" pitchFamily="34" charset="-122"/>
-                <a:cs typeface="Calibri" pitchFamily="34" charset="-120"/>
-              </a:rPr>
-              <a:t>Not used for today's lab while it remains experimental</a:t>
-            </a:r>
-            <a:endParaRPr lang="en-US" sz="1300" dirty="0"/>
-          </a:p>
-        </p:txBody>
-      </p:sp>
-      <p:sp>
-        <p:nvSpPr>
-          <p:cNvPr id="11" name="Shape 9"/>
+              <a:t>Together, these make a complete workflow run replayable from the start — not just resumable from the last superstep</a:t>
+            </a:r>
+            <a:endParaRPr lang="en-US" sz="1600" dirty="0"/>
+          </a:p>
+        </p:txBody>
+      </p:sp>
+      <p:sp>
+        <p:nvSpPr>
+          <p:cNvPr id="6" name="Shape 4"/>
           <p:cNvSpPr/>
           <p:nvPr/>
         </p:nvSpPr>
@@ -5939,7 +6461,7 @@
       </p:sp>
       <p:sp>
         <p:nvSpPr>
-          <p:cNvPr id="12" name="Text 10"/>
+          <p:cNvPr id="7" name="Text 5"/>
           <p:cNvSpPr/>
           <p:nvPr/>
         </p:nvSpPr>
@@ -5972,7 +6494,7 @@
                 <a:ea typeface="Calibri" pitchFamily="34" charset="-122"/>
                 <a:cs typeface="Calibri" pitchFamily="34" charset="-120"/>
               </a:rPr>
-              <a:t>Source: https://learn.microsoft.com/en-us/agent-framework/concepts/workflows/</a:t>
+              <a:t>Source: https://learn.microsoft.com/en-us/agent-framework/workflows/checkpoints</a:t>
             </a:r>
             <a:endParaRPr lang="en-US" sz="820" dirty="0"/>
           </a:p>
@@ -6098,7 +6620,7 @@
               <a:buNone/>
             </a:pPr>
             <a:r>
-              <a:rPr lang="en-US" sz="2500" b="1" dirty="0">
+              <a:rPr lang="en-US" sz="2800" b="1" dirty="0">
                 <a:solidFill>
                   <a:srgbClr val="1E2761"/>
                 </a:solidFill>
@@ -6106,9 +6628,9 @@
                 <a:ea typeface="Calibri" pitchFamily="34" charset="-122"/>
                 <a:cs typeface="Calibri" pitchFamily="34" charset="-120"/>
               </a:rPr>
-              <a:t>A YAML alternative: declarative workflows</a:t>
-            </a:r>
-            <a:endParaRPr lang="en-US" sz="2500" dirty="0"/>
+              <a:t>A note on the functional API</a:t>
+            </a:r>
+            <a:endParaRPr lang="en-US" sz="2800" dirty="0"/>
           </a:p>
         </p:txBody>
       </p:sp>
@@ -6172,7 +6694,7 @@
                 <a:ea typeface="Calibri" pitchFamily="34" charset="-122"/>
                 <a:cs typeface="Calibri" pitchFamily="34" charset="-120"/>
               </a:rPr>
-              <a:t>Programmatic (today's focus)</a:t>
+              <a:t>WorkflowBuilder (today's focus)</a:t>
             </a:r>
             <a:endParaRPr lang="en-US" sz="2000" dirty="0"/>
           </a:p>
@@ -6214,7 +6736,7 @@
                 <a:ea typeface="Calibri" pitchFamily="34" charset="-122"/>
                 <a:cs typeface="Calibri" pitchFamily="34" charset="-120"/>
               </a:rPr>
-              <a:t>WorkflowBuilder in Python, C#, or Go</a:t>
+              <a:t>Explicit edges and conditions</a:t>
             </a:r>
             <a:endParaRPr lang="en-US" sz="1300" dirty="0"/>
           </a:p>
@@ -6232,7 +6754,7 @@
                 <a:ea typeface="Calibri" pitchFamily="34" charset="-122"/>
                 <a:cs typeface="Calibri" pitchFamily="34" charset="-120"/>
               </a:rPr>
-              <a:t>Maximum flexibility; integrates directly with existing code</a:t>
+              <a:t>Fixed graphs, fan-out/fan-in, type-validated routing</a:t>
             </a:r>
             <a:endParaRPr lang="en-US" sz="1300" dirty="0"/>
           </a:p>
@@ -6250,7 +6772,7 @@
                 <a:ea typeface="Calibri" pitchFamily="34" charset="-122"/>
                 <a:cs typeface="Calibri" pitchFamily="34" charset="-120"/>
               </a:rPr>
-              <a:t>What today's lab is built on</a:t>
+              <a:t>Available in Python, C#, and Go</a:t>
             </a:r>
             <a:endParaRPr lang="en-US" sz="1300" dirty="0"/>
           </a:p>
@@ -6316,7 +6838,7 @@
                 <a:ea typeface="Calibri" pitchFamily="34" charset="-122"/>
                 <a:cs typeface="Calibri" pitchFamily="34" charset="-120"/>
               </a:rPr>
-              <a:t>Declarative — OUT OF SCOPE THIS WEEK</a:t>
+              <a:t>@workflow — Python only, EXPERIMENTAL</a:t>
             </a:r>
             <a:endParaRPr lang="en-US" sz="2000" dirty="0"/>
           </a:p>
@@ -6358,7 +6880,7 @@
                 <a:ea typeface="Calibri" pitchFamily="34" charset="-122"/>
                 <a:cs typeface="Calibri" pitchFamily="34" charset="-120"/>
               </a:rPr>
-              <a:t>Define the graph in YAML instead of code</a:t>
+              <a:t>Native Python control flow: if, while, asyncio.gather</a:t>
             </a:r>
             <a:endParaRPr lang="en-US" sz="1300" dirty="0"/>
           </a:p>
@@ -6376,7 +6898,7 @@
                 <a:ea typeface="Calibri" pitchFamily="34" charset="-122"/>
                 <a:cs typeface="Calibri" pitchFamily="34" charset="-120"/>
               </a:rPr>
-              <a:t>Docs' own guidance: prefer it for standard patterns, frequently-changing workflows, or non-developer maintainers</a:t>
+              <a:t>Could simplify a custom revision loop to a plain while — worth revisiting once it's no longer experimental</a:t>
             </a:r>
             <a:endParaRPr lang="en-US" sz="1300" dirty="0"/>
           </a:p>
@@ -6394,7 +6916,7 @@
                 <a:ea typeface="Calibri" pitchFamily="34" charset="-122"/>
                 <a:cs typeface="Calibri" pitchFamily="34" charset="-120"/>
               </a:rPr>
-              <a:t>Real and documented — just not this workshop's focus, since the week is code-first</a:t>
+              <a:t>Not used for today's lab while it remains experimental</a:t>
             </a:r>
             <a:endParaRPr lang="en-US" sz="1300" dirty="0"/>
           </a:p>
@@ -6458,7 +6980,7 @@
                 <a:ea typeface="Calibri" pitchFamily="34" charset="-122"/>
                 <a:cs typeface="Calibri" pitchFamily="34" charset="-120"/>
               </a:rPr>
-              <a:t>Source: https://learn.microsoft.com/en-us/agent-framework/workflows/declarative</a:t>
+              <a:t>Source: https://learn.microsoft.com/en-us/agent-framework/concepts/workflows/</a:t>
             </a:r>
             <a:endParaRPr lang="en-US" sz="820" dirty="0"/>
           </a:p>
@@ -6475,6 +6997,492 @@
 <file path=ppt/slides/slide18.xml><?xml version="1.0" encoding="utf-8"?>
 <p:sld xmlns:a="http://schemas.openxmlformats.org/drawingml/2006/main" xmlns:r="http://schemas.openxmlformats.org/officeDocument/2006/relationships" xmlns:p="http://schemas.openxmlformats.org/presentationml/2006/main">
   <p:cSld name="Slide 18">
+    <p:bg>
+      <p:bgPr>
+        <a:solidFill>
+          <a:srgbClr val="FFFFFF"/>
+        </a:solidFill>
+      </p:bgPr>
+    </p:bg>
+    <p:spTree>
+      <p:nvGrpSpPr>
+        <p:cNvPr id="1" name=""/>
+        <p:cNvGrpSpPr/>
+        <p:nvPr/>
+      </p:nvGrpSpPr>
+      <p:grpSpPr>
+        <a:xfrm>
+          <a:off x="0" y="0"/>
+          <a:ext cx="0" cy="0"/>
+          <a:chOff x="0" y="0"/>
+          <a:chExt cx="0" cy="0"/>
+        </a:xfrm>
+      </p:grpSpPr>
+      <p:sp>
+        <p:nvSpPr>
+          <p:cNvPr id="2" name="Shape 0"/>
+          <p:cNvSpPr/>
+          <p:nvPr/>
+        </p:nvSpPr>
+        <p:spPr>
+          <a:xfrm>
+            <a:off x="0" y="0"/>
+            <a:ext cx="54864" cy="5143500"/>
+          </a:xfrm>
+          <a:prstGeom prst="rect">
+            <a:avLst/>
+          </a:prstGeom>
+          <a:solidFill>
+            <a:srgbClr val="1E2761"/>
+          </a:solidFill>
+          <a:ln/>
+        </p:spPr>
+      </p:sp>
+      <p:sp>
+        <p:nvSpPr>
+          <p:cNvPr id="3" name="Text 1"/>
+          <p:cNvSpPr/>
+          <p:nvPr/>
+        </p:nvSpPr>
+        <p:spPr>
+          <a:xfrm>
+            <a:off x="5486400" y="256032"/>
+            <a:ext cx="3337560" cy="228600"/>
+          </a:xfrm>
+          <a:prstGeom prst="rect">
+            <a:avLst/>
+          </a:prstGeom>
+          <a:noFill/>
+          <a:ln/>
+        </p:spPr>
+        <p:txBody>
+          <a:bodyPr wrap="square" lIns="0" tIns="0" rIns="0" bIns="0" rtlCol="0" anchor="ctr">
+            <a:normAutofit/>
+          </a:bodyPr>
+          <a:lstStyle/>
+          <a:p>
+            <a:pPr algn="r" indent="0" marL="0">
+              <a:buNone/>
+            </a:pPr>
+            <a:r>
+              <a:rPr lang="en-US" sz="950" dirty="0">
+                <a:solidFill>
+                  <a:srgbClr val="6B7280"/>
+                </a:solidFill>
+                <a:latin typeface="Calibri" pitchFamily="34" charset="0"/>
+                <a:ea typeface="Calibri" pitchFamily="34" charset="-122"/>
+                <a:cs typeface="Calibri" pitchFamily="34" charset="-120"/>
+              </a:rPr>
+              <a:t>Day 4 · Module 3</a:t>
+            </a:r>
+            <a:endParaRPr lang="en-US" sz="950" dirty="0"/>
+          </a:p>
+        </p:txBody>
+      </p:sp>
+      <p:sp>
+        <p:nvSpPr>
+          <p:cNvPr id="4" name="Text 2"/>
+          <p:cNvSpPr/>
+          <p:nvPr/>
+        </p:nvSpPr>
+        <p:spPr>
+          <a:xfrm>
+            <a:off x="365760" y="310896"/>
+            <a:ext cx="6583680" cy="603504"/>
+          </a:xfrm>
+          <a:prstGeom prst="rect">
+            <a:avLst/>
+          </a:prstGeom>
+          <a:noFill/>
+          <a:ln/>
+        </p:spPr>
+        <p:txBody>
+          <a:bodyPr wrap="square" lIns="0" tIns="0" rIns="0" bIns="0" rtlCol="0" anchor="ctr">
+            <a:normAutofit/>
+          </a:bodyPr>
+          <a:lstStyle/>
+          <a:p>
+            <a:pPr indent="0" marL="0">
+              <a:buNone/>
+            </a:pPr>
+            <a:r>
+              <a:rPr lang="en-US" sz="2500" b="1" dirty="0">
+                <a:solidFill>
+                  <a:srgbClr val="1E2761"/>
+                </a:solidFill>
+                <a:latin typeface="Calibri" pitchFamily="34" charset="0"/>
+                <a:ea typeface="Calibri" pitchFamily="34" charset="-122"/>
+                <a:cs typeface="Calibri" pitchFamily="34" charset="-120"/>
+              </a:rPr>
+              <a:t>A YAML alternative: declarative workflows</a:t>
+            </a:r>
+            <a:endParaRPr lang="en-US" sz="2500" dirty="0"/>
+          </a:p>
+        </p:txBody>
+      </p:sp>
+      <p:sp>
+        <p:nvSpPr>
+          <p:cNvPr id="5" name="Shape 3"/>
+          <p:cNvSpPr/>
+          <p:nvPr/>
+        </p:nvSpPr>
+        <p:spPr>
+          <a:xfrm>
+            <a:off x="365760" y="1078992"/>
+            <a:ext cx="4114800" cy="3493008"/>
+          </a:xfrm>
+          <a:prstGeom prst="roundRect">
+            <a:avLst/>
+          </a:prstGeom>
+          <a:solidFill>
+            <a:srgbClr val="F3F4F6"/>
+          </a:solidFill>
+          <a:ln w="11430">
+            <a:solidFill>
+              <a:srgbClr val="D1D5DB"/>
+            </a:solidFill>
+            <a:prstDash val="solid"/>
+          </a:ln>
+        </p:spPr>
+      </p:sp>
+      <p:sp>
+        <p:nvSpPr>
+          <p:cNvPr id="6" name="Text 4"/>
+          <p:cNvSpPr/>
+          <p:nvPr/>
+        </p:nvSpPr>
+        <p:spPr>
+          <a:xfrm>
+            <a:off x="566928" y="1298448"/>
+            <a:ext cx="3712464" cy="411480"/>
+          </a:xfrm>
+          <a:prstGeom prst="rect">
+            <a:avLst/>
+          </a:prstGeom>
+          <a:noFill/>
+          <a:ln/>
+        </p:spPr>
+        <p:txBody>
+          <a:bodyPr wrap="square" lIns="0" tIns="0" rIns="0" bIns="0" rtlCol="0" anchor="ctr">
+            <a:normAutofit/>
+          </a:bodyPr>
+          <a:lstStyle/>
+          <a:p>
+            <a:pPr indent="0" marL="0">
+              <a:buNone/>
+            </a:pPr>
+            <a:r>
+              <a:rPr lang="en-US" sz="2000" b="1" dirty="0">
+                <a:solidFill>
+                  <a:srgbClr val="1E2761"/>
+                </a:solidFill>
+                <a:latin typeface="Calibri" pitchFamily="34" charset="0"/>
+                <a:ea typeface="Calibri" pitchFamily="34" charset="-122"/>
+                <a:cs typeface="Calibri" pitchFamily="34" charset="-120"/>
+              </a:rPr>
+              <a:t>Programmatic (today's focus)</a:t>
+            </a:r>
+            <a:endParaRPr lang="en-US" sz="2000" dirty="0"/>
+          </a:p>
+        </p:txBody>
+      </p:sp>
+      <p:sp>
+        <p:nvSpPr>
+          <p:cNvPr id="7" name="Text 5"/>
+          <p:cNvSpPr/>
+          <p:nvPr/>
+        </p:nvSpPr>
+        <p:spPr>
+          <a:xfrm>
+            <a:off x="594360" y="1828800"/>
+            <a:ext cx="3639312" cy="2395728"/>
+          </a:xfrm>
+          <a:prstGeom prst="rect">
+            <a:avLst/>
+          </a:prstGeom>
+          <a:noFill/>
+          <a:ln/>
+        </p:spPr>
+        <p:txBody>
+          <a:bodyPr wrap="square" lIns="381" tIns="381" rIns="381" bIns="381" rtlCol="0" anchor="ctr">
+            <a:normAutofit/>
+          </a:bodyPr>
+          <a:lstStyle/>
+          <a:p>
+            <a:pPr marL="342900" indent="-342900">
+              <a:buSzPct val="100000"/>
+              <a:buChar char="•"/>
+            </a:pPr>
+            <a:r>
+              <a:rPr lang="en-US" sz="1300" dirty="0">
+                <a:solidFill>
+                  <a:srgbClr val="212121"/>
+                </a:solidFill>
+                <a:latin typeface="Calibri" pitchFamily="34" charset="0"/>
+                <a:ea typeface="Calibri" pitchFamily="34" charset="-122"/>
+                <a:cs typeface="Calibri" pitchFamily="34" charset="-120"/>
+              </a:rPr>
+              <a:t>WorkflowBuilder in Python, C#, or Go</a:t>
+            </a:r>
+            <a:endParaRPr lang="en-US" sz="1300" dirty="0"/>
+          </a:p>
+          <a:p>
+            <a:pPr marL="342900" indent="-342900">
+              <a:buSzPct val="100000"/>
+              <a:buChar char="•"/>
+            </a:pPr>
+            <a:r>
+              <a:rPr lang="en-US" sz="1300" dirty="0">
+                <a:solidFill>
+                  <a:srgbClr val="212121"/>
+                </a:solidFill>
+                <a:latin typeface="Calibri" pitchFamily="34" charset="0"/>
+                <a:ea typeface="Calibri" pitchFamily="34" charset="-122"/>
+                <a:cs typeface="Calibri" pitchFamily="34" charset="-120"/>
+              </a:rPr>
+              <a:t>Maximum flexibility; integrates directly with existing code</a:t>
+            </a:r>
+            <a:endParaRPr lang="en-US" sz="1300" dirty="0"/>
+          </a:p>
+          <a:p>
+            <a:pPr marL="342900" indent="-342900">
+              <a:buSzPct val="100000"/>
+              <a:buChar char="•"/>
+            </a:pPr>
+            <a:r>
+              <a:rPr lang="en-US" sz="1300" dirty="0">
+                <a:solidFill>
+                  <a:srgbClr val="212121"/>
+                </a:solidFill>
+                <a:latin typeface="Calibri" pitchFamily="34" charset="0"/>
+                <a:ea typeface="Calibri" pitchFamily="34" charset="-122"/>
+                <a:cs typeface="Calibri" pitchFamily="34" charset="-120"/>
+              </a:rPr>
+              <a:t>What today's lab is built on</a:t>
+            </a:r>
+            <a:endParaRPr lang="en-US" sz="1300" dirty="0"/>
+          </a:p>
+        </p:txBody>
+      </p:sp>
+      <p:sp>
+        <p:nvSpPr>
+          <p:cNvPr id="8" name="Shape 6"/>
+          <p:cNvSpPr/>
+          <p:nvPr/>
+        </p:nvSpPr>
+        <p:spPr>
+          <a:xfrm>
+            <a:off x="4663440" y="1078992"/>
+            <a:ext cx="4114800" cy="3493008"/>
+          </a:xfrm>
+          <a:prstGeom prst="roundRect">
+            <a:avLst/>
+          </a:prstGeom>
+          <a:solidFill>
+            <a:srgbClr val="CADCFC"/>
+          </a:solidFill>
+          <a:ln w="11430">
+            <a:solidFill>
+              <a:srgbClr val="1E2761"/>
+            </a:solidFill>
+            <a:prstDash val="solid"/>
+          </a:ln>
+        </p:spPr>
+      </p:sp>
+      <p:sp>
+        <p:nvSpPr>
+          <p:cNvPr id="9" name="Text 7"/>
+          <p:cNvSpPr/>
+          <p:nvPr/>
+        </p:nvSpPr>
+        <p:spPr>
+          <a:xfrm>
+            <a:off x="4864608" y="1298448"/>
+            <a:ext cx="3712464" cy="411480"/>
+          </a:xfrm>
+          <a:prstGeom prst="rect">
+            <a:avLst/>
+          </a:prstGeom>
+          <a:noFill/>
+          <a:ln/>
+        </p:spPr>
+        <p:txBody>
+          <a:bodyPr wrap="square" lIns="0" tIns="0" rIns="0" bIns="0" rtlCol="0" anchor="ctr">
+            <a:normAutofit/>
+          </a:bodyPr>
+          <a:lstStyle/>
+          <a:p>
+            <a:pPr indent="0" marL="0">
+              <a:buNone/>
+            </a:pPr>
+            <a:r>
+              <a:rPr lang="en-US" sz="2000" b="1" dirty="0">
+                <a:solidFill>
+                  <a:srgbClr val="1E2761"/>
+                </a:solidFill>
+                <a:latin typeface="Calibri" pitchFamily="34" charset="0"/>
+                <a:ea typeface="Calibri" pitchFamily="34" charset="-122"/>
+                <a:cs typeface="Calibri" pitchFamily="34" charset="-120"/>
+              </a:rPr>
+              <a:t>Declarative — OUT OF SCOPE THIS WEEK</a:t>
+            </a:r>
+            <a:endParaRPr lang="en-US" sz="2000" dirty="0"/>
+          </a:p>
+        </p:txBody>
+      </p:sp>
+      <p:sp>
+        <p:nvSpPr>
+          <p:cNvPr id="10" name="Text 8"/>
+          <p:cNvSpPr/>
+          <p:nvPr/>
+        </p:nvSpPr>
+        <p:spPr>
+          <a:xfrm>
+            <a:off x="4892040" y="1828800"/>
+            <a:ext cx="3639312" cy="2395728"/>
+          </a:xfrm>
+          <a:prstGeom prst="rect">
+            <a:avLst/>
+          </a:prstGeom>
+          <a:noFill/>
+          <a:ln/>
+        </p:spPr>
+        <p:txBody>
+          <a:bodyPr wrap="square" lIns="381" tIns="381" rIns="381" bIns="381" rtlCol="0" anchor="ctr">
+            <a:normAutofit/>
+          </a:bodyPr>
+          <a:lstStyle/>
+          <a:p>
+            <a:pPr marL="342900" indent="-342900">
+              <a:buSzPct val="100000"/>
+              <a:buChar char="•"/>
+            </a:pPr>
+            <a:r>
+              <a:rPr lang="en-US" sz="1300" dirty="0">
+                <a:solidFill>
+                  <a:srgbClr val="212121"/>
+                </a:solidFill>
+                <a:latin typeface="Calibri" pitchFamily="34" charset="0"/>
+                <a:ea typeface="Calibri" pitchFamily="34" charset="-122"/>
+                <a:cs typeface="Calibri" pitchFamily="34" charset="-120"/>
+              </a:rPr>
+              <a:t>Define the graph in YAML instead of code</a:t>
+            </a:r>
+            <a:endParaRPr lang="en-US" sz="1300" dirty="0"/>
+          </a:p>
+          <a:p>
+            <a:pPr marL="342900" indent="-342900">
+              <a:buSzPct val="100000"/>
+              <a:buChar char="•"/>
+            </a:pPr>
+            <a:r>
+              <a:rPr lang="en-US" sz="1300" dirty="0">
+                <a:solidFill>
+                  <a:srgbClr val="212121"/>
+                </a:solidFill>
+                <a:latin typeface="Calibri" pitchFamily="34" charset="0"/>
+                <a:ea typeface="Calibri" pitchFamily="34" charset="-122"/>
+                <a:cs typeface="Calibri" pitchFamily="34" charset="-120"/>
+              </a:rPr>
+              <a:t>Docs' own guidance: prefer it for standard patterns, frequently-changing workflows, or non-developer maintainers</a:t>
+            </a:r>
+            <a:endParaRPr lang="en-US" sz="1300" dirty="0"/>
+          </a:p>
+          <a:p>
+            <a:pPr marL="342900" indent="-342900">
+              <a:buSzPct val="100000"/>
+              <a:buChar char="•"/>
+            </a:pPr>
+            <a:r>
+              <a:rPr lang="en-US" sz="1300" dirty="0">
+                <a:solidFill>
+                  <a:srgbClr val="212121"/>
+                </a:solidFill>
+                <a:latin typeface="Calibri" pitchFamily="34" charset="0"/>
+                <a:ea typeface="Calibri" pitchFamily="34" charset="-122"/>
+                <a:cs typeface="Calibri" pitchFamily="34" charset="-120"/>
+              </a:rPr>
+              <a:t>Real and documented — just not this workshop's focus, since the week is code-first</a:t>
+            </a:r>
+            <a:endParaRPr lang="en-US" sz="1300" dirty="0"/>
+          </a:p>
+        </p:txBody>
+      </p:sp>
+      <p:sp>
+        <p:nvSpPr>
+          <p:cNvPr id="11" name="Shape 9"/>
+          <p:cNvSpPr/>
+          <p:nvPr/>
+        </p:nvSpPr>
+        <p:spPr>
+          <a:xfrm>
+            <a:off x="365760" y="4773168"/>
+            <a:ext cx="8412480" cy="0"/>
+          </a:xfrm>
+          <a:prstGeom prst="line">
+            <a:avLst/>
+          </a:prstGeom>
+          <a:noFill/>
+          <a:ln w="6350">
+            <a:solidFill>
+              <a:srgbClr val="D1D5DB"/>
+            </a:solidFill>
+            <a:prstDash val="solid"/>
+          </a:ln>
+        </p:spPr>
+      </p:sp>
+      <p:sp>
+        <p:nvSpPr>
+          <p:cNvPr id="12" name="Text 10"/>
+          <p:cNvSpPr/>
+          <p:nvPr/>
+        </p:nvSpPr>
+        <p:spPr>
+          <a:xfrm>
+            <a:off x="384048" y="4818888"/>
+            <a:ext cx="8275320" cy="182880"/>
+          </a:xfrm>
+          <a:prstGeom prst="rect">
+            <a:avLst/>
+          </a:prstGeom>
+          <a:noFill/>
+          <a:ln/>
+        </p:spPr>
+        <p:txBody>
+          <a:bodyPr wrap="square" lIns="0" tIns="0" rIns="0" bIns="0" rtlCol="0" anchor="ctr">
+            <a:normAutofit/>
+          </a:bodyPr>
+          <a:lstStyle/>
+          <a:p>
+            <a:pPr indent="0" marL="0">
+              <a:buNone/>
+            </a:pPr>
+            <a:r>
+              <a:rPr lang="en-US" sz="820" dirty="0">
+                <a:solidFill>
+                  <a:srgbClr val="6B7280"/>
+                </a:solidFill>
+                <a:latin typeface="Calibri" pitchFamily="34" charset="0"/>
+                <a:ea typeface="Calibri" pitchFamily="34" charset="-122"/>
+                <a:cs typeface="Calibri" pitchFamily="34" charset="-120"/>
+              </a:rPr>
+              <a:t>Source: https://learn.microsoft.com/en-us/agent-framework/workflows/declarative</a:t>
+            </a:r>
+            <a:endParaRPr lang="en-US" sz="820" dirty="0"/>
+          </a:p>
+        </p:txBody>
+      </p:sp>
+    </p:spTree>
+  </p:cSld>
+  <p:clrMapOvr>
+    <a:masterClrMapping/>
+  </p:clrMapOvr>
+</p:sld>
+</file>
+
+<file path=ppt/slides/slide19.xml><?xml version="1.0" encoding="utf-8"?>
+<p:sld xmlns:a="http://schemas.openxmlformats.org/drawingml/2006/main" xmlns:r="http://schemas.openxmlformats.org/officeDocument/2006/relationships" xmlns:p="http://schemas.openxmlformats.org/presentationml/2006/main">
+  <p:cSld name="Slide 19">
     <p:bg>
       <p:bgPr>
         <a:solidFill>
@@ -10686,7 +11694,7 @@
     <p:bg>
       <p:bgPr>
         <a:solidFill>
-          <a:srgbClr val="FFFFFF"/>
+          <a:srgbClr val="CADCFC"/>
         </a:solidFill>
       </p:bgPr>
     </p:bg>
@@ -10713,7 +11721,7 @@
         <p:spPr>
           <a:xfrm>
             <a:off x="0" y="0"/>
-            <a:ext cx="54864" cy="5143500"/>
+            <a:ext cx="146304" cy="5143500"/>
           </a:xfrm>
           <a:prstGeom prst="rect">
             <a:avLst/>
@@ -10732,8 +11740,8 @@
         </p:nvSpPr>
         <p:spPr>
           <a:xfrm>
-            <a:off x="5486400" y="256032"/>
-            <a:ext cx="3337560" cy="228600"/>
+            <a:off x="5669280" y="274320"/>
+            <a:ext cx="3291840" cy="274320"/>
           </a:xfrm>
           <a:prstGeom prst="rect">
             <a:avLst/>
@@ -10742,16 +11750,14 @@
           <a:ln/>
         </p:spPr>
         <p:txBody>
-          <a:bodyPr wrap="square" lIns="0" tIns="0" rIns="0" bIns="0" rtlCol="0" anchor="ctr">
-            <a:normAutofit/>
-          </a:bodyPr>
+          <a:bodyPr wrap="square" lIns="0" tIns="0" rIns="0" bIns="0" rtlCol="0" anchor="ctr"/>
           <a:lstStyle/>
           <a:p>
             <a:pPr algn="r" indent="0" marL="0">
               <a:buNone/>
             </a:pPr>
             <a:r>
-              <a:rPr lang="en-US" sz="950" dirty="0">
+              <a:rPr lang="en-US" sz="1000" dirty="0">
                 <a:solidFill>
                   <a:srgbClr val="6B7280"/>
                 </a:solidFill>
@@ -10759,9 +11765,9 @@
                 <a:ea typeface="Calibri" pitchFamily="34" charset="-122"/>
                 <a:cs typeface="Calibri" pitchFamily="34" charset="-120"/>
               </a:rPr>
-              <a:t>Day 4 · Module 3</a:t>
-            </a:r>
-            <a:endParaRPr lang="en-US" sz="950" dirty="0"/>
+              <a:t>Day 4 · Module 3 · Demo</a:t>
+            </a:r>
+            <a:endParaRPr lang="en-US" sz="1000" dirty="0"/>
           </a:p>
         </p:txBody>
       </p:sp>
@@ -10773,8 +11779,8 @@
         </p:nvSpPr>
         <p:spPr>
           <a:xfrm>
-            <a:off x="365760" y="310896"/>
-            <a:ext cx="6583680" cy="603504"/>
+            <a:off x="548640" y="1051560"/>
+            <a:ext cx="5486400" cy="502920"/>
           </a:xfrm>
           <a:prstGeom prst="rect">
             <a:avLst/>
@@ -10783,16 +11789,14 @@
           <a:ln/>
         </p:spPr>
         <p:txBody>
-          <a:bodyPr wrap="square" lIns="0" tIns="0" rIns="0" bIns="0" rtlCol="0" anchor="ctr">
-            <a:normAutofit/>
-          </a:bodyPr>
-          <a:lstStyle/>
-          <a:p>
-            <a:pPr indent="0" marL="0">
-              <a:buNone/>
-            </a:pPr>
-            <a:r>
-              <a:rPr lang="en-US" sz="2800" b="1" dirty="0">
+          <a:bodyPr wrap="square" lIns="0" tIns="0" rIns="0" bIns="0" rtlCol="0" anchor="ctr"/>
+          <a:lstStyle/>
+          <a:p>
+            <a:pPr indent="0" marL="0">
+              <a:buNone/>
+            </a:pPr>
+            <a:r>
+              <a:rPr lang="en-US" sz="3200" b="1" spc="800" kern="0" dirty="0">
                 <a:solidFill>
                   <a:srgbClr val="1E2761"/>
                 </a:solidFill>
@@ -10800,69 +11804,22 @@
                 <a:ea typeface="Calibri" pitchFamily="34" charset="-122"/>
                 <a:cs typeface="Calibri" pitchFamily="34" charset="-120"/>
               </a:rPr>
-              <a:t>The superstep execution model</a:t>
-            </a:r>
-            <a:endParaRPr lang="en-US" sz="2800" dirty="0"/>
-          </a:p>
-        </p:txBody>
-      </p:sp>
-      <p:sp>
-        <p:nvSpPr>
-          <p:cNvPr id="5" name="Shape 3"/>
-          <p:cNvSpPr/>
-          <p:nvPr/>
-        </p:nvSpPr>
-        <p:spPr>
-          <a:xfrm>
-            <a:off x="365760" y="1216152"/>
-            <a:ext cx="2633472" cy="1572768"/>
-          </a:xfrm>
-          <a:prstGeom prst="roundRect">
-            <a:avLst>
-              <a:gd name="adj" fmla="val 3488"/>
-            </a:avLst>
-          </a:prstGeom>
-          <a:solidFill>
-            <a:srgbClr val="CADCFC"/>
-          </a:solidFill>
-          <a:ln w="10160">
-            <a:solidFill>
-              <a:srgbClr val="1E2761"/>
-            </a:solidFill>
-            <a:prstDash val="solid"/>
-          </a:ln>
-        </p:spPr>
-      </p:sp>
-      <p:sp>
-        <p:nvSpPr>
-          <p:cNvPr id="6" name="Shape 4"/>
-          <p:cNvSpPr/>
-          <p:nvPr/>
-        </p:nvSpPr>
-        <p:spPr>
-          <a:xfrm>
-            <a:off x="475488" y="1335024"/>
-            <a:ext cx="320040" cy="320040"/>
-          </a:xfrm>
-          <a:prstGeom prst="ellipse">
-            <a:avLst/>
-          </a:prstGeom>
-          <a:solidFill>
-            <a:srgbClr val="1E2761"/>
-          </a:solidFill>
-          <a:ln/>
-        </p:spPr>
-      </p:sp>
-      <p:sp>
-        <p:nvSpPr>
-          <p:cNvPr id="7" name="Text 5"/>
-          <p:cNvSpPr/>
-          <p:nvPr/>
-        </p:nvSpPr>
-        <p:spPr>
-          <a:xfrm>
-            <a:off x="475488" y="1385316"/>
-            <a:ext cx="320040" cy="146304"/>
+              <a:t>DEMO</a:t>
+            </a:r>
+            <a:endParaRPr lang="en-US" sz="3200" dirty="0"/>
+          </a:p>
+        </p:txBody>
+      </p:sp>
+      <p:sp>
+        <p:nvSpPr>
+          <p:cNvPr id="5" name="Text 3"/>
+          <p:cNvSpPr/>
+          <p:nvPr/>
+        </p:nvSpPr>
+        <p:spPr>
+          <a:xfrm>
+            <a:off x="548640" y="1691640"/>
+            <a:ext cx="8046720" cy="914400"/>
           </a:xfrm>
           <a:prstGeom prst="rect">
             <a:avLst/>
@@ -10874,34 +11831,34 @@
           <a:bodyPr wrap="square" lIns="0" tIns="0" rIns="0" bIns="0" rtlCol="0" anchor="ctr"/>
           <a:lstStyle/>
           <a:p>
-            <a:pPr algn="ctr" indent="0" marL="0">
-              <a:buNone/>
-            </a:pPr>
-            <a:r>
-              <a:rPr lang="en-US" sz="900" b="1" dirty="0">
-                <a:solidFill>
-                  <a:srgbClr val="FFFFFF"/>
+            <a:pPr indent="0" marL="0">
+              <a:buNone/>
+            </a:pPr>
+            <a:r>
+              <a:rPr lang="en-US" sz="3000" b="1" dirty="0">
+                <a:solidFill>
+                  <a:srgbClr val="1E2761"/>
                 </a:solidFill>
                 <a:latin typeface="Calibri" pitchFamily="34" charset="0"/>
                 <a:ea typeface="Calibri" pitchFamily="34" charset="-122"/>
                 <a:cs typeface="Calibri" pitchFamily="34" charset="-120"/>
               </a:rPr>
-              <a:t>1</a:t>
-            </a:r>
-            <a:endParaRPr lang="en-US" sz="900" dirty="0"/>
-          </a:p>
-        </p:txBody>
-      </p:sp>
-      <p:sp>
-        <p:nvSpPr>
-          <p:cNvPr id="8" name="Text 6"/>
-          <p:cNvSpPr/>
-          <p:nvPr/>
-        </p:nvSpPr>
-        <p:spPr>
-          <a:xfrm>
-            <a:off x="896112" y="1335024"/>
-            <a:ext cx="1975104" cy="310896"/>
+              <a:t>Visualize the graph you're about to build yourself</a:t>
+            </a:r>
+            <a:endParaRPr lang="en-US" sz="3000" dirty="0"/>
+          </a:p>
+        </p:txBody>
+      </p:sp>
+      <p:sp>
+        <p:nvSpPr>
+          <p:cNvPr id="6" name="Text 4"/>
+          <p:cNvSpPr/>
+          <p:nvPr/>
+        </p:nvSpPr>
+        <p:spPr>
+          <a:xfrm>
+            <a:off x="6583680" y="1051560"/>
+            <a:ext cx="2194560" cy="502920"/>
           </a:xfrm>
           <a:prstGeom prst="rect">
             <a:avLst/>
@@ -10910,39 +11867,37 @@
           <a:ln/>
         </p:spPr>
         <p:txBody>
-          <a:bodyPr wrap="square" lIns="0" tIns="0" rIns="0" bIns="0" rtlCol="0" anchor="ctr">
-            <a:normAutofit/>
-          </a:bodyPr>
-          <a:lstStyle/>
-          <a:p>
-            <a:pPr indent="0" marL="0">
-              <a:buNone/>
-            </a:pPr>
-            <a:r>
-              <a:rPr lang="en-US" sz="1500" b="1" dirty="0">
-                <a:solidFill>
-                  <a:srgbClr val="1E2761"/>
+          <a:bodyPr wrap="square" lIns="0" tIns="0" rIns="0" bIns="0" rtlCol="0" anchor="ctr"/>
+          <a:lstStyle/>
+          <a:p>
+            <a:pPr algn="r" indent="0" marL="0">
+              <a:buNone/>
+            </a:pPr>
+            <a:r>
+              <a:rPr lang="en-US" sz="1800" i="1" dirty="0">
+                <a:solidFill>
+                  <a:srgbClr val="6B7280"/>
                 </a:solidFill>
                 <a:latin typeface="Calibri" pitchFamily="34" charset="0"/>
                 <a:ea typeface="Calibri" pitchFamily="34" charset="-122"/>
                 <a:cs typeface="Calibri" pitchFamily="34" charset="-120"/>
               </a:rPr>
-              <a:t>Collect</a:t>
-            </a:r>
-            <a:endParaRPr lang="en-US" sz="1500" dirty="0"/>
-          </a:p>
-        </p:txBody>
-      </p:sp>
-      <p:sp>
-        <p:nvSpPr>
-          <p:cNvPr id="9" name="Text 7"/>
-          <p:cNvSpPr/>
-          <p:nvPr/>
-        </p:nvSpPr>
-        <p:spPr>
-          <a:xfrm>
-            <a:off x="512064" y="1719072"/>
-            <a:ext cx="2340864" cy="950976"/>
+              <a:t>~5 min</a:t>
+            </a:r>
+            <a:endParaRPr lang="en-US" sz="1800" dirty="0"/>
+          </a:p>
+        </p:txBody>
+      </p:sp>
+      <p:sp>
+        <p:nvSpPr>
+          <p:cNvPr id="7" name="Text 5"/>
+          <p:cNvSpPr/>
+          <p:nvPr/>
+        </p:nvSpPr>
+        <p:spPr>
+          <a:xfrm>
+            <a:off x="548640" y="2788920"/>
+            <a:ext cx="8046720" cy="1371600"/>
           </a:xfrm>
           <a:prstGeom prst="rect">
             <a:avLst/>
@@ -10951,16 +11906,17 @@
           <a:ln/>
         </p:spPr>
         <p:txBody>
-          <a:bodyPr wrap="square" lIns="0" tIns="0" rIns="0" bIns="0" rtlCol="0" anchor="t">
-            <a:normAutofit/>
-          </a:bodyPr>
-          <a:lstStyle/>
-          <a:p>
-            <a:pPr indent="0" marL="0">
-              <a:buNone/>
-            </a:pPr>
-            <a:r>
-              <a:rPr lang="en-US" sz="1150" dirty="0">
+          <a:bodyPr wrap="square" lIns="0" tIns="0" rIns="0" bIns="0" rtlCol="0" anchor="ctr"/>
+          <a:lstStyle/>
+          <a:p>
+            <a:pPr indent="0" marL="0">
+              <a:spcAft>
+                <a:spcPts val="600"/>
+              </a:spcAft>
+              <a:buNone/>
+            </a:pPr>
+            <a:r>
+              <a:rPr lang="en-US" sz="1600" dirty="0">
                 <a:solidFill>
                   <a:srgbClr val="212121"/>
                 </a:solidFill>
@@ -10968,89 +11924,22 @@
                 <a:ea typeface="Calibri" pitchFamily="34" charset="-122"/>
                 <a:cs typeface="Calibri" pitchFamily="34" charset="-120"/>
               </a:rPr>
-              <a:t>gather all pending messages from the previous superstep</a:t>
-            </a:r>
-            <a:endParaRPr lang="en-US" sz="1150" dirty="0"/>
-          </a:p>
-        </p:txBody>
-      </p:sp>
-      <p:sp>
-        <p:nvSpPr>
-          <p:cNvPr id="10" name="Shape 8"/>
-          <p:cNvSpPr/>
-          <p:nvPr/>
-        </p:nvSpPr>
-        <p:spPr>
-          <a:xfrm>
-            <a:off x="3035808" y="1892808"/>
-            <a:ext cx="164592" cy="219456"/>
-          </a:xfrm>
-          <a:prstGeom prst="chevron">
-            <a:avLst/>
-          </a:prstGeom>
-          <a:solidFill>
-            <a:srgbClr val="E8A87C"/>
-          </a:solidFill>
-          <a:ln/>
-        </p:spPr>
-      </p:sp>
-      <p:sp>
-        <p:nvSpPr>
-          <p:cNvPr id="11" name="Shape 9"/>
-          <p:cNvSpPr/>
-          <p:nvPr/>
-        </p:nvSpPr>
-        <p:spPr>
-          <a:xfrm>
-            <a:off x="3255264" y="1216152"/>
-            <a:ext cx="2633472" cy="1572768"/>
-          </a:xfrm>
-          <a:prstGeom prst="roundRect">
-            <a:avLst>
-              <a:gd name="adj" fmla="val 3488"/>
-            </a:avLst>
-          </a:prstGeom>
-          <a:solidFill>
-            <a:srgbClr val="F3F4F6"/>
-          </a:solidFill>
-          <a:ln w="10160">
-            <a:solidFill>
-              <a:srgbClr val="D1D5DB"/>
-            </a:solidFill>
-            <a:prstDash val="solid"/>
-          </a:ln>
-        </p:spPr>
-      </p:sp>
-      <p:sp>
-        <p:nvSpPr>
-          <p:cNvPr id="12" name="Shape 10"/>
-          <p:cNvSpPr/>
-          <p:nvPr/>
-        </p:nvSpPr>
-        <p:spPr>
-          <a:xfrm>
-            <a:off x="3364992" y="1335024"/>
-            <a:ext cx="320040" cy="320040"/>
-          </a:xfrm>
-          <a:prstGeom prst="ellipse">
-            <a:avLst/>
-          </a:prstGeom>
-          <a:solidFill>
-            <a:srgbClr val="1E2761"/>
-          </a:solidFill>
-          <a:ln/>
-        </p:spPr>
-      </p:sp>
-      <p:sp>
-        <p:nvSpPr>
-          <p:cNvPr id="13" name="Text 11"/>
-          <p:cNvSpPr/>
-          <p:nvPr/>
-        </p:nvSpPr>
-        <p:spPr>
-          <a:xfrm>
-            <a:off x="3364992" y="1385316"/>
-            <a:ext cx="320040" cy="146304"/>
+              <a:t>Render the EXACT three-executor, conditional-loop graph attendees are about to build by hand this afternoon — Planner → Retriever → Critic, with a conditional edge back to the Planner when the Critic doesn't approve. Paste the printed Mermaid into mermaid.live live, then optionally run it for real on a question that usually needs a revision pass, so the loop-back edge fires in an actual trace, not just on the diagram.</a:t>
+            </a:r>
+            <a:endParaRPr lang="en-US" sz="1600" dirty="0"/>
+          </a:p>
+        </p:txBody>
+      </p:sp>
+      <p:sp>
+        <p:nvSpPr>
+          <p:cNvPr id="8" name="Text 6"/>
+          <p:cNvSpPr/>
+          <p:nvPr/>
+        </p:nvSpPr>
+        <p:spPr>
+          <a:xfrm>
+            <a:off x="548640" y="4434840"/>
+            <a:ext cx="8046720" cy="320040"/>
           </a:xfrm>
           <a:prstGeom prst="rect">
             <a:avLst/>
@@ -11062,653 +11951,27 @@
           <a:bodyPr wrap="square" lIns="0" tIns="0" rIns="0" bIns="0" rtlCol="0" anchor="ctr"/>
           <a:lstStyle/>
           <a:p>
-            <a:pPr algn="ctr" indent="0" marL="0">
-              <a:buNone/>
-            </a:pPr>
-            <a:r>
-              <a:rPr lang="en-US" sz="900" b="1" dirty="0">
-                <a:solidFill>
-                  <a:srgbClr val="FFFFFF"/>
+            <a:pPr indent="0" marL="0">
+              <a:buNone/>
+            </a:pPr>
+            <a:r>
+              <a:rPr lang="en-US" sz="1100" i="1" dirty="0">
+                <a:solidFill>
+                  <a:srgbClr val="6B7280"/>
                 </a:solidFill>
                 <a:latin typeface="Calibri" pitchFamily="34" charset="0"/>
                 <a:ea typeface="Calibri" pitchFamily="34" charset="-122"/>
                 <a:cs typeface="Calibri" pitchFamily="34" charset="-120"/>
               </a:rPr>
-              <a:t>2</a:t>
-            </a:r>
-            <a:endParaRPr lang="en-US" sz="900" dirty="0"/>
-          </a:p>
-        </p:txBody>
-      </p:sp>
-      <p:sp>
-        <p:nvSpPr>
-          <p:cNvPr id="14" name="Text 12"/>
-          <p:cNvSpPr/>
-          <p:nvPr/>
-        </p:nvSpPr>
-        <p:spPr>
-          <a:xfrm>
-            <a:off x="3785616" y="1335024"/>
-            <a:ext cx="1975104" cy="310896"/>
-          </a:xfrm>
-          <a:prstGeom prst="rect">
-            <a:avLst/>
-          </a:prstGeom>
-          <a:noFill/>
-          <a:ln/>
-        </p:spPr>
-        <p:txBody>
-          <a:bodyPr wrap="square" lIns="0" tIns="0" rIns="0" bIns="0" rtlCol="0" anchor="ctr">
-            <a:normAutofit/>
-          </a:bodyPr>
-          <a:lstStyle/>
-          <a:p>
-            <a:pPr indent="0" marL="0">
-              <a:buNone/>
-            </a:pPr>
-            <a:r>
-              <a:rPr lang="en-US" sz="1500" b="1" dirty="0">
-                <a:solidFill>
-                  <a:srgbClr val="1E2761"/>
-                </a:solidFill>
-                <a:latin typeface="Calibri" pitchFamily="34" charset="0"/>
-                <a:ea typeface="Calibri" pitchFamily="34" charset="-122"/>
-                <a:cs typeface="Calibri" pitchFamily="34" charset="-120"/>
-              </a:rPr>
-              <a:t>Route</a:t>
-            </a:r>
-            <a:endParaRPr lang="en-US" sz="1500" dirty="0"/>
-          </a:p>
-        </p:txBody>
-      </p:sp>
-      <p:sp>
-        <p:nvSpPr>
-          <p:cNvPr id="15" name="Text 13"/>
-          <p:cNvSpPr/>
-          <p:nvPr/>
-        </p:nvSpPr>
-        <p:spPr>
-          <a:xfrm>
-            <a:off x="3401568" y="1719072"/>
-            <a:ext cx="2340864" cy="950976"/>
-          </a:xfrm>
-          <a:prstGeom prst="rect">
-            <a:avLst/>
-          </a:prstGeom>
-          <a:noFill/>
-          <a:ln/>
-        </p:spPr>
-        <p:txBody>
-          <a:bodyPr wrap="square" lIns="0" tIns="0" rIns="0" bIns="0" rtlCol="0" anchor="t">
-            <a:normAutofit/>
-          </a:bodyPr>
-          <a:lstStyle/>
-          <a:p>
-            <a:pPr indent="0" marL="0">
-              <a:buNone/>
-            </a:pPr>
-            <a:r>
-              <a:rPr lang="en-US" sz="1150" dirty="0">
-                <a:solidFill>
-                  <a:srgbClr val="212121"/>
-                </a:solidFill>
-                <a:latin typeface="Calibri" pitchFamily="34" charset="0"/>
-                <a:ea typeface="Calibri" pitchFamily="34" charset="-122"/>
-                <a:cs typeface="Calibri" pitchFamily="34" charset="-120"/>
-              </a:rPr>
-              <a:t>dispatch messages to target executors based on edges and conditions</a:t>
-            </a:r>
-            <a:endParaRPr lang="en-US" sz="1150" dirty="0"/>
-          </a:p>
-        </p:txBody>
-      </p:sp>
-      <p:sp>
-        <p:nvSpPr>
-          <p:cNvPr id="16" name="Shape 14"/>
-          <p:cNvSpPr/>
-          <p:nvPr/>
-        </p:nvSpPr>
-        <p:spPr>
-          <a:xfrm>
-            <a:off x="5925312" y="1892808"/>
-            <a:ext cx="164592" cy="219456"/>
-          </a:xfrm>
-          <a:prstGeom prst="chevron">
-            <a:avLst/>
-          </a:prstGeom>
-          <a:solidFill>
-            <a:srgbClr val="E8A87C"/>
-          </a:solidFill>
-          <a:ln/>
-        </p:spPr>
-      </p:sp>
-      <p:sp>
-        <p:nvSpPr>
-          <p:cNvPr id="17" name="Shape 15"/>
-          <p:cNvSpPr/>
-          <p:nvPr/>
-        </p:nvSpPr>
-        <p:spPr>
-          <a:xfrm>
-            <a:off x="6144768" y="1216152"/>
-            <a:ext cx="2633472" cy="1572768"/>
-          </a:xfrm>
-          <a:prstGeom prst="roundRect">
-            <a:avLst>
-              <a:gd name="adj" fmla="val 3488"/>
-            </a:avLst>
-          </a:prstGeom>
-          <a:solidFill>
-            <a:srgbClr val="F3F4F6"/>
-          </a:solidFill>
-          <a:ln w="10160">
-            <a:solidFill>
-              <a:srgbClr val="D1D5DB"/>
-            </a:solidFill>
-            <a:prstDash val="solid"/>
-          </a:ln>
-        </p:spPr>
-      </p:sp>
-      <p:sp>
-        <p:nvSpPr>
-          <p:cNvPr id="18" name="Shape 16"/>
-          <p:cNvSpPr/>
-          <p:nvPr/>
-        </p:nvSpPr>
-        <p:spPr>
-          <a:xfrm>
-            <a:off x="6254496" y="1335024"/>
-            <a:ext cx="320040" cy="320040"/>
-          </a:xfrm>
-          <a:prstGeom prst="ellipse">
-            <a:avLst/>
-          </a:prstGeom>
-          <a:solidFill>
-            <a:srgbClr val="1E2761"/>
-          </a:solidFill>
-          <a:ln/>
-        </p:spPr>
-      </p:sp>
-      <p:sp>
-        <p:nvSpPr>
-          <p:cNvPr id="19" name="Text 17"/>
-          <p:cNvSpPr/>
-          <p:nvPr/>
-        </p:nvSpPr>
-        <p:spPr>
-          <a:xfrm>
-            <a:off x="6254496" y="1385316"/>
-            <a:ext cx="320040" cy="146304"/>
-          </a:xfrm>
-          <a:prstGeom prst="rect">
-            <a:avLst/>
-          </a:prstGeom>
-          <a:noFill/>
-          <a:ln/>
-        </p:spPr>
-        <p:txBody>
-          <a:bodyPr wrap="square" lIns="0" tIns="0" rIns="0" bIns="0" rtlCol="0" anchor="ctr"/>
-          <a:lstStyle/>
-          <a:p>
-            <a:pPr algn="ctr" indent="0" marL="0">
-              <a:buNone/>
-            </a:pPr>
-            <a:r>
-              <a:rPr lang="en-US" sz="900" b="1" dirty="0">
-                <a:solidFill>
-                  <a:srgbClr val="FFFFFF"/>
-                </a:solidFill>
-                <a:latin typeface="Calibri" pitchFamily="34" charset="0"/>
-                <a:ea typeface="Calibri" pitchFamily="34" charset="-122"/>
-                <a:cs typeface="Calibri" pitchFamily="34" charset="-120"/>
-              </a:rPr>
-              <a:t>3</a:t>
-            </a:r>
-            <a:endParaRPr lang="en-US" sz="900" dirty="0"/>
-          </a:p>
-        </p:txBody>
-      </p:sp>
-      <p:sp>
-        <p:nvSpPr>
-          <p:cNvPr id="20" name="Text 18"/>
-          <p:cNvSpPr/>
-          <p:nvPr/>
-        </p:nvSpPr>
-        <p:spPr>
-          <a:xfrm>
-            <a:off x="6675120" y="1335024"/>
-            <a:ext cx="1975104" cy="310896"/>
-          </a:xfrm>
-          <a:prstGeom prst="rect">
-            <a:avLst/>
-          </a:prstGeom>
-          <a:noFill/>
-          <a:ln/>
-        </p:spPr>
-        <p:txBody>
-          <a:bodyPr wrap="square" lIns="0" tIns="0" rIns="0" bIns="0" rtlCol="0" anchor="ctr">
-            <a:normAutofit/>
-          </a:bodyPr>
-          <a:lstStyle/>
-          <a:p>
-            <a:pPr indent="0" marL="0">
-              <a:buNone/>
-            </a:pPr>
-            <a:r>
-              <a:rPr lang="en-US" sz="1500" b="1" dirty="0">
-                <a:solidFill>
-                  <a:srgbClr val="1E2761"/>
-                </a:solidFill>
-                <a:latin typeface="Calibri" pitchFamily="34" charset="0"/>
-                <a:ea typeface="Calibri" pitchFamily="34" charset="-122"/>
-                <a:cs typeface="Calibri" pitchFamily="34" charset="-120"/>
-              </a:rPr>
-              <a:t>Execute</a:t>
-            </a:r>
-            <a:endParaRPr lang="en-US" sz="1500" dirty="0"/>
-          </a:p>
-        </p:txBody>
-      </p:sp>
-      <p:sp>
-        <p:nvSpPr>
-          <p:cNvPr id="21" name="Text 19"/>
-          <p:cNvSpPr/>
-          <p:nvPr/>
-        </p:nvSpPr>
-        <p:spPr>
-          <a:xfrm>
-            <a:off x="6291072" y="1719072"/>
-            <a:ext cx="2340864" cy="950976"/>
-          </a:xfrm>
-          <a:prstGeom prst="rect">
-            <a:avLst/>
-          </a:prstGeom>
-          <a:noFill/>
-          <a:ln/>
-        </p:spPr>
-        <p:txBody>
-          <a:bodyPr wrap="square" lIns="0" tIns="0" rIns="0" bIns="0" rtlCol="0" anchor="t">
-            <a:normAutofit/>
-          </a:bodyPr>
-          <a:lstStyle/>
-          <a:p>
-            <a:pPr indent="0" marL="0">
-              <a:buNone/>
-            </a:pPr>
-            <a:r>
-              <a:rPr lang="en-US" sz="1150" dirty="0">
-                <a:solidFill>
-                  <a:srgbClr val="212121"/>
-                </a:solidFill>
-                <a:latin typeface="Calibri" pitchFamily="34" charset="0"/>
-                <a:ea typeface="Calibri" pitchFamily="34" charset="-122"/>
-                <a:cs typeface="Calibri" pitchFamily="34" charset="-120"/>
-              </a:rPr>
-              <a:t>run all target executors concurrently within this superstep</a:t>
-            </a:r>
-            <a:endParaRPr lang="en-US" sz="1150" dirty="0"/>
-          </a:p>
-        </p:txBody>
-      </p:sp>
-      <p:sp>
-        <p:nvSpPr>
-          <p:cNvPr id="22" name="Shape 20"/>
-          <p:cNvSpPr/>
-          <p:nvPr/>
-        </p:nvSpPr>
-        <p:spPr>
-          <a:xfrm>
-            <a:off x="365760" y="3044952"/>
-            <a:ext cx="2633472" cy="1572768"/>
-          </a:xfrm>
-          <a:prstGeom prst="roundRect">
-            <a:avLst>
-              <a:gd name="adj" fmla="val 3488"/>
-            </a:avLst>
-          </a:prstGeom>
-          <a:solidFill>
-            <a:srgbClr val="F3F4F6"/>
-          </a:solidFill>
-          <a:ln w="10160">
-            <a:solidFill>
-              <a:srgbClr val="D1D5DB"/>
-            </a:solidFill>
-            <a:prstDash val="solid"/>
-          </a:ln>
-        </p:spPr>
-      </p:sp>
-      <p:sp>
-        <p:nvSpPr>
-          <p:cNvPr id="23" name="Shape 21"/>
-          <p:cNvSpPr/>
-          <p:nvPr/>
-        </p:nvSpPr>
-        <p:spPr>
-          <a:xfrm>
-            <a:off x="475488" y="3163824"/>
-            <a:ext cx="320040" cy="320040"/>
-          </a:xfrm>
-          <a:prstGeom prst="ellipse">
-            <a:avLst/>
-          </a:prstGeom>
-          <a:solidFill>
-            <a:srgbClr val="1E2761"/>
-          </a:solidFill>
-          <a:ln/>
-        </p:spPr>
-      </p:sp>
-      <p:sp>
-        <p:nvSpPr>
-          <p:cNvPr id="24" name="Text 22"/>
-          <p:cNvSpPr/>
-          <p:nvPr/>
-        </p:nvSpPr>
-        <p:spPr>
-          <a:xfrm>
-            <a:off x="475488" y="3214116"/>
-            <a:ext cx="320040" cy="146304"/>
-          </a:xfrm>
-          <a:prstGeom prst="rect">
-            <a:avLst/>
-          </a:prstGeom>
-          <a:noFill/>
-          <a:ln/>
-        </p:spPr>
-        <p:txBody>
-          <a:bodyPr wrap="square" lIns="0" tIns="0" rIns="0" bIns="0" rtlCol="0" anchor="ctr"/>
-          <a:lstStyle/>
-          <a:p>
-            <a:pPr algn="ctr" indent="0" marL="0">
-              <a:buNone/>
-            </a:pPr>
-            <a:r>
-              <a:rPr lang="en-US" sz="900" b="1" dirty="0">
-                <a:solidFill>
-                  <a:srgbClr val="FFFFFF"/>
-                </a:solidFill>
-                <a:latin typeface="Calibri" pitchFamily="34" charset="0"/>
-                <a:ea typeface="Calibri" pitchFamily="34" charset="-122"/>
-                <a:cs typeface="Calibri" pitchFamily="34" charset="-120"/>
-              </a:rPr>
-              <a:t>4</a:t>
-            </a:r>
-            <a:endParaRPr lang="en-US" sz="900" dirty="0"/>
-          </a:p>
-        </p:txBody>
-      </p:sp>
-      <p:sp>
-        <p:nvSpPr>
-          <p:cNvPr id="25" name="Text 23"/>
-          <p:cNvSpPr/>
-          <p:nvPr/>
-        </p:nvSpPr>
-        <p:spPr>
-          <a:xfrm>
-            <a:off x="896112" y="3163824"/>
-            <a:ext cx="1975104" cy="310896"/>
-          </a:xfrm>
-          <a:prstGeom prst="rect">
-            <a:avLst/>
-          </a:prstGeom>
-          <a:noFill/>
-          <a:ln/>
-        </p:spPr>
-        <p:txBody>
-          <a:bodyPr wrap="square" lIns="0" tIns="0" rIns="0" bIns="0" rtlCol="0" anchor="ctr">
-            <a:normAutofit/>
-          </a:bodyPr>
-          <a:lstStyle/>
-          <a:p>
-            <a:pPr indent="0" marL="0">
-              <a:buNone/>
-            </a:pPr>
-            <a:r>
-              <a:rPr lang="en-US" sz="1500" b="1" dirty="0">
-                <a:solidFill>
-                  <a:srgbClr val="1E2761"/>
-                </a:solidFill>
-                <a:latin typeface="Calibri" pitchFamily="34" charset="0"/>
-                <a:ea typeface="Calibri" pitchFamily="34" charset="-122"/>
-                <a:cs typeface="Calibri" pitchFamily="34" charset="-120"/>
-              </a:rPr>
-              <a:t>Synchronize</a:t>
-            </a:r>
-            <a:endParaRPr lang="en-US" sz="1500" dirty="0"/>
-          </a:p>
-        </p:txBody>
-      </p:sp>
-      <p:sp>
-        <p:nvSpPr>
-          <p:cNvPr id="26" name="Text 24"/>
-          <p:cNvSpPr/>
-          <p:nvPr/>
-        </p:nvSpPr>
-        <p:spPr>
-          <a:xfrm>
-            <a:off x="512064" y="3547872"/>
-            <a:ext cx="2340864" cy="950976"/>
-          </a:xfrm>
-          <a:prstGeom prst="rect">
-            <a:avLst/>
-          </a:prstGeom>
-          <a:noFill/>
-          <a:ln/>
-        </p:spPr>
-        <p:txBody>
-          <a:bodyPr wrap="square" lIns="0" tIns="0" rIns="0" bIns="0" rtlCol="0" anchor="t">
-            <a:normAutofit/>
-          </a:bodyPr>
-          <a:lstStyle/>
-          <a:p>
-            <a:pPr indent="0" marL="0">
-              <a:buNone/>
-            </a:pPr>
-            <a:r>
-              <a:rPr lang="en-US" sz="1150" dirty="0">
-                <a:solidFill>
-                  <a:srgbClr val="212121"/>
-                </a:solidFill>
-                <a:latin typeface="Calibri" pitchFamily="34" charset="0"/>
-                <a:ea typeface="Calibri" pitchFamily="34" charset="-122"/>
-                <a:cs typeface="Calibri" pitchFamily="34" charset="-120"/>
-              </a:rPr>
-              <a:t>wait for every executor to finish (a barrier) before advancing</a:t>
-            </a:r>
-            <a:endParaRPr lang="en-US" sz="1150" dirty="0"/>
-          </a:p>
-        </p:txBody>
-      </p:sp>
-      <p:sp>
-        <p:nvSpPr>
-          <p:cNvPr id="27" name="Shape 25"/>
-          <p:cNvSpPr/>
-          <p:nvPr/>
-        </p:nvSpPr>
-        <p:spPr>
-          <a:xfrm>
-            <a:off x="3035808" y="3721608"/>
-            <a:ext cx="164592" cy="219456"/>
-          </a:xfrm>
-          <a:prstGeom prst="chevron">
-            <a:avLst/>
-          </a:prstGeom>
-          <a:solidFill>
-            <a:srgbClr val="E8A87C"/>
-          </a:solidFill>
-          <a:ln/>
-        </p:spPr>
-      </p:sp>
-      <p:sp>
-        <p:nvSpPr>
-          <p:cNvPr id="28" name="Shape 26"/>
-          <p:cNvSpPr/>
-          <p:nvPr/>
-        </p:nvSpPr>
-        <p:spPr>
-          <a:xfrm>
-            <a:off x="3255264" y="3044952"/>
-            <a:ext cx="2633472" cy="1572768"/>
-          </a:xfrm>
-          <a:prstGeom prst="roundRect">
-            <a:avLst>
-              <a:gd name="adj" fmla="val 3488"/>
-            </a:avLst>
-          </a:prstGeom>
-          <a:solidFill>
-            <a:srgbClr val="CADCFC"/>
-          </a:solidFill>
-          <a:ln w="10160">
-            <a:solidFill>
-              <a:srgbClr val="1E2761"/>
-            </a:solidFill>
-            <a:prstDash val="solid"/>
-          </a:ln>
-        </p:spPr>
-      </p:sp>
-      <p:sp>
-        <p:nvSpPr>
-          <p:cNvPr id="29" name="Shape 27"/>
-          <p:cNvSpPr/>
-          <p:nvPr/>
-        </p:nvSpPr>
-        <p:spPr>
-          <a:xfrm>
-            <a:off x="3364992" y="3163824"/>
-            <a:ext cx="320040" cy="320040"/>
-          </a:xfrm>
-          <a:prstGeom prst="ellipse">
-            <a:avLst/>
-          </a:prstGeom>
-          <a:solidFill>
-            <a:srgbClr val="1E2761"/>
-          </a:solidFill>
-          <a:ln/>
-        </p:spPr>
-      </p:sp>
-      <p:sp>
-        <p:nvSpPr>
-          <p:cNvPr id="30" name="Text 28"/>
-          <p:cNvSpPr/>
-          <p:nvPr/>
-        </p:nvSpPr>
-        <p:spPr>
-          <a:xfrm>
-            <a:off x="3364992" y="3214116"/>
-            <a:ext cx="320040" cy="146304"/>
-          </a:xfrm>
-          <a:prstGeom prst="rect">
-            <a:avLst/>
-          </a:prstGeom>
-          <a:noFill/>
-          <a:ln/>
-        </p:spPr>
-        <p:txBody>
-          <a:bodyPr wrap="square" lIns="0" tIns="0" rIns="0" bIns="0" rtlCol="0" anchor="ctr"/>
-          <a:lstStyle/>
-          <a:p>
-            <a:pPr algn="ctr" indent="0" marL="0">
-              <a:buNone/>
-            </a:pPr>
-            <a:r>
-              <a:rPr lang="en-US" sz="900" b="1" dirty="0">
-                <a:solidFill>
-                  <a:srgbClr val="FFFFFF"/>
-                </a:solidFill>
-                <a:latin typeface="Calibri" pitchFamily="34" charset="0"/>
-                <a:ea typeface="Calibri" pitchFamily="34" charset="-122"/>
-                <a:cs typeface="Calibri" pitchFamily="34" charset="-120"/>
-              </a:rPr>
-              <a:t>5</a:t>
-            </a:r>
-            <a:endParaRPr lang="en-US" sz="900" dirty="0"/>
-          </a:p>
-        </p:txBody>
-      </p:sp>
-      <p:sp>
-        <p:nvSpPr>
-          <p:cNvPr id="31" name="Text 29"/>
-          <p:cNvSpPr/>
-          <p:nvPr/>
-        </p:nvSpPr>
-        <p:spPr>
-          <a:xfrm>
-            <a:off x="3785616" y="3163824"/>
-            <a:ext cx="1975104" cy="310896"/>
-          </a:xfrm>
-          <a:prstGeom prst="rect">
-            <a:avLst/>
-          </a:prstGeom>
-          <a:noFill/>
-          <a:ln/>
-        </p:spPr>
-        <p:txBody>
-          <a:bodyPr wrap="square" lIns="0" tIns="0" rIns="0" bIns="0" rtlCol="0" anchor="ctr">
-            <a:normAutofit/>
-          </a:bodyPr>
-          <a:lstStyle/>
-          <a:p>
-            <a:pPr indent="0" marL="0">
-              <a:buNone/>
-            </a:pPr>
-            <a:r>
-              <a:rPr lang="en-US" sz="1500" b="1" dirty="0">
-                <a:solidFill>
-                  <a:srgbClr val="1E2761"/>
-                </a:solidFill>
-                <a:latin typeface="Calibri" pitchFamily="34" charset="0"/>
-                <a:ea typeface="Calibri" pitchFamily="34" charset="-122"/>
-                <a:cs typeface="Calibri" pitchFamily="34" charset="-120"/>
-              </a:rPr>
-              <a:t>Queue</a:t>
-            </a:r>
-            <a:endParaRPr lang="en-US" sz="1500" dirty="0"/>
-          </a:p>
-        </p:txBody>
-      </p:sp>
-      <p:sp>
-        <p:nvSpPr>
-          <p:cNvPr id="32" name="Text 30"/>
-          <p:cNvSpPr/>
-          <p:nvPr/>
-        </p:nvSpPr>
-        <p:spPr>
-          <a:xfrm>
-            <a:off x="3401568" y="3547872"/>
-            <a:ext cx="2340864" cy="950976"/>
-          </a:xfrm>
-          <a:prstGeom prst="rect">
-            <a:avLst/>
-          </a:prstGeom>
-          <a:noFill/>
-          <a:ln/>
-        </p:spPr>
-        <p:txBody>
-          <a:bodyPr wrap="square" lIns="0" tIns="0" rIns="0" bIns="0" rtlCol="0" anchor="t">
-            <a:normAutofit/>
-          </a:bodyPr>
-          <a:lstStyle/>
-          <a:p>
-            <a:pPr indent="0" marL="0">
-              <a:buNone/>
-            </a:pPr>
-            <a:r>
-              <a:rPr lang="en-US" sz="1150" dirty="0">
-                <a:solidFill>
-                  <a:srgbClr val="212121"/>
-                </a:solidFill>
-                <a:latin typeface="Calibri" pitchFamily="34" charset="0"/>
-                <a:ea typeface="Calibri" pitchFamily="34" charset="-122"/>
-                <a:cs typeface="Calibri" pitchFamily="34" charset="-120"/>
-              </a:rPr>
-              <a:t>new messages emitted this superstep wait for the next one</a:t>
-            </a:r>
-            <a:endParaRPr lang="en-US" sz="1150" dirty="0"/>
-          </a:p>
-        </p:txBody>
-      </p:sp>
-      <p:sp>
-        <p:nvSpPr>
-          <p:cNvPr id="33" name="Shape 31"/>
+              <a:t>Runbook: demos/day4/module-3-demo-1-visualize-graph.md</a:t>
+            </a:r>
+            <a:endParaRPr lang="en-US" sz="1100" dirty="0"/>
+          </a:p>
+        </p:txBody>
+      </p:sp>
+      <p:sp>
+        <p:nvSpPr>
+          <p:cNvPr id="9" name="Shape 7"/>
           <p:cNvSpPr/>
           <p:nvPr/>
         </p:nvSpPr>
@@ -11731,7 +11994,7 @@
       </p:sp>
       <p:sp>
         <p:nvSpPr>
-          <p:cNvPr id="34" name="Text 32"/>
+          <p:cNvPr id="10" name="Text 8"/>
           <p:cNvSpPr/>
           <p:nvPr/>
         </p:nvSpPr>
@@ -11764,7 +12027,7 @@
                 <a:ea typeface="Calibri" pitchFamily="34" charset="-122"/>
                 <a:cs typeface="Calibri" pitchFamily="34" charset="-120"/>
               </a:rPr>
-              <a:t>Source: https://learn.microsoft.com/en-us/agent-framework/concepts/workflows/builder-and-execution</a:t>
+              <a:t>Source: https://learn.microsoft.com/en-us/agent-framework/workflows/visualization</a:t>
             </a:r>
             <a:endParaRPr lang="en-US" sz="820" dirty="0"/>
           </a:p>
@@ -11898,7 +12161,7 @@
                 <a:ea typeface="Calibri" pitchFamily="34" charset="-122"/>
                 <a:cs typeface="Calibri" pitchFamily="34" charset="-120"/>
               </a:rPr>
-              <a:t>Why supersteps matter</a:t>
+              <a:t>The superstep execution model</a:t>
             </a:r>
             <a:endParaRPr lang="en-US" sz="2800" dirty="0"/>
           </a:p>
@@ -11906,14 +12169,141 @@
       </p:sp>
       <p:sp>
         <p:nvSpPr>
-          <p:cNvPr id="5" name="Text 3"/>
-          <p:cNvSpPr/>
-          <p:nvPr/>
-        </p:nvSpPr>
-        <p:spPr>
-          <a:xfrm>
-            <a:off x="502920" y="1170432"/>
-            <a:ext cx="7955280" cy="3520440"/>
+          <p:cNvPr id="5" name="Shape 3"/>
+          <p:cNvSpPr/>
+          <p:nvPr/>
+        </p:nvSpPr>
+        <p:spPr>
+          <a:xfrm>
+            <a:off x="365760" y="1216152"/>
+            <a:ext cx="2633472" cy="1572768"/>
+          </a:xfrm>
+          <a:prstGeom prst="roundRect">
+            <a:avLst>
+              <a:gd name="adj" fmla="val 3488"/>
+            </a:avLst>
+          </a:prstGeom>
+          <a:solidFill>
+            <a:srgbClr val="CADCFC"/>
+          </a:solidFill>
+          <a:ln w="10160">
+            <a:solidFill>
+              <a:srgbClr val="1E2761"/>
+            </a:solidFill>
+            <a:prstDash val="solid"/>
+          </a:ln>
+        </p:spPr>
+      </p:sp>
+      <p:sp>
+        <p:nvSpPr>
+          <p:cNvPr id="6" name="Shape 4"/>
+          <p:cNvSpPr/>
+          <p:nvPr/>
+        </p:nvSpPr>
+        <p:spPr>
+          <a:xfrm>
+            <a:off x="475488" y="1335024"/>
+            <a:ext cx="320040" cy="320040"/>
+          </a:xfrm>
+          <a:prstGeom prst="ellipse">
+            <a:avLst/>
+          </a:prstGeom>
+          <a:solidFill>
+            <a:srgbClr val="1E2761"/>
+          </a:solidFill>
+          <a:ln/>
+        </p:spPr>
+      </p:sp>
+      <p:sp>
+        <p:nvSpPr>
+          <p:cNvPr id="7" name="Text 5"/>
+          <p:cNvSpPr/>
+          <p:nvPr/>
+        </p:nvSpPr>
+        <p:spPr>
+          <a:xfrm>
+            <a:off x="475488" y="1385316"/>
+            <a:ext cx="320040" cy="146304"/>
+          </a:xfrm>
+          <a:prstGeom prst="rect">
+            <a:avLst/>
+          </a:prstGeom>
+          <a:noFill/>
+          <a:ln/>
+        </p:spPr>
+        <p:txBody>
+          <a:bodyPr wrap="square" lIns="0" tIns="0" rIns="0" bIns="0" rtlCol="0" anchor="ctr"/>
+          <a:lstStyle/>
+          <a:p>
+            <a:pPr algn="ctr" indent="0" marL="0">
+              <a:buNone/>
+            </a:pPr>
+            <a:r>
+              <a:rPr lang="en-US" sz="900" b="1" dirty="0">
+                <a:solidFill>
+                  <a:srgbClr val="FFFFFF"/>
+                </a:solidFill>
+                <a:latin typeface="Calibri" pitchFamily="34" charset="0"/>
+                <a:ea typeface="Calibri" pitchFamily="34" charset="-122"/>
+                <a:cs typeface="Calibri" pitchFamily="34" charset="-120"/>
+              </a:rPr>
+              <a:t>1</a:t>
+            </a:r>
+            <a:endParaRPr lang="en-US" sz="900" dirty="0"/>
+          </a:p>
+        </p:txBody>
+      </p:sp>
+      <p:sp>
+        <p:nvSpPr>
+          <p:cNvPr id="8" name="Text 6"/>
+          <p:cNvSpPr/>
+          <p:nvPr/>
+        </p:nvSpPr>
+        <p:spPr>
+          <a:xfrm>
+            <a:off x="896112" y="1335024"/>
+            <a:ext cx="1975104" cy="310896"/>
+          </a:xfrm>
+          <a:prstGeom prst="rect">
+            <a:avLst/>
+          </a:prstGeom>
+          <a:noFill/>
+          <a:ln/>
+        </p:spPr>
+        <p:txBody>
+          <a:bodyPr wrap="square" lIns="0" tIns="0" rIns="0" bIns="0" rtlCol="0" anchor="ctr">
+            <a:normAutofit/>
+          </a:bodyPr>
+          <a:lstStyle/>
+          <a:p>
+            <a:pPr indent="0" marL="0">
+              <a:buNone/>
+            </a:pPr>
+            <a:r>
+              <a:rPr lang="en-US" sz="1500" b="1" dirty="0">
+                <a:solidFill>
+                  <a:srgbClr val="1E2761"/>
+                </a:solidFill>
+                <a:latin typeface="Calibri" pitchFamily="34" charset="0"/>
+                <a:ea typeface="Calibri" pitchFamily="34" charset="-122"/>
+                <a:cs typeface="Calibri" pitchFamily="34" charset="-120"/>
+              </a:rPr>
+              <a:t>Collect</a:t>
+            </a:r>
+            <a:endParaRPr lang="en-US" sz="1500" dirty="0"/>
+          </a:p>
+        </p:txBody>
+      </p:sp>
+      <p:sp>
+        <p:nvSpPr>
+          <p:cNvPr id="9" name="Text 7"/>
+          <p:cNvSpPr/>
+          <p:nvPr/>
+        </p:nvSpPr>
+        <p:spPr>
+          <a:xfrm>
+            <a:off x="512064" y="1719072"/>
+            <a:ext cx="2340864" cy="950976"/>
           </a:xfrm>
           <a:prstGeom prst="rect">
             <a:avLst/>
@@ -11927,53 +12317,158 @@
           </a:bodyPr>
           <a:lstStyle/>
           <a:p>
-            <a:pPr marL="342900" indent="-342900">
-              <a:spcAft>
-                <a:spcPts val="1000"/>
-              </a:spcAft>
-              <a:buSzPct val="100000"/>
-              <a:buChar char="•"/>
-            </a:pPr>
-            <a:r>
-              <a:rPr lang="en-US" sz="1600" b="1" dirty="0">
-                <a:solidFill>
-                  <a:srgbClr val="1E2761"/>
+            <a:pPr indent="0" marL="0">
+              <a:buNone/>
+            </a:pPr>
+            <a:r>
+              <a:rPr lang="en-US" sz="1150" dirty="0">
+                <a:solidFill>
+                  <a:srgbClr val="212121"/>
                 </a:solidFill>
                 <a:latin typeface="Calibri" pitchFamily="34" charset="0"/>
                 <a:ea typeface="Calibri" pitchFamily="34" charset="-122"/>
                 <a:cs typeface="Calibri" pitchFamily="34" charset="-120"/>
               </a:rPr>
-              <a:t>Deterministic execution</a:t>
-            </a:r>
-            <a:pPr indent="0" marL="0">
-              <a:spcAft>
-                <a:spcPts val="1000"/>
-              </a:spcAft>
-              <a:buNone/>
-            </a:pPr>
-            <a:r>
-              <a:rPr lang="en-US" sz="1600" dirty="0">
-                <a:solidFill>
-                  <a:srgbClr val="212121"/>
+              <a:t>gather all pending messages from the previous superstep</a:t>
+            </a:r>
+            <a:endParaRPr lang="en-US" sz="1150" dirty="0"/>
+          </a:p>
+        </p:txBody>
+      </p:sp>
+      <p:sp>
+        <p:nvSpPr>
+          <p:cNvPr id="10" name="Shape 8"/>
+          <p:cNvSpPr/>
+          <p:nvPr/>
+        </p:nvSpPr>
+        <p:spPr>
+          <a:xfrm>
+            <a:off x="3035808" y="1892808"/>
+            <a:ext cx="164592" cy="219456"/>
+          </a:xfrm>
+          <a:prstGeom prst="chevron">
+            <a:avLst/>
+          </a:prstGeom>
+          <a:solidFill>
+            <a:srgbClr val="E8A87C"/>
+          </a:solidFill>
+          <a:ln/>
+        </p:spPr>
+      </p:sp>
+      <p:sp>
+        <p:nvSpPr>
+          <p:cNvPr id="11" name="Shape 9"/>
+          <p:cNvSpPr/>
+          <p:nvPr/>
+        </p:nvSpPr>
+        <p:spPr>
+          <a:xfrm>
+            <a:off x="3255264" y="1216152"/>
+            <a:ext cx="2633472" cy="1572768"/>
+          </a:xfrm>
+          <a:prstGeom prst="roundRect">
+            <a:avLst>
+              <a:gd name="adj" fmla="val 3488"/>
+            </a:avLst>
+          </a:prstGeom>
+          <a:solidFill>
+            <a:srgbClr val="F3F4F6"/>
+          </a:solidFill>
+          <a:ln w="10160">
+            <a:solidFill>
+              <a:srgbClr val="D1D5DB"/>
+            </a:solidFill>
+            <a:prstDash val="solid"/>
+          </a:ln>
+        </p:spPr>
+      </p:sp>
+      <p:sp>
+        <p:nvSpPr>
+          <p:cNvPr id="12" name="Shape 10"/>
+          <p:cNvSpPr/>
+          <p:nvPr/>
+        </p:nvSpPr>
+        <p:spPr>
+          <a:xfrm>
+            <a:off x="3364992" y="1335024"/>
+            <a:ext cx="320040" cy="320040"/>
+          </a:xfrm>
+          <a:prstGeom prst="ellipse">
+            <a:avLst/>
+          </a:prstGeom>
+          <a:solidFill>
+            <a:srgbClr val="1E2761"/>
+          </a:solidFill>
+          <a:ln/>
+        </p:spPr>
+      </p:sp>
+      <p:sp>
+        <p:nvSpPr>
+          <p:cNvPr id="13" name="Text 11"/>
+          <p:cNvSpPr/>
+          <p:nvPr/>
+        </p:nvSpPr>
+        <p:spPr>
+          <a:xfrm>
+            <a:off x="3364992" y="1385316"/>
+            <a:ext cx="320040" cy="146304"/>
+          </a:xfrm>
+          <a:prstGeom prst="rect">
+            <a:avLst/>
+          </a:prstGeom>
+          <a:noFill/>
+          <a:ln/>
+        </p:spPr>
+        <p:txBody>
+          <a:bodyPr wrap="square" lIns="0" tIns="0" rIns="0" bIns="0" rtlCol="0" anchor="ctr"/>
+          <a:lstStyle/>
+          <a:p>
+            <a:pPr algn="ctr" indent="0" marL="0">
+              <a:buNone/>
+            </a:pPr>
+            <a:r>
+              <a:rPr lang="en-US" sz="900" b="1" dirty="0">
+                <a:solidFill>
+                  <a:srgbClr val="FFFFFF"/>
                 </a:solidFill>
                 <a:latin typeface="Calibri" pitchFamily="34" charset="0"/>
                 <a:ea typeface="Calibri" pitchFamily="34" charset="-122"/>
                 <a:cs typeface="Calibri" pitchFamily="34" charset="-120"/>
               </a:rPr>
-              <a:t>  —  the same input always executes in the same order</a:t>
-            </a:r>
-            <a:endParaRPr lang="en-US" sz="1600" dirty="0"/>
-          </a:p>
-          <a:p>
-            <a:pPr marL="342900" indent="-342900">
-              <a:spcAft>
-                <a:spcPts val="1000"/>
-              </a:spcAft>
-              <a:buSzPct val="100000"/>
-              <a:buChar char="•"/>
-            </a:pPr>
-            <a:r>
-              <a:rPr lang="en-US" sz="1600" b="1" dirty="0">
+              <a:t>2</a:t>
+            </a:r>
+            <a:endParaRPr lang="en-US" sz="900" dirty="0"/>
+          </a:p>
+        </p:txBody>
+      </p:sp>
+      <p:sp>
+        <p:nvSpPr>
+          <p:cNvPr id="14" name="Text 12"/>
+          <p:cNvSpPr/>
+          <p:nvPr/>
+        </p:nvSpPr>
+        <p:spPr>
+          <a:xfrm>
+            <a:off x="3785616" y="1335024"/>
+            <a:ext cx="1975104" cy="310896"/>
+          </a:xfrm>
+          <a:prstGeom prst="rect">
+            <a:avLst/>
+          </a:prstGeom>
+          <a:noFill/>
+          <a:ln/>
+        </p:spPr>
+        <p:txBody>
+          <a:bodyPr wrap="square" lIns="0" tIns="0" rIns="0" bIns="0" rtlCol="0" anchor="ctr">
+            <a:normAutofit/>
+          </a:bodyPr>
+          <a:lstStyle/>
+          <a:p>
+            <a:pPr indent="0" marL="0">
+              <a:buNone/>
+            </a:pPr>
+            <a:r>
+              <a:rPr lang="en-US" sz="1500" b="1" dirty="0">
                 <a:solidFill>
                   <a:srgbClr val="1E2761"/>
                 </a:solidFill>
@@ -11981,16 +12476,40 @@
                 <a:ea typeface="Calibri" pitchFamily="34" charset="-122"/>
                 <a:cs typeface="Calibri" pitchFamily="34" charset="-120"/>
               </a:rPr>
-              <a:t>Reliable checkpointing</a:t>
-            </a:r>
-            <a:pPr indent="0" marL="0">
-              <a:spcAft>
-                <a:spcPts val="1000"/>
-              </a:spcAft>
-              <a:buNone/>
-            </a:pPr>
-            <a:r>
-              <a:rPr lang="en-US" sz="1600" dirty="0">
+              <a:t>Route</a:t>
+            </a:r>
+            <a:endParaRPr lang="en-US" sz="1500" dirty="0"/>
+          </a:p>
+        </p:txBody>
+      </p:sp>
+      <p:sp>
+        <p:nvSpPr>
+          <p:cNvPr id="15" name="Text 13"/>
+          <p:cNvSpPr/>
+          <p:nvPr/>
+        </p:nvSpPr>
+        <p:spPr>
+          <a:xfrm>
+            <a:off x="3401568" y="1719072"/>
+            <a:ext cx="2340864" cy="950976"/>
+          </a:xfrm>
+          <a:prstGeom prst="rect">
+            <a:avLst/>
+          </a:prstGeom>
+          <a:noFill/>
+          <a:ln/>
+        </p:spPr>
+        <p:txBody>
+          <a:bodyPr wrap="square" lIns="0" tIns="0" rIns="0" bIns="0" rtlCol="0" anchor="t">
+            <a:normAutofit/>
+          </a:bodyPr>
+          <a:lstStyle/>
+          <a:p>
+            <a:pPr indent="0" marL="0">
+              <a:buNone/>
+            </a:pPr>
+            <a:r>
+              <a:rPr lang="en-US" sz="1150" dirty="0">
                 <a:solidFill>
                   <a:srgbClr val="212121"/>
                 </a:solidFill>
@@ -11998,58 +12517,187 @@
                 <a:ea typeface="Calibri" pitchFamily="34" charset="-122"/>
                 <a:cs typeface="Calibri" pitchFamily="34" charset="-120"/>
               </a:rPr>
-              <a:t>  —  state can be saved at superstep boundaries with no ambiguity</a:t>
-            </a:r>
-            <a:endParaRPr lang="en-US" sz="1600" dirty="0"/>
-          </a:p>
-          <a:p>
-            <a:pPr marL="342900" indent="-342900">
-              <a:spcAft>
-                <a:spcPts val="1000"/>
-              </a:spcAft>
-              <a:buSzPct val="100000"/>
-              <a:buChar char="•"/>
-            </a:pPr>
-            <a:r>
-              <a:rPr lang="en-US" sz="1600" b="1" dirty="0">
-                <a:solidFill>
-                  <a:srgbClr val="1E2761"/>
+              <a:t>dispatch messages to target executors based on edges and conditions</a:t>
+            </a:r>
+            <a:endParaRPr lang="en-US" sz="1150" dirty="0"/>
+          </a:p>
+        </p:txBody>
+      </p:sp>
+      <p:sp>
+        <p:nvSpPr>
+          <p:cNvPr id="16" name="Shape 14"/>
+          <p:cNvSpPr/>
+          <p:nvPr/>
+        </p:nvSpPr>
+        <p:spPr>
+          <a:xfrm>
+            <a:off x="5925312" y="1892808"/>
+            <a:ext cx="164592" cy="219456"/>
+          </a:xfrm>
+          <a:prstGeom prst="chevron">
+            <a:avLst/>
+          </a:prstGeom>
+          <a:solidFill>
+            <a:srgbClr val="E8A87C"/>
+          </a:solidFill>
+          <a:ln/>
+        </p:spPr>
+      </p:sp>
+      <p:sp>
+        <p:nvSpPr>
+          <p:cNvPr id="17" name="Shape 15"/>
+          <p:cNvSpPr/>
+          <p:nvPr/>
+        </p:nvSpPr>
+        <p:spPr>
+          <a:xfrm>
+            <a:off x="6144768" y="1216152"/>
+            <a:ext cx="2633472" cy="1572768"/>
+          </a:xfrm>
+          <a:prstGeom prst="roundRect">
+            <a:avLst>
+              <a:gd name="adj" fmla="val 3488"/>
+            </a:avLst>
+          </a:prstGeom>
+          <a:solidFill>
+            <a:srgbClr val="F3F4F6"/>
+          </a:solidFill>
+          <a:ln w="10160">
+            <a:solidFill>
+              <a:srgbClr val="D1D5DB"/>
+            </a:solidFill>
+            <a:prstDash val="solid"/>
+          </a:ln>
+        </p:spPr>
+      </p:sp>
+      <p:sp>
+        <p:nvSpPr>
+          <p:cNvPr id="18" name="Shape 16"/>
+          <p:cNvSpPr/>
+          <p:nvPr/>
+        </p:nvSpPr>
+        <p:spPr>
+          <a:xfrm>
+            <a:off x="6254496" y="1335024"/>
+            <a:ext cx="320040" cy="320040"/>
+          </a:xfrm>
+          <a:prstGeom prst="ellipse">
+            <a:avLst/>
+          </a:prstGeom>
+          <a:solidFill>
+            <a:srgbClr val="1E2761"/>
+          </a:solidFill>
+          <a:ln/>
+        </p:spPr>
+      </p:sp>
+      <p:sp>
+        <p:nvSpPr>
+          <p:cNvPr id="19" name="Text 17"/>
+          <p:cNvSpPr/>
+          <p:nvPr/>
+        </p:nvSpPr>
+        <p:spPr>
+          <a:xfrm>
+            <a:off x="6254496" y="1385316"/>
+            <a:ext cx="320040" cy="146304"/>
+          </a:xfrm>
+          <a:prstGeom prst="rect">
+            <a:avLst/>
+          </a:prstGeom>
+          <a:noFill/>
+          <a:ln/>
+        </p:spPr>
+        <p:txBody>
+          <a:bodyPr wrap="square" lIns="0" tIns="0" rIns="0" bIns="0" rtlCol="0" anchor="ctr"/>
+          <a:lstStyle/>
+          <a:p>
+            <a:pPr algn="ctr" indent="0" marL="0">
+              <a:buNone/>
+            </a:pPr>
+            <a:r>
+              <a:rPr lang="en-US" sz="900" b="1" dirty="0">
+                <a:solidFill>
+                  <a:srgbClr val="FFFFFF"/>
                 </a:solidFill>
                 <a:latin typeface="Calibri" pitchFamily="34" charset="0"/>
                 <a:ea typeface="Calibri" pitchFamily="34" charset="-122"/>
                 <a:cs typeface="Calibri" pitchFamily="34" charset="-120"/>
               </a:rPr>
-              <a:t>Simpler reasoning</a:t>
-            </a:r>
-            <a:pPr indent="0" marL="0">
-              <a:spcAft>
-                <a:spcPts val="1000"/>
-              </a:spcAft>
-              <a:buNone/>
-            </a:pPr>
-            <a:r>
-              <a:rPr lang="en-US" sz="1600" dirty="0">
-                <a:solidFill>
-                  <a:srgbClr val="212121"/>
+              <a:t>3</a:t>
+            </a:r>
+            <a:endParaRPr lang="en-US" sz="900" dirty="0"/>
+          </a:p>
+        </p:txBody>
+      </p:sp>
+      <p:sp>
+        <p:nvSpPr>
+          <p:cNvPr id="20" name="Text 18"/>
+          <p:cNvSpPr/>
+          <p:nvPr/>
+        </p:nvSpPr>
+        <p:spPr>
+          <a:xfrm>
+            <a:off x="6675120" y="1335024"/>
+            <a:ext cx="1975104" cy="310896"/>
+          </a:xfrm>
+          <a:prstGeom prst="rect">
+            <a:avLst/>
+          </a:prstGeom>
+          <a:noFill/>
+          <a:ln/>
+        </p:spPr>
+        <p:txBody>
+          <a:bodyPr wrap="square" lIns="0" tIns="0" rIns="0" bIns="0" rtlCol="0" anchor="ctr">
+            <a:normAutofit/>
+          </a:bodyPr>
+          <a:lstStyle/>
+          <a:p>
+            <a:pPr indent="0" marL="0">
+              <a:buNone/>
+            </a:pPr>
+            <a:r>
+              <a:rPr lang="en-US" sz="1500" b="1" dirty="0">
+                <a:solidFill>
+                  <a:srgbClr val="1E2761"/>
                 </a:solidFill>
                 <a:latin typeface="Calibri" pitchFamily="34" charset="0"/>
                 <a:ea typeface="Calibri" pitchFamily="34" charset="-122"/>
                 <a:cs typeface="Calibri" pitchFamily="34" charset="-120"/>
               </a:rPr>
-              <a:t>  —  no race conditions between supersteps; every executor sees a consistent view</a:t>
-            </a:r>
-            <a:endParaRPr lang="en-US" sz="1600" dirty="0"/>
-          </a:p>
-          <a:p>
-            <a:pPr marL="342900" indent="-342900">
-              <a:spcAft>
-                <a:spcPts val="1000"/>
-              </a:spcAft>
-              <a:buSzPct val="100000"/>
-              <a:buChar char="•"/>
-            </a:pPr>
-            <a:r>
-              <a:rPr lang="en-US" sz="1600" dirty="0">
+              <a:t>Execute</a:t>
+            </a:r>
+            <a:endParaRPr lang="en-US" sz="1500" dirty="0"/>
+          </a:p>
+        </p:txBody>
+      </p:sp>
+      <p:sp>
+        <p:nvSpPr>
+          <p:cNvPr id="21" name="Text 19"/>
+          <p:cNvSpPr/>
+          <p:nvPr/>
+        </p:nvSpPr>
+        <p:spPr>
+          <a:xfrm>
+            <a:off x="6291072" y="1719072"/>
+            <a:ext cx="2340864" cy="950976"/>
+          </a:xfrm>
+          <a:prstGeom prst="rect">
+            <a:avLst/>
+          </a:prstGeom>
+          <a:noFill/>
+          <a:ln/>
+        </p:spPr>
+        <p:txBody>
+          <a:bodyPr wrap="square" lIns="0" tIns="0" rIns="0" bIns="0" rtlCol="0" anchor="t">
+            <a:normAutofit/>
+          </a:bodyPr>
+          <a:lstStyle/>
+          <a:p>
+            <a:pPr indent="0" marL="0">
+              <a:buNone/>
+            </a:pPr>
+            <a:r>
+              <a:rPr lang="en-US" sz="1150" dirty="0">
                 <a:solidFill>
                   <a:srgbClr val="212121"/>
                 </a:solidFill>
@@ -12057,15 +12705,371 @@
                 <a:ea typeface="Calibri" pitchFamily="34" charset="-122"/>
                 <a:cs typeface="Calibri" pitchFamily="34" charset="-120"/>
               </a:rPr>
-              <a:t>Caveat: the barrier means one slow executor blocks the whole superstep — consolidate sequential logic into one executor if independent branches need independent timing</a:t>
-            </a:r>
-            <a:endParaRPr lang="en-US" sz="1600" dirty="0"/>
-          </a:p>
-        </p:txBody>
-      </p:sp>
-      <p:sp>
-        <p:nvSpPr>
-          <p:cNvPr id="6" name="Shape 4"/>
+              <a:t>run all target executors concurrently within this superstep</a:t>
+            </a:r>
+            <a:endParaRPr lang="en-US" sz="1150" dirty="0"/>
+          </a:p>
+        </p:txBody>
+      </p:sp>
+      <p:sp>
+        <p:nvSpPr>
+          <p:cNvPr id="22" name="Shape 20"/>
+          <p:cNvSpPr/>
+          <p:nvPr/>
+        </p:nvSpPr>
+        <p:spPr>
+          <a:xfrm>
+            <a:off x="365760" y="3044952"/>
+            <a:ext cx="2633472" cy="1572768"/>
+          </a:xfrm>
+          <a:prstGeom prst="roundRect">
+            <a:avLst>
+              <a:gd name="adj" fmla="val 3488"/>
+            </a:avLst>
+          </a:prstGeom>
+          <a:solidFill>
+            <a:srgbClr val="F3F4F6"/>
+          </a:solidFill>
+          <a:ln w="10160">
+            <a:solidFill>
+              <a:srgbClr val="D1D5DB"/>
+            </a:solidFill>
+            <a:prstDash val="solid"/>
+          </a:ln>
+        </p:spPr>
+      </p:sp>
+      <p:sp>
+        <p:nvSpPr>
+          <p:cNvPr id="23" name="Shape 21"/>
+          <p:cNvSpPr/>
+          <p:nvPr/>
+        </p:nvSpPr>
+        <p:spPr>
+          <a:xfrm>
+            <a:off x="475488" y="3163824"/>
+            <a:ext cx="320040" cy="320040"/>
+          </a:xfrm>
+          <a:prstGeom prst="ellipse">
+            <a:avLst/>
+          </a:prstGeom>
+          <a:solidFill>
+            <a:srgbClr val="1E2761"/>
+          </a:solidFill>
+          <a:ln/>
+        </p:spPr>
+      </p:sp>
+      <p:sp>
+        <p:nvSpPr>
+          <p:cNvPr id="24" name="Text 22"/>
+          <p:cNvSpPr/>
+          <p:nvPr/>
+        </p:nvSpPr>
+        <p:spPr>
+          <a:xfrm>
+            <a:off x="475488" y="3214116"/>
+            <a:ext cx="320040" cy="146304"/>
+          </a:xfrm>
+          <a:prstGeom prst="rect">
+            <a:avLst/>
+          </a:prstGeom>
+          <a:noFill/>
+          <a:ln/>
+        </p:spPr>
+        <p:txBody>
+          <a:bodyPr wrap="square" lIns="0" tIns="0" rIns="0" bIns="0" rtlCol="0" anchor="ctr"/>
+          <a:lstStyle/>
+          <a:p>
+            <a:pPr algn="ctr" indent="0" marL="0">
+              <a:buNone/>
+            </a:pPr>
+            <a:r>
+              <a:rPr lang="en-US" sz="900" b="1" dirty="0">
+                <a:solidFill>
+                  <a:srgbClr val="FFFFFF"/>
+                </a:solidFill>
+                <a:latin typeface="Calibri" pitchFamily="34" charset="0"/>
+                <a:ea typeface="Calibri" pitchFamily="34" charset="-122"/>
+                <a:cs typeface="Calibri" pitchFamily="34" charset="-120"/>
+              </a:rPr>
+              <a:t>4</a:t>
+            </a:r>
+            <a:endParaRPr lang="en-US" sz="900" dirty="0"/>
+          </a:p>
+        </p:txBody>
+      </p:sp>
+      <p:sp>
+        <p:nvSpPr>
+          <p:cNvPr id="25" name="Text 23"/>
+          <p:cNvSpPr/>
+          <p:nvPr/>
+        </p:nvSpPr>
+        <p:spPr>
+          <a:xfrm>
+            <a:off x="896112" y="3163824"/>
+            <a:ext cx="1975104" cy="310896"/>
+          </a:xfrm>
+          <a:prstGeom prst="rect">
+            <a:avLst/>
+          </a:prstGeom>
+          <a:noFill/>
+          <a:ln/>
+        </p:spPr>
+        <p:txBody>
+          <a:bodyPr wrap="square" lIns="0" tIns="0" rIns="0" bIns="0" rtlCol="0" anchor="ctr">
+            <a:normAutofit/>
+          </a:bodyPr>
+          <a:lstStyle/>
+          <a:p>
+            <a:pPr indent="0" marL="0">
+              <a:buNone/>
+            </a:pPr>
+            <a:r>
+              <a:rPr lang="en-US" sz="1500" b="1" dirty="0">
+                <a:solidFill>
+                  <a:srgbClr val="1E2761"/>
+                </a:solidFill>
+                <a:latin typeface="Calibri" pitchFamily="34" charset="0"/>
+                <a:ea typeface="Calibri" pitchFamily="34" charset="-122"/>
+                <a:cs typeface="Calibri" pitchFamily="34" charset="-120"/>
+              </a:rPr>
+              <a:t>Synchronize</a:t>
+            </a:r>
+            <a:endParaRPr lang="en-US" sz="1500" dirty="0"/>
+          </a:p>
+        </p:txBody>
+      </p:sp>
+      <p:sp>
+        <p:nvSpPr>
+          <p:cNvPr id="26" name="Text 24"/>
+          <p:cNvSpPr/>
+          <p:nvPr/>
+        </p:nvSpPr>
+        <p:spPr>
+          <a:xfrm>
+            <a:off x="512064" y="3547872"/>
+            <a:ext cx="2340864" cy="950976"/>
+          </a:xfrm>
+          <a:prstGeom prst="rect">
+            <a:avLst/>
+          </a:prstGeom>
+          <a:noFill/>
+          <a:ln/>
+        </p:spPr>
+        <p:txBody>
+          <a:bodyPr wrap="square" lIns="0" tIns="0" rIns="0" bIns="0" rtlCol="0" anchor="t">
+            <a:normAutofit/>
+          </a:bodyPr>
+          <a:lstStyle/>
+          <a:p>
+            <a:pPr indent="0" marL="0">
+              <a:buNone/>
+            </a:pPr>
+            <a:r>
+              <a:rPr lang="en-US" sz="1150" dirty="0">
+                <a:solidFill>
+                  <a:srgbClr val="212121"/>
+                </a:solidFill>
+                <a:latin typeface="Calibri" pitchFamily="34" charset="0"/>
+                <a:ea typeface="Calibri" pitchFamily="34" charset="-122"/>
+                <a:cs typeface="Calibri" pitchFamily="34" charset="-120"/>
+              </a:rPr>
+              <a:t>wait for every executor to finish (a barrier) before advancing</a:t>
+            </a:r>
+            <a:endParaRPr lang="en-US" sz="1150" dirty="0"/>
+          </a:p>
+        </p:txBody>
+      </p:sp>
+      <p:sp>
+        <p:nvSpPr>
+          <p:cNvPr id="27" name="Shape 25"/>
+          <p:cNvSpPr/>
+          <p:nvPr/>
+        </p:nvSpPr>
+        <p:spPr>
+          <a:xfrm>
+            <a:off x="3035808" y="3721608"/>
+            <a:ext cx="164592" cy="219456"/>
+          </a:xfrm>
+          <a:prstGeom prst="chevron">
+            <a:avLst/>
+          </a:prstGeom>
+          <a:solidFill>
+            <a:srgbClr val="E8A87C"/>
+          </a:solidFill>
+          <a:ln/>
+        </p:spPr>
+      </p:sp>
+      <p:sp>
+        <p:nvSpPr>
+          <p:cNvPr id="28" name="Shape 26"/>
+          <p:cNvSpPr/>
+          <p:nvPr/>
+        </p:nvSpPr>
+        <p:spPr>
+          <a:xfrm>
+            <a:off x="3255264" y="3044952"/>
+            <a:ext cx="2633472" cy="1572768"/>
+          </a:xfrm>
+          <a:prstGeom prst="roundRect">
+            <a:avLst>
+              <a:gd name="adj" fmla="val 3488"/>
+            </a:avLst>
+          </a:prstGeom>
+          <a:solidFill>
+            <a:srgbClr val="CADCFC"/>
+          </a:solidFill>
+          <a:ln w="10160">
+            <a:solidFill>
+              <a:srgbClr val="1E2761"/>
+            </a:solidFill>
+            <a:prstDash val="solid"/>
+          </a:ln>
+        </p:spPr>
+      </p:sp>
+      <p:sp>
+        <p:nvSpPr>
+          <p:cNvPr id="29" name="Shape 27"/>
+          <p:cNvSpPr/>
+          <p:nvPr/>
+        </p:nvSpPr>
+        <p:spPr>
+          <a:xfrm>
+            <a:off x="3364992" y="3163824"/>
+            <a:ext cx="320040" cy="320040"/>
+          </a:xfrm>
+          <a:prstGeom prst="ellipse">
+            <a:avLst/>
+          </a:prstGeom>
+          <a:solidFill>
+            <a:srgbClr val="1E2761"/>
+          </a:solidFill>
+          <a:ln/>
+        </p:spPr>
+      </p:sp>
+      <p:sp>
+        <p:nvSpPr>
+          <p:cNvPr id="30" name="Text 28"/>
+          <p:cNvSpPr/>
+          <p:nvPr/>
+        </p:nvSpPr>
+        <p:spPr>
+          <a:xfrm>
+            <a:off x="3364992" y="3214116"/>
+            <a:ext cx="320040" cy="146304"/>
+          </a:xfrm>
+          <a:prstGeom prst="rect">
+            <a:avLst/>
+          </a:prstGeom>
+          <a:noFill/>
+          <a:ln/>
+        </p:spPr>
+        <p:txBody>
+          <a:bodyPr wrap="square" lIns="0" tIns="0" rIns="0" bIns="0" rtlCol="0" anchor="ctr"/>
+          <a:lstStyle/>
+          <a:p>
+            <a:pPr algn="ctr" indent="0" marL="0">
+              <a:buNone/>
+            </a:pPr>
+            <a:r>
+              <a:rPr lang="en-US" sz="900" b="1" dirty="0">
+                <a:solidFill>
+                  <a:srgbClr val="FFFFFF"/>
+                </a:solidFill>
+                <a:latin typeface="Calibri" pitchFamily="34" charset="0"/>
+                <a:ea typeface="Calibri" pitchFamily="34" charset="-122"/>
+                <a:cs typeface="Calibri" pitchFamily="34" charset="-120"/>
+              </a:rPr>
+              <a:t>5</a:t>
+            </a:r>
+            <a:endParaRPr lang="en-US" sz="900" dirty="0"/>
+          </a:p>
+        </p:txBody>
+      </p:sp>
+      <p:sp>
+        <p:nvSpPr>
+          <p:cNvPr id="31" name="Text 29"/>
+          <p:cNvSpPr/>
+          <p:nvPr/>
+        </p:nvSpPr>
+        <p:spPr>
+          <a:xfrm>
+            <a:off x="3785616" y="3163824"/>
+            <a:ext cx="1975104" cy="310896"/>
+          </a:xfrm>
+          <a:prstGeom prst="rect">
+            <a:avLst/>
+          </a:prstGeom>
+          <a:noFill/>
+          <a:ln/>
+        </p:spPr>
+        <p:txBody>
+          <a:bodyPr wrap="square" lIns="0" tIns="0" rIns="0" bIns="0" rtlCol="0" anchor="ctr">
+            <a:normAutofit/>
+          </a:bodyPr>
+          <a:lstStyle/>
+          <a:p>
+            <a:pPr indent="0" marL="0">
+              <a:buNone/>
+            </a:pPr>
+            <a:r>
+              <a:rPr lang="en-US" sz="1500" b="1" dirty="0">
+                <a:solidFill>
+                  <a:srgbClr val="1E2761"/>
+                </a:solidFill>
+                <a:latin typeface="Calibri" pitchFamily="34" charset="0"/>
+                <a:ea typeface="Calibri" pitchFamily="34" charset="-122"/>
+                <a:cs typeface="Calibri" pitchFamily="34" charset="-120"/>
+              </a:rPr>
+              <a:t>Queue</a:t>
+            </a:r>
+            <a:endParaRPr lang="en-US" sz="1500" dirty="0"/>
+          </a:p>
+        </p:txBody>
+      </p:sp>
+      <p:sp>
+        <p:nvSpPr>
+          <p:cNvPr id="32" name="Text 30"/>
+          <p:cNvSpPr/>
+          <p:nvPr/>
+        </p:nvSpPr>
+        <p:spPr>
+          <a:xfrm>
+            <a:off x="3401568" y="3547872"/>
+            <a:ext cx="2340864" cy="950976"/>
+          </a:xfrm>
+          <a:prstGeom prst="rect">
+            <a:avLst/>
+          </a:prstGeom>
+          <a:noFill/>
+          <a:ln/>
+        </p:spPr>
+        <p:txBody>
+          <a:bodyPr wrap="square" lIns="0" tIns="0" rIns="0" bIns="0" rtlCol="0" anchor="t">
+            <a:normAutofit/>
+          </a:bodyPr>
+          <a:lstStyle/>
+          <a:p>
+            <a:pPr indent="0" marL="0">
+              <a:buNone/>
+            </a:pPr>
+            <a:r>
+              <a:rPr lang="en-US" sz="1150" dirty="0">
+                <a:solidFill>
+                  <a:srgbClr val="212121"/>
+                </a:solidFill>
+                <a:latin typeface="Calibri" pitchFamily="34" charset="0"/>
+                <a:ea typeface="Calibri" pitchFamily="34" charset="-122"/>
+                <a:cs typeface="Calibri" pitchFamily="34" charset="-120"/>
+              </a:rPr>
+              <a:t>new messages emitted this superstep wait for the next one</a:t>
+            </a:r>
+            <a:endParaRPr lang="en-US" sz="1150" dirty="0"/>
+          </a:p>
+        </p:txBody>
+      </p:sp>
+      <p:sp>
+        <p:nvSpPr>
+          <p:cNvPr id="33" name="Shape 31"/>
           <p:cNvSpPr/>
           <p:nvPr/>
         </p:nvSpPr>
@@ -12088,7 +13092,7 @@
       </p:sp>
       <p:sp>
         <p:nvSpPr>
-          <p:cNvPr id="7" name="Text 5"/>
+          <p:cNvPr id="34" name="Text 32"/>
           <p:cNvSpPr/>
           <p:nvPr/>
         </p:nvSpPr>
@@ -12255,735 +13259,174 @@
                 <a:ea typeface="Calibri" pitchFamily="34" charset="-122"/>
                 <a:cs typeface="Calibri" pitchFamily="34" charset="-120"/>
               </a:rPr>
-              <a:t>Events give you observability</a:t>
+              <a:t>Why supersteps matter</a:t>
             </a:r>
             <a:endParaRPr lang="en-US" sz="2800" dirty="0"/>
           </a:p>
         </p:txBody>
       </p:sp>
-      <p:graphicFrame>
-        <p:nvGraphicFramePr>
-          <p:cNvPr id="10" name="Table 0"/>
-          <p:cNvGraphicFramePr>
-            <a:graphicFrameLocks noGrp="1"/>
-          </p:cNvGraphicFramePr>
-          <p:nvPr>
-            <p:extLst>
-              <p:ext uri="{D42A27DB-BD31-4B8C-83A1-F6EECF244321}">
-                <p14:modId xmlns:p14="http://schemas.microsoft.com/office/powerpoint/2010/main" val="1579011935"/>
-              </p:ext>
-            </p:extLst>
-          </p:nvPr>
-        </p:nvGraphicFramePr>
-        <p:xfrm>
-          <a:off x="365760" y="1078992"/>
-          <a:ext cx="8412480" cy="914400"/>
-        </p:xfrm>
-        <a:graphic>
-          <a:graphicData uri="http://schemas.openxmlformats.org/drawingml/2006/table">
-            <a:tbl>
-              <a:tblPr/>
-              <a:tblGrid>
-                <a:gridCol w="4023360"/>
-                <a:gridCol w="4389120"/>
-              </a:tblGrid>
-              <a:tr h="658368">
-                <a:tc>
-                  <a:txBody>
-                    <a:bodyPr/>
-                    <a:lstStyle/>
-                    <a:p>
-                      <a:pPr indent="0" marL="0">
-                        <a:buNone/>
-                      </a:pPr>
-                      <a:r>
-                        <a:rPr lang="en-US" sz="1100" b="1" dirty="0">
-                          <a:solidFill>
-                            <a:srgbClr val="FFFFFF"/>
-                          </a:solidFill>
-                          <a:latin typeface="Calibri" pitchFamily="34" charset="0"/>
-                          <a:ea typeface="Calibri" pitchFamily="34" charset="-122"/>
-                          <a:cs typeface="Calibri" pitchFamily="34" charset="-120"/>
-                        </a:rPr>
-                        <a:t>Event type</a:t>
-                      </a:r>
-                      <a:endParaRPr lang="en-US" sz="1100" dirty="0">
-                        <a:latin typeface="Calibri" charset="0"/>
-                        <a:ea typeface="Calibri" charset="0"/>
-                        <a:cs typeface="Calibri" charset="0"/>
-                      </a:endParaRPr>
-                    </a:p>
-                  </a:txBody>
-                  <a:tcPr marL="54864" marR="54864" marT="54864" marB="54864" anchor="ctr">
-                    <a:lnL w="6350" cap="flat" cmpd="sng" algn="ctr">
-                      <a:solidFill>
-                        <a:srgbClr val="D1D5DB"/>
-                      </a:solidFill>
-                      <a:prstDash val="solid"/>
-                      <a:round/>
-                      <a:headEnd type="none" w="med" len="med"/>
-                      <a:tailEnd type="none" w="med" len="med"/>
-                    </a:lnL>
-                    <a:lnR w="6350" cap="flat" cmpd="sng" algn="ctr">
-                      <a:solidFill>
-                        <a:srgbClr val="D1D5DB"/>
-                      </a:solidFill>
-                      <a:prstDash val="solid"/>
-                      <a:round/>
-                      <a:headEnd type="none" w="med" len="med"/>
-                      <a:tailEnd type="none" w="med" len="med"/>
-                    </a:lnR>
-                    <a:lnT w="6350" cap="flat" cmpd="sng" algn="ctr">
-                      <a:solidFill>
-                        <a:srgbClr val="D1D5DB"/>
-                      </a:solidFill>
-                      <a:prstDash val="solid"/>
-                      <a:round/>
-                      <a:headEnd type="none" w="med" len="med"/>
-                      <a:tailEnd type="none" w="med" len="med"/>
-                    </a:lnT>
-                    <a:lnB w="6350" cap="flat" cmpd="sng" algn="ctr">
-                      <a:solidFill>
-                        <a:srgbClr val="D1D5DB"/>
-                      </a:solidFill>
-                      <a:prstDash val="solid"/>
-                      <a:round/>
-                      <a:headEnd type="none" w="med" len="med"/>
-                      <a:tailEnd type="none" w="med" len="med"/>
-                    </a:lnB>
-                    <a:solidFill>
-                      <a:srgbClr val="1E2761"/>
-                    </a:solidFill>
-                  </a:tcPr>
-                </a:tc>
-                <a:tc>
-                  <a:txBody>
-                    <a:bodyPr/>
-                    <a:lstStyle/>
-                    <a:p>
-                      <a:pPr indent="0" marL="0">
-                        <a:buNone/>
-                      </a:pPr>
-                      <a:r>
-                        <a:rPr lang="en-US" sz="1100" b="1" dirty="0">
-                          <a:solidFill>
-                            <a:srgbClr val="FFFFFF"/>
-                          </a:solidFill>
-                          <a:latin typeface="Calibri" pitchFamily="34" charset="0"/>
-                          <a:ea typeface="Calibri" pitchFamily="34" charset="-122"/>
-                          <a:cs typeface="Calibri" pitchFamily="34" charset="-120"/>
-                        </a:rPr>
-                        <a:t>Meaning</a:t>
-                      </a:r>
-                      <a:endParaRPr lang="en-US" sz="1100" dirty="0">
-                        <a:latin typeface="Calibri" charset="0"/>
-                        <a:ea typeface="Calibri" charset="0"/>
-                        <a:cs typeface="Calibri" charset="0"/>
-                      </a:endParaRPr>
-                    </a:p>
-                  </a:txBody>
-                  <a:tcPr marL="54864" marR="54864" marT="54864" marB="54864" anchor="ctr">
-                    <a:lnL w="6350" cap="flat" cmpd="sng" algn="ctr">
-                      <a:solidFill>
-                        <a:srgbClr val="D1D5DB"/>
-                      </a:solidFill>
-                      <a:prstDash val="solid"/>
-                      <a:round/>
-                      <a:headEnd type="none" w="med" len="med"/>
-                      <a:tailEnd type="none" w="med" len="med"/>
-                    </a:lnL>
-                    <a:lnR w="6350" cap="flat" cmpd="sng" algn="ctr">
-                      <a:solidFill>
-                        <a:srgbClr val="D1D5DB"/>
-                      </a:solidFill>
-                      <a:prstDash val="solid"/>
-                      <a:round/>
-                      <a:headEnd type="none" w="med" len="med"/>
-                      <a:tailEnd type="none" w="med" len="med"/>
-                    </a:lnR>
-                    <a:lnT w="6350" cap="flat" cmpd="sng" algn="ctr">
-                      <a:solidFill>
-                        <a:srgbClr val="D1D5DB"/>
-                      </a:solidFill>
-                      <a:prstDash val="solid"/>
-                      <a:round/>
-                      <a:headEnd type="none" w="med" len="med"/>
-                      <a:tailEnd type="none" w="med" len="med"/>
-                    </a:lnT>
-                    <a:lnB w="6350" cap="flat" cmpd="sng" algn="ctr">
-                      <a:solidFill>
-                        <a:srgbClr val="D1D5DB"/>
-                      </a:solidFill>
-                      <a:prstDash val="solid"/>
-                      <a:round/>
-                      <a:headEnd type="none" w="med" len="med"/>
-                      <a:tailEnd type="none" w="med" len="med"/>
-                    </a:lnB>
-                    <a:solidFill>
-                      <a:srgbClr val="1E2761"/>
-                    </a:solidFill>
-                  </a:tcPr>
-                </a:tc>
-              </a:tr>
-              <a:tr h="658368">
-                <a:tc>
-                  <a:txBody>
-                    <a:bodyPr/>
-                    <a:lstStyle/>
-                    <a:p>
-                      <a:pPr indent="0" marL="0">
-                        <a:buNone/>
-                      </a:pPr>
-                      <a:r>
-                        <a:rPr lang="en-US" sz="1100" dirty="0">
-                          <a:solidFill>
-                            <a:srgbClr val="212121"/>
-                          </a:solidFill>
-                          <a:latin typeface="Calibri" pitchFamily="34" charset="0"/>
-                          <a:ea typeface="Calibri" pitchFamily="34" charset="-122"/>
-                          <a:cs typeface="Calibri" pitchFamily="34" charset="-120"/>
-                        </a:rPr>
-                        <a:t>output / intermediate</a:t>
-                      </a:r>
-                      <a:endParaRPr lang="en-US" sz="1100" dirty="0">
-                        <a:latin typeface="Calibri" charset="0"/>
-                        <a:ea typeface="Calibri" charset="0"/>
-                        <a:cs typeface="Calibri" charset="0"/>
-                      </a:endParaRPr>
-                    </a:p>
-                  </a:txBody>
-                  <a:tcPr marL="54864" marR="54864" marT="54864" marB="54864" anchor="ctr">
-                    <a:lnL w="6350" cap="flat" cmpd="sng" algn="ctr">
-                      <a:solidFill>
-                        <a:srgbClr val="D1D5DB"/>
-                      </a:solidFill>
-                      <a:prstDash val="solid"/>
-                      <a:round/>
-                      <a:headEnd type="none" w="med" len="med"/>
-                      <a:tailEnd type="none" w="med" len="med"/>
-                    </a:lnL>
-                    <a:lnR w="6350" cap="flat" cmpd="sng" algn="ctr">
-                      <a:solidFill>
-                        <a:srgbClr val="D1D5DB"/>
-                      </a:solidFill>
-                      <a:prstDash val="solid"/>
-                      <a:round/>
-                      <a:headEnd type="none" w="med" len="med"/>
-                      <a:tailEnd type="none" w="med" len="med"/>
-                    </a:lnR>
-                    <a:lnT w="6350" cap="flat" cmpd="sng" algn="ctr">
-                      <a:solidFill>
-                        <a:srgbClr val="D1D5DB"/>
-                      </a:solidFill>
-                      <a:prstDash val="solid"/>
-                      <a:round/>
-                      <a:headEnd type="none" w="med" len="med"/>
-                      <a:tailEnd type="none" w="med" len="med"/>
-                    </a:lnT>
-                    <a:lnB w="6350" cap="flat" cmpd="sng" algn="ctr">
-                      <a:solidFill>
-                        <a:srgbClr val="D1D5DB"/>
-                      </a:solidFill>
-                      <a:prstDash val="solid"/>
-                      <a:round/>
-                      <a:headEnd type="none" w="med" len="med"/>
-                      <a:tailEnd type="none" w="med" len="med"/>
-                    </a:lnB>
-                    <a:solidFill>
-                      <a:srgbClr val="FFFFFF"/>
-                    </a:solidFill>
-                  </a:tcPr>
-                </a:tc>
-                <a:tc>
-                  <a:txBody>
-                    <a:bodyPr/>
-                    <a:lstStyle/>
-                    <a:p>
-                      <a:pPr indent="0" marL="0">
-                        <a:buNone/>
-                      </a:pPr>
-                      <a:r>
-                        <a:rPr lang="en-US" sz="1100" dirty="0">
-                          <a:solidFill>
-                            <a:srgbClr val="212121"/>
-                          </a:solidFill>
-                          <a:latin typeface="Calibri" pitchFamily="34" charset="0"/>
-                          <a:ea typeface="Calibri" pitchFamily="34" charset="-122"/>
-                          <a:cs typeface="Calibri" pitchFamily="34" charset="-120"/>
-                        </a:rPr>
-                        <a:t>Terminal vs. observational workflow output</a:t>
-                      </a:r>
-                      <a:endParaRPr lang="en-US" sz="1100" dirty="0">
-                        <a:latin typeface="Calibri" charset="0"/>
-                        <a:ea typeface="Calibri" charset="0"/>
-                        <a:cs typeface="Calibri" charset="0"/>
-                      </a:endParaRPr>
-                    </a:p>
-                  </a:txBody>
-                  <a:tcPr marL="54864" marR="54864" marT="54864" marB="54864" anchor="ctr">
-                    <a:lnL w="6350" cap="flat" cmpd="sng" algn="ctr">
-                      <a:solidFill>
-                        <a:srgbClr val="D1D5DB"/>
-                      </a:solidFill>
-                      <a:prstDash val="solid"/>
-                      <a:round/>
-                      <a:headEnd type="none" w="med" len="med"/>
-                      <a:tailEnd type="none" w="med" len="med"/>
-                    </a:lnL>
-                    <a:lnR w="6350" cap="flat" cmpd="sng" algn="ctr">
-                      <a:solidFill>
-                        <a:srgbClr val="D1D5DB"/>
-                      </a:solidFill>
-                      <a:prstDash val="solid"/>
-                      <a:round/>
-                      <a:headEnd type="none" w="med" len="med"/>
-                      <a:tailEnd type="none" w="med" len="med"/>
-                    </a:lnR>
-                    <a:lnT w="6350" cap="flat" cmpd="sng" algn="ctr">
-                      <a:solidFill>
-                        <a:srgbClr val="D1D5DB"/>
-                      </a:solidFill>
-                      <a:prstDash val="solid"/>
-                      <a:round/>
-                      <a:headEnd type="none" w="med" len="med"/>
-                      <a:tailEnd type="none" w="med" len="med"/>
-                    </a:lnT>
-                    <a:lnB w="6350" cap="flat" cmpd="sng" algn="ctr">
-                      <a:solidFill>
-                        <a:srgbClr val="D1D5DB"/>
-                      </a:solidFill>
-                      <a:prstDash val="solid"/>
-                      <a:round/>
-                      <a:headEnd type="none" w="med" len="med"/>
-                      <a:tailEnd type="none" w="med" len="med"/>
-                    </a:lnB>
-                    <a:solidFill>
-                      <a:srgbClr val="FFFFFF"/>
-                    </a:solidFill>
-                  </a:tcPr>
-                </a:tc>
-              </a:tr>
-              <a:tr h="658368">
-                <a:tc>
-                  <a:txBody>
-                    <a:bodyPr/>
-                    <a:lstStyle/>
-                    <a:p>
-                      <a:pPr indent="0" marL="0">
-                        <a:buNone/>
-                      </a:pPr>
-                      <a:r>
-                        <a:rPr lang="en-US" sz="1100" dirty="0">
-                          <a:solidFill>
-                            <a:srgbClr val="212121"/>
-                          </a:solidFill>
-                          <a:latin typeface="Calibri" pitchFamily="34" charset="0"/>
-                          <a:ea typeface="Calibri" pitchFamily="34" charset="-122"/>
-                          <a:cs typeface="Calibri" pitchFamily="34" charset="-120"/>
-                        </a:rPr>
-                        <a:t>executor_invoked / executor_completed / executor_failed</a:t>
-                      </a:r>
-                      <a:endParaRPr lang="en-US" sz="1100" dirty="0">
-                        <a:latin typeface="Calibri" charset="0"/>
-                        <a:ea typeface="Calibri" charset="0"/>
-                        <a:cs typeface="Calibri" charset="0"/>
-                      </a:endParaRPr>
-                    </a:p>
-                  </a:txBody>
-                  <a:tcPr marL="54864" marR="54864" marT="54864" marB="54864" anchor="ctr">
-                    <a:lnL w="6350" cap="flat" cmpd="sng" algn="ctr">
-                      <a:solidFill>
-                        <a:srgbClr val="D1D5DB"/>
-                      </a:solidFill>
-                      <a:prstDash val="solid"/>
-                      <a:round/>
-                      <a:headEnd type="none" w="med" len="med"/>
-                      <a:tailEnd type="none" w="med" len="med"/>
-                    </a:lnL>
-                    <a:lnR w="6350" cap="flat" cmpd="sng" algn="ctr">
-                      <a:solidFill>
-                        <a:srgbClr val="D1D5DB"/>
-                      </a:solidFill>
-                      <a:prstDash val="solid"/>
-                      <a:round/>
-                      <a:headEnd type="none" w="med" len="med"/>
-                      <a:tailEnd type="none" w="med" len="med"/>
-                    </a:lnR>
-                    <a:lnT w="6350" cap="flat" cmpd="sng" algn="ctr">
-                      <a:solidFill>
-                        <a:srgbClr val="D1D5DB"/>
-                      </a:solidFill>
-                      <a:prstDash val="solid"/>
-                      <a:round/>
-                      <a:headEnd type="none" w="med" len="med"/>
-                      <a:tailEnd type="none" w="med" len="med"/>
-                    </a:lnT>
-                    <a:lnB w="6350" cap="flat" cmpd="sng" algn="ctr">
-                      <a:solidFill>
-                        <a:srgbClr val="D1D5DB"/>
-                      </a:solidFill>
-                      <a:prstDash val="solid"/>
-                      <a:round/>
-                      <a:headEnd type="none" w="med" len="med"/>
-                      <a:tailEnd type="none" w="med" len="med"/>
-                    </a:lnB>
-                    <a:solidFill>
-                      <a:srgbClr val="F3F4F6"/>
-                    </a:solidFill>
-                  </a:tcPr>
-                </a:tc>
-                <a:tc>
-                  <a:txBody>
-                    <a:bodyPr/>
-                    <a:lstStyle/>
-                    <a:p>
-                      <a:pPr indent="0" marL="0">
-                        <a:buNone/>
-                      </a:pPr>
-                      <a:r>
-                        <a:rPr lang="en-US" sz="1100" dirty="0">
-                          <a:solidFill>
-                            <a:srgbClr val="212121"/>
-                          </a:solidFill>
-                          <a:latin typeface="Calibri" pitchFamily="34" charset="0"/>
-                          <a:ea typeface="Calibri" pitchFamily="34" charset="-122"/>
-                          <a:cs typeface="Calibri" pitchFamily="34" charset="-120"/>
-                        </a:rPr>
-                        <a:t>Per-executor lifecycle</a:t>
-                      </a:r>
-                      <a:endParaRPr lang="en-US" sz="1100" dirty="0">
-                        <a:latin typeface="Calibri" charset="0"/>
-                        <a:ea typeface="Calibri" charset="0"/>
-                        <a:cs typeface="Calibri" charset="0"/>
-                      </a:endParaRPr>
-                    </a:p>
-                  </a:txBody>
-                  <a:tcPr marL="54864" marR="54864" marT="54864" marB="54864" anchor="ctr">
-                    <a:lnL w="6350" cap="flat" cmpd="sng" algn="ctr">
-                      <a:solidFill>
-                        <a:srgbClr val="D1D5DB"/>
-                      </a:solidFill>
-                      <a:prstDash val="solid"/>
-                      <a:round/>
-                      <a:headEnd type="none" w="med" len="med"/>
-                      <a:tailEnd type="none" w="med" len="med"/>
-                    </a:lnL>
-                    <a:lnR w="6350" cap="flat" cmpd="sng" algn="ctr">
-                      <a:solidFill>
-                        <a:srgbClr val="D1D5DB"/>
-                      </a:solidFill>
-                      <a:prstDash val="solid"/>
-                      <a:round/>
-                      <a:headEnd type="none" w="med" len="med"/>
-                      <a:tailEnd type="none" w="med" len="med"/>
-                    </a:lnR>
-                    <a:lnT w="6350" cap="flat" cmpd="sng" algn="ctr">
-                      <a:solidFill>
-                        <a:srgbClr val="D1D5DB"/>
-                      </a:solidFill>
-                      <a:prstDash val="solid"/>
-                      <a:round/>
-                      <a:headEnd type="none" w="med" len="med"/>
-                      <a:tailEnd type="none" w="med" len="med"/>
-                    </a:lnT>
-                    <a:lnB w="6350" cap="flat" cmpd="sng" algn="ctr">
-                      <a:solidFill>
-                        <a:srgbClr val="D1D5DB"/>
-                      </a:solidFill>
-                      <a:prstDash val="solid"/>
-                      <a:round/>
-                      <a:headEnd type="none" w="med" len="med"/>
-                      <a:tailEnd type="none" w="med" len="med"/>
-                    </a:lnB>
-                    <a:solidFill>
-                      <a:srgbClr val="F3F4F6"/>
-                    </a:solidFill>
-                  </a:tcPr>
-                </a:tc>
-              </a:tr>
-              <a:tr h="658368">
-                <a:tc>
-                  <a:txBody>
-                    <a:bodyPr/>
-                    <a:lstStyle/>
-                    <a:p>
-                      <a:pPr indent="0" marL="0">
-                        <a:buNone/>
-                      </a:pPr>
-                      <a:r>
-                        <a:rPr lang="en-US" sz="1100" dirty="0">
-                          <a:solidFill>
-                            <a:srgbClr val="212121"/>
-                          </a:solidFill>
-                          <a:latin typeface="Calibri" pitchFamily="34" charset="0"/>
-                          <a:ea typeface="Calibri" pitchFamily="34" charset="-122"/>
-                          <a:cs typeface="Calibri" pitchFamily="34" charset="-120"/>
-                        </a:rPr>
-                        <a:t>superstep_started / superstep_completed</a:t>
-                      </a:r>
-                      <a:endParaRPr lang="en-US" sz="1100" dirty="0">
-                        <a:latin typeface="Calibri" charset="0"/>
-                        <a:ea typeface="Calibri" charset="0"/>
-                        <a:cs typeface="Calibri" charset="0"/>
-                      </a:endParaRPr>
-                    </a:p>
-                  </a:txBody>
-                  <a:tcPr marL="54864" marR="54864" marT="54864" marB="54864" anchor="ctr">
-                    <a:lnL w="6350" cap="flat" cmpd="sng" algn="ctr">
-                      <a:solidFill>
-                        <a:srgbClr val="D1D5DB"/>
-                      </a:solidFill>
-                      <a:prstDash val="solid"/>
-                      <a:round/>
-                      <a:headEnd type="none" w="med" len="med"/>
-                      <a:tailEnd type="none" w="med" len="med"/>
-                    </a:lnL>
-                    <a:lnR w="6350" cap="flat" cmpd="sng" algn="ctr">
-                      <a:solidFill>
-                        <a:srgbClr val="D1D5DB"/>
-                      </a:solidFill>
-                      <a:prstDash val="solid"/>
-                      <a:round/>
-                      <a:headEnd type="none" w="med" len="med"/>
-                      <a:tailEnd type="none" w="med" len="med"/>
-                    </a:lnR>
-                    <a:lnT w="6350" cap="flat" cmpd="sng" algn="ctr">
-                      <a:solidFill>
-                        <a:srgbClr val="D1D5DB"/>
-                      </a:solidFill>
-                      <a:prstDash val="solid"/>
-                      <a:round/>
-                      <a:headEnd type="none" w="med" len="med"/>
-                      <a:tailEnd type="none" w="med" len="med"/>
-                    </a:lnT>
-                    <a:lnB w="6350" cap="flat" cmpd="sng" algn="ctr">
-                      <a:solidFill>
-                        <a:srgbClr val="D1D5DB"/>
-                      </a:solidFill>
-                      <a:prstDash val="solid"/>
-                      <a:round/>
-                      <a:headEnd type="none" w="med" len="med"/>
-                      <a:tailEnd type="none" w="med" len="med"/>
-                    </a:lnB>
-                    <a:solidFill>
-                      <a:srgbClr val="FFFFFF"/>
-                    </a:solidFill>
-                  </a:tcPr>
-                </a:tc>
-                <a:tc>
-                  <a:txBody>
-                    <a:bodyPr/>
-                    <a:lstStyle/>
-                    <a:p>
-                      <a:pPr indent="0" marL="0">
-                        <a:buNone/>
-                      </a:pPr>
-                      <a:r>
-                        <a:rPr lang="en-US" sz="1100" dirty="0">
-                          <a:solidFill>
-                            <a:srgbClr val="212121"/>
-                          </a:solidFill>
-                          <a:latin typeface="Calibri" pitchFamily="34" charset="0"/>
-                          <a:ea typeface="Calibri" pitchFamily="34" charset="-122"/>
-                          <a:cs typeface="Calibri" pitchFamily="34" charset="-120"/>
-                        </a:rPr>
-                        <a:t>Superstep boundaries</a:t>
-                      </a:r>
-                      <a:endParaRPr lang="en-US" sz="1100" dirty="0">
-                        <a:latin typeface="Calibri" charset="0"/>
-                        <a:ea typeface="Calibri" charset="0"/>
-                        <a:cs typeface="Calibri" charset="0"/>
-                      </a:endParaRPr>
-                    </a:p>
-                  </a:txBody>
-                  <a:tcPr marL="54864" marR="54864" marT="54864" marB="54864" anchor="ctr">
-                    <a:lnL w="6350" cap="flat" cmpd="sng" algn="ctr">
-                      <a:solidFill>
-                        <a:srgbClr val="D1D5DB"/>
-                      </a:solidFill>
-                      <a:prstDash val="solid"/>
-                      <a:round/>
-                      <a:headEnd type="none" w="med" len="med"/>
-                      <a:tailEnd type="none" w="med" len="med"/>
-                    </a:lnL>
-                    <a:lnR w="6350" cap="flat" cmpd="sng" algn="ctr">
-                      <a:solidFill>
-                        <a:srgbClr val="D1D5DB"/>
-                      </a:solidFill>
-                      <a:prstDash val="solid"/>
-                      <a:round/>
-                      <a:headEnd type="none" w="med" len="med"/>
-                      <a:tailEnd type="none" w="med" len="med"/>
-                    </a:lnR>
-                    <a:lnT w="6350" cap="flat" cmpd="sng" algn="ctr">
-                      <a:solidFill>
-                        <a:srgbClr val="D1D5DB"/>
-                      </a:solidFill>
-                      <a:prstDash val="solid"/>
-                      <a:round/>
-                      <a:headEnd type="none" w="med" len="med"/>
-                      <a:tailEnd type="none" w="med" len="med"/>
-                    </a:lnT>
-                    <a:lnB w="6350" cap="flat" cmpd="sng" algn="ctr">
-                      <a:solidFill>
-                        <a:srgbClr val="D1D5DB"/>
-                      </a:solidFill>
-                      <a:prstDash val="solid"/>
-                      <a:round/>
-                      <a:headEnd type="none" w="med" len="med"/>
-                      <a:tailEnd type="none" w="med" len="med"/>
-                    </a:lnB>
-                    <a:solidFill>
-                      <a:srgbClr val="FFFFFF"/>
-                    </a:solidFill>
-                  </a:tcPr>
-                </a:tc>
-              </a:tr>
-              <a:tr h="658368">
-                <a:tc>
-                  <a:txBody>
-                    <a:bodyPr/>
-                    <a:lstStyle/>
-                    <a:p>
-                      <a:pPr indent="0" marL="0">
-                        <a:buNone/>
-                      </a:pPr>
-                      <a:r>
-                        <a:rPr lang="en-US" sz="1100" dirty="0">
-                          <a:solidFill>
-                            <a:srgbClr val="212121"/>
-                          </a:solidFill>
-                          <a:latin typeface="Calibri" pitchFamily="34" charset="0"/>
-                          <a:ea typeface="Calibri" pitchFamily="34" charset="-122"/>
-                          <a:cs typeface="Calibri" pitchFamily="34" charset="-120"/>
-                        </a:rPr>
-                        <a:t>request_info</a:t>
-                      </a:r>
-                      <a:endParaRPr lang="en-US" sz="1100" dirty="0">
-                        <a:latin typeface="Calibri" charset="0"/>
-                        <a:ea typeface="Calibri" charset="0"/>
-                        <a:cs typeface="Calibri" charset="0"/>
-                      </a:endParaRPr>
-                    </a:p>
-                  </a:txBody>
-                  <a:tcPr marL="54864" marR="54864" marT="54864" marB="54864" anchor="ctr">
-                    <a:lnL w="6350" cap="flat" cmpd="sng" algn="ctr">
-                      <a:solidFill>
-                        <a:srgbClr val="D1D5DB"/>
-                      </a:solidFill>
-                      <a:prstDash val="solid"/>
-                      <a:round/>
-                      <a:headEnd type="none" w="med" len="med"/>
-                      <a:tailEnd type="none" w="med" len="med"/>
-                    </a:lnL>
-                    <a:lnR w="6350" cap="flat" cmpd="sng" algn="ctr">
-                      <a:solidFill>
-                        <a:srgbClr val="D1D5DB"/>
-                      </a:solidFill>
-                      <a:prstDash val="solid"/>
-                      <a:round/>
-                      <a:headEnd type="none" w="med" len="med"/>
-                      <a:tailEnd type="none" w="med" len="med"/>
-                    </a:lnR>
-                    <a:lnT w="6350" cap="flat" cmpd="sng" algn="ctr">
-                      <a:solidFill>
-                        <a:srgbClr val="D1D5DB"/>
-                      </a:solidFill>
-                      <a:prstDash val="solid"/>
-                      <a:round/>
-                      <a:headEnd type="none" w="med" len="med"/>
-                      <a:tailEnd type="none" w="med" len="med"/>
-                    </a:lnT>
-                    <a:lnB w="6350" cap="flat" cmpd="sng" algn="ctr">
-                      <a:solidFill>
-                        <a:srgbClr val="D1D5DB"/>
-                      </a:solidFill>
-                      <a:prstDash val="solid"/>
-                      <a:round/>
-                      <a:headEnd type="none" w="med" len="med"/>
-                      <a:tailEnd type="none" w="med" len="med"/>
-                    </a:lnB>
-                    <a:solidFill>
-                      <a:srgbClr val="F3F4F6"/>
-                    </a:solidFill>
-                  </a:tcPr>
-                </a:tc>
-                <a:tc>
-                  <a:txBody>
-                    <a:bodyPr/>
-                    <a:lstStyle/>
-                    <a:p>
-                      <a:pPr indent="0" marL="0">
-                        <a:buNone/>
-                      </a:pPr>
-                      <a:r>
-                        <a:rPr lang="en-US" sz="1100" dirty="0">
-                          <a:solidFill>
-                            <a:srgbClr val="212121"/>
-                          </a:solidFill>
-                          <a:latin typeface="Calibri" pitchFamily="34" charset="0"/>
-                          <a:ea typeface="Calibri" pitchFamily="34" charset="-122"/>
-                          <a:cs typeface="Calibri" pitchFamily="34" charset="-120"/>
-                        </a:rPr>
-                        <a:t>An executor is requesting external input (human-in-the-loop)</a:t>
-                      </a:r>
-                      <a:endParaRPr lang="en-US" sz="1100" dirty="0">
-                        <a:latin typeface="Calibri" charset="0"/>
-                        <a:ea typeface="Calibri" charset="0"/>
-                        <a:cs typeface="Calibri" charset="0"/>
-                      </a:endParaRPr>
-                    </a:p>
-                  </a:txBody>
-                  <a:tcPr marL="54864" marR="54864" marT="54864" marB="54864" anchor="ctr">
-                    <a:lnL w="6350" cap="flat" cmpd="sng" algn="ctr">
-                      <a:solidFill>
-                        <a:srgbClr val="D1D5DB"/>
-                      </a:solidFill>
-                      <a:prstDash val="solid"/>
-                      <a:round/>
-                      <a:headEnd type="none" w="med" len="med"/>
-                      <a:tailEnd type="none" w="med" len="med"/>
-                    </a:lnL>
-                    <a:lnR w="6350" cap="flat" cmpd="sng" algn="ctr">
-                      <a:solidFill>
-                        <a:srgbClr val="D1D5DB"/>
-                      </a:solidFill>
-                      <a:prstDash val="solid"/>
-                      <a:round/>
-                      <a:headEnd type="none" w="med" len="med"/>
-                      <a:tailEnd type="none" w="med" len="med"/>
-                    </a:lnR>
-                    <a:lnT w="6350" cap="flat" cmpd="sng" algn="ctr">
-                      <a:solidFill>
-                        <a:srgbClr val="D1D5DB"/>
-                      </a:solidFill>
-                      <a:prstDash val="solid"/>
-                      <a:round/>
-                      <a:headEnd type="none" w="med" len="med"/>
-                      <a:tailEnd type="none" w="med" len="med"/>
-                    </a:lnT>
-                    <a:lnB w="6350" cap="flat" cmpd="sng" algn="ctr">
-                      <a:solidFill>
-                        <a:srgbClr val="D1D5DB"/>
-                      </a:solidFill>
-                      <a:prstDash val="solid"/>
-                      <a:round/>
-                      <a:headEnd type="none" w="med" len="med"/>
-                      <a:tailEnd type="none" w="med" len="med"/>
-                    </a:lnB>
-                    <a:solidFill>
-                      <a:srgbClr val="F3F4F6"/>
-                    </a:solidFill>
-                  </a:tcPr>
-                </a:tc>
-              </a:tr>
-            </a:tbl>
-          </a:graphicData>
-        </a:graphic>
-      </p:graphicFrame>
-      <p:sp>
-        <p:nvSpPr>
-          <p:cNvPr id="6" name="Shape 3"/>
+      <p:sp>
+        <p:nvSpPr>
+          <p:cNvPr id="5" name="Text 3"/>
+          <p:cNvSpPr/>
+          <p:nvPr/>
+        </p:nvSpPr>
+        <p:spPr>
+          <a:xfrm>
+            <a:off x="502920" y="1170432"/>
+            <a:ext cx="7955280" cy="3520440"/>
+          </a:xfrm>
+          <a:prstGeom prst="rect">
+            <a:avLst/>
+          </a:prstGeom>
+          <a:noFill/>
+          <a:ln/>
+        </p:spPr>
+        <p:txBody>
+          <a:bodyPr wrap="square" lIns="0" tIns="0" rIns="0" bIns="0" rtlCol="0" anchor="t">
+            <a:normAutofit/>
+          </a:bodyPr>
+          <a:lstStyle/>
+          <a:p>
+            <a:pPr marL="342900" indent="-342900">
+              <a:spcAft>
+                <a:spcPts val="1000"/>
+              </a:spcAft>
+              <a:buSzPct val="100000"/>
+              <a:buChar char="•"/>
+            </a:pPr>
+            <a:r>
+              <a:rPr lang="en-US" sz="1600" b="1" dirty="0">
+                <a:solidFill>
+                  <a:srgbClr val="1E2761"/>
+                </a:solidFill>
+                <a:latin typeface="Calibri" pitchFamily="34" charset="0"/>
+                <a:ea typeface="Calibri" pitchFamily="34" charset="-122"/>
+                <a:cs typeface="Calibri" pitchFamily="34" charset="-120"/>
+              </a:rPr>
+              <a:t>Deterministic execution</a:t>
+            </a:r>
+            <a:pPr indent="0" marL="0">
+              <a:spcAft>
+                <a:spcPts val="1000"/>
+              </a:spcAft>
+              <a:buNone/>
+            </a:pPr>
+            <a:r>
+              <a:rPr lang="en-US" sz="1600" dirty="0">
+                <a:solidFill>
+                  <a:srgbClr val="212121"/>
+                </a:solidFill>
+                <a:latin typeface="Calibri" pitchFamily="34" charset="0"/>
+                <a:ea typeface="Calibri" pitchFamily="34" charset="-122"/>
+                <a:cs typeface="Calibri" pitchFamily="34" charset="-120"/>
+              </a:rPr>
+              <a:t>  —  the same input always executes in the same order</a:t>
+            </a:r>
+            <a:endParaRPr lang="en-US" sz="1600" dirty="0"/>
+          </a:p>
+          <a:p>
+            <a:pPr marL="342900" indent="-342900">
+              <a:spcAft>
+                <a:spcPts val="1000"/>
+              </a:spcAft>
+              <a:buSzPct val="100000"/>
+              <a:buChar char="•"/>
+            </a:pPr>
+            <a:r>
+              <a:rPr lang="en-US" sz="1600" b="1" dirty="0">
+                <a:solidFill>
+                  <a:srgbClr val="1E2761"/>
+                </a:solidFill>
+                <a:latin typeface="Calibri" pitchFamily="34" charset="0"/>
+                <a:ea typeface="Calibri" pitchFamily="34" charset="-122"/>
+                <a:cs typeface="Calibri" pitchFamily="34" charset="-120"/>
+              </a:rPr>
+              <a:t>Reliable checkpointing</a:t>
+            </a:r>
+            <a:pPr indent="0" marL="0">
+              <a:spcAft>
+                <a:spcPts val="1000"/>
+              </a:spcAft>
+              <a:buNone/>
+            </a:pPr>
+            <a:r>
+              <a:rPr lang="en-US" sz="1600" dirty="0">
+                <a:solidFill>
+                  <a:srgbClr val="212121"/>
+                </a:solidFill>
+                <a:latin typeface="Calibri" pitchFamily="34" charset="0"/>
+                <a:ea typeface="Calibri" pitchFamily="34" charset="-122"/>
+                <a:cs typeface="Calibri" pitchFamily="34" charset="-120"/>
+              </a:rPr>
+              <a:t>  —  state can be saved at superstep boundaries with no ambiguity</a:t>
+            </a:r>
+            <a:endParaRPr lang="en-US" sz="1600" dirty="0"/>
+          </a:p>
+          <a:p>
+            <a:pPr marL="342900" indent="-342900">
+              <a:spcAft>
+                <a:spcPts val="1000"/>
+              </a:spcAft>
+              <a:buSzPct val="100000"/>
+              <a:buChar char="•"/>
+            </a:pPr>
+            <a:r>
+              <a:rPr lang="en-US" sz="1600" b="1" dirty="0">
+                <a:solidFill>
+                  <a:srgbClr val="1E2761"/>
+                </a:solidFill>
+                <a:latin typeface="Calibri" pitchFamily="34" charset="0"/>
+                <a:ea typeface="Calibri" pitchFamily="34" charset="-122"/>
+                <a:cs typeface="Calibri" pitchFamily="34" charset="-120"/>
+              </a:rPr>
+              <a:t>Simpler reasoning</a:t>
+            </a:r>
+            <a:pPr indent="0" marL="0">
+              <a:spcAft>
+                <a:spcPts val="1000"/>
+              </a:spcAft>
+              <a:buNone/>
+            </a:pPr>
+            <a:r>
+              <a:rPr lang="en-US" sz="1600" dirty="0">
+                <a:solidFill>
+                  <a:srgbClr val="212121"/>
+                </a:solidFill>
+                <a:latin typeface="Calibri" pitchFamily="34" charset="0"/>
+                <a:ea typeface="Calibri" pitchFamily="34" charset="-122"/>
+                <a:cs typeface="Calibri" pitchFamily="34" charset="-120"/>
+              </a:rPr>
+              <a:t>  —  no race conditions between supersteps; every executor sees a consistent view</a:t>
+            </a:r>
+            <a:endParaRPr lang="en-US" sz="1600" dirty="0"/>
+          </a:p>
+          <a:p>
+            <a:pPr marL="342900" indent="-342900">
+              <a:spcAft>
+                <a:spcPts val="1000"/>
+              </a:spcAft>
+              <a:buSzPct val="100000"/>
+              <a:buChar char="•"/>
+            </a:pPr>
+            <a:r>
+              <a:rPr lang="en-US" sz="1600" dirty="0">
+                <a:solidFill>
+                  <a:srgbClr val="212121"/>
+                </a:solidFill>
+                <a:latin typeface="Calibri" pitchFamily="34" charset="0"/>
+                <a:ea typeface="Calibri" pitchFamily="34" charset="-122"/>
+                <a:cs typeface="Calibri" pitchFamily="34" charset="-120"/>
+              </a:rPr>
+              <a:t>Caveat: the barrier means one slow executor blocks the whole superstep — consolidate sequential logic into one executor if independent branches need independent timing</a:t>
+            </a:r>
+            <a:endParaRPr lang="en-US" sz="1600" dirty="0"/>
+          </a:p>
+        </p:txBody>
+      </p:sp>
+      <p:sp>
+        <p:nvSpPr>
+          <p:cNvPr id="6" name="Shape 4"/>
           <p:cNvSpPr/>
           <p:nvPr/>
         </p:nvSpPr>
@@ -13006,7 +13449,7 @@
       </p:sp>
       <p:sp>
         <p:nvSpPr>
-          <p:cNvPr id="7" name="Text 4"/>
+          <p:cNvPr id="7" name="Text 5"/>
           <p:cNvSpPr/>
           <p:nvPr/>
         </p:nvSpPr>
@@ -13039,7 +13482,7 @@
                 <a:ea typeface="Calibri" pitchFamily="34" charset="-122"/>
                 <a:cs typeface="Calibri" pitchFamily="34" charset="-120"/>
               </a:rPr>
-              <a:t>Source: https://learn.microsoft.com/en-us/agent-framework/concepts/workflows/events</a:t>
+              <a:t>Source: https://learn.microsoft.com/en-us/agent-framework/concepts/workflows/builder-and-execution</a:t>
             </a:r>
             <a:endParaRPr lang="en-US" sz="820" dirty="0"/>
           </a:p>

--- a/decks/day4/module-3-workflow-fundamentals.pptx
+++ b/decks/day4/module-3-workflow-fundamentals.pptx
@@ -23,10 +23,9 @@
     <p:sldId id="271" r:id="rId17"/>
     <p:sldId id="272" r:id="rId18"/>
     <p:sldId id="273" r:id="rId19"/>
-    <p:sldId id="274" r:id="rId20"/>
   </p:sldIdLst>
   <p:notesMasterIdLst>
-    <p:notesMasterId r:id="rId21"/>
+    <p:notesMasterId r:id="rId20"/>
   </p:notesMasterIdLst>
   <p:sldSz cx="9144000" cy="5143500"/>
   <p:notesSz cx="5143500" cy="9144000"/>
@@ -1143,8 +1142,8 @@
           <a:p>
             <a:r>
               <a:rPr lang="en-US" dirty="0"/>
-              <a:t>• Flag the version-specific behavior clearly since it changes what "replayable" means in earlier Python releases — worth a note if attendees are on an older version.
-• GROUNDING SOURCE: https://learn.microsoft.com/en-us/agent-framework/workflows/checkpoints</a:t>
+              <a:t>• Per this workshop's decision: teach WorkflowBuilder as primary; mention the functional API honestly, including its experimental status, and flag it as worth revisiting once it's no longer experimental. Do not build the lab on it.
+• GROUNDING SOURCE: https://learn.microsoft.com/en-us/agent-framework/concepts/workflows/</a:t>
             </a:r>
             <a:endParaRPr lang="en-US" dirty="0"/>
           </a:p>
@@ -1232,8 +1231,8 @@
           <a:p>
             <a:r>
               <a:rPr lang="en-US" dirty="0"/>
-              <a:t>• Per this workshop's decision: teach WorkflowBuilder as primary; mention the functional API honestly, including its experimental status, and flag it as worth revisiting once it's no longer experimental. Do not build the lab on it.
-• GROUNDING SOURCE: https://learn.microsoft.com/en-us/agent-framework/concepts/workflows/</a:t>
+              <a:t>• Flag this the same way Day 3 flagged Agent Hooks — real, documented, and deliberately out of scope for a code-first week. Mention only; do not teach YAML syntax or build any lab content on it.
+• GROUNDING SOURCE: https://learn.microsoft.com/en-us/agent-framework/workflows/declarative</a:t>
             </a:r>
             <a:endParaRPr lang="en-US" dirty="0"/>
           </a:p>
@@ -1321,8 +1320,12 @@
           <a:p>
             <a:r>
               <a:rPr lang="en-US" dirty="0"/>
-              <a:t>• Flag this the same way Day 3 flagged Agent Hooks — real, documented, and deliberately out of scope for a code-first week. Mention only; do not teach YAML syntax or build any lab content on it.
-• GROUNDING SOURCE: https://learn.microsoft.com/en-us/agent-framework/workflows/declarative</a:t>
+              <a:t>• Ask attendees to name the two building blocks a Critic-to-Planner revision loop needs. Answer: a conditional edge (this module) plus a counter in workflow state (also this module) — no prebuilt orchestration pattern from Module 2 supports the loop-back directly.
+• GROUNDING SOURCE: https://learn.microsoft.com/en-us/agent-framework/concepts/workflows/
+• GROUNDING SOURCE: https://learn.microsoft.com/en-us/agent-framework/workflows/human-in-the-loop
+• GROUNDING SOURCE: https://learn.microsoft.com/en-us/agent-framework/workflows/checkpoints
+• GROUNDING SOURCE: https://learn.microsoft.com/en-us/agent-framework/workflows/visualization
+• GROUNDING SOURCE: https://learn.microsoft.com/en-us/agent-framework/workflows/observability</a:t>
             </a:r>
             <a:endParaRPr lang="en-US" dirty="0"/>
           </a:p>
@@ -1346,99 +1349,6 @@
             <a:fld id="{F7021451-1387-4CA6-816F-3879F97B5CBC}" type="slidenum">
               <a:rPr lang="en-US"/>
               <a:t>18</a:t>
-            </a:fld>
-            <a:endParaRPr lang="en-US"/>
-          </a:p>
-        </p:txBody>
-      </p:sp>
-    </p:spTree>
-    <p:extLst>
-      <p:ext uri="{BB962C8B-B14F-4D97-AF65-F5344CB8AC3E}">
-        <p14:creationId xmlns:p14="http://schemas.microsoft.com/office/powerpoint/2010/main" val="1024086991"/>
-      </p:ext>
-    </p:extLst>
-  </p:cSld>
-  <p:clrMapOvr>
-    <a:masterClrMapping/>
-  </p:clrMapOvr>
-</p:notes>
-</file>
-
-<file path=ppt/notesSlides/notesSlide19.xml><?xml version="1.0" encoding="utf-8"?>
-<p:notes xmlns:a="http://schemas.openxmlformats.org/drawingml/2006/main" xmlns:r="http://schemas.openxmlformats.org/officeDocument/2006/relationships" xmlns:p="http://schemas.openxmlformats.org/presentationml/2006/main">
-  <p:cSld>
-    <p:spTree>
-      <p:nvGrpSpPr>
-        <p:cNvPr id="1" name=""/>
-        <p:cNvGrpSpPr/>
-        <p:nvPr/>
-      </p:nvGrpSpPr>
-      <p:grpSpPr>
-        <a:xfrm>
-          <a:off x="0" y="0"/>
-          <a:ext cx="0" cy="0"/>
-          <a:chOff x="0" y="0"/>
-          <a:chExt cx="0" cy="0"/>
-        </a:xfrm>
-      </p:grpSpPr>
-      <p:sp>
-        <p:nvSpPr>
-          <p:cNvPr id="2" name="Slide Image Placeholder 1"/>
-          <p:cNvSpPr>
-            <a:spLocks noGrp="1" noRot="1" noChangeAspect="1"/>
-          </p:cNvSpPr>
-          <p:nvPr>
-            <p:ph type="sldImg"/>
-          </p:nvPr>
-        </p:nvSpPr>
-        <p:spPr/>
-      </p:sp>
-      <p:sp>
-        <p:nvSpPr>
-          <p:cNvPr id="3" name="Notes Placeholder 2"/>
-          <p:cNvSpPr>
-            <a:spLocks noGrp="1"/>
-          </p:cNvSpPr>
-          <p:nvPr>
-            <p:ph type="body" idx="1"/>
-          </p:nvPr>
-        </p:nvSpPr>
-        <p:spPr/>
-        <p:txBody>
-          <a:bodyPr/>
-          <a:lstStyle/>
-          <a:p>
-            <a:r>
-              <a:rPr lang="en-US" dirty="0"/>
-              <a:t>• Ask attendees to name the two building blocks a Critic-to-Planner revision loop needs. Answer: a conditional edge (this module) plus a counter in workflow state (also this module) — no prebuilt orchestration pattern from Module 2 supports the loop-back directly.
-• GROUNDING SOURCE: https://learn.microsoft.com/en-us/agent-framework/concepts/workflows/
-• GROUNDING SOURCE: https://learn.microsoft.com/en-us/agent-framework/workflows/human-in-the-loop
-• GROUNDING SOURCE: https://learn.microsoft.com/en-us/agent-framework/workflows/checkpoints
-• GROUNDING SOURCE: https://learn.microsoft.com/en-us/agent-framework/workflows/visualization
-• GROUNDING SOURCE: https://learn.microsoft.com/en-us/agent-framework/workflows/observability</a:t>
-            </a:r>
-            <a:endParaRPr lang="en-US" dirty="0"/>
-          </a:p>
-        </p:txBody>
-      </p:sp>
-      <p:sp>
-        <p:nvSpPr>
-          <p:cNvPr id="4" name="Slide Number Placeholder 3"/>
-          <p:cNvSpPr>
-            <a:spLocks noGrp="1"/>
-          </p:cNvSpPr>
-          <p:nvPr>
-            <p:ph type="sldNum" sz="quarter" idx="10"/>
-          </p:nvPr>
-        </p:nvSpPr>
-        <p:spPr/>
-        <p:txBody>
-          <a:bodyPr/>
-          <a:lstStyle/>
-          <a:p>
-            <a:fld id="{F7021451-1387-4CA6-816F-3879F97B5CBC}" type="slidenum">
-              <a:rPr lang="en-US"/>
-              <a:t>19</a:t>
             </a:fld>
             <a:endParaRPr lang="en-US"/>
           </a:p>
@@ -4720,7 +4630,7 @@
               <a:buNone/>
             </a:pPr>
             <a:r>
-              <a:rPr lang="en-US" sz="2300" b="1" dirty="0">
+              <a:rPr lang="en-US" sz="2500" b="1" dirty="0">
                 <a:solidFill>
                   <a:srgbClr val="1E2761"/>
                 </a:solidFill>
@@ -4728,9 +4638,9 @@
                 <a:ea typeface="Calibri" pitchFamily="34" charset="-122"/>
                 <a:cs typeface="Calibri" pitchFamily="34" charset="-120"/>
               </a:rPr>
-              <a:t>State: per-executor by default, shared on request</a:t>
-            </a:r>
-            <a:endParaRPr lang="en-US" sz="2300" dirty="0"/>
+              <a:t>State: access and share common data</a:t>
+            </a:r>
+            <a:endParaRPr lang="en-US" sz="2500" dirty="0"/>
           </a:p>
         </p:txBody>
       </p:sp>
@@ -4773,7 +4683,7 @@
                 <a:ea typeface="Calibri" pitchFamily="34" charset="-122"/>
                 <a:cs typeface="Calibri" pitchFamily="34" charset="-120"/>
               </a:rPr>
-              <a:t>ctx.set_state(key, value) / ctx.get_state(key) — private to the writing executor by default</a:t>
+              <a:t>ctx.set_state(key, value) / ctx.get_state(key) — state that is available to downstream executors</a:t>
             </a:r>
             <a:endParaRPr lang="en-US" sz="1600" dirty="0"/>
           </a:p>
@@ -4794,7 +4704,7 @@
                 <a:ea typeface="Calibri" pitchFamily="34" charset="-122"/>
                 <a:cs typeface="Calibri" pitchFamily="34" charset="-120"/>
               </a:rPr>
-              <a:t>Use a consistent key (or shared scope) across executors to exchange state that isn't a direct message</a:t>
+              <a:t>Use a consistent key across executors to exchange state that isn't a direct message</a:t>
             </a:r>
             <a:endParaRPr lang="en-US" sz="1600" dirty="0"/>
           </a:p>
@@ -4836,7 +4746,28 @@
                 <a:ea typeface="Calibri" pitchFamily="34" charset="-122"/>
                 <a:cs typeface="Calibri" pitchFamily="34" charset="-120"/>
               </a:rPr>
-              <a:t>Isolation risk: reusing one workflow/executor instance across unrelated runs leaks state between them — build fresh instances per run</a:t>
+              <a:t>Isolation risk: reusing one workflow/executor instance across unrelated runs leaks state between them</a:t>
+            </a:r>
+            <a:endParaRPr lang="en-US" sz="1600" dirty="0"/>
+          </a:p>
+          <a:p>
+            <a:pPr lvl="1" marL="457200" indent="-228600">
+              <a:spcAft>
+                <a:spcPts val="1000"/>
+              </a:spcAft>
+              <a:buSzPct val="100000"/>
+              <a:buChar char="•"/>
+            </a:pPr>
+            <a:r>
+              <a:rPr lang="en-US" sz="1600" dirty="0">
+                <a:solidFill>
+                  <a:srgbClr val="212121"/>
+                </a:solidFill>
+                <a:latin typeface="Calibri" pitchFamily="34" charset="0"/>
+                <a:ea typeface="Calibri" pitchFamily="34" charset="-122"/>
+                <a:cs typeface="Calibri" pitchFamily="34" charset="-120"/>
+              </a:rPr>
+              <a:t>Build fresh instances per run</a:t>
             </a:r>
             <a:endParaRPr lang="en-US" sz="1600" dirty="0"/>
           </a:p>
@@ -6082,7 +6013,49 @@
                 <a:ea typeface="Calibri" pitchFamily="34" charset="-122"/>
                 <a:cs typeface="Calibri" pitchFamily="34" charset="-120"/>
               </a:rPr>
-              <a:t>A checkpoint is created at the end of every superstep, after all its executors finish</a:t>
+              <a:t>A checkpoint is created:</a:t>
+            </a:r>
+            <a:endParaRPr lang="en-US" sz="1600" dirty="0"/>
+          </a:p>
+          <a:p>
+            <a:pPr lvl="1" marL="457200" indent="-228600">
+              <a:spcAft>
+                <a:spcPts val="1000"/>
+              </a:spcAft>
+              <a:buSzPct val="100000"/>
+              <a:buChar char="•"/>
+            </a:pPr>
+            <a:r>
+              <a:rPr lang="en-US" sz="1600" dirty="0">
+                <a:solidFill>
+                  <a:srgbClr val="212121"/>
+                </a:solidFill>
+                <a:latin typeface="Calibri" pitchFamily="34" charset="0"/>
+                <a:ea typeface="Calibri" pitchFamily="34" charset="-122"/>
+                <a:cs typeface="Calibri" pitchFamily="34" charset="-120"/>
+              </a:rPr>
+              <a:t>At the start of the first superstep</a:t>
+            </a:r>
+            <a:endParaRPr lang="en-US" sz="1600" dirty="0"/>
+          </a:p>
+          <a:p>
+            <a:pPr lvl="1" marL="457200" indent="-228600">
+              <a:spcAft>
+                <a:spcPts val="1000"/>
+              </a:spcAft>
+              <a:buSzPct val="100000"/>
+              <a:buChar char="•"/>
+            </a:pPr>
+            <a:r>
+              <a:rPr lang="en-US" sz="1600" dirty="0">
+                <a:solidFill>
+                  <a:srgbClr val="212121"/>
+                </a:solidFill>
+                <a:latin typeface="Calibri" pitchFamily="34" charset="0"/>
+                <a:ea typeface="Calibri" pitchFamily="34" charset="-122"/>
+                <a:cs typeface="Calibri" pitchFamily="34" charset="-120"/>
+              </a:rPr>
+              <a:t>At the end of every superstep, after all its executors finish</a:t>
             </a:r>
             <a:endParaRPr lang="en-US" sz="1600" dirty="0"/>
           </a:p>
@@ -6343,7 +6316,7 @@
                 <a:ea typeface="Calibri" pitchFamily="34" charset="-122"/>
                 <a:cs typeface="Calibri" pitchFamily="34" charset="-120"/>
               </a:rPr>
-              <a:t>Replay: Python 1.13+</a:t>
+              <a:t>A note on the functional API</a:t>
             </a:r>
             <a:endParaRPr lang="en-US" sz="2800" dirty="0"/>
           </a:p>
@@ -6351,14 +6324,39 @@
       </p:sp>
       <p:sp>
         <p:nvSpPr>
-          <p:cNvPr id="5" name="Text 3"/>
-          <p:cNvSpPr/>
-          <p:nvPr/>
-        </p:nvSpPr>
-        <p:spPr>
-          <a:xfrm>
-            <a:off x="502920" y="1170432"/>
-            <a:ext cx="7955280" cy="3520440"/>
+          <p:cNvPr id="5" name="Shape 3"/>
+          <p:cNvSpPr/>
+          <p:nvPr/>
+        </p:nvSpPr>
+        <p:spPr>
+          <a:xfrm>
+            <a:off x="365760" y="1078992"/>
+            <a:ext cx="4114800" cy="3493008"/>
+          </a:xfrm>
+          <a:prstGeom prst="roundRect">
+            <a:avLst/>
+          </a:prstGeom>
+          <a:solidFill>
+            <a:srgbClr val="F3F4F6"/>
+          </a:solidFill>
+          <a:ln w="11430">
+            <a:solidFill>
+              <a:srgbClr val="D1D5DB"/>
+            </a:solidFill>
+            <a:prstDash val="solid"/>
+          </a:ln>
+        </p:spPr>
+      </p:sp>
+      <p:sp>
+        <p:nvSpPr>
+          <p:cNvPr id="6" name="Text 4"/>
+          <p:cNvSpPr/>
+          <p:nvPr/>
+        </p:nvSpPr>
+        <p:spPr>
+          <a:xfrm>
+            <a:off x="566928" y="1298448"/>
+            <a:ext cx="3712464" cy="411480"/>
           </a:xfrm>
           <a:prstGeom prst="rect">
             <a:avLst/>
@@ -6367,41 +6365,58 @@
           <a:ln/>
         </p:spPr>
         <p:txBody>
-          <a:bodyPr wrap="square" lIns="0" tIns="0" rIns="0" bIns="0" rtlCol="0" anchor="t">
+          <a:bodyPr wrap="square" lIns="0" tIns="0" rIns="0" bIns="0" rtlCol="0" anchor="ctr">
             <a:normAutofit/>
           </a:bodyPr>
           <a:lstStyle/>
           <a:p>
-            <a:pPr marL="342900" indent="-342900">
-              <a:spcAft>
-                <a:spcPts val="1000"/>
-              </a:spcAft>
-              <a:buSzPct val="100000"/>
-              <a:buChar char="•"/>
-            </a:pPr>
-            <a:r>
-              <a:rPr lang="en-US" sz="1600" dirty="0">
-                <a:solidFill>
-                  <a:srgbClr val="212121"/>
+            <a:pPr indent="0" marL="0">
+              <a:buNone/>
+            </a:pPr>
+            <a:r>
+              <a:rPr lang="en-US" sz="2000" b="1" dirty="0">
+                <a:solidFill>
+                  <a:srgbClr val="1E2761"/>
                 </a:solidFill>
                 <a:latin typeface="Calibri" pitchFamily="34" charset="0"/>
                 <a:ea typeface="Calibri" pitchFamily="34" charset="-122"/>
                 <a:cs typeface="Calibri" pitchFamily="34" charset="-120"/>
               </a:rPr>
-              <a:t>Python workflows (1.13.0+) also create an entry checkpoint before the first superstep, recording the original input</a:t>
-            </a:r>
-            <a:endParaRPr lang="en-US" sz="1600" dirty="0"/>
-          </a:p>
+              <a:t>WorkflowBuilder (today's focus)</a:t>
+            </a:r>
+            <a:endParaRPr lang="en-US" sz="2000" dirty="0"/>
+          </a:p>
+        </p:txBody>
+      </p:sp>
+      <p:sp>
+        <p:nvSpPr>
+          <p:cNvPr id="7" name="Text 5"/>
+          <p:cNvSpPr/>
+          <p:nvPr/>
+        </p:nvSpPr>
+        <p:spPr>
+          <a:xfrm>
+            <a:off x="594360" y="1828800"/>
+            <a:ext cx="3639312" cy="2395728"/>
+          </a:xfrm>
+          <a:prstGeom prst="rect">
+            <a:avLst/>
+          </a:prstGeom>
+          <a:noFill/>
+          <a:ln/>
+        </p:spPr>
+        <p:txBody>
+          <a:bodyPr wrap="square" lIns="381" tIns="381" rIns="381" bIns="381" rtlCol="0" anchor="ctr">
+            <a:normAutofit/>
+          </a:bodyPr>
+          <a:lstStyle/>
           <a:p>
             <a:pPr marL="342900" indent="-342900">
-              <a:spcAft>
-                <a:spcPts val="1000"/>
-              </a:spcAft>
               <a:buSzPct val="100000"/>
               <a:buChar char="•"/>
             </a:pPr>
             <a:r>
-              <a:rPr lang="en-US" sz="1600" dirty="0">
+              <a:rPr lang="en-US" sz="1300" dirty="0">
                 <a:solidFill>
                   <a:srgbClr val="212121"/>
                 </a:solidFill>
@@ -6409,20 +6424,17 @@
                 <a:ea typeface="Calibri" pitchFamily="34" charset="-122"/>
                 <a:cs typeface="Calibri" pitchFamily="34" charset="-120"/>
               </a:rPr>
-              <a:t>Another entry checkpoint is created when responses to a request_info event are delivered</a:t>
-            </a:r>
-            <a:endParaRPr lang="en-US" sz="1600" dirty="0"/>
+              <a:t>Explicit edges and conditions</a:t>
+            </a:r>
+            <a:endParaRPr lang="en-US" sz="1300" dirty="0"/>
           </a:p>
           <a:p>
             <a:pPr marL="342900" indent="-342900">
-              <a:spcAft>
-                <a:spcPts val="1000"/>
-              </a:spcAft>
               <a:buSzPct val="100000"/>
               <a:buChar char="•"/>
             </a:pPr>
             <a:r>
-              <a:rPr lang="en-US" sz="1600" dirty="0">
+              <a:rPr lang="en-US" sz="1300" dirty="0">
                 <a:solidFill>
                   <a:srgbClr val="212121"/>
                 </a:solidFill>
@@ -6430,15 +6442,177 @@
                 <a:ea typeface="Calibri" pitchFamily="34" charset="-122"/>
                 <a:cs typeface="Calibri" pitchFamily="34" charset="-120"/>
               </a:rPr>
-              <a:t>Together, these make a complete workflow run replayable from the start — not just resumable from the last superstep</a:t>
-            </a:r>
-            <a:endParaRPr lang="en-US" sz="1600" dirty="0"/>
-          </a:p>
-        </p:txBody>
-      </p:sp>
-      <p:sp>
-        <p:nvSpPr>
-          <p:cNvPr id="6" name="Shape 4"/>
+              <a:t>Fixed graphs, fan-out/fan-in, type-validated routing</a:t>
+            </a:r>
+            <a:endParaRPr lang="en-US" sz="1300" dirty="0"/>
+          </a:p>
+          <a:p>
+            <a:pPr marL="342900" indent="-342900">
+              <a:buSzPct val="100000"/>
+              <a:buChar char="•"/>
+            </a:pPr>
+            <a:r>
+              <a:rPr lang="en-US" sz="1300" dirty="0">
+                <a:solidFill>
+                  <a:srgbClr val="212121"/>
+                </a:solidFill>
+                <a:latin typeface="Calibri" pitchFamily="34" charset="0"/>
+                <a:ea typeface="Calibri" pitchFamily="34" charset="-122"/>
+                <a:cs typeface="Calibri" pitchFamily="34" charset="-120"/>
+              </a:rPr>
+              <a:t>Available in Python, C#, and Go</a:t>
+            </a:r>
+            <a:endParaRPr lang="en-US" sz="1300" dirty="0"/>
+          </a:p>
+        </p:txBody>
+      </p:sp>
+      <p:sp>
+        <p:nvSpPr>
+          <p:cNvPr id="8" name="Shape 6"/>
+          <p:cNvSpPr/>
+          <p:nvPr/>
+        </p:nvSpPr>
+        <p:spPr>
+          <a:xfrm>
+            <a:off x="4663440" y="1078992"/>
+            <a:ext cx="4114800" cy="3493008"/>
+          </a:xfrm>
+          <a:prstGeom prst="roundRect">
+            <a:avLst/>
+          </a:prstGeom>
+          <a:solidFill>
+            <a:srgbClr val="CADCFC"/>
+          </a:solidFill>
+          <a:ln w="11430">
+            <a:solidFill>
+              <a:srgbClr val="1E2761"/>
+            </a:solidFill>
+            <a:prstDash val="solid"/>
+          </a:ln>
+        </p:spPr>
+      </p:sp>
+      <p:sp>
+        <p:nvSpPr>
+          <p:cNvPr id="9" name="Text 7"/>
+          <p:cNvSpPr/>
+          <p:nvPr/>
+        </p:nvSpPr>
+        <p:spPr>
+          <a:xfrm>
+            <a:off x="4864608" y="1298448"/>
+            <a:ext cx="3712464" cy="411480"/>
+          </a:xfrm>
+          <a:prstGeom prst="rect">
+            <a:avLst/>
+          </a:prstGeom>
+          <a:noFill/>
+          <a:ln/>
+        </p:spPr>
+        <p:txBody>
+          <a:bodyPr wrap="square" lIns="0" tIns="0" rIns="0" bIns="0" rtlCol="0" anchor="ctr">
+            <a:normAutofit/>
+          </a:bodyPr>
+          <a:lstStyle/>
+          <a:p>
+            <a:pPr indent="0" marL="0">
+              <a:buNone/>
+            </a:pPr>
+            <a:r>
+              <a:rPr lang="en-US" sz="2000" b="1" dirty="0">
+                <a:solidFill>
+                  <a:srgbClr val="1E2761"/>
+                </a:solidFill>
+                <a:latin typeface="Calibri" pitchFamily="34" charset="0"/>
+                <a:ea typeface="Calibri" pitchFamily="34" charset="-122"/>
+                <a:cs typeface="Calibri" pitchFamily="34" charset="-120"/>
+              </a:rPr>
+              <a:t>@workflow — Python only, EXPERIMENTAL</a:t>
+            </a:r>
+            <a:endParaRPr lang="en-US" sz="2000" dirty="0"/>
+          </a:p>
+        </p:txBody>
+      </p:sp>
+      <p:sp>
+        <p:nvSpPr>
+          <p:cNvPr id="10" name="Text 8"/>
+          <p:cNvSpPr/>
+          <p:nvPr/>
+        </p:nvSpPr>
+        <p:spPr>
+          <a:xfrm>
+            <a:off x="4892040" y="1828800"/>
+            <a:ext cx="3639312" cy="2395728"/>
+          </a:xfrm>
+          <a:prstGeom prst="rect">
+            <a:avLst/>
+          </a:prstGeom>
+          <a:noFill/>
+          <a:ln/>
+        </p:spPr>
+        <p:txBody>
+          <a:bodyPr wrap="square" lIns="381" tIns="381" rIns="381" bIns="381" rtlCol="0" anchor="ctr">
+            <a:normAutofit/>
+          </a:bodyPr>
+          <a:lstStyle/>
+          <a:p>
+            <a:pPr marL="342900" indent="-342900">
+              <a:buSzPct val="100000"/>
+              <a:buChar char="•"/>
+            </a:pPr>
+            <a:r>
+              <a:rPr lang="en-US" sz="1300" dirty="0">
+                <a:solidFill>
+                  <a:srgbClr val="212121"/>
+                </a:solidFill>
+                <a:latin typeface="Calibri" pitchFamily="34" charset="0"/>
+                <a:ea typeface="Calibri" pitchFamily="34" charset="-122"/>
+                <a:cs typeface="Calibri" pitchFamily="34" charset="-120"/>
+              </a:rPr>
+              <a:t>Native Python control flow: if, while, asyncio.gather</a:t>
+            </a:r>
+            <a:endParaRPr lang="en-US" sz="1300" dirty="0"/>
+          </a:p>
+          <a:p>
+            <a:pPr marL="342900" indent="-342900">
+              <a:buSzPct val="100000"/>
+              <a:buChar char="•"/>
+            </a:pPr>
+            <a:r>
+              <a:rPr lang="en-US" sz="1300" dirty="0">
+                <a:solidFill>
+                  <a:srgbClr val="212121"/>
+                </a:solidFill>
+                <a:latin typeface="Calibri" pitchFamily="34" charset="0"/>
+                <a:ea typeface="Calibri" pitchFamily="34" charset="-122"/>
+                <a:cs typeface="Calibri" pitchFamily="34" charset="-120"/>
+              </a:rPr>
+              <a:t>Could simplify a custom revision loop to a plain while — worth revisiting once it's no longer experimental</a:t>
+            </a:r>
+            <a:endParaRPr lang="en-US" sz="1300" dirty="0"/>
+          </a:p>
+          <a:p>
+            <a:pPr marL="342900" indent="-342900">
+              <a:buSzPct val="100000"/>
+              <a:buChar char="•"/>
+            </a:pPr>
+            <a:r>
+              <a:rPr lang="en-US" sz="1300" dirty="0">
+                <a:solidFill>
+                  <a:srgbClr val="212121"/>
+                </a:solidFill>
+                <a:latin typeface="Calibri" pitchFamily="34" charset="0"/>
+                <a:ea typeface="Calibri" pitchFamily="34" charset="-122"/>
+                <a:cs typeface="Calibri" pitchFamily="34" charset="-120"/>
+              </a:rPr>
+              <a:t>Not used for today's lab while it remains experimental</a:t>
+            </a:r>
+            <a:endParaRPr lang="en-US" sz="1300" dirty="0"/>
+          </a:p>
+        </p:txBody>
+      </p:sp>
+      <p:sp>
+        <p:nvSpPr>
+          <p:cNvPr id="11" name="Shape 9"/>
           <p:cNvSpPr/>
           <p:nvPr/>
         </p:nvSpPr>
@@ -6461,7 +6635,7 @@
       </p:sp>
       <p:sp>
         <p:nvSpPr>
-          <p:cNvPr id="7" name="Text 5"/>
+          <p:cNvPr id="12" name="Text 10"/>
           <p:cNvSpPr/>
           <p:nvPr/>
         </p:nvSpPr>
@@ -6494,7 +6668,7 @@
                 <a:ea typeface="Calibri" pitchFamily="34" charset="-122"/>
                 <a:cs typeface="Calibri" pitchFamily="34" charset="-120"/>
               </a:rPr>
-              <a:t>Source: https://learn.microsoft.com/en-us/agent-framework/workflows/checkpoints</a:t>
+              <a:t>Source: https://learn.microsoft.com/en-us/agent-framework/concepts/workflows/</a:t>
             </a:r>
             <a:endParaRPr lang="en-US" sz="820" dirty="0"/>
           </a:p>
@@ -6620,7 +6794,7 @@
               <a:buNone/>
             </a:pPr>
             <a:r>
-              <a:rPr lang="en-US" sz="2800" b="1" dirty="0">
+              <a:rPr lang="en-US" sz="2500" b="1" dirty="0">
                 <a:solidFill>
                   <a:srgbClr val="1E2761"/>
                 </a:solidFill>
@@ -6628,9 +6802,9 @@
                 <a:ea typeface="Calibri" pitchFamily="34" charset="-122"/>
                 <a:cs typeface="Calibri" pitchFamily="34" charset="-120"/>
               </a:rPr>
-              <a:t>A note on the functional API</a:t>
-            </a:r>
-            <a:endParaRPr lang="en-US" sz="2800" dirty="0"/>
+              <a:t>A YAML alternative: declarative workflows</a:t>
+            </a:r>
+            <a:endParaRPr lang="en-US" sz="2500" dirty="0"/>
           </a:p>
         </p:txBody>
       </p:sp>
@@ -6694,7 +6868,7 @@
                 <a:ea typeface="Calibri" pitchFamily="34" charset="-122"/>
                 <a:cs typeface="Calibri" pitchFamily="34" charset="-120"/>
               </a:rPr>
-              <a:t>WorkflowBuilder (today's focus)</a:t>
+              <a:t>Programmatic (today's focus)</a:t>
             </a:r>
             <a:endParaRPr lang="en-US" sz="2000" dirty="0"/>
           </a:p>
@@ -6736,7 +6910,7 @@
                 <a:ea typeface="Calibri" pitchFamily="34" charset="-122"/>
                 <a:cs typeface="Calibri" pitchFamily="34" charset="-120"/>
               </a:rPr>
-              <a:t>Explicit edges and conditions</a:t>
+              <a:t>WorkflowBuilder in Python, C#, or Go</a:t>
             </a:r>
             <a:endParaRPr lang="en-US" sz="1300" dirty="0"/>
           </a:p>
@@ -6754,7 +6928,7 @@
                 <a:ea typeface="Calibri" pitchFamily="34" charset="-122"/>
                 <a:cs typeface="Calibri" pitchFamily="34" charset="-120"/>
               </a:rPr>
-              <a:t>Fixed graphs, fan-out/fan-in, type-validated routing</a:t>
+              <a:t>Maximum flexibility; integrates directly with existing code</a:t>
             </a:r>
             <a:endParaRPr lang="en-US" sz="1300" dirty="0"/>
           </a:p>
@@ -6772,7 +6946,7 @@
                 <a:ea typeface="Calibri" pitchFamily="34" charset="-122"/>
                 <a:cs typeface="Calibri" pitchFamily="34" charset="-120"/>
               </a:rPr>
-              <a:t>Available in Python, C#, and Go</a:t>
+              <a:t>What today's lab is built on</a:t>
             </a:r>
             <a:endParaRPr lang="en-US" sz="1300" dirty="0"/>
           </a:p>
@@ -6838,7 +7012,7 @@
                 <a:ea typeface="Calibri" pitchFamily="34" charset="-122"/>
                 <a:cs typeface="Calibri" pitchFamily="34" charset="-120"/>
               </a:rPr>
-              <a:t>@workflow — Python only, EXPERIMENTAL</a:t>
+              <a:t>Declarative — OUT OF SCOPE THIS WEEK</a:t>
             </a:r>
             <a:endParaRPr lang="en-US" sz="2000" dirty="0"/>
           </a:p>
@@ -6880,7 +7054,7 @@
                 <a:ea typeface="Calibri" pitchFamily="34" charset="-122"/>
                 <a:cs typeface="Calibri" pitchFamily="34" charset="-120"/>
               </a:rPr>
-              <a:t>Native Python control flow: if, while, asyncio.gather</a:t>
+              <a:t>Define the graph in YAML instead of code</a:t>
             </a:r>
             <a:endParaRPr lang="en-US" sz="1300" dirty="0"/>
           </a:p>
@@ -6898,7 +7072,7 @@
                 <a:ea typeface="Calibri" pitchFamily="34" charset="-122"/>
                 <a:cs typeface="Calibri" pitchFamily="34" charset="-120"/>
               </a:rPr>
-              <a:t>Could simplify a custom revision loop to a plain while — worth revisiting once it's no longer experimental</a:t>
+              <a:t>Docs' own guidance: prefer it for standard patterns, frequently-changing workflows, or non-developer maintainers</a:t>
             </a:r>
             <a:endParaRPr lang="en-US" sz="1300" dirty="0"/>
           </a:p>
@@ -6916,7 +7090,7 @@
                 <a:ea typeface="Calibri" pitchFamily="34" charset="-122"/>
                 <a:cs typeface="Calibri" pitchFamily="34" charset="-120"/>
               </a:rPr>
-              <a:t>Not used for today's lab while it remains experimental</a:t>
+              <a:t>Real and documented — just not this workshop's focus, since the week is code-first</a:t>
             </a:r>
             <a:endParaRPr lang="en-US" sz="1300" dirty="0"/>
           </a:p>
@@ -6980,7 +7154,7 @@
                 <a:ea typeface="Calibri" pitchFamily="34" charset="-122"/>
                 <a:cs typeface="Calibri" pitchFamily="34" charset="-120"/>
               </a:rPr>
-              <a:t>Source: https://learn.microsoft.com/en-us/agent-framework/concepts/workflows/</a:t>
+              <a:t>Source: https://learn.microsoft.com/en-us/agent-framework/workflows/declarative</a:t>
             </a:r>
             <a:endParaRPr lang="en-US" sz="820" dirty="0"/>
           </a:p>
@@ -7106,492 +7280,6 @@
               <a:buNone/>
             </a:pPr>
             <a:r>
-              <a:rPr lang="en-US" sz="2500" b="1" dirty="0">
-                <a:solidFill>
-                  <a:srgbClr val="1E2761"/>
-                </a:solidFill>
-                <a:latin typeface="Calibri" pitchFamily="34" charset="0"/>
-                <a:ea typeface="Calibri" pitchFamily="34" charset="-122"/>
-                <a:cs typeface="Calibri" pitchFamily="34" charset="-120"/>
-              </a:rPr>
-              <a:t>A YAML alternative: declarative workflows</a:t>
-            </a:r>
-            <a:endParaRPr lang="en-US" sz="2500" dirty="0"/>
-          </a:p>
-        </p:txBody>
-      </p:sp>
-      <p:sp>
-        <p:nvSpPr>
-          <p:cNvPr id="5" name="Shape 3"/>
-          <p:cNvSpPr/>
-          <p:nvPr/>
-        </p:nvSpPr>
-        <p:spPr>
-          <a:xfrm>
-            <a:off x="365760" y="1078992"/>
-            <a:ext cx="4114800" cy="3493008"/>
-          </a:xfrm>
-          <a:prstGeom prst="roundRect">
-            <a:avLst/>
-          </a:prstGeom>
-          <a:solidFill>
-            <a:srgbClr val="F3F4F6"/>
-          </a:solidFill>
-          <a:ln w="11430">
-            <a:solidFill>
-              <a:srgbClr val="D1D5DB"/>
-            </a:solidFill>
-            <a:prstDash val="solid"/>
-          </a:ln>
-        </p:spPr>
-      </p:sp>
-      <p:sp>
-        <p:nvSpPr>
-          <p:cNvPr id="6" name="Text 4"/>
-          <p:cNvSpPr/>
-          <p:nvPr/>
-        </p:nvSpPr>
-        <p:spPr>
-          <a:xfrm>
-            <a:off x="566928" y="1298448"/>
-            <a:ext cx="3712464" cy="411480"/>
-          </a:xfrm>
-          <a:prstGeom prst="rect">
-            <a:avLst/>
-          </a:prstGeom>
-          <a:noFill/>
-          <a:ln/>
-        </p:spPr>
-        <p:txBody>
-          <a:bodyPr wrap="square" lIns="0" tIns="0" rIns="0" bIns="0" rtlCol="0" anchor="ctr">
-            <a:normAutofit/>
-          </a:bodyPr>
-          <a:lstStyle/>
-          <a:p>
-            <a:pPr indent="0" marL="0">
-              <a:buNone/>
-            </a:pPr>
-            <a:r>
-              <a:rPr lang="en-US" sz="2000" b="1" dirty="0">
-                <a:solidFill>
-                  <a:srgbClr val="1E2761"/>
-                </a:solidFill>
-                <a:latin typeface="Calibri" pitchFamily="34" charset="0"/>
-                <a:ea typeface="Calibri" pitchFamily="34" charset="-122"/>
-                <a:cs typeface="Calibri" pitchFamily="34" charset="-120"/>
-              </a:rPr>
-              <a:t>Programmatic (today's focus)</a:t>
-            </a:r>
-            <a:endParaRPr lang="en-US" sz="2000" dirty="0"/>
-          </a:p>
-        </p:txBody>
-      </p:sp>
-      <p:sp>
-        <p:nvSpPr>
-          <p:cNvPr id="7" name="Text 5"/>
-          <p:cNvSpPr/>
-          <p:nvPr/>
-        </p:nvSpPr>
-        <p:spPr>
-          <a:xfrm>
-            <a:off x="594360" y="1828800"/>
-            <a:ext cx="3639312" cy="2395728"/>
-          </a:xfrm>
-          <a:prstGeom prst="rect">
-            <a:avLst/>
-          </a:prstGeom>
-          <a:noFill/>
-          <a:ln/>
-        </p:spPr>
-        <p:txBody>
-          <a:bodyPr wrap="square" lIns="381" tIns="381" rIns="381" bIns="381" rtlCol="0" anchor="ctr">
-            <a:normAutofit/>
-          </a:bodyPr>
-          <a:lstStyle/>
-          <a:p>
-            <a:pPr marL="342900" indent="-342900">
-              <a:buSzPct val="100000"/>
-              <a:buChar char="•"/>
-            </a:pPr>
-            <a:r>
-              <a:rPr lang="en-US" sz="1300" dirty="0">
-                <a:solidFill>
-                  <a:srgbClr val="212121"/>
-                </a:solidFill>
-                <a:latin typeface="Calibri" pitchFamily="34" charset="0"/>
-                <a:ea typeface="Calibri" pitchFamily="34" charset="-122"/>
-                <a:cs typeface="Calibri" pitchFamily="34" charset="-120"/>
-              </a:rPr>
-              <a:t>WorkflowBuilder in Python, C#, or Go</a:t>
-            </a:r>
-            <a:endParaRPr lang="en-US" sz="1300" dirty="0"/>
-          </a:p>
-          <a:p>
-            <a:pPr marL="342900" indent="-342900">
-              <a:buSzPct val="100000"/>
-              <a:buChar char="•"/>
-            </a:pPr>
-            <a:r>
-              <a:rPr lang="en-US" sz="1300" dirty="0">
-                <a:solidFill>
-                  <a:srgbClr val="212121"/>
-                </a:solidFill>
-                <a:latin typeface="Calibri" pitchFamily="34" charset="0"/>
-                <a:ea typeface="Calibri" pitchFamily="34" charset="-122"/>
-                <a:cs typeface="Calibri" pitchFamily="34" charset="-120"/>
-              </a:rPr>
-              <a:t>Maximum flexibility; integrates directly with existing code</a:t>
-            </a:r>
-            <a:endParaRPr lang="en-US" sz="1300" dirty="0"/>
-          </a:p>
-          <a:p>
-            <a:pPr marL="342900" indent="-342900">
-              <a:buSzPct val="100000"/>
-              <a:buChar char="•"/>
-            </a:pPr>
-            <a:r>
-              <a:rPr lang="en-US" sz="1300" dirty="0">
-                <a:solidFill>
-                  <a:srgbClr val="212121"/>
-                </a:solidFill>
-                <a:latin typeface="Calibri" pitchFamily="34" charset="0"/>
-                <a:ea typeface="Calibri" pitchFamily="34" charset="-122"/>
-                <a:cs typeface="Calibri" pitchFamily="34" charset="-120"/>
-              </a:rPr>
-              <a:t>What today's lab is built on</a:t>
-            </a:r>
-            <a:endParaRPr lang="en-US" sz="1300" dirty="0"/>
-          </a:p>
-        </p:txBody>
-      </p:sp>
-      <p:sp>
-        <p:nvSpPr>
-          <p:cNvPr id="8" name="Shape 6"/>
-          <p:cNvSpPr/>
-          <p:nvPr/>
-        </p:nvSpPr>
-        <p:spPr>
-          <a:xfrm>
-            <a:off x="4663440" y="1078992"/>
-            <a:ext cx="4114800" cy="3493008"/>
-          </a:xfrm>
-          <a:prstGeom prst="roundRect">
-            <a:avLst/>
-          </a:prstGeom>
-          <a:solidFill>
-            <a:srgbClr val="CADCFC"/>
-          </a:solidFill>
-          <a:ln w="11430">
-            <a:solidFill>
-              <a:srgbClr val="1E2761"/>
-            </a:solidFill>
-            <a:prstDash val="solid"/>
-          </a:ln>
-        </p:spPr>
-      </p:sp>
-      <p:sp>
-        <p:nvSpPr>
-          <p:cNvPr id="9" name="Text 7"/>
-          <p:cNvSpPr/>
-          <p:nvPr/>
-        </p:nvSpPr>
-        <p:spPr>
-          <a:xfrm>
-            <a:off x="4864608" y="1298448"/>
-            <a:ext cx="3712464" cy="411480"/>
-          </a:xfrm>
-          <a:prstGeom prst="rect">
-            <a:avLst/>
-          </a:prstGeom>
-          <a:noFill/>
-          <a:ln/>
-        </p:spPr>
-        <p:txBody>
-          <a:bodyPr wrap="square" lIns="0" tIns="0" rIns="0" bIns="0" rtlCol="0" anchor="ctr">
-            <a:normAutofit/>
-          </a:bodyPr>
-          <a:lstStyle/>
-          <a:p>
-            <a:pPr indent="0" marL="0">
-              <a:buNone/>
-            </a:pPr>
-            <a:r>
-              <a:rPr lang="en-US" sz="2000" b="1" dirty="0">
-                <a:solidFill>
-                  <a:srgbClr val="1E2761"/>
-                </a:solidFill>
-                <a:latin typeface="Calibri" pitchFamily="34" charset="0"/>
-                <a:ea typeface="Calibri" pitchFamily="34" charset="-122"/>
-                <a:cs typeface="Calibri" pitchFamily="34" charset="-120"/>
-              </a:rPr>
-              <a:t>Declarative — OUT OF SCOPE THIS WEEK</a:t>
-            </a:r>
-            <a:endParaRPr lang="en-US" sz="2000" dirty="0"/>
-          </a:p>
-        </p:txBody>
-      </p:sp>
-      <p:sp>
-        <p:nvSpPr>
-          <p:cNvPr id="10" name="Text 8"/>
-          <p:cNvSpPr/>
-          <p:nvPr/>
-        </p:nvSpPr>
-        <p:spPr>
-          <a:xfrm>
-            <a:off x="4892040" y="1828800"/>
-            <a:ext cx="3639312" cy="2395728"/>
-          </a:xfrm>
-          <a:prstGeom prst="rect">
-            <a:avLst/>
-          </a:prstGeom>
-          <a:noFill/>
-          <a:ln/>
-        </p:spPr>
-        <p:txBody>
-          <a:bodyPr wrap="square" lIns="381" tIns="381" rIns="381" bIns="381" rtlCol="0" anchor="ctr">
-            <a:normAutofit/>
-          </a:bodyPr>
-          <a:lstStyle/>
-          <a:p>
-            <a:pPr marL="342900" indent="-342900">
-              <a:buSzPct val="100000"/>
-              <a:buChar char="•"/>
-            </a:pPr>
-            <a:r>
-              <a:rPr lang="en-US" sz="1300" dirty="0">
-                <a:solidFill>
-                  <a:srgbClr val="212121"/>
-                </a:solidFill>
-                <a:latin typeface="Calibri" pitchFamily="34" charset="0"/>
-                <a:ea typeface="Calibri" pitchFamily="34" charset="-122"/>
-                <a:cs typeface="Calibri" pitchFamily="34" charset="-120"/>
-              </a:rPr>
-              <a:t>Define the graph in YAML instead of code</a:t>
-            </a:r>
-            <a:endParaRPr lang="en-US" sz="1300" dirty="0"/>
-          </a:p>
-          <a:p>
-            <a:pPr marL="342900" indent="-342900">
-              <a:buSzPct val="100000"/>
-              <a:buChar char="•"/>
-            </a:pPr>
-            <a:r>
-              <a:rPr lang="en-US" sz="1300" dirty="0">
-                <a:solidFill>
-                  <a:srgbClr val="212121"/>
-                </a:solidFill>
-                <a:latin typeface="Calibri" pitchFamily="34" charset="0"/>
-                <a:ea typeface="Calibri" pitchFamily="34" charset="-122"/>
-                <a:cs typeface="Calibri" pitchFamily="34" charset="-120"/>
-              </a:rPr>
-              <a:t>Docs' own guidance: prefer it for standard patterns, frequently-changing workflows, or non-developer maintainers</a:t>
-            </a:r>
-            <a:endParaRPr lang="en-US" sz="1300" dirty="0"/>
-          </a:p>
-          <a:p>
-            <a:pPr marL="342900" indent="-342900">
-              <a:buSzPct val="100000"/>
-              <a:buChar char="•"/>
-            </a:pPr>
-            <a:r>
-              <a:rPr lang="en-US" sz="1300" dirty="0">
-                <a:solidFill>
-                  <a:srgbClr val="212121"/>
-                </a:solidFill>
-                <a:latin typeface="Calibri" pitchFamily="34" charset="0"/>
-                <a:ea typeface="Calibri" pitchFamily="34" charset="-122"/>
-                <a:cs typeface="Calibri" pitchFamily="34" charset="-120"/>
-              </a:rPr>
-              <a:t>Real and documented — just not this workshop's focus, since the week is code-first</a:t>
-            </a:r>
-            <a:endParaRPr lang="en-US" sz="1300" dirty="0"/>
-          </a:p>
-        </p:txBody>
-      </p:sp>
-      <p:sp>
-        <p:nvSpPr>
-          <p:cNvPr id="11" name="Shape 9"/>
-          <p:cNvSpPr/>
-          <p:nvPr/>
-        </p:nvSpPr>
-        <p:spPr>
-          <a:xfrm>
-            <a:off x="365760" y="4773168"/>
-            <a:ext cx="8412480" cy="0"/>
-          </a:xfrm>
-          <a:prstGeom prst="line">
-            <a:avLst/>
-          </a:prstGeom>
-          <a:noFill/>
-          <a:ln w="6350">
-            <a:solidFill>
-              <a:srgbClr val="D1D5DB"/>
-            </a:solidFill>
-            <a:prstDash val="solid"/>
-          </a:ln>
-        </p:spPr>
-      </p:sp>
-      <p:sp>
-        <p:nvSpPr>
-          <p:cNvPr id="12" name="Text 10"/>
-          <p:cNvSpPr/>
-          <p:nvPr/>
-        </p:nvSpPr>
-        <p:spPr>
-          <a:xfrm>
-            <a:off x="384048" y="4818888"/>
-            <a:ext cx="8275320" cy="182880"/>
-          </a:xfrm>
-          <a:prstGeom prst="rect">
-            <a:avLst/>
-          </a:prstGeom>
-          <a:noFill/>
-          <a:ln/>
-        </p:spPr>
-        <p:txBody>
-          <a:bodyPr wrap="square" lIns="0" tIns="0" rIns="0" bIns="0" rtlCol="0" anchor="ctr">
-            <a:normAutofit/>
-          </a:bodyPr>
-          <a:lstStyle/>
-          <a:p>
-            <a:pPr indent="0" marL="0">
-              <a:buNone/>
-            </a:pPr>
-            <a:r>
-              <a:rPr lang="en-US" sz="820" dirty="0">
-                <a:solidFill>
-                  <a:srgbClr val="6B7280"/>
-                </a:solidFill>
-                <a:latin typeface="Calibri" pitchFamily="34" charset="0"/>
-                <a:ea typeface="Calibri" pitchFamily="34" charset="-122"/>
-                <a:cs typeface="Calibri" pitchFamily="34" charset="-120"/>
-              </a:rPr>
-              <a:t>Source: https://learn.microsoft.com/en-us/agent-framework/workflows/declarative</a:t>
-            </a:r>
-            <a:endParaRPr lang="en-US" sz="820" dirty="0"/>
-          </a:p>
-        </p:txBody>
-      </p:sp>
-    </p:spTree>
-  </p:cSld>
-  <p:clrMapOvr>
-    <a:masterClrMapping/>
-  </p:clrMapOvr>
-</p:sld>
-</file>
-
-<file path=ppt/slides/slide19.xml><?xml version="1.0" encoding="utf-8"?>
-<p:sld xmlns:a="http://schemas.openxmlformats.org/drawingml/2006/main" xmlns:r="http://schemas.openxmlformats.org/officeDocument/2006/relationships" xmlns:p="http://schemas.openxmlformats.org/presentationml/2006/main">
-  <p:cSld name="Slide 19">
-    <p:bg>
-      <p:bgPr>
-        <a:solidFill>
-          <a:srgbClr val="FFFFFF"/>
-        </a:solidFill>
-      </p:bgPr>
-    </p:bg>
-    <p:spTree>
-      <p:nvGrpSpPr>
-        <p:cNvPr id="1" name=""/>
-        <p:cNvGrpSpPr/>
-        <p:nvPr/>
-      </p:nvGrpSpPr>
-      <p:grpSpPr>
-        <a:xfrm>
-          <a:off x="0" y="0"/>
-          <a:ext cx="0" cy="0"/>
-          <a:chOff x="0" y="0"/>
-          <a:chExt cx="0" cy="0"/>
-        </a:xfrm>
-      </p:grpSpPr>
-      <p:sp>
-        <p:nvSpPr>
-          <p:cNvPr id="2" name="Shape 0"/>
-          <p:cNvSpPr/>
-          <p:nvPr/>
-        </p:nvSpPr>
-        <p:spPr>
-          <a:xfrm>
-            <a:off x="0" y="0"/>
-            <a:ext cx="54864" cy="5143500"/>
-          </a:xfrm>
-          <a:prstGeom prst="rect">
-            <a:avLst/>
-          </a:prstGeom>
-          <a:solidFill>
-            <a:srgbClr val="1E2761"/>
-          </a:solidFill>
-          <a:ln/>
-        </p:spPr>
-      </p:sp>
-      <p:sp>
-        <p:nvSpPr>
-          <p:cNvPr id="3" name="Text 1"/>
-          <p:cNvSpPr/>
-          <p:nvPr/>
-        </p:nvSpPr>
-        <p:spPr>
-          <a:xfrm>
-            <a:off x="5486400" y="256032"/>
-            <a:ext cx="3337560" cy="228600"/>
-          </a:xfrm>
-          <a:prstGeom prst="rect">
-            <a:avLst/>
-          </a:prstGeom>
-          <a:noFill/>
-          <a:ln/>
-        </p:spPr>
-        <p:txBody>
-          <a:bodyPr wrap="square" lIns="0" tIns="0" rIns="0" bIns="0" rtlCol="0" anchor="ctr">
-            <a:normAutofit/>
-          </a:bodyPr>
-          <a:lstStyle/>
-          <a:p>
-            <a:pPr algn="r" indent="0" marL="0">
-              <a:buNone/>
-            </a:pPr>
-            <a:r>
-              <a:rPr lang="en-US" sz="950" dirty="0">
-                <a:solidFill>
-                  <a:srgbClr val="6B7280"/>
-                </a:solidFill>
-                <a:latin typeface="Calibri" pitchFamily="34" charset="0"/>
-                <a:ea typeface="Calibri" pitchFamily="34" charset="-122"/>
-                <a:cs typeface="Calibri" pitchFamily="34" charset="-120"/>
-              </a:rPr>
-              <a:t>Day 4 · Module 3</a:t>
-            </a:r>
-            <a:endParaRPr lang="en-US" sz="950" dirty="0"/>
-          </a:p>
-        </p:txBody>
-      </p:sp>
-      <p:sp>
-        <p:nvSpPr>
-          <p:cNvPr id="4" name="Text 2"/>
-          <p:cNvSpPr/>
-          <p:nvPr/>
-        </p:nvSpPr>
-        <p:spPr>
-          <a:xfrm>
-            <a:off x="365760" y="310896"/>
-            <a:ext cx="6583680" cy="603504"/>
-          </a:xfrm>
-          <a:prstGeom prst="rect">
-            <a:avLst/>
-          </a:prstGeom>
-          <a:noFill/>
-          <a:ln/>
-        </p:spPr>
-        <p:txBody>
-          <a:bodyPr wrap="square" lIns="0" tIns="0" rIns="0" bIns="0" rtlCol="0" anchor="ctr">
-            <a:normAutofit/>
-          </a:bodyPr>
-          <a:lstStyle/>
-          <a:p>
-            <a:pPr indent="0" marL="0">
-              <a:buNone/>
-            </a:pPr>
-            <a:r>
               <a:rPr lang="en-US" sz="2800" b="1" dirty="0">
                 <a:solidFill>
                   <a:srgbClr val="1E2761"/>
@@ -8614,7 +8302,49 @@
                 <a:ea typeface="Calibri" pitchFamily="34" charset="-122"/>
                 <a:cs typeface="Calibri" pitchFamily="34" charset="-120"/>
               </a:rPr>
-              <a:t>Two kinds: custom logic components, or AI agents (Module 1's "workflow with agent executors")</a:t>
+              <a:t>Two kinds:</a:t>
+            </a:r>
+            <a:endParaRPr lang="en-US" sz="1600" dirty="0"/>
+          </a:p>
+          <a:p>
+            <a:pPr lvl="1" marL="457200" indent="-228600">
+              <a:spcAft>
+                <a:spcPts val="1000"/>
+              </a:spcAft>
+              <a:buSzPct val="100000"/>
+              <a:buChar char="•"/>
+            </a:pPr>
+            <a:r>
+              <a:rPr lang="en-US" sz="1600" dirty="0">
+                <a:solidFill>
+                  <a:srgbClr val="212121"/>
+                </a:solidFill>
+                <a:latin typeface="Calibri" pitchFamily="34" charset="0"/>
+                <a:ea typeface="Calibri" pitchFamily="34" charset="-122"/>
+                <a:cs typeface="Calibri" pitchFamily="34" charset="-120"/>
+              </a:rPr>
+              <a:t>Custom logic components</a:t>
+            </a:r>
+            <a:endParaRPr lang="en-US" sz="1600" dirty="0"/>
+          </a:p>
+          <a:p>
+            <a:pPr lvl="1" marL="457200" indent="-228600">
+              <a:spcAft>
+                <a:spcPts val="1000"/>
+              </a:spcAft>
+              <a:buSzPct val="100000"/>
+              <a:buChar char="•"/>
+            </a:pPr>
+            <a:r>
+              <a:rPr lang="en-US" sz="1600" dirty="0">
+                <a:solidFill>
+                  <a:srgbClr val="212121"/>
+                </a:solidFill>
+                <a:latin typeface="Calibri" pitchFamily="34" charset="0"/>
+                <a:ea typeface="Calibri" pitchFamily="34" charset="-122"/>
+                <a:cs typeface="Calibri" pitchFamily="34" charset="-120"/>
+              </a:rPr>
+              <a:t>AI agents (Module 1's "workflow with agent executors")</a:t>
             </a:r>
             <a:endParaRPr lang="en-US" sz="1600" dirty="0"/>
           </a:p>
@@ -8640,7 +8370,7 @@
             <a:endParaRPr lang="en-US" sz="1600" dirty="0"/>
           </a:p>
           <a:p>
-            <a:pPr marL="342900" indent="-342900">
+            <a:pPr lvl="1" marL="457200" indent="-228600">
               <a:spcAft>
                 <a:spcPts val="1000"/>
               </a:spcAft>
@@ -8656,7 +8386,28 @@
                 <a:ea typeface="Calibri" pitchFamily="34" charset="-122"/>
                 <a:cs typeface="Calibri" pitchFamily="34" charset="-120"/>
               </a:rPr>
-              <a:t>WorkflowContext.send_message(...) forwards to connected executors; ctx.yield_output(...) produces a workflow output</a:t>
+              <a:t>WorkflowContext.send_message(...) forwards to connected executors</a:t>
+            </a:r>
+            <a:endParaRPr lang="en-US" sz="1600" dirty="0"/>
+          </a:p>
+          <a:p>
+            <a:pPr lvl="1" marL="457200" indent="-228600">
+              <a:spcAft>
+                <a:spcPts val="1000"/>
+              </a:spcAft>
+              <a:buSzPct val="100000"/>
+              <a:buChar char="•"/>
+            </a:pPr>
+            <a:r>
+              <a:rPr lang="en-US" sz="1600" dirty="0">
+                <a:solidFill>
+                  <a:srgbClr val="212121"/>
+                </a:solidFill>
+                <a:latin typeface="Calibri" pitchFamily="34" charset="0"/>
+                <a:ea typeface="Calibri" pitchFamily="34" charset="-122"/>
+                <a:cs typeface="Calibri" pitchFamily="34" charset="-120"/>
+              </a:rPr>
+              <a:t>ctx.yield_output(...) produces a workflow output</a:t>
             </a:r>
             <a:endParaRPr lang="en-US" sz="1600" dirty="0"/>
           </a:p>
@@ -11924,7 +11675,7 @@
                 <a:ea typeface="Calibri" pitchFamily="34" charset="-122"/>
                 <a:cs typeface="Calibri" pitchFamily="34" charset="-120"/>
               </a:rPr>
-              <a:t>Render the EXACT three-executor, conditional-loop graph attendees are about to build by hand this afternoon — Planner → Retriever → Critic, with a conditional edge back to the Planner when the Critic doesn't approve. Paste the printed Mermaid into mermaid.live live, then optionally run it for real on a question that usually needs a revision pass, so the loop-back edge fires in an actual trace, not just on the diagram.</a:t>
+              <a:t>Render the same three-executor, conditional-loop graph attendees are about to build by hand this afternoon — Planner → Retriever → Critic, with a conditional edge back to the Planner when the Critic doesn't approve. Paste the printed Mermaid into mermaid.live live, then optionally run it for real on a question that usually needs a revision pass, so the loop-back edge fires in an actual trace, not just on the diagram.</a:t>
             </a:r>
             <a:endParaRPr lang="en-US" sz="1600" dirty="0"/>
           </a:p>
@@ -13273,8 +13024,8 @@
         </p:nvSpPr>
         <p:spPr>
           <a:xfrm>
-            <a:off x="502920" y="1170432"/>
-            <a:ext cx="7955280" cy="3520440"/>
+            <a:off x="502920" y="1078992"/>
+            <a:ext cx="7955280" cy="2924810"/>
           </a:xfrm>
           <a:prstGeom prst="rect">
             <a:avLst/>
@@ -13401,18 +13152,41 @@
             </a:r>
             <a:endParaRPr lang="en-US" sz="1600" dirty="0"/>
           </a:p>
-          <a:p>
-            <a:pPr marL="342900" indent="-342900">
+        </p:txBody>
+      </p:sp>
+      <p:sp>
+        <p:nvSpPr>
+          <p:cNvPr id="6" name="Text 4"/>
+          <p:cNvSpPr/>
+          <p:nvPr/>
+        </p:nvSpPr>
+        <p:spPr>
+          <a:xfrm>
+            <a:off x="365760" y="4131818"/>
+            <a:ext cx="8412480" cy="577342"/>
+          </a:xfrm>
+          <a:prstGeom prst="rect">
+            <a:avLst/>
+          </a:prstGeom>
+          <a:noFill/>
+          <a:ln/>
+        </p:spPr>
+        <p:txBody>
+          <a:bodyPr wrap="square" lIns="0" tIns="0" rIns="0" bIns="0" rtlCol="0" anchor="t">
+            <a:normAutofit/>
+          </a:bodyPr>
+          <a:lstStyle/>
+          <a:p>
+            <a:pPr indent="0" marL="0">
               <a:spcAft>
-                <a:spcPts val="1000"/>
+                <a:spcPts val="800"/>
               </a:spcAft>
-              <a:buSzPct val="100000"/>
-              <a:buChar char="•"/>
-            </a:pPr>
-            <a:r>
-              <a:rPr lang="en-US" sz="1600" dirty="0">
-                <a:solidFill>
-                  <a:srgbClr val="212121"/>
+              <a:buNone/>
+            </a:pPr>
+            <a:r>
+              <a:rPr lang="en-US" sz="1300" dirty="0">
+                <a:solidFill>
+                  <a:srgbClr val="6B7280"/>
                 </a:solidFill>
                 <a:latin typeface="Calibri" pitchFamily="34" charset="0"/>
                 <a:ea typeface="Calibri" pitchFamily="34" charset="-122"/>
@@ -13420,13 +13194,13 @@
               </a:rPr>
               <a:t>Caveat: the barrier means one slow executor blocks the whole superstep — consolidate sequential logic into one executor if independent branches need independent timing</a:t>
             </a:r>
-            <a:endParaRPr lang="en-US" sz="1600" dirty="0"/>
-          </a:p>
-        </p:txBody>
-      </p:sp>
-      <p:sp>
-        <p:nvSpPr>
-          <p:cNvPr id="6" name="Shape 4"/>
+            <a:endParaRPr lang="en-US" sz="1300" dirty="0"/>
+          </a:p>
+        </p:txBody>
+      </p:sp>
+      <p:sp>
+        <p:nvSpPr>
+          <p:cNvPr id="7" name="Shape 5"/>
           <p:cNvSpPr/>
           <p:nvPr/>
         </p:nvSpPr>
@@ -13449,7 +13223,7 @@
       </p:sp>
       <p:sp>
         <p:nvSpPr>
-          <p:cNvPr id="7" name="Text 5"/>
+          <p:cNvPr id="8" name="Text 6"/>
           <p:cNvSpPr/>
           <p:nvPr/>
         </p:nvSpPr>

--- a/decks/day4/module-3-workflow-fundamentals.pptx
+++ b/decks/day4/module-3-workflow-fundamentals.pptx
@@ -23,9 +23,11 @@
     <p:sldId id="271" r:id="rId17"/>
     <p:sldId id="272" r:id="rId18"/>
     <p:sldId id="273" r:id="rId19"/>
+    <p:sldId id="274" r:id="rId20"/>
+    <p:sldId id="275" r:id="rId21"/>
   </p:sldIdLst>
   <p:notesMasterIdLst>
-    <p:notesMasterId r:id="rId20"/>
+    <p:notesMasterId r:id="rId22"/>
   </p:notesMasterIdLst>
   <p:sldSz cx="9144000" cy="5143500"/>
   <p:notesSz cx="5143500" cy="9144000"/>
@@ -1231,8 +1233,8 @@
           <a:p>
             <a:r>
               <a:rPr lang="en-US" dirty="0"/>
-              <a:t>• Flag this the same way Day 3 flagged Agent Hooks — real, documented, and deliberately out of scope for a code-first week. Mention only; do not teach YAML syntax or build any lab content on it.
-• GROUNDING SOURCE: https://learn.microsoft.com/en-us/agent-framework/workflows/declarative</a:t>
+              <a:t>• Supersedes this deck's earlier one-slide "mention only, out of scope" stub — the workshop now teaches this content directly rather than just flagging its existence, matching the doc's own Overview section (key-benefit labels are verbatim). Still not built into today's lab, which stays WorkflowBuilder-based.
+• GROUNDING SOURCE: https://learn.microsoft.com/en-us/agent-framework/workflows/declarative?pivots=programming-language-python#overview</a:t>
             </a:r>
             <a:endParaRPr lang="en-US" dirty="0"/>
           </a:p>
@@ -1320,12 +1322,8 @@
           <a:p>
             <a:r>
               <a:rPr lang="en-US" dirty="0"/>
-              <a:t>• Ask attendees to name the two building blocks a Critic-to-Planner revision loop needs. Answer: a conditional edge (this module) plus a counter in workflow state (also this module) — no prebuilt orchestration pattern from Module 2 supports the loop-back directly.
-• GROUNDING SOURCE: https://learn.microsoft.com/en-us/agent-framework/concepts/workflows/
-• GROUNDING SOURCE: https://learn.microsoft.com/en-us/agent-framework/workflows/human-in-the-loop
-• GROUNDING SOURCE: https://learn.microsoft.com/en-us/agent-framework/workflows/checkpoints
-• GROUNDING SOURCE: https://learn.microsoft.com/en-us/agent-framework/workflows/visualization
-• GROUNDING SOURCE: https://learn.microsoft.com/en-us/agent-framework/workflows/observability</a:t>
+              <a:t>• Verbatim table from the doc. Today's lab sits squarely in the Programmatic column ("integration with existing Python code," "complex custom logic") — worth naming explicitly when this table is on screen.
+• GROUNDING SOURCE: https://learn.microsoft.com/en-us/agent-framework/workflows/declarative?pivots=programming-language-python#when-to-use-declarative-vs-programmatic-workflows</a:t>
             </a:r>
             <a:endParaRPr lang="en-US" dirty="0"/>
           </a:p>
@@ -1349,6 +1347,95 @@
             <a:fld id="{F7021451-1387-4CA6-816F-3879F97B5CBC}" type="slidenum">
               <a:rPr lang="en-US"/>
               <a:t>18</a:t>
+            </a:fld>
+            <a:endParaRPr lang="en-US"/>
+          </a:p>
+        </p:txBody>
+      </p:sp>
+    </p:spTree>
+    <p:extLst>
+      <p:ext uri="{BB962C8B-B14F-4D97-AF65-F5344CB8AC3E}">
+        <p14:creationId xmlns:p14="http://schemas.microsoft.com/office/powerpoint/2010/main" val="1024086991"/>
+      </p:ext>
+    </p:extLst>
+  </p:cSld>
+  <p:clrMapOvr>
+    <a:masterClrMapping/>
+  </p:clrMapOvr>
+</p:notes>
+</file>
+
+<file path=ppt/notesSlides/notesSlide19.xml><?xml version="1.0" encoding="utf-8"?>
+<p:notes xmlns:a="http://schemas.openxmlformats.org/drawingml/2006/main" xmlns:r="http://schemas.openxmlformats.org/officeDocument/2006/relationships" xmlns:p="http://schemas.openxmlformats.org/presentationml/2006/main">
+  <p:cSld>
+    <p:spTree>
+      <p:nvGrpSpPr>
+        <p:cNvPr id="1" name=""/>
+        <p:cNvGrpSpPr/>
+        <p:nvPr/>
+      </p:nvGrpSpPr>
+      <p:grpSpPr>
+        <a:xfrm>
+          <a:off x="0" y="0"/>
+          <a:ext cx="0" cy="0"/>
+          <a:chOff x="0" y="0"/>
+          <a:chExt cx="0" cy="0"/>
+        </a:xfrm>
+      </p:grpSpPr>
+      <p:sp>
+        <p:nvSpPr>
+          <p:cNvPr id="2" name="Slide Image Placeholder 1"/>
+          <p:cNvSpPr>
+            <a:spLocks noGrp="1" noRot="1" noChangeAspect="1"/>
+          </p:cNvSpPr>
+          <p:nvPr>
+            <p:ph type="sldImg"/>
+          </p:nvPr>
+        </p:nvSpPr>
+        <p:spPr/>
+      </p:sp>
+      <p:sp>
+        <p:nvSpPr>
+          <p:cNvPr id="3" name="Notes Placeholder 2"/>
+          <p:cNvSpPr>
+            <a:spLocks noGrp="1"/>
+          </p:cNvSpPr>
+          <p:nvPr>
+            <p:ph type="body" idx="1"/>
+          </p:nvPr>
+        </p:nvSpPr>
+        <p:spPr/>
+        <p:txBody>
+          <a:bodyPr/>
+          <a:lstStyle/>
+          <a:p>
+            <a:r>
+              <a:rPr lang="en-US" dirty="0"/>
+              <a:t>• Verbatim skeleton from the doc's Python zone. The doc's own follow-on Structure Elements table (name/description/inputs/actions, required or not) is compressed into the one-line caption below rather than reproduced as a second table.
+• GROUNDING SOURCE: https://learn.microsoft.com/en-us/agent-framework/workflows/declarative?pivots=programming-language-python#python-yaml-structure</a:t>
+            </a:r>
+            <a:endParaRPr lang="en-US" dirty="0"/>
+          </a:p>
+        </p:txBody>
+      </p:sp>
+      <p:sp>
+        <p:nvSpPr>
+          <p:cNvPr id="4" name="Slide Number Placeholder 3"/>
+          <p:cNvSpPr>
+            <a:spLocks noGrp="1"/>
+          </p:cNvSpPr>
+          <p:nvPr>
+            <p:ph type="sldNum" sz="quarter" idx="10"/>
+          </p:nvPr>
+        </p:nvSpPr>
+        <p:spPr/>
+        <p:txBody>
+          <a:bodyPr/>
+          <a:lstStyle/>
+          <a:p>
+            <a:fld id="{F7021451-1387-4CA6-816F-3879F97B5CBC}" type="slidenum">
+              <a:rPr lang="en-US"/>
+              <a:t>19</a:t>
             </a:fld>
             <a:endParaRPr lang="en-US"/>
           </a:p>
@@ -1438,6 +1525,100 @@
             <a:fld id="{F7021451-1387-4CA6-816F-3879F97B5CBC}" type="slidenum">
               <a:rPr lang="en-US"/>
               <a:t>2</a:t>
+            </a:fld>
+            <a:endParaRPr lang="en-US"/>
+          </a:p>
+        </p:txBody>
+      </p:sp>
+    </p:spTree>
+    <p:extLst>
+      <p:ext uri="{BB962C8B-B14F-4D97-AF65-F5344CB8AC3E}">
+        <p14:creationId xmlns:p14="http://schemas.microsoft.com/office/powerpoint/2010/main" val="1024086991"/>
+      </p:ext>
+    </p:extLst>
+  </p:cSld>
+  <p:clrMapOvr>
+    <a:masterClrMapping/>
+  </p:clrMapOvr>
+</p:notes>
+</file>
+
+<file path=ppt/notesSlides/notesSlide20.xml><?xml version="1.0" encoding="utf-8"?>
+<p:notes xmlns:a="http://schemas.openxmlformats.org/drawingml/2006/main" xmlns:r="http://schemas.openxmlformats.org/officeDocument/2006/relationships" xmlns:p="http://schemas.openxmlformats.org/presentationml/2006/main">
+  <p:cSld>
+    <p:spTree>
+      <p:nvGrpSpPr>
+        <p:cNvPr id="1" name=""/>
+        <p:cNvGrpSpPr/>
+        <p:nvPr/>
+      </p:nvGrpSpPr>
+      <p:grpSpPr>
+        <a:xfrm>
+          <a:off x="0" y="0"/>
+          <a:ext cx="0" cy="0"/>
+          <a:chOff x="0" y="0"/>
+          <a:chExt cx="0" cy="0"/>
+        </a:xfrm>
+      </p:grpSpPr>
+      <p:sp>
+        <p:nvSpPr>
+          <p:cNvPr id="2" name="Slide Image Placeholder 1"/>
+          <p:cNvSpPr>
+            <a:spLocks noGrp="1" noRot="1" noChangeAspect="1"/>
+          </p:cNvSpPr>
+          <p:nvPr>
+            <p:ph type="sldImg"/>
+          </p:nvPr>
+        </p:nvSpPr>
+        <p:spPr/>
+      </p:sp>
+      <p:sp>
+        <p:nvSpPr>
+          <p:cNvPr id="3" name="Notes Placeholder 2"/>
+          <p:cNvSpPr>
+            <a:spLocks noGrp="1"/>
+          </p:cNvSpPr>
+          <p:nvPr>
+            <p:ph type="body" idx="1"/>
+          </p:nvPr>
+        </p:nvSpPr>
+        <p:spPr/>
+        <p:txBody>
+          <a:bodyPr/>
+          <a:lstStyle/>
+          <a:p>
+            <a:r>
+              <a:rPr lang="en-US" dirty="0"/>
+              <a:t>• Ask attendees to name the two building blocks a Critic-to-Planner revision loop needs. Answer: a conditional edge (this module) plus a counter in workflow state (also this module) — no prebuilt orchestration pattern from Module 2 supports the loop-back directly.
+• GROUNDING SOURCE: https://learn.microsoft.com/en-us/agent-framework/concepts/workflows/
+• GROUNDING SOURCE: https://learn.microsoft.com/en-us/agent-framework/workflows/human-in-the-loop
+• GROUNDING SOURCE: https://learn.microsoft.com/en-us/agent-framework/workflows/checkpoints
+• GROUNDING SOURCE: https://learn.microsoft.com/en-us/agent-framework/workflows/visualization
+• GROUNDING SOURCE: https://learn.microsoft.com/en-us/agent-framework/workflows/observability
+• GROUNDING SOURCE: https://learn.microsoft.com/en-us/agent-framework/workflows/declarative</a:t>
+            </a:r>
+            <a:endParaRPr lang="en-US" dirty="0"/>
+          </a:p>
+        </p:txBody>
+      </p:sp>
+      <p:sp>
+        <p:nvSpPr>
+          <p:cNvPr id="4" name="Slide Number Placeholder 3"/>
+          <p:cNvSpPr>
+            <a:spLocks noGrp="1"/>
+          </p:cNvSpPr>
+          <p:nvPr>
+            <p:ph type="sldNum" sz="quarter" idx="10"/>
+          </p:nvPr>
+        </p:nvSpPr>
+        <p:spPr/>
+        <p:txBody>
+          <a:bodyPr/>
+          <a:lstStyle/>
+          <a:p>
+            <a:fld id="{F7021451-1387-4CA6-816F-3879F97B5CBC}" type="slidenum">
+              <a:rPr lang="en-US"/>
+              <a:t>20</a:t>
             </a:fld>
             <a:endParaRPr lang="en-US"/>
           </a:p>
@@ -5982,8 +6163,8 @@
         </p:nvSpPr>
         <p:spPr>
           <a:xfrm>
-            <a:off x="502920" y="1170432"/>
-            <a:ext cx="7955280" cy="3520440"/>
+            <a:off x="502920" y="1078992"/>
+            <a:ext cx="7955280" cy="2924810"/>
           </a:xfrm>
           <a:prstGeom prst="rect">
             <a:avLst/>
@@ -6101,18 +6282,41 @@
             </a:r>
             <a:endParaRPr lang="en-US" sz="1600" dirty="0"/>
           </a:p>
-          <a:p>
-            <a:pPr marL="342900" indent="-342900">
+        </p:txBody>
+      </p:sp>
+      <p:sp>
+        <p:nvSpPr>
+          <p:cNvPr id="6" name="Text 4"/>
+          <p:cNvSpPr/>
+          <p:nvPr/>
+        </p:nvSpPr>
+        <p:spPr>
+          <a:xfrm>
+            <a:off x="365760" y="4131818"/>
+            <a:ext cx="8412480" cy="577342"/>
+          </a:xfrm>
+          <a:prstGeom prst="rect">
+            <a:avLst/>
+          </a:prstGeom>
+          <a:noFill/>
+          <a:ln/>
+        </p:spPr>
+        <p:txBody>
+          <a:bodyPr wrap="square" lIns="0" tIns="0" rIns="0" bIns="0" rtlCol="0" anchor="t">
+            <a:normAutofit/>
+          </a:bodyPr>
+          <a:lstStyle/>
+          <a:p>
+            <a:pPr indent="0" marL="0">
               <a:spcAft>
-                <a:spcPts val="1000"/>
+                <a:spcPts val="800"/>
               </a:spcAft>
-              <a:buSzPct val="100000"/>
-              <a:buChar char="•"/>
-            </a:pPr>
-            <a:r>
-              <a:rPr lang="en-US" sz="1600" dirty="0">
-                <a:solidFill>
-                  <a:srgbClr val="212121"/>
+              <a:buNone/>
+            </a:pPr>
+            <a:r>
+              <a:rPr lang="en-US" sz="1300" dirty="0">
+                <a:solidFill>
+                  <a:srgbClr val="6B7280"/>
                 </a:solidFill>
                 <a:latin typeface="Calibri" pitchFamily="34" charset="0"/>
                 <a:ea typeface="Calibri" pitchFamily="34" charset="-122"/>
@@ -6120,13 +6324,13 @@
               </a:rPr>
               <a:t>Use cases: long-running workflows, pause/resume across process restarts, audit/compliance snapshots, migrating a run across environments</a:t>
             </a:r>
-            <a:endParaRPr lang="en-US" sz="1600" dirty="0"/>
-          </a:p>
-        </p:txBody>
-      </p:sp>
-      <p:sp>
-        <p:nvSpPr>
-          <p:cNvPr id="6" name="Shape 4"/>
+            <a:endParaRPr lang="en-US" sz="1300" dirty="0"/>
+          </a:p>
+        </p:txBody>
+      </p:sp>
+      <p:sp>
+        <p:nvSpPr>
+          <p:cNvPr id="7" name="Shape 5"/>
           <p:cNvSpPr/>
           <p:nvPr/>
         </p:nvSpPr>
@@ -6149,7 +6353,7 @@
       </p:sp>
       <p:sp>
         <p:nvSpPr>
-          <p:cNvPr id="7" name="Text 5"/>
+          <p:cNvPr id="8" name="Text 6"/>
           <p:cNvSpPr/>
           <p:nvPr/>
         </p:nvSpPr>
@@ -6794,7 +6998,7 @@
               <a:buNone/>
             </a:pPr>
             <a:r>
-              <a:rPr lang="en-US" sz="2500" b="1" dirty="0">
+              <a:rPr lang="en-US" sz="2300" b="1" dirty="0">
                 <a:solidFill>
                   <a:srgbClr val="1E2761"/>
                 </a:solidFill>
@@ -6802,47 +7006,22 @@
                 <a:ea typeface="Calibri" pitchFamily="34" charset="-122"/>
                 <a:cs typeface="Calibri" pitchFamily="34" charset="-120"/>
               </a:rPr>
-              <a:t>A YAML alternative: declarative workflows</a:t>
-            </a:r>
-            <a:endParaRPr lang="en-US" sz="2500" dirty="0"/>
-          </a:p>
-        </p:txBody>
-      </p:sp>
-      <p:sp>
-        <p:nvSpPr>
-          <p:cNvPr id="5" name="Shape 3"/>
-          <p:cNvSpPr/>
-          <p:nvPr/>
-        </p:nvSpPr>
-        <p:spPr>
-          <a:xfrm>
-            <a:off x="365760" y="1078992"/>
-            <a:ext cx="4114800" cy="3493008"/>
-          </a:xfrm>
-          <a:prstGeom prst="roundRect">
-            <a:avLst/>
-          </a:prstGeom>
-          <a:solidFill>
-            <a:srgbClr val="F3F4F6"/>
-          </a:solidFill>
-          <a:ln w="11430">
-            <a:solidFill>
-              <a:srgbClr val="D1D5DB"/>
-            </a:solidFill>
-            <a:prstDash val="solid"/>
-          </a:ln>
-        </p:spPr>
-      </p:sp>
-      <p:sp>
-        <p:nvSpPr>
-          <p:cNvPr id="6" name="Text 4"/>
-          <p:cNvSpPr/>
-          <p:nvPr/>
-        </p:nvSpPr>
-        <p:spPr>
-          <a:xfrm>
-            <a:off x="566928" y="1298448"/>
-            <a:ext cx="3712464" cy="411480"/>
+              <a:t>Declarative workflows: describe what, not how</a:t>
+            </a:r>
+            <a:endParaRPr lang="en-US" sz="2300" dirty="0"/>
+          </a:p>
+        </p:txBody>
+      </p:sp>
+      <p:sp>
+        <p:nvSpPr>
+          <p:cNvPr id="5" name="Text 3"/>
+          <p:cNvSpPr/>
+          <p:nvPr/>
+        </p:nvSpPr>
+        <p:spPr>
+          <a:xfrm>
+            <a:off x="502920" y="1170432"/>
+            <a:ext cx="7955280" cy="3520440"/>
           </a:xfrm>
           <a:prstGeom prst="rect">
             <a:avLst/>
@@ -6851,58 +7030,41 @@
           <a:ln/>
         </p:spPr>
         <p:txBody>
-          <a:bodyPr wrap="square" lIns="0" tIns="0" rIns="0" bIns="0" rtlCol="0" anchor="ctr">
+          <a:bodyPr wrap="square" lIns="0" tIns="0" rIns="0" bIns="0" rtlCol="0" anchor="t">
             <a:normAutofit/>
           </a:bodyPr>
           <a:lstStyle/>
           <a:p>
-            <a:pPr indent="0" marL="0">
-              <a:buNone/>
-            </a:pPr>
-            <a:r>
-              <a:rPr lang="en-US" sz="2000" b="1" dirty="0">
-                <a:solidFill>
-                  <a:srgbClr val="1E2761"/>
+            <a:pPr marL="342900" indent="-342900">
+              <a:spcAft>
+                <a:spcPts val="1000"/>
+              </a:spcAft>
+              <a:buSzPct val="100000"/>
+              <a:buChar char="•"/>
+            </a:pPr>
+            <a:r>
+              <a:rPr lang="en-US" sz="1600" dirty="0">
+                <a:solidFill>
+                  <a:srgbClr val="212121"/>
                 </a:solidFill>
                 <a:latin typeface="Calibri" pitchFamily="34" charset="0"/>
                 <a:ea typeface="Calibri" pitchFamily="34" charset="-122"/>
                 <a:cs typeface="Calibri" pitchFamily="34" charset="-120"/>
               </a:rPr>
-              <a:t>Programmatic (today's focus)</a:t>
-            </a:r>
-            <a:endParaRPr lang="en-US" sz="2000" dirty="0"/>
-          </a:p>
-        </p:txBody>
-      </p:sp>
-      <p:sp>
-        <p:nvSpPr>
-          <p:cNvPr id="7" name="Text 5"/>
-          <p:cNvSpPr/>
-          <p:nvPr/>
-        </p:nvSpPr>
-        <p:spPr>
-          <a:xfrm>
-            <a:off x="594360" y="1828800"/>
-            <a:ext cx="3639312" cy="2395728"/>
-          </a:xfrm>
-          <a:prstGeom prst="rect">
-            <a:avLst/>
-          </a:prstGeom>
-          <a:noFill/>
-          <a:ln/>
-        </p:spPr>
-        <p:txBody>
-          <a:bodyPr wrap="square" lIns="381" tIns="381" rIns="381" bIns="381" rtlCol="0" anchor="ctr">
-            <a:normAutofit/>
-          </a:bodyPr>
-          <a:lstStyle/>
+              <a:t>Declarative workflows define workflow logic in YAML instead of programmatic code — easier to read, modify, and share across teams</a:t>
+            </a:r>
+            <a:endParaRPr lang="en-US" sz="1600" dirty="0"/>
+          </a:p>
           <a:p>
             <a:pPr marL="342900" indent="-342900">
+              <a:spcAft>
+                <a:spcPts val="1000"/>
+              </a:spcAft>
               <a:buSzPct val="100000"/>
               <a:buChar char="•"/>
             </a:pPr>
             <a:r>
-              <a:rPr lang="en-US" sz="1300" dirty="0">
+              <a:rPr lang="en-US" sz="1600" dirty="0">
                 <a:solidFill>
                   <a:srgbClr val="212121"/>
                 </a:solidFill>
@@ -6910,17 +7072,20 @@
                 <a:ea typeface="Calibri" pitchFamily="34" charset="-122"/>
                 <a:cs typeface="Calibri" pitchFamily="34" charset="-120"/>
               </a:rPr>
-              <a:t>WorkflowBuilder in Python, C#, or Go</a:t>
-            </a:r>
-            <a:endParaRPr lang="en-US" sz="1300" dirty="0"/>
+              <a:t>You describe what the workflow should do, not how to implement it — the framework converts the YAML into an executable workflow graph</a:t>
+            </a:r>
+            <a:endParaRPr lang="en-US" sz="1600" dirty="0"/>
           </a:p>
           <a:p>
             <a:pPr marL="342900" indent="-342900">
+              <a:spcAft>
+                <a:spcPts val="1000"/>
+              </a:spcAft>
               <a:buSzPct val="100000"/>
               <a:buChar char="•"/>
             </a:pPr>
             <a:r>
-              <a:rPr lang="en-US" sz="1300" dirty="0">
+              <a:rPr lang="en-US" sz="1600" dirty="0">
                 <a:solidFill>
                   <a:srgbClr val="212121"/>
                 </a:solidFill>
@@ -6928,17 +7093,20 @@
                 <a:ea typeface="Calibri" pitchFamily="34" charset="-122"/>
                 <a:cs typeface="Calibri" pitchFamily="34" charset="-120"/>
               </a:rPr>
-              <a:t>Maximum flexibility; integrates directly with existing code</a:t>
-            </a:r>
-            <a:endParaRPr lang="en-US" sz="1300" dirty="0"/>
-          </a:p>
-          <a:p>
-            <a:pPr marL="342900" indent="-342900">
+              <a:t>Key benefits:</a:t>
+            </a:r>
+            <a:endParaRPr lang="en-US" sz="1600" dirty="0"/>
+          </a:p>
+          <a:p>
+            <a:pPr lvl="1" marL="457200" indent="-228600">
+              <a:spcAft>
+                <a:spcPts val="1000"/>
+              </a:spcAft>
               <a:buSzPct val="100000"/>
               <a:buChar char="•"/>
             </a:pPr>
             <a:r>
-              <a:rPr lang="en-US" sz="1300" dirty="0">
+              <a:rPr lang="en-US" sz="1600" dirty="0">
                 <a:solidFill>
                   <a:srgbClr val="212121"/>
                 </a:solidFill>
@@ -6946,107 +7114,41 @@
                 <a:ea typeface="Calibri" pitchFamily="34" charset="-122"/>
                 <a:cs typeface="Calibri" pitchFamily="34" charset="-120"/>
               </a:rPr>
-              <a:t>What today's lab is built on</a:t>
-            </a:r>
-            <a:endParaRPr lang="en-US" sz="1300" dirty="0"/>
-          </a:p>
-        </p:txBody>
-      </p:sp>
-      <p:sp>
-        <p:nvSpPr>
-          <p:cNvPr id="8" name="Shape 6"/>
-          <p:cNvSpPr/>
-          <p:nvPr/>
-        </p:nvSpPr>
-        <p:spPr>
-          <a:xfrm>
-            <a:off x="4663440" y="1078992"/>
-            <a:ext cx="4114800" cy="3493008"/>
-          </a:xfrm>
-          <a:prstGeom prst="roundRect">
-            <a:avLst/>
-          </a:prstGeom>
-          <a:solidFill>
-            <a:srgbClr val="CADCFC"/>
-          </a:solidFill>
-          <a:ln w="11430">
-            <a:solidFill>
-              <a:srgbClr val="1E2761"/>
-            </a:solidFill>
-            <a:prstDash val="solid"/>
-          </a:ln>
-        </p:spPr>
-      </p:sp>
-      <p:sp>
-        <p:nvSpPr>
-          <p:cNvPr id="9" name="Text 7"/>
-          <p:cNvSpPr/>
-          <p:nvPr/>
-        </p:nvSpPr>
-        <p:spPr>
-          <a:xfrm>
-            <a:off x="4864608" y="1298448"/>
-            <a:ext cx="3712464" cy="411480"/>
-          </a:xfrm>
-          <a:prstGeom prst="rect">
-            <a:avLst/>
-          </a:prstGeom>
-          <a:noFill/>
-          <a:ln/>
-        </p:spPr>
-        <p:txBody>
-          <a:bodyPr wrap="square" lIns="0" tIns="0" rIns="0" bIns="0" rtlCol="0" anchor="ctr">
-            <a:normAutofit/>
-          </a:bodyPr>
-          <a:lstStyle/>
-          <a:p>
-            <a:pPr indent="0" marL="0">
-              <a:buNone/>
-            </a:pPr>
-            <a:r>
-              <a:rPr lang="en-US" sz="2000" b="1" dirty="0">
-                <a:solidFill>
-                  <a:srgbClr val="1E2761"/>
+              <a:t>Readable — YAML syntax is easy to understand, even for non-developers</a:t>
+            </a:r>
+            <a:endParaRPr lang="en-US" sz="1600" dirty="0"/>
+          </a:p>
+          <a:p>
+            <a:pPr lvl="1" marL="457200" indent="-228600">
+              <a:spcAft>
+                <a:spcPts val="1000"/>
+              </a:spcAft>
+              <a:buSzPct val="100000"/>
+              <a:buChar char="•"/>
+            </a:pPr>
+            <a:r>
+              <a:rPr lang="en-US" sz="1600" dirty="0">
+                <a:solidFill>
+                  <a:srgbClr val="212121"/>
                 </a:solidFill>
                 <a:latin typeface="Calibri" pitchFamily="34" charset="0"/>
                 <a:ea typeface="Calibri" pitchFamily="34" charset="-122"/>
                 <a:cs typeface="Calibri" pitchFamily="34" charset="-120"/>
               </a:rPr>
-              <a:t>Declarative — OUT OF SCOPE THIS WEEK</a:t>
-            </a:r>
-            <a:endParaRPr lang="en-US" sz="2000" dirty="0"/>
-          </a:p>
-        </p:txBody>
-      </p:sp>
-      <p:sp>
-        <p:nvSpPr>
-          <p:cNvPr id="10" name="Text 8"/>
-          <p:cNvSpPr/>
-          <p:nvPr/>
-        </p:nvSpPr>
-        <p:spPr>
-          <a:xfrm>
-            <a:off x="4892040" y="1828800"/>
-            <a:ext cx="3639312" cy="2395728"/>
-          </a:xfrm>
-          <a:prstGeom prst="rect">
-            <a:avLst/>
-          </a:prstGeom>
-          <a:noFill/>
-          <a:ln/>
-        </p:spPr>
-        <p:txBody>
-          <a:bodyPr wrap="square" lIns="381" tIns="381" rIns="381" bIns="381" rtlCol="0" anchor="ctr">
-            <a:normAutofit/>
-          </a:bodyPr>
-          <a:lstStyle/>
-          <a:p>
-            <a:pPr marL="342900" indent="-342900">
+              <a:t>Portable — definitions can be shared, versioned, and modified without code changes</a:t>
+            </a:r>
+            <a:endParaRPr lang="en-US" sz="1600" dirty="0"/>
+          </a:p>
+          <a:p>
+            <a:pPr lvl="1" marL="457200" indent="-228600">
+              <a:spcAft>
+                <a:spcPts val="1000"/>
+              </a:spcAft>
               <a:buSzPct val="100000"/>
               <a:buChar char="•"/>
             </a:pPr>
             <a:r>
-              <a:rPr lang="en-US" sz="1300" dirty="0">
+              <a:rPr lang="en-US" sz="1600" dirty="0">
                 <a:solidFill>
                   <a:srgbClr val="212121"/>
                 </a:solidFill>
@@ -7054,17 +7156,20 @@
                 <a:ea typeface="Calibri" pitchFamily="34" charset="-122"/>
                 <a:cs typeface="Calibri" pitchFamily="34" charset="-120"/>
               </a:rPr>
-              <a:t>Define the graph in YAML instead of code</a:t>
-            </a:r>
-            <a:endParaRPr lang="en-US" sz="1300" dirty="0"/>
-          </a:p>
-          <a:p>
-            <a:pPr marL="342900" indent="-342900">
+              <a:t>Rapid iteration — modify workflow behavior by editing configuration files</a:t>
+            </a:r>
+            <a:endParaRPr lang="en-US" sz="1600" dirty="0"/>
+          </a:p>
+          <a:p>
+            <a:pPr lvl="1" marL="457200" indent="-228600">
+              <a:spcAft>
+                <a:spcPts val="1000"/>
+              </a:spcAft>
               <a:buSzPct val="100000"/>
               <a:buChar char="•"/>
             </a:pPr>
             <a:r>
-              <a:rPr lang="en-US" sz="1300" dirty="0">
+              <a:rPr lang="en-US" sz="1600" dirty="0">
                 <a:solidFill>
                   <a:srgbClr val="212121"/>
                 </a:solidFill>
@@ -7072,33 +7177,15 @@
                 <a:ea typeface="Calibri" pitchFamily="34" charset="-122"/>
                 <a:cs typeface="Calibri" pitchFamily="34" charset="-120"/>
               </a:rPr>
-              <a:t>Docs' own guidance: prefer it for standard patterns, frequently-changing workflows, or non-developer maintainers</a:t>
-            </a:r>
-            <a:endParaRPr lang="en-US" sz="1300" dirty="0"/>
-          </a:p>
-          <a:p>
-            <a:pPr marL="342900" indent="-342900">
-              <a:buSzPct val="100000"/>
-              <a:buChar char="•"/>
-            </a:pPr>
-            <a:r>
-              <a:rPr lang="en-US" sz="1300" dirty="0">
-                <a:solidFill>
-                  <a:srgbClr val="212121"/>
-                </a:solidFill>
-                <a:latin typeface="Calibri" pitchFamily="34" charset="0"/>
-                <a:ea typeface="Calibri" pitchFamily="34" charset="-122"/>
-                <a:cs typeface="Calibri" pitchFamily="34" charset="-120"/>
-              </a:rPr>
-              <a:t>Real and documented — just not this workshop's focus, since the week is code-first</a:t>
-            </a:r>
-            <a:endParaRPr lang="en-US" sz="1300" dirty="0"/>
-          </a:p>
-        </p:txBody>
-      </p:sp>
-      <p:sp>
-        <p:nvSpPr>
-          <p:cNvPr id="11" name="Shape 9"/>
+              <a:t>Consistent structure — predefined action types keep workflows following best practices</a:t>
+            </a:r>
+            <a:endParaRPr lang="en-US" sz="1600" dirty="0"/>
+          </a:p>
+        </p:txBody>
+      </p:sp>
+      <p:sp>
+        <p:nvSpPr>
+          <p:cNvPr id="6" name="Shape 4"/>
           <p:cNvSpPr/>
           <p:nvPr/>
         </p:nvSpPr>
@@ -7121,7 +7208,7 @@
       </p:sp>
       <p:sp>
         <p:nvSpPr>
-          <p:cNvPr id="12" name="Text 10"/>
+          <p:cNvPr id="7" name="Text 5"/>
           <p:cNvSpPr/>
           <p:nvPr/>
         </p:nvSpPr>
@@ -7154,7 +7241,7 @@
                 <a:ea typeface="Calibri" pitchFamily="34" charset="-122"/>
                 <a:cs typeface="Calibri" pitchFamily="34" charset="-120"/>
               </a:rPr>
-              <a:t>Source: https://learn.microsoft.com/en-us/agent-framework/workflows/declarative</a:t>
+              <a:t>Source: https://learn.microsoft.com/en-us/agent-framework/workflows/declarative?pivots=programming-language-python#overview</a:t>
             </a:r>
             <a:endParaRPr lang="en-US" sz="820" dirty="0"/>
           </a:p>
@@ -7280,7 +7367,7 @@
               <a:buNone/>
             </a:pPr>
             <a:r>
-              <a:rPr lang="en-US" sz="2800" b="1" dirty="0">
+              <a:rPr lang="en-US" sz="2300" b="1" dirty="0">
                 <a:solidFill>
                   <a:srgbClr val="1E2761"/>
                 </a:solidFill>
@@ -7288,765 +7375,1011 @@
                 <a:ea typeface="Calibri" pitchFamily="34" charset="-122"/>
                 <a:cs typeface="Calibri" pitchFamily="34" charset="-120"/>
               </a:rPr>
-              <a:t>Takeaways</a:t>
-            </a:r>
-            <a:endParaRPr lang="en-US" sz="2800" dirty="0"/>
-          </a:p>
-        </p:txBody>
-      </p:sp>
-      <p:sp>
-        <p:nvSpPr>
-          <p:cNvPr id="5" name="Shape 3"/>
-          <p:cNvSpPr/>
-          <p:nvPr/>
-        </p:nvSpPr>
-        <p:spPr>
-          <a:xfrm>
-            <a:off x="502920" y="1097280"/>
-            <a:ext cx="8138160" cy="556260"/>
-          </a:xfrm>
-          <a:prstGeom prst="roundRect">
-            <a:avLst/>
-          </a:prstGeom>
-          <a:solidFill>
-            <a:srgbClr val="F3F4F6"/>
-          </a:solidFill>
-          <a:ln w="6350">
-            <a:solidFill>
-              <a:srgbClr val="D1D5DB"/>
-            </a:solidFill>
-            <a:prstDash val="solid"/>
-          </a:ln>
-        </p:spPr>
-      </p:sp>
-      <p:sp>
-        <p:nvSpPr>
-          <p:cNvPr id="6" name="Shape 4"/>
-          <p:cNvSpPr/>
-          <p:nvPr/>
-        </p:nvSpPr>
-        <p:spPr>
-          <a:xfrm>
-            <a:off x="667512" y="1225296"/>
-            <a:ext cx="256032" cy="256032"/>
-          </a:xfrm>
-          <a:prstGeom prst="ellipse">
-            <a:avLst/>
-          </a:prstGeom>
-          <a:solidFill>
-            <a:srgbClr val="1E2761"/>
-          </a:solidFill>
-          <a:ln/>
-        </p:spPr>
-      </p:sp>
-      <p:sp>
-        <p:nvSpPr>
-          <p:cNvPr id="7" name="Text 5"/>
-          <p:cNvSpPr/>
-          <p:nvPr/>
-        </p:nvSpPr>
-        <p:spPr>
-          <a:xfrm>
-            <a:off x="667512" y="1252728"/>
-            <a:ext cx="256032" cy="137160"/>
-          </a:xfrm>
-          <a:prstGeom prst="rect">
-            <a:avLst/>
-          </a:prstGeom>
-          <a:noFill/>
-          <a:ln/>
-        </p:spPr>
-        <p:txBody>
-          <a:bodyPr wrap="square" lIns="0" tIns="0" rIns="0" bIns="0" rtlCol="0" anchor="ctr"/>
-          <a:lstStyle/>
-          <a:p>
-            <a:pPr algn="ctr" indent="0" marL="0">
-              <a:buNone/>
-            </a:pPr>
-            <a:r>
-              <a:rPr lang="en-US" sz="900" b="1" dirty="0">
-                <a:solidFill>
-                  <a:srgbClr val="FFFFFF"/>
-                </a:solidFill>
-                <a:latin typeface="Calibri" pitchFamily="34" charset="0"/>
-                <a:ea typeface="Calibri" pitchFamily="34" charset="-122"/>
-                <a:cs typeface="Calibri" pitchFamily="34" charset="-120"/>
-              </a:rPr>
-              <a:t>✓</a:t>
-            </a:r>
-            <a:endParaRPr lang="en-US" sz="900" dirty="0"/>
-          </a:p>
-        </p:txBody>
-      </p:sp>
-      <p:sp>
-        <p:nvSpPr>
-          <p:cNvPr id="8" name="Text 6"/>
-          <p:cNvSpPr/>
-          <p:nvPr/>
-        </p:nvSpPr>
-        <p:spPr>
-          <a:xfrm>
-            <a:off x="1042416" y="1207008"/>
-            <a:ext cx="7315200" cy="373380"/>
-          </a:xfrm>
-          <a:prstGeom prst="rect">
-            <a:avLst/>
-          </a:prstGeom>
-          <a:noFill/>
-          <a:ln/>
-        </p:spPr>
-        <p:txBody>
-          <a:bodyPr wrap="square" lIns="0" tIns="0" rIns="0" bIns="0" rtlCol="0" anchor="ctr">
-            <a:normAutofit/>
-          </a:bodyPr>
-          <a:lstStyle/>
-          <a:p>
-            <a:pPr indent="0" marL="0">
-              <a:buNone/>
-            </a:pPr>
-            <a:r>
-              <a:rPr lang="en-US" sz="1300" dirty="0">
-                <a:solidFill>
-                  <a:srgbClr val="212121"/>
-                </a:solidFill>
-                <a:latin typeface="Calibri" pitchFamily="34" charset="0"/>
-                <a:ea typeface="Calibri" pitchFamily="34" charset="-122"/>
-                <a:cs typeface="Calibri" pitchFamily="34" charset="-120"/>
-              </a:rPr>
-              <a:t>You build executors from typed message handlers, and connect them with direct, conditional, switch-case, or fan-in/fan-out edges.</a:t>
-            </a:r>
-            <a:endParaRPr lang="en-US" sz="1300" dirty="0"/>
-          </a:p>
-        </p:txBody>
-      </p:sp>
-      <p:sp>
-        <p:nvSpPr>
-          <p:cNvPr id="9" name="Shape 7"/>
-          <p:cNvSpPr/>
-          <p:nvPr/>
-        </p:nvSpPr>
-        <p:spPr>
-          <a:xfrm>
-            <a:off x="502920" y="1726692"/>
-            <a:ext cx="8138160" cy="556260"/>
-          </a:xfrm>
-          <a:prstGeom prst="roundRect">
-            <a:avLst/>
-          </a:prstGeom>
-          <a:solidFill>
-            <a:srgbClr val="F3F4F6"/>
-          </a:solidFill>
-          <a:ln w="6350">
-            <a:solidFill>
-              <a:srgbClr val="D1D5DB"/>
-            </a:solidFill>
-            <a:prstDash val="solid"/>
-          </a:ln>
-        </p:spPr>
-      </p:sp>
-      <p:sp>
-        <p:nvSpPr>
-          <p:cNvPr id="10" name="Shape 8"/>
-          <p:cNvSpPr/>
-          <p:nvPr/>
-        </p:nvSpPr>
-        <p:spPr>
-          <a:xfrm>
-            <a:off x="667512" y="1854708"/>
-            <a:ext cx="256032" cy="256032"/>
-          </a:xfrm>
-          <a:prstGeom prst="ellipse">
-            <a:avLst/>
-          </a:prstGeom>
-          <a:solidFill>
-            <a:srgbClr val="1E2761"/>
-          </a:solidFill>
-          <a:ln/>
-        </p:spPr>
-      </p:sp>
-      <p:sp>
-        <p:nvSpPr>
-          <p:cNvPr id="11" name="Text 9"/>
-          <p:cNvSpPr/>
-          <p:nvPr/>
-        </p:nvSpPr>
-        <p:spPr>
-          <a:xfrm>
-            <a:off x="667512" y="1882140"/>
-            <a:ext cx="256032" cy="137160"/>
-          </a:xfrm>
-          <a:prstGeom prst="rect">
-            <a:avLst/>
-          </a:prstGeom>
-          <a:noFill/>
-          <a:ln/>
-        </p:spPr>
-        <p:txBody>
-          <a:bodyPr wrap="square" lIns="0" tIns="0" rIns="0" bIns="0" rtlCol="0" anchor="ctr"/>
-          <a:lstStyle/>
-          <a:p>
-            <a:pPr algn="ctr" indent="0" marL="0">
-              <a:buNone/>
-            </a:pPr>
-            <a:r>
-              <a:rPr lang="en-US" sz="900" b="1" dirty="0">
-                <a:solidFill>
-                  <a:srgbClr val="FFFFFF"/>
-                </a:solidFill>
-                <a:latin typeface="Calibri" pitchFamily="34" charset="0"/>
-                <a:ea typeface="Calibri" pitchFamily="34" charset="-122"/>
-                <a:cs typeface="Calibri" pitchFamily="34" charset="-120"/>
-              </a:rPr>
-              <a:t>✓</a:t>
-            </a:r>
-            <a:endParaRPr lang="en-US" sz="900" dirty="0"/>
-          </a:p>
-        </p:txBody>
-      </p:sp>
-      <p:sp>
-        <p:nvSpPr>
-          <p:cNvPr id="12" name="Text 10"/>
-          <p:cNvSpPr/>
-          <p:nvPr/>
-        </p:nvSpPr>
-        <p:spPr>
-          <a:xfrm>
-            <a:off x="1042416" y="1836420"/>
-            <a:ext cx="7315200" cy="373380"/>
-          </a:xfrm>
-          <a:prstGeom prst="rect">
-            <a:avLst/>
-          </a:prstGeom>
-          <a:noFill/>
-          <a:ln/>
-        </p:spPr>
-        <p:txBody>
-          <a:bodyPr wrap="square" lIns="0" tIns="0" rIns="0" bIns="0" rtlCol="0" anchor="ctr">
-            <a:normAutofit/>
-          </a:bodyPr>
-          <a:lstStyle/>
-          <a:p>
-            <a:pPr indent="0" marL="0">
-              <a:buNone/>
-            </a:pPr>
-            <a:r>
-              <a:rPr lang="en-US" sz="1300" dirty="0">
-                <a:solidFill>
-                  <a:srgbClr val="212121"/>
-                </a:solidFill>
-                <a:latin typeface="Calibri" pitchFamily="34" charset="0"/>
-                <a:ea typeface="Calibri" pitchFamily="34" charset="-122"/>
-                <a:cs typeface="Calibri" pitchFamily="34" charset="-120"/>
-              </a:rPr>
-              <a:t>Conditional edges are what a revision loop needs — no prebuilt orchestration pattern supports routing back to an earlier agent.</a:t>
-            </a:r>
-            <a:endParaRPr lang="en-US" sz="1300" dirty="0"/>
-          </a:p>
-        </p:txBody>
-      </p:sp>
-      <p:sp>
-        <p:nvSpPr>
-          <p:cNvPr id="13" name="Shape 11"/>
-          <p:cNvSpPr/>
-          <p:nvPr/>
-        </p:nvSpPr>
-        <p:spPr>
-          <a:xfrm>
-            <a:off x="502920" y="2356104"/>
-            <a:ext cx="8138160" cy="556260"/>
-          </a:xfrm>
-          <a:prstGeom prst="roundRect">
-            <a:avLst/>
-          </a:prstGeom>
-          <a:solidFill>
-            <a:srgbClr val="F3F4F6"/>
-          </a:solidFill>
-          <a:ln w="6350">
-            <a:solidFill>
-              <a:srgbClr val="D1D5DB"/>
-            </a:solidFill>
-            <a:prstDash val="solid"/>
-          </a:ln>
-        </p:spPr>
-      </p:sp>
-      <p:sp>
-        <p:nvSpPr>
-          <p:cNvPr id="14" name="Shape 12"/>
-          <p:cNvSpPr/>
-          <p:nvPr/>
-        </p:nvSpPr>
-        <p:spPr>
-          <a:xfrm>
-            <a:off x="667512" y="2484120"/>
-            <a:ext cx="256032" cy="256032"/>
-          </a:xfrm>
-          <a:prstGeom prst="ellipse">
-            <a:avLst/>
-          </a:prstGeom>
-          <a:solidFill>
-            <a:srgbClr val="1E2761"/>
-          </a:solidFill>
-          <a:ln/>
-        </p:spPr>
-      </p:sp>
-      <p:sp>
-        <p:nvSpPr>
-          <p:cNvPr id="15" name="Text 13"/>
-          <p:cNvSpPr/>
-          <p:nvPr/>
-        </p:nvSpPr>
-        <p:spPr>
-          <a:xfrm>
-            <a:off x="667512" y="2511552"/>
-            <a:ext cx="256032" cy="137160"/>
-          </a:xfrm>
-          <a:prstGeom prst="rect">
-            <a:avLst/>
-          </a:prstGeom>
-          <a:noFill/>
-          <a:ln/>
-        </p:spPr>
-        <p:txBody>
-          <a:bodyPr wrap="square" lIns="0" tIns="0" rIns="0" bIns="0" rtlCol="0" anchor="ctr"/>
-          <a:lstStyle/>
-          <a:p>
-            <a:pPr algn="ctr" indent="0" marL="0">
-              <a:buNone/>
-            </a:pPr>
-            <a:r>
-              <a:rPr lang="en-US" sz="900" b="1" dirty="0">
-                <a:solidFill>
-                  <a:srgbClr val="FFFFFF"/>
-                </a:solidFill>
-                <a:latin typeface="Calibri" pitchFamily="34" charset="0"/>
-                <a:ea typeface="Calibri" pitchFamily="34" charset="-122"/>
-                <a:cs typeface="Calibri" pitchFamily="34" charset="-120"/>
-              </a:rPr>
-              <a:t>✓</a:t>
-            </a:r>
-            <a:endParaRPr lang="en-US" sz="900" dirty="0"/>
-          </a:p>
-        </p:txBody>
-      </p:sp>
-      <p:sp>
-        <p:nvSpPr>
-          <p:cNvPr id="16" name="Text 14"/>
-          <p:cNvSpPr/>
-          <p:nvPr/>
-        </p:nvSpPr>
-        <p:spPr>
-          <a:xfrm>
-            <a:off x="1042416" y="2465832"/>
-            <a:ext cx="7315200" cy="373380"/>
-          </a:xfrm>
-          <a:prstGeom prst="rect">
-            <a:avLst/>
-          </a:prstGeom>
-          <a:noFill/>
-          <a:ln/>
-        </p:spPr>
-        <p:txBody>
-          <a:bodyPr wrap="square" lIns="0" tIns="0" rIns="0" bIns="0" rtlCol="0" anchor="ctr">
-            <a:normAutofit/>
-          </a:bodyPr>
-          <a:lstStyle/>
-          <a:p>
-            <a:pPr indent="0" marL="0">
-              <a:buNone/>
-            </a:pPr>
-            <a:r>
-              <a:rPr lang="en-US" sz="1300" dirty="0">
-                <a:solidFill>
-                  <a:srgbClr val="212121"/>
-                </a:solidFill>
-                <a:latin typeface="Calibri" pitchFamily="34" charset="0"/>
-                <a:ea typeface="Calibri" pitchFamily="34" charset="-122"/>
-                <a:cs typeface="Calibri" pitchFamily="34" charset="-120"/>
-              </a:rPr>
-              <a:t>The superstep (Pregel/BSP) model is why parallel execution is real, checkpointing is reliable, and execution is deterministic.</a:t>
-            </a:r>
-            <a:endParaRPr lang="en-US" sz="1300" dirty="0"/>
-          </a:p>
-        </p:txBody>
-      </p:sp>
-      <p:sp>
-        <p:nvSpPr>
-          <p:cNvPr id="17" name="Shape 15"/>
-          <p:cNvSpPr/>
-          <p:nvPr/>
-        </p:nvSpPr>
-        <p:spPr>
-          <a:xfrm>
-            <a:off x="502920" y="2985516"/>
-            <a:ext cx="8138160" cy="556260"/>
-          </a:xfrm>
-          <a:prstGeom prst="roundRect">
-            <a:avLst/>
-          </a:prstGeom>
-          <a:solidFill>
-            <a:srgbClr val="F3F4F6"/>
-          </a:solidFill>
-          <a:ln w="6350">
-            <a:solidFill>
-              <a:srgbClr val="D1D5DB"/>
-            </a:solidFill>
-            <a:prstDash val="solid"/>
-          </a:ln>
-        </p:spPr>
-      </p:sp>
-      <p:sp>
-        <p:nvSpPr>
-          <p:cNvPr id="18" name="Shape 16"/>
-          <p:cNvSpPr/>
-          <p:nvPr/>
-        </p:nvSpPr>
-        <p:spPr>
-          <a:xfrm>
-            <a:off x="667512" y="3113532"/>
-            <a:ext cx="256032" cy="256032"/>
-          </a:xfrm>
-          <a:prstGeom prst="ellipse">
-            <a:avLst/>
-          </a:prstGeom>
-          <a:solidFill>
-            <a:srgbClr val="1E2761"/>
-          </a:solidFill>
-          <a:ln/>
-        </p:spPr>
-      </p:sp>
-      <p:sp>
-        <p:nvSpPr>
-          <p:cNvPr id="19" name="Text 17"/>
-          <p:cNvSpPr/>
-          <p:nvPr/>
-        </p:nvSpPr>
-        <p:spPr>
-          <a:xfrm>
-            <a:off x="667512" y="3140964"/>
-            <a:ext cx="256032" cy="137160"/>
-          </a:xfrm>
-          <a:prstGeom prst="rect">
-            <a:avLst/>
-          </a:prstGeom>
-          <a:noFill/>
-          <a:ln/>
-        </p:spPr>
-        <p:txBody>
-          <a:bodyPr wrap="square" lIns="0" tIns="0" rIns="0" bIns="0" rtlCol="0" anchor="ctr"/>
-          <a:lstStyle/>
-          <a:p>
-            <a:pPr algn="ctr" indent="0" marL="0">
-              <a:buNone/>
-            </a:pPr>
-            <a:r>
-              <a:rPr lang="en-US" sz="900" b="1" dirty="0">
-                <a:solidFill>
-                  <a:srgbClr val="FFFFFF"/>
-                </a:solidFill>
-                <a:latin typeface="Calibri" pitchFamily="34" charset="0"/>
-                <a:ea typeface="Calibri" pitchFamily="34" charset="-122"/>
-                <a:cs typeface="Calibri" pitchFamily="34" charset="-120"/>
-              </a:rPr>
-              <a:t>✓</a:t>
-            </a:r>
-            <a:endParaRPr lang="en-US" sz="900" dirty="0"/>
-          </a:p>
-        </p:txBody>
-      </p:sp>
-      <p:sp>
-        <p:nvSpPr>
-          <p:cNvPr id="20" name="Text 18"/>
-          <p:cNvSpPr/>
-          <p:nvPr/>
-        </p:nvSpPr>
-        <p:spPr>
-          <a:xfrm>
-            <a:off x="1042416" y="3095244"/>
-            <a:ext cx="7315200" cy="373380"/>
-          </a:xfrm>
-          <a:prstGeom prst="rect">
-            <a:avLst/>
-          </a:prstGeom>
-          <a:noFill/>
-          <a:ln/>
-        </p:spPr>
-        <p:txBody>
-          <a:bodyPr wrap="square" lIns="0" tIns="0" rIns="0" bIns="0" rtlCol="0" anchor="ctr">
-            <a:normAutofit/>
-          </a:bodyPr>
-          <a:lstStyle/>
-          <a:p>
-            <a:pPr indent="0" marL="0">
-              <a:buNone/>
-            </a:pPr>
-            <a:r>
-              <a:rPr lang="en-US" sz="1300" dirty="0">
-                <a:solidFill>
-                  <a:srgbClr val="212121"/>
-                </a:solidFill>
-                <a:latin typeface="Calibri" pitchFamily="34" charset="0"/>
-                <a:ea typeface="Calibri" pitchFamily="34" charset="-122"/>
-                <a:cs typeface="Calibri" pitchFamily="34" charset="-120"/>
-              </a:rPr>
-              <a:t>Human-in-the-loop and tool approval share one request/response mechanism; checkpoints preserve pending requests across a restore.</a:t>
-            </a:r>
-            <a:endParaRPr lang="en-US" sz="1300" dirty="0"/>
-          </a:p>
-        </p:txBody>
-      </p:sp>
-      <p:sp>
-        <p:nvSpPr>
-          <p:cNvPr id="21" name="Shape 19"/>
-          <p:cNvSpPr/>
-          <p:nvPr/>
-        </p:nvSpPr>
-        <p:spPr>
-          <a:xfrm>
-            <a:off x="502920" y="3614928"/>
-            <a:ext cx="8138160" cy="556260"/>
-          </a:xfrm>
-          <a:prstGeom prst="roundRect">
-            <a:avLst/>
-          </a:prstGeom>
-          <a:solidFill>
-            <a:srgbClr val="F3F4F6"/>
-          </a:solidFill>
-          <a:ln w="6350">
-            <a:solidFill>
-              <a:srgbClr val="D1D5DB"/>
-            </a:solidFill>
-            <a:prstDash val="solid"/>
-          </a:ln>
-        </p:spPr>
-      </p:sp>
-      <p:sp>
-        <p:nvSpPr>
-          <p:cNvPr id="22" name="Shape 20"/>
-          <p:cNvSpPr/>
-          <p:nvPr/>
-        </p:nvSpPr>
-        <p:spPr>
-          <a:xfrm>
-            <a:off x="667512" y="3742944"/>
-            <a:ext cx="256032" cy="256032"/>
-          </a:xfrm>
-          <a:prstGeom prst="ellipse">
-            <a:avLst/>
-          </a:prstGeom>
-          <a:solidFill>
-            <a:srgbClr val="1E2761"/>
-          </a:solidFill>
-          <a:ln/>
-        </p:spPr>
-      </p:sp>
-      <p:sp>
-        <p:nvSpPr>
-          <p:cNvPr id="23" name="Text 21"/>
-          <p:cNvSpPr/>
-          <p:nvPr/>
-        </p:nvSpPr>
-        <p:spPr>
-          <a:xfrm>
-            <a:off x="667512" y="3770376"/>
-            <a:ext cx="256032" cy="137160"/>
-          </a:xfrm>
-          <a:prstGeom prst="rect">
-            <a:avLst/>
-          </a:prstGeom>
-          <a:noFill/>
-          <a:ln/>
-        </p:spPr>
-        <p:txBody>
-          <a:bodyPr wrap="square" lIns="0" tIns="0" rIns="0" bIns="0" rtlCol="0" anchor="ctr"/>
-          <a:lstStyle/>
-          <a:p>
-            <a:pPr algn="ctr" indent="0" marL="0">
-              <a:buNone/>
-            </a:pPr>
-            <a:r>
-              <a:rPr lang="en-US" sz="900" b="1" dirty="0">
-                <a:solidFill>
-                  <a:srgbClr val="FFFFFF"/>
-                </a:solidFill>
-                <a:latin typeface="Calibri" pitchFamily="34" charset="0"/>
-                <a:ea typeface="Calibri" pitchFamily="34" charset="-122"/>
-                <a:cs typeface="Calibri" pitchFamily="34" charset="-120"/>
-              </a:rPr>
-              <a:t>✓</a:t>
-            </a:r>
-            <a:endParaRPr lang="en-US" sz="900" dirty="0"/>
-          </a:p>
-        </p:txBody>
-      </p:sp>
-      <p:sp>
-        <p:nvSpPr>
-          <p:cNvPr id="24" name="Text 22"/>
-          <p:cNvSpPr/>
-          <p:nvPr/>
-        </p:nvSpPr>
-        <p:spPr>
-          <a:xfrm>
-            <a:off x="1042416" y="3724656"/>
-            <a:ext cx="7315200" cy="373380"/>
-          </a:xfrm>
-          <a:prstGeom prst="rect">
-            <a:avLst/>
-          </a:prstGeom>
-          <a:noFill/>
-          <a:ln/>
-        </p:spPr>
-        <p:txBody>
-          <a:bodyPr wrap="square" lIns="0" tIns="0" rIns="0" bIns="0" rtlCol="0" anchor="ctr">
-            <a:normAutofit/>
-          </a:bodyPr>
-          <a:lstStyle/>
-          <a:p>
-            <a:pPr indent="0" marL="0">
-              <a:buNone/>
-            </a:pPr>
-            <a:r>
-              <a:rPr lang="en-US" sz="1300" dirty="0">
-                <a:solidFill>
-                  <a:srgbClr val="212121"/>
-                </a:solidFill>
-                <a:latin typeface="Calibri" pitchFamily="34" charset="0"/>
-                <a:ea typeface="Calibri" pitchFamily="34" charset="-122"/>
-                <a:cs typeface="Calibri" pitchFamily="34" charset="-120"/>
-              </a:rPr>
-              <a:t>You can render any graph you build with WorkflowViz, and diagnose a silent edge with edge_group.delivery_status — both work on the lab's own conditional edge.</a:t>
-            </a:r>
-            <a:endParaRPr lang="en-US" sz="1300" dirty="0"/>
-          </a:p>
-        </p:txBody>
-      </p:sp>
-      <p:sp>
-        <p:nvSpPr>
-          <p:cNvPr id="25" name="Shape 23"/>
-          <p:cNvSpPr/>
-          <p:nvPr/>
-        </p:nvSpPr>
-        <p:spPr>
-          <a:xfrm>
-            <a:off x="502920" y="4244340"/>
-            <a:ext cx="8138160" cy="556260"/>
-          </a:xfrm>
-          <a:prstGeom prst="roundRect">
-            <a:avLst/>
-          </a:prstGeom>
-          <a:solidFill>
-            <a:srgbClr val="F3F4F6"/>
-          </a:solidFill>
-          <a:ln w="6350">
-            <a:solidFill>
-              <a:srgbClr val="D1D5DB"/>
-            </a:solidFill>
-            <a:prstDash val="solid"/>
-          </a:ln>
-        </p:spPr>
-      </p:sp>
-      <p:sp>
-        <p:nvSpPr>
-          <p:cNvPr id="26" name="Shape 24"/>
-          <p:cNvSpPr/>
-          <p:nvPr/>
-        </p:nvSpPr>
-        <p:spPr>
-          <a:xfrm>
-            <a:off x="667512" y="4372356"/>
-            <a:ext cx="256032" cy="256032"/>
-          </a:xfrm>
-          <a:prstGeom prst="ellipse">
-            <a:avLst/>
-          </a:prstGeom>
-          <a:solidFill>
-            <a:srgbClr val="1E2761"/>
-          </a:solidFill>
-          <a:ln/>
-        </p:spPr>
-      </p:sp>
-      <p:sp>
-        <p:nvSpPr>
-          <p:cNvPr id="27" name="Text 25"/>
-          <p:cNvSpPr/>
-          <p:nvPr/>
-        </p:nvSpPr>
-        <p:spPr>
-          <a:xfrm>
-            <a:off x="667512" y="4399788"/>
-            <a:ext cx="256032" cy="137160"/>
-          </a:xfrm>
-          <a:prstGeom prst="rect">
-            <a:avLst/>
-          </a:prstGeom>
-          <a:noFill/>
-          <a:ln/>
-        </p:spPr>
-        <p:txBody>
-          <a:bodyPr wrap="square" lIns="0" tIns="0" rIns="0" bIns="0" rtlCol="0" anchor="ctr"/>
-          <a:lstStyle/>
-          <a:p>
-            <a:pPr algn="ctr" indent="0" marL="0">
-              <a:buNone/>
-            </a:pPr>
-            <a:r>
-              <a:rPr lang="en-US" sz="900" b="1" dirty="0">
-                <a:solidFill>
-                  <a:srgbClr val="FFFFFF"/>
-                </a:solidFill>
-                <a:latin typeface="Calibri" pitchFamily="34" charset="0"/>
-                <a:ea typeface="Calibri" pitchFamily="34" charset="-122"/>
-                <a:cs typeface="Calibri" pitchFamily="34" charset="-120"/>
-              </a:rPr>
-              <a:t>✓</a:t>
-            </a:r>
-            <a:endParaRPr lang="en-US" sz="900" dirty="0"/>
-          </a:p>
-        </p:txBody>
-      </p:sp>
-      <p:sp>
-        <p:nvSpPr>
-          <p:cNvPr id="28" name="Text 26"/>
-          <p:cNvSpPr/>
-          <p:nvPr/>
-        </p:nvSpPr>
-        <p:spPr>
-          <a:xfrm>
-            <a:off x="1042416" y="4354068"/>
-            <a:ext cx="7315200" cy="373380"/>
-          </a:xfrm>
-          <a:prstGeom prst="rect">
-            <a:avLst/>
-          </a:prstGeom>
-          <a:noFill/>
-          <a:ln/>
-        </p:spPr>
-        <p:txBody>
-          <a:bodyPr wrap="square" lIns="0" tIns="0" rIns="0" bIns="0" rtlCol="0" anchor="ctr">
-            <a:normAutofit/>
-          </a:bodyPr>
-          <a:lstStyle/>
-          <a:p>
-            <a:pPr indent="0" marL="0">
-              <a:buNone/>
-            </a:pPr>
-            <a:r>
-              <a:rPr lang="en-US" sz="1300" dirty="0">
-                <a:solidFill>
-                  <a:srgbClr val="212121"/>
-                </a:solidFill>
-                <a:latin typeface="Calibri" pitchFamily="34" charset="0"/>
-                <a:ea typeface="Calibri" pitchFamily="34" charset="-122"/>
-                <a:cs typeface="Calibri" pitchFamily="34" charset="-120"/>
-              </a:rPr>
-              <a:t>WorkflowBuilder is today's tool; the functional @workflow API and declarative YAML workflows are both real alternatives worth a second look outside this week's scope.</a:t>
-            </a:r>
-            <a:endParaRPr lang="en-US" sz="1300" dirty="0"/>
-          </a:p>
-        </p:txBody>
-      </p:sp>
-      <p:sp>
-        <p:nvSpPr>
-          <p:cNvPr id="29" name="Shape 27"/>
+              <a:t>When to use declarative vs. programmatic workflows</a:t>
+            </a:r>
+            <a:endParaRPr lang="en-US" sz="2300" dirty="0"/>
+          </a:p>
+        </p:txBody>
+      </p:sp>
+      <p:graphicFrame>
+        <p:nvGraphicFramePr>
+          <p:cNvPr id="19" name="Table 0"/>
+          <p:cNvGraphicFramePr>
+            <a:graphicFrameLocks noGrp="1"/>
+          </p:cNvGraphicFramePr>
+          <p:nvPr>
+            <p:extLst>
+              <p:ext uri="{D42A27DB-BD31-4B8C-83A1-F6EECF244321}">
+                <p14:modId xmlns:p14="http://schemas.microsoft.com/office/powerpoint/2010/main" val="1579011935"/>
+              </p:ext>
+            </p:extLst>
+          </p:nvPr>
+        </p:nvGraphicFramePr>
+        <p:xfrm>
+          <a:off x="365760" y="1078992"/>
+          <a:ext cx="8412480" cy="914400"/>
+        </p:xfrm>
+        <a:graphic>
+          <a:graphicData uri="http://schemas.openxmlformats.org/drawingml/2006/table">
+            <a:tbl>
+              <a:tblPr/>
+              <a:tblGrid>
+                <a:gridCol w="5560792"/>
+                <a:gridCol w="2851688"/>
+              </a:tblGrid>
+              <a:tr h="502920">
+                <a:tc>
+                  <a:txBody>
+                    <a:bodyPr/>
+                    <a:lstStyle/>
+                    <a:p>
+                      <a:pPr indent="0" marL="0">
+                        <a:buNone/>
+                      </a:pPr>
+                      <a:r>
+                        <a:rPr lang="en-US" sz="950" b="1" dirty="0">
+                          <a:solidFill>
+                            <a:srgbClr val="FFFFFF"/>
+                          </a:solidFill>
+                          <a:latin typeface="Calibri" pitchFamily="34" charset="0"/>
+                          <a:ea typeface="Calibri" pitchFamily="34" charset="-122"/>
+                          <a:cs typeface="Calibri" pitchFamily="34" charset="-120"/>
+                        </a:rPr>
+                        <a:t>Scenario</a:t>
+                      </a:r>
+                      <a:endParaRPr lang="en-US" sz="950" dirty="0">
+                        <a:latin typeface="Calibri" charset="0"/>
+                        <a:ea typeface="Calibri" charset="0"/>
+                        <a:cs typeface="Calibri" charset="0"/>
+                      </a:endParaRPr>
+                    </a:p>
+                  </a:txBody>
+                  <a:tcPr marL="54864" marR="54864" marT="54864" marB="54864" anchor="ctr">
+                    <a:lnL w="6350" cap="flat" cmpd="sng" algn="ctr">
+                      <a:solidFill>
+                        <a:srgbClr val="D1D5DB"/>
+                      </a:solidFill>
+                      <a:prstDash val="solid"/>
+                      <a:round/>
+                      <a:headEnd type="none" w="med" len="med"/>
+                      <a:tailEnd type="none" w="med" len="med"/>
+                    </a:lnL>
+                    <a:lnR w="6350" cap="flat" cmpd="sng" algn="ctr">
+                      <a:solidFill>
+                        <a:srgbClr val="D1D5DB"/>
+                      </a:solidFill>
+                      <a:prstDash val="solid"/>
+                      <a:round/>
+                      <a:headEnd type="none" w="med" len="med"/>
+                      <a:tailEnd type="none" w="med" len="med"/>
+                    </a:lnR>
+                    <a:lnT w="6350" cap="flat" cmpd="sng" algn="ctr">
+                      <a:solidFill>
+                        <a:srgbClr val="D1D5DB"/>
+                      </a:solidFill>
+                      <a:prstDash val="solid"/>
+                      <a:round/>
+                      <a:headEnd type="none" w="med" len="med"/>
+                      <a:tailEnd type="none" w="med" len="med"/>
+                    </a:lnT>
+                    <a:lnB w="6350" cap="flat" cmpd="sng" algn="ctr">
+                      <a:solidFill>
+                        <a:srgbClr val="D1D5DB"/>
+                      </a:solidFill>
+                      <a:prstDash val="solid"/>
+                      <a:round/>
+                      <a:headEnd type="none" w="med" len="med"/>
+                      <a:tailEnd type="none" w="med" len="med"/>
+                    </a:lnB>
+                    <a:solidFill>
+                      <a:srgbClr val="1E2761"/>
+                    </a:solidFill>
+                  </a:tcPr>
+                </a:tc>
+                <a:tc>
+                  <a:txBody>
+                    <a:bodyPr/>
+                    <a:lstStyle/>
+                    <a:p>
+                      <a:pPr indent="0" marL="0">
+                        <a:buNone/>
+                      </a:pPr>
+                      <a:r>
+                        <a:rPr lang="en-US" sz="950" b="1" dirty="0">
+                          <a:solidFill>
+                            <a:srgbClr val="FFFFFF"/>
+                          </a:solidFill>
+                          <a:latin typeface="Calibri" pitchFamily="34" charset="0"/>
+                          <a:ea typeface="Calibri" pitchFamily="34" charset="-122"/>
+                          <a:cs typeface="Calibri" pitchFamily="34" charset="-120"/>
+                        </a:rPr>
+                        <a:t>Recommended Approach</a:t>
+                      </a:r>
+                      <a:endParaRPr lang="en-US" sz="950" dirty="0">
+                        <a:latin typeface="Calibri" charset="0"/>
+                        <a:ea typeface="Calibri" charset="0"/>
+                        <a:cs typeface="Calibri" charset="0"/>
+                      </a:endParaRPr>
+                    </a:p>
+                  </a:txBody>
+                  <a:tcPr marL="54864" marR="54864" marT="54864" marB="54864" anchor="ctr">
+                    <a:lnL w="6350" cap="flat" cmpd="sng" algn="ctr">
+                      <a:solidFill>
+                        <a:srgbClr val="D1D5DB"/>
+                      </a:solidFill>
+                      <a:prstDash val="solid"/>
+                      <a:round/>
+                      <a:headEnd type="none" w="med" len="med"/>
+                      <a:tailEnd type="none" w="med" len="med"/>
+                    </a:lnL>
+                    <a:lnR w="6350" cap="flat" cmpd="sng" algn="ctr">
+                      <a:solidFill>
+                        <a:srgbClr val="D1D5DB"/>
+                      </a:solidFill>
+                      <a:prstDash val="solid"/>
+                      <a:round/>
+                      <a:headEnd type="none" w="med" len="med"/>
+                      <a:tailEnd type="none" w="med" len="med"/>
+                    </a:lnR>
+                    <a:lnT w="6350" cap="flat" cmpd="sng" algn="ctr">
+                      <a:solidFill>
+                        <a:srgbClr val="D1D5DB"/>
+                      </a:solidFill>
+                      <a:prstDash val="solid"/>
+                      <a:round/>
+                      <a:headEnd type="none" w="med" len="med"/>
+                      <a:tailEnd type="none" w="med" len="med"/>
+                    </a:lnT>
+                    <a:lnB w="6350" cap="flat" cmpd="sng" algn="ctr">
+                      <a:solidFill>
+                        <a:srgbClr val="D1D5DB"/>
+                      </a:solidFill>
+                      <a:prstDash val="solid"/>
+                      <a:round/>
+                      <a:headEnd type="none" w="med" len="med"/>
+                      <a:tailEnd type="none" w="med" len="med"/>
+                    </a:lnB>
+                    <a:solidFill>
+                      <a:srgbClr val="1E2761"/>
+                    </a:solidFill>
+                  </a:tcPr>
+                </a:tc>
+              </a:tr>
+              <a:tr h="502920">
+                <a:tc>
+                  <a:txBody>
+                    <a:bodyPr/>
+                    <a:lstStyle/>
+                    <a:p>
+                      <a:pPr indent="0" marL="0">
+                        <a:buNone/>
+                      </a:pPr>
+                      <a:r>
+                        <a:rPr lang="en-US" sz="950" dirty="0">
+                          <a:solidFill>
+                            <a:srgbClr val="212121"/>
+                          </a:solidFill>
+                          <a:latin typeface="Calibri" pitchFamily="34" charset="0"/>
+                          <a:ea typeface="Calibri" pitchFamily="34" charset="-122"/>
+                          <a:cs typeface="Calibri" pitchFamily="34" charset="-120"/>
+                        </a:rPr>
+                        <a:t>Standard orchestration patterns</a:t>
+                      </a:r>
+                      <a:endParaRPr lang="en-US" sz="950" dirty="0">
+                        <a:latin typeface="Calibri" charset="0"/>
+                        <a:ea typeface="Calibri" charset="0"/>
+                        <a:cs typeface="Calibri" charset="0"/>
+                      </a:endParaRPr>
+                    </a:p>
+                  </a:txBody>
+                  <a:tcPr marL="54864" marR="54864" marT="54864" marB="54864" anchor="ctr">
+                    <a:lnL w="6350" cap="flat" cmpd="sng" algn="ctr">
+                      <a:solidFill>
+                        <a:srgbClr val="D1D5DB"/>
+                      </a:solidFill>
+                      <a:prstDash val="solid"/>
+                      <a:round/>
+                      <a:headEnd type="none" w="med" len="med"/>
+                      <a:tailEnd type="none" w="med" len="med"/>
+                    </a:lnL>
+                    <a:lnR w="6350" cap="flat" cmpd="sng" algn="ctr">
+                      <a:solidFill>
+                        <a:srgbClr val="D1D5DB"/>
+                      </a:solidFill>
+                      <a:prstDash val="solid"/>
+                      <a:round/>
+                      <a:headEnd type="none" w="med" len="med"/>
+                      <a:tailEnd type="none" w="med" len="med"/>
+                    </a:lnR>
+                    <a:lnT w="6350" cap="flat" cmpd="sng" algn="ctr">
+                      <a:solidFill>
+                        <a:srgbClr val="D1D5DB"/>
+                      </a:solidFill>
+                      <a:prstDash val="solid"/>
+                      <a:round/>
+                      <a:headEnd type="none" w="med" len="med"/>
+                      <a:tailEnd type="none" w="med" len="med"/>
+                    </a:lnT>
+                    <a:lnB w="6350" cap="flat" cmpd="sng" algn="ctr">
+                      <a:solidFill>
+                        <a:srgbClr val="D1D5DB"/>
+                      </a:solidFill>
+                      <a:prstDash val="solid"/>
+                      <a:round/>
+                      <a:headEnd type="none" w="med" len="med"/>
+                      <a:tailEnd type="none" w="med" len="med"/>
+                    </a:lnB>
+                    <a:solidFill>
+                      <a:srgbClr val="FFFFFF"/>
+                    </a:solidFill>
+                  </a:tcPr>
+                </a:tc>
+                <a:tc>
+                  <a:txBody>
+                    <a:bodyPr/>
+                    <a:lstStyle/>
+                    <a:p>
+                      <a:pPr indent="0" marL="0">
+                        <a:buNone/>
+                      </a:pPr>
+                      <a:r>
+                        <a:rPr lang="en-US" sz="950" dirty="0">
+                          <a:solidFill>
+                            <a:srgbClr val="212121"/>
+                          </a:solidFill>
+                          <a:latin typeface="Calibri" pitchFamily="34" charset="0"/>
+                          <a:ea typeface="Calibri" pitchFamily="34" charset="-122"/>
+                          <a:cs typeface="Calibri" pitchFamily="34" charset="-120"/>
+                        </a:rPr>
+                        <a:t>Declarative</a:t>
+                      </a:r>
+                      <a:endParaRPr lang="en-US" sz="950" dirty="0">
+                        <a:latin typeface="Calibri" charset="0"/>
+                        <a:ea typeface="Calibri" charset="0"/>
+                        <a:cs typeface="Calibri" charset="0"/>
+                      </a:endParaRPr>
+                    </a:p>
+                  </a:txBody>
+                  <a:tcPr marL="54864" marR="54864" marT="54864" marB="54864" anchor="ctr">
+                    <a:lnL w="6350" cap="flat" cmpd="sng" algn="ctr">
+                      <a:solidFill>
+                        <a:srgbClr val="D1D5DB"/>
+                      </a:solidFill>
+                      <a:prstDash val="solid"/>
+                      <a:round/>
+                      <a:headEnd type="none" w="med" len="med"/>
+                      <a:tailEnd type="none" w="med" len="med"/>
+                    </a:lnL>
+                    <a:lnR w="6350" cap="flat" cmpd="sng" algn="ctr">
+                      <a:solidFill>
+                        <a:srgbClr val="D1D5DB"/>
+                      </a:solidFill>
+                      <a:prstDash val="solid"/>
+                      <a:round/>
+                      <a:headEnd type="none" w="med" len="med"/>
+                      <a:tailEnd type="none" w="med" len="med"/>
+                    </a:lnR>
+                    <a:lnT w="6350" cap="flat" cmpd="sng" algn="ctr">
+                      <a:solidFill>
+                        <a:srgbClr val="D1D5DB"/>
+                      </a:solidFill>
+                      <a:prstDash val="solid"/>
+                      <a:round/>
+                      <a:headEnd type="none" w="med" len="med"/>
+                      <a:tailEnd type="none" w="med" len="med"/>
+                    </a:lnT>
+                    <a:lnB w="6350" cap="flat" cmpd="sng" algn="ctr">
+                      <a:solidFill>
+                        <a:srgbClr val="D1D5DB"/>
+                      </a:solidFill>
+                      <a:prstDash val="solid"/>
+                      <a:round/>
+                      <a:headEnd type="none" w="med" len="med"/>
+                      <a:tailEnd type="none" w="med" len="med"/>
+                    </a:lnB>
+                    <a:solidFill>
+                      <a:srgbClr val="FFFFFF"/>
+                    </a:solidFill>
+                  </a:tcPr>
+                </a:tc>
+              </a:tr>
+              <a:tr h="502920">
+                <a:tc>
+                  <a:txBody>
+                    <a:bodyPr/>
+                    <a:lstStyle/>
+                    <a:p>
+                      <a:pPr indent="0" marL="0">
+                        <a:buNone/>
+                      </a:pPr>
+                      <a:r>
+                        <a:rPr lang="en-US" sz="950" dirty="0">
+                          <a:solidFill>
+                            <a:srgbClr val="212121"/>
+                          </a:solidFill>
+                          <a:latin typeface="Calibri" pitchFamily="34" charset="0"/>
+                          <a:ea typeface="Calibri" pitchFamily="34" charset="-122"/>
+                          <a:cs typeface="Calibri" pitchFamily="34" charset="-120"/>
+                        </a:rPr>
+                        <a:t>Workflows that change frequently</a:t>
+                      </a:r>
+                      <a:endParaRPr lang="en-US" sz="950" dirty="0">
+                        <a:latin typeface="Calibri" charset="0"/>
+                        <a:ea typeface="Calibri" charset="0"/>
+                        <a:cs typeface="Calibri" charset="0"/>
+                      </a:endParaRPr>
+                    </a:p>
+                  </a:txBody>
+                  <a:tcPr marL="54864" marR="54864" marT="54864" marB="54864" anchor="ctr">
+                    <a:lnL w="6350" cap="flat" cmpd="sng" algn="ctr">
+                      <a:solidFill>
+                        <a:srgbClr val="D1D5DB"/>
+                      </a:solidFill>
+                      <a:prstDash val="solid"/>
+                      <a:round/>
+                      <a:headEnd type="none" w="med" len="med"/>
+                      <a:tailEnd type="none" w="med" len="med"/>
+                    </a:lnL>
+                    <a:lnR w="6350" cap="flat" cmpd="sng" algn="ctr">
+                      <a:solidFill>
+                        <a:srgbClr val="D1D5DB"/>
+                      </a:solidFill>
+                      <a:prstDash val="solid"/>
+                      <a:round/>
+                      <a:headEnd type="none" w="med" len="med"/>
+                      <a:tailEnd type="none" w="med" len="med"/>
+                    </a:lnR>
+                    <a:lnT w="6350" cap="flat" cmpd="sng" algn="ctr">
+                      <a:solidFill>
+                        <a:srgbClr val="D1D5DB"/>
+                      </a:solidFill>
+                      <a:prstDash val="solid"/>
+                      <a:round/>
+                      <a:headEnd type="none" w="med" len="med"/>
+                      <a:tailEnd type="none" w="med" len="med"/>
+                    </a:lnT>
+                    <a:lnB w="6350" cap="flat" cmpd="sng" algn="ctr">
+                      <a:solidFill>
+                        <a:srgbClr val="D1D5DB"/>
+                      </a:solidFill>
+                      <a:prstDash val="solid"/>
+                      <a:round/>
+                      <a:headEnd type="none" w="med" len="med"/>
+                      <a:tailEnd type="none" w="med" len="med"/>
+                    </a:lnB>
+                    <a:solidFill>
+                      <a:srgbClr val="F3F4F6"/>
+                    </a:solidFill>
+                  </a:tcPr>
+                </a:tc>
+                <a:tc>
+                  <a:txBody>
+                    <a:bodyPr/>
+                    <a:lstStyle/>
+                    <a:p>
+                      <a:pPr indent="0" marL="0">
+                        <a:buNone/>
+                      </a:pPr>
+                      <a:r>
+                        <a:rPr lang="en-US" sz="950" dirty="0">
+                          <a:solidFill>
+                            <a:srgbClr val="212121"/>
+                          </a:solidFill>
+                          <a:latin typeface="Calibri" pitchFamily="34" charset="0"/>
+                          <a:ea typeface="Calibri" pitchFamily="34" charset="-122"/>
+                          <a:cs typeface="Calibri" pitchFamily="34" charset="-120"/>
+                        </a:rPr>
+                        <a:t>Declarative</a:t>
+                      </a:r>
+                      <a:endParaRPr lang="en-US" sz="950" dirty="0">
+                        <a:latin typeface="Calibri" charset="0"/>
+                        <a:ea typeface="Calibri" charset="0"/>
+                        <a:cs typeface="Calibri" charset="0"/>
+                      </a:endParaRPr>
+                    </a:p>
+                  </a:txBody>
+                  <a:tcPr marL="54864" marR="54864" marT="54864" marB="54864" anchor="ctr">
+                    <a:lnL w="6350" cap="flat" cmpd="sng" algn="ctr">
+                      <a:solidFill>
+                        <a:srgbClr val="D1D5DB"/>
+                      </a:solidFill>
+                      <a:prstDash val="solid"/>
+                      <a:round/>
+                      <a:headEnd type="none" w="med" len="med"/>
+                      <a:tailEnd type="none" w="med" len="med"/>
+                    </a:lnL>
+                    <a:lnR w="6350" cap="flat" cmpd="sng" algn="ctr">
+                      <a:solidFill>
+                        <a:srgbClr val="D1D5DB"/>
+                      </a:solidFill>
+                      <a:prstDash val="solid"/>
+                      <a:round/>
+                      <a:headEnd type="none" w="med" len="med"/>
+                      <a:tailEnd type="none" w="med" len="med"/>
+                    </a:lnR>
+                    <a:lnT w="6350" cap="flat" cmpd="sng" algn="ctr">
+                      <a:solidFill>
+                        <a:srgbClr val="D1D5DB"/>
+                      </a:solidFill>
+                      <a:prstDash val="solid"/>
+                      <a:round/>
+                      <a:headEnd type="none" w="med" len="med"/>
+                      <a:tailEnd type="none" w="med" len="med"/>
+                    </a:lnT>
+                    <a:lnB w="6350" cap="flat" cmpd="sng" algn="ctr">
+                      <a:solidFill>
+                        <a:srgbClr val="D1D5DB"/>
+                      </a:solidFill>
+                      <a:prstDash val="solid"/>
+                      <a:round/>
+                      <a:headEnd type="none" w="med" len="med"/>
+                      <a:tailEnd type="none" w="med" len="med"/>
+                    </a:lnB>
+                    <a:solidFill>
+                      <a:srgbClr val="F3F4F6"/>
+                    </a:solidFill>
+                  </a:tcPr>
+                </a:tc>
+              </a:tr>
+              <a:tr h="502920">
+                <a:tc>
+                  <a:txBody>
+                    <a:bodyPr/>
+                    <a:lstStyle/>
+                    <a:p>
+                      <a:pPr indent="0" marL="0">
+                        <a:buNone/>
+                      </a:pPr>
+                      <a:r>
+                        <a:rPr lang="en-US" sz="950" dirty="0">
+                          <a:solidFill>
+                            <a:srgbClr val="212121"/>
+                          </a:solidFill>
+                          <a:latin typeface="Calibri" pitchFamily="34" charset="0"/>
+                          <a:ea typeface="Calibri" pitchFamily="34" charset="-122"/>
+                          <a:cs typeface="Calibri" pitchFamily="34" charset="-120"/>
+                        </a:rPr>
+                        <a:t>Non-developers need to modify workflows</a:t>
+                      </a:r>
+                      <a:endParaRPr lang="en-US" sz="950" dirty="0">
+                        <a:latin typeface="Calibri" charset="0"/>
+                        <a:ea typeface="Calibri" charset="0"/>
+                        <a:cs typeface="Calibri" charset="0"/>
+                      </a:endParaRPr>
+                    </a:p>
+                  </a:txBody>
+                  <a:tcPr marL="54864" marR="54864" marT="54864" marB="54864" anchor="ctr">
+                    <a:lnL w="6350" cap="flat" cmpd="sng" algn="ctr">
+                      <a:solidFill>
+                        <a:srgbClr val="D1D5DB"/>
+                      </a:solidFill>
+                      <a:prstDash val="solid"/>
+                      <a:round/>
+                      <a:headEnd type="none" w="med" len="med"/>
+                      <a:tailEnd type="none" w="med" len="med"/>
+                    </a:lnL>
+                    <a:lnR w="6350" cap="flat" cmpd="sng" algn="ctr">
+                      <a:solidFill>
+                        <a:srgbClr val="D1D5DB"/>
+                      </a:solidFill>
+                      <a:prstDash val="solid"/>
+                      <a:round/>
+                      <a:headEnd type="none" w="med" len="med"/>
+                      <a:tailEnd type="none" w="med" len="med"/>
+                    </a:lnR>
+                    <a:lnT w="6350" cap="flat" cmpd="sng" algn="ctr">
+                      <a:solidFill>
+                        <a:srgbClr val="D1D5DB"/>
+                      </a:solidFill>
+                      <a:prstDash val="solid"/>
+                      <a:round/>
+                      <a:headEnd type="none" w="med" len="med"/>
+                      <a:tailEnd type="none" w="med" len="med"/>
+                    </a:lnT>
+                    <a:lnB w="6350" cap="flat" cmpd="sng" algn="ctr">
+                      <a:solidFill>
+                        <a:srgbClr val="D1D5DB"/>
+                      </a:solidFill>
+                      <a:prstDash val="solid"/>
+                      <a:round/>
+                      <a:headEnd type="none" w="med" len="med"/>
+                      <a:tailEnd type="none" w="med" len="med"/>
+                    </a:lnB>
+                    <a:solidFill>
+                      <a:srgbClr val="FFFFFF"/>
+                    </a:solidFill>
+                  </a:tcPr>
+                </a:tc>
+                <a:tc>
+                  <a:txBody>
+                    <a:bodyPr/>
+                    <a:lstStyle/>
+                    <a:p>
+                      <a:pPr indent="0" marL="0">
+                        <a:buNone/>
+                      </a:pPr>
+                      <a:r>
+                        <a:rPr lang="en-US" sz="950" dirty="0">
+                          <a:solidFill>
+                            <a:srgbClr val="212121"/>
+                          </a:solidFill>
+                          <a:latin typeface="Calibri" pitchFamily="34" charset="0"/>
+                          <a:ea typeface="Calibri" pitchFamily="34" charset="-122"/>
+                          <a:cs typeface="Calibri" pitchFamily="34" charset="-120"/>
+                        </a:rPr>
+                        <a:t>Declarative</a:t>
+                      </a:r>
+                      <a:endParaRPr lang="en-US" sz="950" dirty="0">
+                        <a:latin typeface="Calibri" charset="0"/>
+                        <a:ea typeface="Calibri" charset="0"/>
+                        <a:cs typeface="Calibri" charset="0"/>
+                      </a:endParaRPr>
+                    </a:p>
+                  </a:txBody>
+                  <a:tcPr marL="54864" marR="54864" marT="54864" marB="54864" anchor="ctr">
+                    <a:lnL w="6350" cap="flat" cmpd="sng" algn="ctr">
+                      <a:solidFill>
+                        <a:srgbClr val="D1D5DB"/>
+                      </a:solidFill>
+                      <a:prstDash val="solid"/>
+                      <a:round/>
+                      <a:headEnd type="none" w="med" len="med"/>
+                      <a:tailEnd type="none" w="med" len="med"/>
+                    </a:lnL>
+                    <a:lnR w="6350" cap="flat" cmpd="sng" algn="ctr">
+                      <a:solidFill>
+                        <a:srgbClr val="D1D5DB"/>
+                      </a:solidFill>
+                      <a:prstDash val="solid"/>
+                      <a:round/>
+                      <a:headEnd type="none" w="med" len="med"/>
+                      <a:tailEnd type="none" w="med" len="med"/>
+                    </a:lnR>
+                    <a:lnT w="6350" cap="flat" cmpd="sng" algn="ctr">
+                      <a:solidFill>
+                        <a:srgbClr val="D1D5DB"/>
+                      </a:solidFill>
+                      <a:prstDash val="solid"/>
+                      <a:round/>
+                      <a:headEnd type="none" w="med" len="med"/>
+                      <a:tailEnd type="none" w="med" len="med"/>
+                    </a:lnT>
+                    <a:lnB w="6350" cap="flat" cmpd="sng" algn="ctr">
+                      <a:solidFill>
+                        <a:srgbClr val="D1D5DB"/>
+                      </a:solidFill>
+                      <a:prstDash val="solid"/>
+                      <a:round/>
+                      <a:headEnd type="none" w="med" len="med"/>
+                      <a:tailEnd type="none" w="med" len="med"/>
+                    </a:lnB>
+                    <a:solidFill>
+                      <a:srgbClr val="FFFFFF"/>
+                    </a:solidFill>
+                  </a:tcPr>
+                </a:tc>
+              </a:tr>
+              <a:tr h="502920">
+                <a:tc>
+                  <a:txBody>
+                    <a:bodyPr/>
+                    <a:lstStyle/>
+                    <a:p>
+                      <a:pPr indent="0" marL="0">
+                        <a:buNone/>
+                      </a:pPr>
+                      <a:r>
+                        <a:rPr lang="en-US" sz="950" dirty="0">
+                          <a:solidFill>
+                            <a:srgbClr val="212121"/>
+                          </a:solidFill>
+                          <a:latin typeface="Calibri" pitchFamily="34" charset="0"/>
+                          <a:ea typeface="Calibri" pitchFamily="34" charset="-122"/>
+                          <a:cs typeface="Calibri" pitchFamily="34" charset="-120"/>
+                        </a:rPr>
+                        <a:t>Complex custom logic</a:t>
+                      </a:r>
+                      <a:endParaRPr lang="en-US" sz="950" dirty="0">
+                        <a:latin typeface="Calibri" charset="0"/>
+                        <a:ea typeface="Calibri" charset="0"/>
+                        <a:cs typeface="Calibri" charset="0"/>
+                      </a:endParaRPr>
+                    </a:p>
+                  </a:txBody>
+                  <a:tcPr marL="54864" marR="54864" marT="54864" marB="54864" anchor="ctr">
+                    <a:lnL w="6350" cap="flat" cmpd="sng" algn="ctr">
+                      <a:solidFill>
+                        <a:srgbClr val="D1D5DB"/>
+                      </a:solidFill>
+                      <a:prstDash val="solid"/>
+                      <a:round/>
+                      <a:headEnd type="none" w="med" len="med"/>
+                      <a:tailEnd type="none" w="med" len="med"/>
+                    </a:lnL>
+                    <a:lnR w="6350" cap="flat" cmpd="sng" algn="ctr">
+                      <a:solidFill>
+                        <a:srgbClr val="D1D5DB"/>
+                      </a:solidFill>
+                      <a:prstDash val="solid"/>
+                      <a:round/>
+                      <a:headEnd type="none" w="med" len="med"/>
+                      <a:tailEnd type="none" w="med" len="med"/>
+                    </a:lnR>
+                    <a:lnT w="6350" cap="flat" cmpd="sng" algn="ctr">
+                      <a:solidFill>
+                        <a:srgbClr val="D1D5DB"/>
+                      </a:solidFill>
+                      <a:prstDash val="solid"/>
+                      <a:round/>
+                      <a:headEnd type="none" w="med" len="med"/>
+                      <a:tailEnd type="none" w="med" len="med"/>
+                    </a:lnT>
+                    <a:lnB w="6350" cap="flat" cmpd="sng" algn="ctr">
+                      <a:solidFill>
+                        <a:srgbClr val="D1D5DB"/>
+                      </a:solidFill>
+                      <a:prstDash val="solid"/>
+                      <a:round/>
+                      <a:headEnd type="none" w="med" len="med"/>
+                      <a:tailEnd type="none" w="med" len="med"/>
+                    </a:lnB>
+                    <a:solidFill>
+                      <a:srgbClr val="F3F4F6"/>
+                    </a:solidFill>
+                  </a:tcPr>
+                </a:tc>
+                <a:tc>
+                  <a:txBody>
+                    <a:bodyPr/>
+                    <a:lstStyle/>
+                    <a:p>
+                      <a:pPr indent="0" marL="0">
+                        <a:buNone/>
+                      </a:pPr>
+                      <a:r>
+                        <a:rPr lang="en-US" sz="950" dirty="0">
+                          <a:solidFill>
+                            <a:srgbClr val="212121"/>
+                          </a:solidFill>
+                          <a:latin typeface="Calibri" pitchFamily="34" charset="0"/>
+                          <a:ea typeface="Calibri" pitchFamily="34" charset="-122"/>
+                          <a:cs typeface="Calibri" pitchFamily="34" charset="-120"/>
+                        </a:rPr>
+                        <a:t>Programmatic</a:t>
+                      </a:r>
+                      <a:endParaRPr lang="en-US" sz="950" dirty="0">
+                        <a:latin typeface="Calibri" charset="0"/>
+                        <a:ea typeface="Calibri" charset="0"/>
+                        <a:cs typeface="Calibri" charset="0"/>
+                      </a:endParaRPr>
+                    </a:p>
+                  </a:txBody>
+                  <a:tcPr marL="54864" marR="54864" marT="54864" marB="54864" anchor="ctr">
+                    <a:lnL w="6350" cap="flat" cmpd="sng" algn="ctr">
+                      <a:solidFill>
+                        <a:srgbClr val="D1D5DB"/>
+                      </a:solidFill>
+                      <a:prstDash val="solid"/>
+                      <a:round/>
+                      <a:headEnd type="none" w="med" len="med"/>
+                      <a:tailEnd type="none" w="med" len="med"/>
+                    </a:lnL>
+                    <a:lnR w="6350" cap="flat" cmpd="sng" algn="ctr">
+                      <a:solidFill>
+                        <a:srgbClr val="D1D5DB"/>
+                      </a:solidFill>
+                      <a:prstDash val="solid"/>
+                      <a:round/>
+                      <a:headEnd type="none" w="med" len="med"/>
+                      <a:tailEnd type="none" w="med" len="med"/>
+                    </a:lnR>
+                    <a:lnT w="6350" cap="flat" cmpd="sng" algn="ctr">
+                      <a:solidFill>
+                        <a:srgbClr val="D1D5DB"/>
+                      </a:solidFill>
+                      <a:prstDash val="solid"/>
+                      <a:round/>
+                      <a:headEnd type="none" w="med" len="med"/>
+                      <a:tailEnd type="none" w="med" len="med"/>
+                    </a:lnT>
+                    <a:lnB w="6350" cap="flat" cmpd="sng" algn="ctr">
+                      <a:solidFill>
+                        <a:srgbClr val="D1D5DB"/>
+                      </a:solidFill>
+                      <a:prstDash val="solid"/>
+                      <a:round/>
+                      <a:headEnd type="none" w="med" len="med"/>
+                      <a:tailEnd type="none" w="med" len="med"/>
+                    </a:lnB>
+                    <a:solidFill>
+                      <a:srgbClr val="F3F4F6"/>
+                    </a:solidFill>
+                  </a:tcPr>
+                </a:tc>
+              </a:tr>
+              <a:tr h="502920">
+                <a:tc>
+                  <a:txBody>
+                    <a:bodyPr/>
+                    <a:lstStyle/>
+                    <a:p>
+                      <a:pPr indent="0" marL="0">
+                        <a:buNone/>
+                      </a:pPr>
+                      <a:r>
+                        <a:rPr lang="en-US" sz="950" dirty="0">
+                          <a:solidFill>
+                            <a:srgbClr val="212121"/>
+                          </a:solidFill>
+                          <a:latin typeface="Calibri" pitchFamily="34" charset="0"/>
+                          <a:ea typeface="Calibri" pitchFamily="34" charset="-122"/>
+                          <a:cs typeface="Calibri" pitchFamily="34" charset="-120"/>
+                        </a:rPr>
+                        <a:t>Maximum flexibility and control</a:t>
+                      </a:r>
+                      <a:endParaRPr lang="en-US" sz="950" dirty="0">
+                        <a:latin typeface="Calibri" charset="0"/>
+                        <a:ea typeface="Calibri" charset="0"/>
+                        <a:cs typeface="Calibri" charset="0"/>
+                      </a:endParaRPr>
+                    </a:p>
+                  </a:txBody>
+                  <a:tcPr marL="54864" marR="54864" marT="54864" marB="54864" anchor="ctr">
+                    <a:lnL w="6350" cap="flat" cmpd="sng" algn="ctr">
+                      <a:solidFill>
+                        <a:srgbClr val="D1D5DB"/>
+                      </a:solidFill>
+                      <a:prstDash val="solid"/>
+                      <a:round/>
+                      <a:headEnd type="none" w="med" len="med"/>
+                      <a:tailEnd type="none" w="med" len="med"/>
+                    </a:lnL>
+                    <a:lnR w="6350" cap="flat" cmpd="sng" algn="ctr">
+                      <a:solidFill>
+                        <a:srgbClr val="D1D5DB"/>
+                      </a:solidFill>
+                      <a:prstDash val="solid"/>
+                      <a:round/>
+                      <a:headEnd type="none" w="med" len="med"/>
+                      <a:tailEnd type="none" w="med" len="med"/>
+                    </a:lnR>
+                    <a:lnT w="6350" cap="flat" cmpd="sng" algn="ctr">
+                      <a:solidFill>
+                        <a:srgbClr val="D1D5DB"/>
+                      </a:solidFill>
+                      <a:prstDash val="solid"/>
+                      <a:round/>
+                      <a:headEnd type="none" w="med" len="med"/>
+                      <a:tailEnd type="none" w="med" len="med"/>
+                    </a:lnT>
+                    <a:lnB w="6350" cap="flat" cmpd="sng" algn="ctr">
+                      <a:solidFill>
+                        <a:srgbClr val="D1D5DB"/>
+                      </a:solidFill>
+                      <a:prstDash val="solid"/>
+                      <a:round/>
+                      <a:headEnd type="none" w="med" len="med"/>
+                      <a:tailEnd type="none" w="med" len="med"/>
+                    </a:lnB>
+                    <a:solidFill>
+                      <a:srgbClr val="FFFFFF"/>
+                    </a:solidFill>
+                  </a:tcPr>
+                </a:tc>
+                <a:tc>
+                  <a:txBody>
+                    <a:bodyPr/>
+                    <a:lstStyle/>
+                    <a:p>
+                      <a:pPr indent="0" marL="0">
+                        <a:buNone/>
+                      </a:pPr>
+                      <a:r>
+                        <a:rPr lang="en-US" sz="950" dirty="0">
+                          <a:solidFill>
+                            <a:srgbClr val="212121"/>
+                          </a:solidFill>
+                          <a:latin typeface="Calibri" pitchFamily="34" charset="0"/>
+                          <a:ea typeface="Calibri" pitchFamily="34" charset="-122"/>
+                          <a:cs typeface="Calibri" pitchFamily="34" charset="-120"/>
+                        </a:rPr>
+                        <a:t>Programmatic</a:t>
+                      </a:r>
+                      <a:endParaRPr lang="en-US" sz="950" dirty="0">
+                        <a:latin typeface="Calibri" charset="0"/>
+                        <a:ea typeface="Calibri" charset="0"/>
+                        <a:cs typeface="Calibri" charset="0"/>
+                      </a:endParaRPr>
+                    </a:p>
+                  </a:txBody>
+                  <a:tcPr marL="54864" marR="54864" marT="54864" marB="54864" anchor="ctr">
+                    <a:lnL w="6350" cap="flat" cmpd="sng" algn="ctr">
+                      <a:solidFill>
+                        <a:srgbClr val="D1D5DB"/>
+                      </a:solidFill>
+                      <a:prstDash val="solid"/>
+                      <a:round/>
+                      <a:headEnd type="none" w="med" len="med"/>
+                      <a:tailEnd type="none" w="med" len="med"/>
+                    </a:lnL>
+                    <a:lnR w="6350" cap="flat" cmpd="sng" algn="ctr">
+                      <a:solidFill>
+                        <a:srgbClr val="D1D5DB"/>
+                      </a:solidFill>
+                      <a:prstDash val="solid"/>
+                      <a:round/>
+                      <a:headEnd type="none" w="med" len="med"/>
+                      <a:tailEnd type="none" w="med" len="med"/>
+                    </a:lnR>
+                    <a:lnT w="6350" cap="flat" cmpd="sng" algn="ctr">
+                      <a:solidFill>
+                        <a:srgbClr val="D1D5DB"/>
+                      </a:solidFill>
+                      <a:prstDash val="solid"/>
+                      <a:round/>
+                      <a:headEnd type="none" w="med" len="med"/>
+                      <a:tailEnd type="none" w="med" len="med"/>
+                    </a:lnT>
+                    <a:lnB w="6350" cap="flat" cmpd="sng" algn="ctr">
+                      <a:solidFill>
+                        <a:srgbClr val="D1D5DB"/>
+                      </a:solidFill>
+                      <a:prstDash val="solid"/>
+                      <a:round/>
+                      <a:headEnd type="none" w="med" len="med"/>
+                      <a:tailEnd type="none" w="med" len="med"/>
+                    </a:lnB>
+                    <a:solidFill>
+                      <a:srgbClr val="FFFFFF"/>
+                    </a:solidFill>
+                  </a:tcPr>
+                </a:tc>
+              </a:tr>
+              <a:tr h="502920">
+                <a:tc>
+                  <a:txBody>
+                    <a:bodyPr/>
+                    <a:lstStyle/>
+                    <a:p>
+                      <a:pPr indent="0" marL="0">
+                        <a:buNone/>
+                      </a:pPr>
+                      <a:r>
+                        <a:rPr lang="en-US" sz="950" dirty="0">
+                          <a:solidFill>
+                            <a:srgbClr val="212121"/>
+                          </a:solidFill>
+                          <a:latin typeface="Calibri" pitchFamily="34" charset="0"/>
+                          <a:ea typeface="Calibri" pitchFamily="34" charset="-122"/>
+                          <a:cs typeface="Calibri" pitchFamily="34" charset="-120"/>
+                        </a:rPr>
+                        <a:t>Integration with existing Python code</a:t>
+                      </a:r>
+                      <a:endParaRPr lang="en-US" sz="950" dirty="0">
+                        <a:latin typeface="Calibri" charset="0"/>
+                        <a:ea typeface="Calibri" charset="0"/>
+                        <a:cs typeface="Calibri" charset="0"/>
+                      </a:endParaRPr>
+                    </a:p>
+                  </a:txBody>
+                  <a:tcPr marL="54864" marR="54864" marT="54864" marB="54864" anchor="ctr">
+                    <a:lnL w="6350" cap="flat" cmpd="sng" algn="ctr">
+                      <a:solidFill>
+                        <a:srgbClr val="D1D5DB"/>
+                      </a:solidFill>
+                      <a:prstDash val="solid"/>
+                      <a:round/>
+                      <a:headEnd type="none" w="med" len="med"/>
+                      <a:tailEnd type="none" w="med" len="med"/>
+                    </a:lnL>
+                    <a:lnR w="6350" cap="flat" cmpd="sng" algn="ctr">
+                      <a:solidFill>
+                        <a:srgbClr val="D1D5DB"/>
+                      </a:solidFill>
+                      <a:prstDash val="solid"/>
+                      <a:round/>
+                      <a:headEnd type="none" w="med" len="med"/>
+                      <a:tailEnd type="none" w="med" len="med"/>
+                    </a:lnR>
+                    <a:lnT w="6350" cap="flat" cmpd="sng" algn="ctr">
+                      <a:solidFill>
+                        <a:srgbClr val="D1D5DB"/>
+                      </a:solidFill>
+                      <a:prstDash val="solid"/>
+                      <a:round/>
+                      <a:headEnd type="none" w="med" len="med"/>
+                      <a:tailEnd type="none" w="med" len="med"/>
+                    </a:lnT>
+                    <a:lnB w="6350" cap="flat" cmpd="sng" algn="ctr">
+                      <a:solidFill>
+                        <a:srgbClr val="D1D5DB"/>
+                      </a:solidFill>
+                      <a:prstDash val="solid"/>
+                      <a:round/>
+                      <a:headEnd type="none" w="med" len="med"/>
+                      <a:tailEnd type="none" w="med" len="med"/>
+                    </a:lnB>
+                    <a:solidFill>
+                      <a:srgbClr val="F3F4F6"/>
+                    </a:solidFill>
+                  </a:tcPr>
+                </a:tc>
+                <a:tc>
+                  <a:txBody>
+                    <a:bodyPr/>
+                    <a:lstStyle/>
+                    <a:p>
+                      <a:pPr indent="0" marL="0">
+                        <a:buNone/>
+                      </a:pPr>
+                      <a:r>
+                        <a:rPr lang="en-US" sz="950" dirty="0">
+                          <a:solidFill>
+                            <a:srgbClr val="212121"/>
+                          </a:solidFill>
+                          <a:latin typeface="Calibri" pitchFamily="34" charset="0"/>
+                          <a:ea typeface="Calibri" pitchFamily="34" charset="-122"/>
+                          <a:cs typeface="Calibri" pitchFamily="34" charset="-120"/>
+                        </a:rPr>
+                        <a:t>Programmatic</a:t>
+                      </a:r>
+                      <a:endParaRPr lang="en-US" sz="950" dirty="0">
+                        <a:latin typeface="Calibri" charset="0"/>
+                        <a:ea typeface="Calibri" charset="0"/>
+                        <a:cs typeface="Calibri" charset="0"/>
+                      </a:endParaRPr>
+                    </a:p>
+                  </a:txBody>
+                  <a:tcPr marL="54864" marR="54864" marT="54864" marB="54864" anchor="ctr">
+                    <a:lnL w="6350" cap="flat" cmpd="sng" algn="ctr">
+                      <a:solidFill>
+                        <a:srgbClr val="D1D5DB"/>
+                      </a:solidFill>
+                      <a:prstDash val="solid"/>
+                      <a:round/>
+                      <a:headEnd type="none" w="med" len="med"/>
+                      <a:tailEnd type="none" w="med" len="med"/>
+                    </a:lnL>
+                    <a:lnR w="6350" cap="flat" cmpd="sng" algn="ctr">
+                      <a:solidFill>
+                        <a:srgbClr val="D1D5DB"/>
+                      </a:solidFill>
+                      <a:prstDash val="solid"/>
+                      <a:round/>
+                      <a:headEnd type="none" w="med" len="med"/>
+                      <a:tailEnd type="none" w="med" len="med"/>
+                    </a:lnR>
+                    <a:lnT w="6350" cap="flat" cmpd="sng" algn="ctr">
+                      <a:solidFill>
+                        <a:srgbClr val="D1D5DB"/>
+                      </a:solidFill>
+                      <a:prstDash val="solid"/>
+                      <a:round/>
+                      <a:headEnd type="none" w="med" len="med"/>
+                      <a:tailEnd type="none" w="med" len="med"/>
+                    </a:lnT>
+                    <a:lnB w="6350" cap="flat" cmpd="sng" algn="ctr">
+                      <a:solidFill>
+                        <a:srgbClr val="D1D5DB"/>
+                      </a:solidFill>
+                      <a:prstDash val="solid"/>
+                      <a:round/>
+                      <a:headEnd type="none" w="med" len="med"/>
+                      <a:tailEnd type="none" w="med" len="med"/>
+                    </a:lnB>
+                    <a:solidFill>
+                      <a:srgbClr val="F3F4F6"/>
+                    </a:solidFill>
+                  </a:tcPr>
+                </a:tc>
+              </a:tr>
+            </a:tbl>
+          </a:graphicData>
+        </a:graphic>
+      </p:graphicFrame>
+      <p:sp>
+        <p:nvSpPr>
+          <p:cNvPr id="6" name="Shape 3"/>
           <p:cNvSpPr/>
           <p:nvPr/>
         </p:nvSpPr>
@@ -8069,7 +8402,7 @@
       </p:sp>
       <p:sp>
         <p:nvSpPr>
-          <p:cNvPr id="30" name="Text 28"/>
+          <p:cNvPr id="7" name="Text 4"/>
           <p:cNvSpPr/>
           <p:nvPr/>
         </p:nvSpPr>
@@ -8102,7 +8435,497 @@
                 <a:ea typeface="Calibri" pitchFamily="34" charset="-122"/>
                 <a:cs typeface="Calibri" pitchFamily="34" charset="-120"/>
               </a:rPr>
-              <a:t>Source: https://learn.microsoft.com/en-us/agent-framework/concepts/workflows/  ·  +4 in notes</a:t>
+              <a:t>Source: https://learn.microsoft.com/en-us/agent-framework/workflows/declarative?pivots=programming-language-python#when-to-use-declarative-vs-programmatic-workflows</a:t>
+            </a:r>
+            <a:endParaRPr lang="en-US" sz="820" dirty="0"/>
+          </a:p>
+        </p:txBody>
+      </p:sp>
+    </p:spTree>
+  </p:cSld>
+  <p:clrMapOvr>
+    <a:masterClrMapping/>
+  </p:clrMapOvr>
+</p:sld>
+</file>
+
+<file path=ppt/slides/slide19.xml><?xml version="1.0" encoding="utf-8"?>
+<p:sld xmlns:a="http://schemas.openxmlformats.org/drawingml/2006/main" xmlns:r="http://schemas.openxmlformats.org/officeDocument/2006/relationships" xmlns:p="http://schemas.openxmlformats.org/presentationml/2006/main">
+  <p:cSld name="Slide 19">
+    <p:bg>
+      <p:bgPr>
+        <a:solidFill>
+          <a:srgbClr val="FFFFFF"/>
+        </a:solidFill>
+      </p:bgPr>
+    </p:bg>
+    <p:spTree>
+      <p:nvGrpSpPr>
+        <p:cNvPr id="1" name=""/>
+        <p:cNvGrpSpPr/>
+        <p:nvPr/>
+      </p:nvGrpSpPr>
+      <p:grpSpPr>
+        <a:xfrm>
+          <a:off x="0" y="0"/>
+          <a:ext cx="0" cy="0"/>
+          <a:chOff x="0" y="0"/>
+          <a:chExt cx="0" cy="0"/>
+        </a:xfrm>
+      </p:grpSpPr>
+      <p:sp>
+        <p:nvSpPr>
+          <p:cNvPr id="2" name="Shape 0"/>
+          <p:cNvSpPr/>
+          <p:nvPr/>
+        </p:nvSpPr>
+        <p:spPr>
+          <a:xfrm>
+            <a:off x="0" y="0"/>
+            <a:ext cx="54864" cy="5143500"/>
+          </a:xfrm>
+          <a:prstGeom prst="rect">
+            <a:avLst/>
+          </a:prstGeom>
+          <a:solidFill>
+            <a:srgbClr val="1E2761"/>
+          </a:solidFill>
+          <a:ln/>
+        </p:spPr>
+      </p:sp>
+      <p:sp>
+        <p:nvSpPr>
+          <p:cNvPr id="3" name="Text 1"/>
+          <p:cNvSpPr/>
+          <p:nvPr/>
+        </p:nvSpPr>
+        <p:spPr>
+          <a:xfrm>
+            <a:off x="5486400" y="256032"/>
+            <a:ext cx="3337560" cy="228600"/>
+          </a:xfrm>
+          <a:prstGeom prst="rect">
+            <a:avLst/>
+          </a:prstGeom>
+          <a:noFill/>
+          <a:ln/>
+        </p:spPr>
+        <p:txBody>
+          <a:bodyPr wrap="square" lIns="0" tIns="0" rIns="0" bIns="0" rtlCol="0" anchor="ctr">
+            <a:normAutofit/>
+          </a:bodyPr>
+          <a:lstStyle/>
+          <a:p>
+            <a:pPr algn="r" indent="0" marL="0">
+              <a:buNone/>
+            </a:pPr>
+            <a:r>
+              <a:rPr lang="en-US" sz="950" dirty="0">
+                <a:solidFill>
+                  <a:srgbClr val="6B7280"/>
+                </a:solidFill>
+                <a:latin typeface="Calibri" pitchFamily="34" charset="0"/>
+                <a:ea typeface="Calibri" pitchFamily="34" charset="-122"/>
+                <a:cs typeface="Calibri" pitchFamily="34" charset="-120"/>
+              </a:rPr>
+              <a:t>Day 4 · Module 3</a:t>
+            </a:r>
+            <a:endParaRPr lang="en-US" sz="950" dirty="0"/>
+          </a:p>
+        </p:txBody>
+      </p:sp>
+      <p:sp>
+        <p:nvSpPr>
+          <p:cNvPr id="4" name="Text 2"/>
+          <p:cNvSpPr/>
+          <p:nvPr/>
+        </p:nvSpPr>
+        <p:spPr>
+          <a:xfrm>
+            <a:off x="365760" y="310896"/>
+            <a:ext cx="6583680" cy="603504"/>
+          </a:xfrm>
+          <a:prstGeom prst="rect">
+            <a:avLst/>
+          </a:prstGeom>
+          <a:noFill/>
+          <a:ln/>
+        </p:spPr>
+        <p:txBody>
+          <a:bodyPr wrap="square" lIns="0" tIns="0" rIns="0" bIns="0" rtlCol="0" anchor="ctr">
+            <a:normAutofit/>
+          </a:bodyPr>
+          <a:lstStyle/>
+          <a:p>
+            <a:pPr indent="0" marL="0">
+              <a:buNone/>
+            </a:pPr>
+            <a:r>
+              <a:rPr lang="en-US" sz="2800" b="1" dirty="0">
+                <a:solidFill>
+                  <a:srgbClr val="1E2761"/>
+                </a:solidFill>
+                <a:latin typeface="Calibri" pitchFamily="34" charset="0"/>
+                <a:ea typeface="Calibri" pitchFamily="34" charset="-122"/>
+                <a:cs typeface="Calibri" pitchFamily="34" charset="-120"/>
+              </a:rPr>
+              <a:t>Python YAML structure</a:t>
+            </a:r>
+            <a:endParaRPr lang="en-US" sz="2800" dirty="0"/>
+          </a:p>
+        </p:txBody>
+      </p:sp>
+      <p:sp>
+        <p:nvSpPr>
+          <p:cNvPr id="5" name="Shape 3"/>
+          <p:cNvSpPr/>
+          <p:nvPr/>
+        </p:nvSpPr>
+        <p:spPr>
+          <a:xfrm>
+            <a:off x="365760" y="1115568"/>
+            <a:ext cx="8412480" cy="2888234"/>
+          </a:xfrm>
+          <a:prstGeom prst="rect">
+            <a:avLst/>
+          </a:prstGeom>
+          <a:solidFill>
+            <a:srgbClr val="1D1E22"/>
+          </a:solidFill>
+          <a:ln w="9525">
+            <a:solidFill>
+              <a:srgbClr val="2A2B2E"/>
+            </a:solidFill>
+            <a:prstDash val="solid"/>
+          </a:ln>
+        </p:spPr>
+      </p:sp>
+      <p:sp>
+        <p:nvSpPr>
+          <p:cNvPr id="6" name="Text 4"/>
+          <p:cNvSpPr/>
+          <p:nvPr/>
+        </p:nvSpPr>
+        <p:spPr>
+          <a:xfrm>
+            <a:off x="502920" y="1207008"/>
+            <a:ext cx="8138160" cy="2705354"/>
+          </a:xfrm>
+          <a:prstGeom prst="rect">
+            <a:avLst/>
+          </a:prstGeom>
+          <a:noFill/>
+          <a:ln/>
+        </p:spPr>
+        <p:txBody>
+          <a:bodyPr wrap="square" lIns="0" tIns="0" rIns="0" bIns="0" rtlCol="0" anchor="t">
+            <a:normAutofit/>
+          </a:bodyPr>
+          <a:lstStyle/>
+          <a:p>
+            <a:pPr indent="0" marL="0">
+              <a:buNone/>
+            </a:pPr>
+            <a:r>
+              <a:rPr lang="en-US" sz="1080" dirty="0">
+                <a:solidFill>
+                  <a:srgbClr val="FFFFFF"/>
+                </a:solidFill>
+                <a:latin typeface="Consolas" pitchFamily="34" charset="0"/>
+                <a:ea typeface="Consolas" pitchFamily="34" charset="-122"/>
+                <a:cs typeface="Consolas" pitchFamily="34" charset="-120"/>
+              </a:rPr>
+              <a:t>name: my-workflow</a:t>
+            </a:r>
+            <a:endParaRPr lang="en-US" sz="1080" dirty="0"/>
+          </a:p>
+          <a:p>
+            <a:pPr indent="0" marL="0">
+              <a:buNone/>
+            </a:pPr>
+            <a:r>
+              <a:rPr lang="en-US" sz="1080" dirty="0">
+                <a:solidFill>
+                  <a:srgbClr val="FFFFFF"/>
+                </a:solidFill>
+                <a:latin typeface="Consolas" pitchFamily="34" charset="0"/>
+                <a:ea typeface="Consolas" pitchFamily="34" charset="-122"/>
+                <a:cs typeface="Consolas" pitchFamily="34" charset="-120"/>
+              </a:rPr>
+              <a:t>description: A brief description of what this workflow does</a:t>
+            </a:r>
+            <a:endParaRPr lang="en-US" sz="1080" dirty="0"/>
+          </a:p>
+          <a:p>
+            <a:pPr indent="0" marL="0">
+              <a:buNone/>
+            </a:pPr>
+            <a:endParaRPr lang="en-US" sz="1080" dirty="0"/>
+          </a:p>
+          <a:p>
+            <a:pPr indent="0" marL="0">
+              <a:buNone/>
+            </a:pPr>
+            <a:r>
+              <a:rPr lang="en-US" sz="1080" dirty="0">
+                <a:solidFill>
+                  <a:srgbClr val="FFFFFF"/>
+                </a:solidFill>
+                <a:latin typeface="Consolas" pitchFamily="34" charset="0"/>
+                <a:ea typeface="Consolas" pitchFamily="34" charset="-122"/>
+                <a:cs typeface="Consolas" pitchFamily="34" charset="-120"/>
+              </a:rPr>
+              <a:t>inputs:</a:t>
+            </a:r>
+            <a:endParaRPr lang="en-US" sz="1080" dirty="0"/>
+          </a:p>
+          <a:p>
+            <a:pPr indent="0" marL="0">
+              <a:buNone/>
+            </a:pPr>
+            <a:r>
+              <a:rPr lang="en-US" sz="1080" dirty="0">
+                <a:solidFill>
+                  <a:srgbClr val="FFFFFF"/>
+                </a:solidFill>
+                <a:latin typeface="Consolas" pitchFamily="34" charset="0"/>
+                <a:ea typeface="Consolas" pitchFamily="34" charset="-122"/>
+                <a:cs typeface="Consolas" pitchFamily="34" charset="-120"/>
+              </a:rPr>
+              <a:t>  parameterName:</a:t>
+            </a:r>
+            <a:endParaRPr lang="en-US" sz="1080" dirty="0"/>
+          </a:p>
+          <a:p>
+            <a:pPr indent="0" marL="0">
+              <a:buNone/>
+            </a:pPr>
+            <a:r>
+              <a:rPr lang="en-US" sz="1080" dirty="0">
+                <a:solidFill>
+                  <a:srgbClr val="FFFFFF"/>
+                </a:solidFill>
+                <a:latin typeface="Consolas" pitchFamily="34" charset="0"/>
+                <a:ea typeface="Consolas" pitchFamily="34" charset="-122"/>
+                <a:cs typeface="Consolas" pitchFamily="34" charset="-120"/>
+              </a:rPr>
+              <a:t>    type: string</a:t>
+            </a:r>
+            <a:endParaRPr lang="en-US" sz="1080" dirty="0"/>
+          </a:p>
+          <a:p>
+            <a:pPr indent="0" marL="0">
+              <a:buNone/>
+            </a:pPr>
+            <a:r>
+              <a:rPr lang="en-US" sz="1080" dirty="0">
+                <a:solidFill>
+                  <a:srgbClr val="FFFFFF"/>
+                </a:solidFill>
+                <a:latin typeface="Consolas" pitchFamily="34" charset="0"/>
+                <a:ea typeface="Consolas" pitchFamily="34" charset="-122"/>
+                <a:cs typeface="Consolas" pitchFamily="34" charset="-120"/>
+              </a:rPr>
+              <a:t>    description: Description of the parameter</a:t>
+            </a:r>
+            <a:endParaRPr lang="en-US" sz="1080" dirty="0"/>
+          </a:p>
+          <a:p>
+            <a:pPr indent="0" marL="0">
+              <a:buNone/>
+            </a:pPr>
+            <a:endParaRPr lang="en-US" sz="1080" dirty="0"/>
+          </a:p>
+          <a:p>
+            <a:pPr indent="0" marL="0">
+              <a:buNone/>
+            </a:pPr>
+            <a:r>
+              <a:rPr lang="en-US" sz="1080" dirty="0">
+                <a:solidFill>
+                  <a:srgbClr val="FFFFFF"/>
+                </a:solidFill>
+                <a:latin typeface="Consolas" pitchFamily="34" charset="0"/>
+                <a:ea typeface="Consolas" pitchFamily="34" charset="-122"/>
+                <a:cs typeface="Consolas" pitchFamily="34" charset="-120"/>
+              </a:rPr>
+              <a:t>actions:</a:t>
+            </a:r>
+            <a:endParaRPr lang="en-US" sz="1080" dirty="0"/>
+          </a:p>
+          <a:p>
+            <a:pPr indent="0" marL="0">
+              <a:buNone/>
+            </a:pPr>
+            <a:r>
+              <a:rPr lang="en-US" sz="1080" dirty="0">
+                <a:solidFill>
+                  <a:srgbClr val="FFFFFF"/>
+                </a:solidFill>
+                <a:latin typeface="Consolas" pitchFamily="34" charset="0"/>
+                <a:ea typeface="Consolas" pitchFamily="34" charset="-122"/>
+                <a:cs typeface="Consolas" pitchFamily="34" charset="-120"/>
+              </a:rPr>
+              <a:t>  - kind: ActionType</a:t>
+            </a:r>
+            <a:endParaRPr lang="en-US" sz="1080" dirty="0"/>
+          </a:p>
+          <a:p>
+            <a:pPr indent="0" marL="0">
+              <a:buNone/>
+            </a:pPr>
+            <a:r>
+              <a:rPr lang="en-US" sz="1080" dirty="0">
+                <a:solidFill>
+                  <a:srgbClr val="FFFFFF"/>
+                </a:solidFill>
+                <a:latin typeface="Consolas" pitchFamily="34" charset="0"/>
+                <a:ea typeface="Consolas" pitchFamily="34" charset="-122"/>
+                <a:cs typeface="Consolas" pitchFamily="34" charset="-120"/>
+              </a:rPr>
+              <a:t>    id: unique_action_id</a:t>
+            </a:r>
+            <a:endParaRPr lang="en-US" sz="1080" dirty="0"/>
+          </a:p>
+          <a:p>
+            <a:pPr indent="0" marL="0">
+              <a:buNone/>
+            </a:pPr>
+            <a:r>
+              <a:rPr lang="en-US" sz="1080" dirty="0">
+                <a:solidFill>
+                  <a:srgbClr val="FFFFFF"/>
+                </a:solidFill>
+                <a:latin typeface="Consolas" pitchFamily="34" charset="0"/>
+                <a:ea typeface="Consolas" pitchFamily="34" charset="-122"/>
+                <a:cs typeface="Consolas" pitchFamily="34" charset="-120"/>
+              </a:rPr>
+              <a:t>    displayName: Human readable name</a:t>
+            </a:r>
+            <a:endParaRPr lang="en-US" sz="1080" dirty="0"/>
+          </a:p>
+          <a:p>
+            <a:pPr indent="0" marL="0">
+              <a:buNone/>
+            </a:pPr>
+            <a:r>
+              <a:rPr lang="en-US" sz="1080" dirty="0">
+                <a:solidFill>
+                  <a:srgbClr val="FFFFFF"/>
+                </a:solidFill>
+                <a:latin typeface="Consolas" pitchFamily="34" charset="0"/>
+                <a:ea typeface="Consolas" pitchFamily="34" charset="-122"/>
+                <a:cs typeface="Consolas" pitchFamily="34" charset="-120"/>
+              </a:rPr>
+              <a:t>    # Action-specific properties</a:t>
+            </a:r>
+            <a:endParaRPr lang="en-US" sz="1080" dirty="0"/>
+          </a:p>
+        </p:txBody>
+      </p:sp>
+      <p:sp>
+        <p:nvSpPr>
+          <p:cNvPr id="7" name="Text 5"/>
+          <p:cNvSpPr/>
+          <p:nvPr/>
+        </p:nvSpPr>
+        <p:spPr>
+          <a:xfrm>
+            <a:off x="365760" y="4131818"/>
+            <a:ext cx="8412480" cy="577342"/>
+          </a:xfrm>
+          <a:prstGeom prst="rect">
+            <a:avLst/>
+          </a:prstGeom>
+          <a:noFill/>
+          <a:ln/>
+        </p:spPr>
+        <p:txBody>
+          <a:bodyPr wrap="square" lIns="0" tIns="0" rIns="0" bIns="0" rtlCol="0" anchor="t">
+            <a:normAutofit/>
+          </a:bodyPr>
+          <a:lstStyle/>
+          <a:p>
+            <a:pPr indent="0" marL="0">
+              <a:spcAft>
+                <a:spcPts val="800"/>
+              </a:spcAft>
+              <a:buNone/>
+            </a:pPr>
+            <a:r>
+              <a:rPr lang="en-US" sz="1300" dirty="0">
+                <a:solidFill>
+                  <a:srgbClr val="6B7280"/>
+                </a:solidFill>
+                <a:latin typeface="Calibri" pitchFamily="34" charset="0"/>
+                <a:ea typeface="Calibri" pitchFamily="34" charset="-122"/>
+                <a:cs typeface="Calibri" pitchFamily="34" charset="-120"/>
+              </a:rPr>
+              <a:t>Only name and actions are required — description and inputs are optional, and actions is the ordered list of steps the workflow actually runs.</a:t>
+            </a:r>
+            <a:endParaRPr lang="en-US" sz="1300" dirty="0"/>
+          </a:p>
+        </p:txBody>
+      </p:sp>
+      <p:sp>
+        <p:nvSpPr>
+          <p:cNvPr id="8" name="Shape 6"/>
+          <p:cNvSpPr/>
+          <p:nvPr/>
+        </p:nvSpPr>
+        <p:spPr>
+          <a:xfrm>
+            <a:off x="365760" y="4773168"/>
+            <a:ext cx="8412480" cy="0"/>
+          </a:xfrm>
+          <a:prstGeom prst="line">
+            <a:avLst/>
+          </a:prstGeom>
+          <a:noFill/>
+          <a:ln w="6350">
+            <a:solidFill>
+              <a:srgbClr val="D1D5DB"/>
+            </a:solidFill>
+            <a:prstDash val="solid"/>
+          </a:ln>
+        </p:spPr>
+      </p:sp>
+      <p:sp>
+        <p:nvSpPr>
+          <p:cNvPr id="9" name="Text 7"/>
+          <p:cNvSpPr/>
+          <p:nvPr/>
+        </p:nvSpPr>
+        <p:spPr>
+          <a:xfrm>
+            <a:off x="384048" y="4818888"/>
+            <a:ext cx="8275320" cy="182880"/>
+          </a:xfrm>
+          <a:prstGeom prst="rect">
+            <a:avLst/>
+          </a:prstGeom>
+          <a:noFill/>
+          <a:ln/>
+        </p:spPr>
+        <p:txBody>
+          <a:bodyPr wrap="square" lIns="0" tIns="0" rIns="0" bIns="0" rtlCol="0" anchor="ctr">
+            <a:normAutofit/>
+          </a:bodyPr>
+          <a:lstStyle/>
+          <a:p>
+            <a:pPr indent="0" marL="0">
+              <a:buNone/>
+            </a:pPr>
+            <a:r>
+              <a:rPr lang="en-US" sz="820" dirty="0">
+                <a:solidFill>
+                  <a:srgbClr val="6B7280"/>
+                </a:solidFill>
+                <a:latin typeface="Calibri" pitchFamily="34" charset="0"/>
+                <a:ea typeface="Calibri" pitchFamily="34" charset="-122"/>
+                <a:cs typeface="Calibri" pitchFamily="34" charset="-120"/>
+              </a:rPr>
+              <a:t>Source: https://learn.microsoft.com/en-us/agent-framework/workflows/declarative?pivots=programming-language-python#python-yaml-structure</a:t>
             </a:r>
             <a:endParaRPr lang="en-US" sz="820" dirty="0"/>
           </a:p>
@@ -8472,6 +9295,954 @@
                 <a:cs typeface="Calibri" pitchFamily="34" charset="-120"/>
               </a:rPr>
               <a:t>Source: https://learn.microsoft.com/en-us/agent-framework/concepts/workflows/executors</a:t>
+            </a:r>
+            <a:endParaRPr lang="en-US" sz="820" dirty="0"/>
+          </a:p>
+        </p:txBody>
+      </p:sp>
+    </p:spTree>
+  </p:cSld>
+  <p:clrMapOvr>
+    <a:masterClrMapping/>
+  </p:clrMapOvr>
+</p:sld>
+</file>
+
+<file path=ppt/slides/slide20.xml><?xml version="1.0" encoding="utf-8"?>
+<p:sld xmlns:a="http://schemas.openxmlformats.org/drawingml/2006/main" xmlns:r="http://schemas.openxmlformats.org/officeDocument/2006/relationships" xmlns:p="http://schemas.openxmlformats.org/presentationml/2006/main">
+  <p:cSld name="Slide 20">
+    <p:bg>
+      <p:bgPr>
+        <a:solidFill>
+          <a:srgbClr val="FFFFFF"/>
+        </a:solidFill>
+      </p:bgPr>
+    </p:bg>
+    <p:spTree>
+      <p:nvGrpSpPr>
+        <p:cNvPr id="1" name=""/>
+        <p:cNvGrpSpPr/>
+        <p:nvPr/>
+      </p:nvGrpSpPr>
+      <p:grpSpPr>
+        <a:xfrm>
+          <a:off x="0" y="0"/>
+          <a:ext cx="0" cy="0"/>
+          <a:chOff x="0" y="0"/>
+          <a:chExt cx="0" cy="0"/>
+        </a:xfrm>
+      </p:grpSpPr>
+      <p:sp>
+        <p:nvSpPr>
+          <p:cNvPr id="2" name="Shape 0"/>
+          <p:cNvSpPr/>
+          <p:nvPr/>
+        </p:nvSpPr>
+        <p:spPr>
+          <a:xfrm>
+            <a:off x="0" y="0"/>
+            <a:ext cx="54864" cy="5143500"/>
+          </a:xfrm>
+          <a:prstGeom prst="rect">
+            <a:avLst/>
+          </a:prstGeom>
+          <a:solidFill>
+            <a:srgbClr val="1E2761"/>
+          </a:solidFill>
+          <a:ln/>
+        </p:spPr>
+      </p:sp>
+      <p:sp>
+        <p:nvSpPr>
+          <p:cNvPr id="3" name="Text 1"/>
+          <p:cNvSpPr/>
+          <p:nvPr/>
+        </p:nvSpPr>
+        <p:spPr>
+          <a:xfrm>
+            <a:off x="5486400" y="256032"/>
+            <a:ext cx="3337560" cy="228600"/>
+          </a:xfrm>
+          <a:prstGeom prst="rect">
+            <a:avLst/>
+          </a:prstGeom>
+          <a:noFill/>
+          <a:ln/>
+        </p:spPr>
+        <p:txBody>
+          <a:bodyPr wrap="square" lIns="0" tIns="0" rIns="0" bIns="0" rtlCol="0" anchor="ctr">
+            <a:normAutofit/>
+          </a:bodyPr>
+          <a:lstStyle/>
+          <a:p>
+            <a:pPr algn="r" indent="0" marL="0">
+              <a:buNone/>
+            </a:pPr>
+            <a:r>
+              <a:rPr lang="en-US" sz="950" dirty="0">
+                <a:solidFill>
+                  <a:srgbClr val="6B7280"/>
+                </a:solidFill>
+                <a:latin typeface="Calibri" pitchFamily="34" charset="0"/>
+                <a:ea typeface="Calibri" pitchFamily="34" charset="-122"/>
+                <a:cs typeface="Calibri" pitchFamily="34" charset="-120"/>
+              </a:rPr>
+              <a:t>Day 4 · Module 3</a:t>
+            </a:r>
+            <a:endParaRPr lang="en-US" sz="950" dirty="0"/>
+          </a:p>
+        </p:txBody>
+      </p:sp>
+      <p:sp>
+        <p:nvSpPr>
+          <p:cNvPr id="4" name="Text 2"/>
+          <p:cNvSpPr/>
+          <p:nvPr/>
+        </p:nvSpPr>
+        <p:spPr>
+          <a:xfrm>
+            <a:off x="365760" y="310896"/>
+            <a:ext cx="6583680" cy="603504"/>
+          </a:xfrm>
+          <a:prstGeom prst="rect">
+            <a:avLst/>
+          </a:prstGeom>
+          <a:noFill/>
+          <a:ln/>
+        </p:spPr>
+        <p:txBody>
+          <a:bodyPr wrap="square" lIns="0" tIns="0" rIns="0" bIns="0" rtlCol="0" anchor="ctr">
+            <a:normAutofit/>
+          </a:bodyPr>
+          <a:lstStyle/>
+          <a:p>
+            <a:pPr indent="0" marL="0">
+              <a:buNone/>
+            </a:pPr>
+            <a:r>
+              <a:rPr lang="en-US" sz="2800" b="1" dirty="0">
+                <a:solidFill>
+                  <a:srgbClr val="1E2761"/>
+                </a:solidFill>
+                <a:latin typeface="Calibri" pitchFamily="34" charset="0"/>
+                <a:ea typeface="Calibri" pitchFamily="34" charset="-122"/>
+                <a:cs typeface="Calibri" pitchFamily="34" charset="-120"/>
+              </a:rPr>
+              <a:t>Takeaways</a:t>
+            </a:r>
+            <a:endParaRPr lang="en-US" sz="2800" dirty="0"/>
+          </a:p>
+        </p:txBody>
+      </p:sp>
+      <p:sp>
+        <p:nvSpPr>
+          <p:cNvPr id="5" name="Shape 3"/>
+          <p:cNvSpPr/>
+          <p:nvPr/>
+        </p:nvSpPr>
+        <p:spPr>
+          <a:xfrm>
+            <a:off x="502920" y="1097280"/>
+            <a:ext cx="8138160" cy="556260"/>
+          </a:xfrm>
+          <a:prstGeom prst="roundRect">
+            <a:avLst/>
+          </a:prstGeom>
+          <a:solidFill>
+            <a:srgbClr val="F3F4F6"/>
+          </a:solidFill>
+          <a:ln w="6350">
+            <a:solidFill>
+              <a:srgbClr val="D1D5DB"/>
+            </a:solidFill>
+            <a:prstDash val="solid"/>
+          </a:ln>
+        </p:spPr>
+      </p:sp>
+      <p:sp>
+        <p:nvSpPr>
+          <p:cNvPr id="6" name="Shape 4"/>
+          <p:cNvSpPr/>
+          <p:nvPr/>
+        </p:nvSpPr>
+        <p:spPr>
+          <a:xfrm>
+            <a:off x="667512" y="1225296"/>
+            <a:ext cx="256032" cy="256032"/>
+          </a:xfrm>
+          <a:prstGeom prst="ellipse">
+            <a:avLst/>
+          </a:prstGeom>
+          <a:solidFill>
+            <a:srgbClr val="1E2761"/>
+          </a:solidFill>
+          <a:ln/>
+        </p:spPr>
+      </p:sp>
+      <p:sp>
+        <p:nvSpPr>
+          <p:cNvPr id="7" name="Text 5"/>
+          <p:cNvSpPr/>
+          <p:nvPr/>
+        </p:nvSpPr>
+        <p:spPr>
+          <a:xfrm>
+            <a:off x="667512" y="1252728"/>
+            <a:ext cx="256032" cy="137160"/>
+          </a:xfrm>
+          <a:prstGeom prst="rect">
+            <a:avLst/>
+          </a:prstGeom>
+          <a:noFill/>
+          <a:ln/>
+        </p:spPr>
+        <p:txBody>
+          <a:bodyPr wrap="square" lIns="0" tIns="0" rIns="0" bIns="0" rtlCol="0" anchor="ctr"/>
+          <a:lstStyle/>
+          <a:p>
+            <a:pPr algn="ctr" indent="0" marL="0">
+              <a:buNone/>
+            </a:pPr>
+            <a:r>
+              <a:rPr lang="en-US" sz="900" b="1" dirty="0">
+                <a:solidFill>
+                  <a:srgbClr val="FFFFFF"/>
+                </a:solidFill>
+                <a:latin typeface="Calibri" pitchFamily="34" charset="0"/>
+                <a:ea typeface="Calibri" pitchFamily="34" charset="-122"/>
+                <a:cs typeface="Calibri" pitchFamily="34" charset="-120"/>
+              </a:rPr>
+              <a:t>✓</a:t>
+            </a:r>
+            <a:endParaRPr lang="en-US" sz="900" dirty="0"/>
+          </a:p>
+        </p:txBody>
+      </p:sp>
+      <p:sp>
+        <p:nvSpPr>
+          <p:cNvPr id="8" name="Text 6"/>
+          <p:cNvSpPr/>
+          <p:nvPr/>
+        </p:nvSpPr>
+        <p:spPr>
+          <a:xfrm>
+            <a:off x="1042416" y="1207008"/>
+            <a:ext cx="7315200" cy="373380"/>
+          </a:xfrm>
+          <a:prstGeom prst="rect">
+            <a:avLst/>
+          </a:prstGeom>
+          <a:noFill/>
+          <a:ln/>
+        </p:spPr>
+        <p:txBody>
+          <a:bodyPr wrap="square" lIns="0" tIns="0" rIns="0" bIns="0" rtlCol="0" anchor="ctr">
+            <a:normAutofit/>
+          </a:bodyPr>
+          <a:lstStyle/>
+          <a:p>
+            <a:pPr indent="0" marL="0">
+              <a:buNone/>
+            </a:pPr>
+            <a:r>
+              <a:rPr lang="en-US" sz="1300" dirty="0">
+                <a:solidFill>
+                  <a:srgbClr val="212121"/>
+                </a:solidFill>
+                <a:latin typeface="Calibri" pitchFamily="34" charset="0"/>
+                <a:ea typeface="Calibri" pitchFamily="34" charset="-122"/>
+                <a:cs typeface="Calibri" pitchFamily="34" charset="-120"/>
+              </a:rPr>
+              <a:t>You build executors from typed message handlers, and connect them with direct, conditional, switch-case, or fan-in/fan-out edges.</a:t>
+            </a:r>
+            <a:endParaRPr lang="en-US" sz="1300" dirty="0"/>
+          </a:p>
+        </p:txBody>
+      </p:sp>
+      <p:sp>
+        <p:nvSpPr>
+          <p:cNvPr id="9" name="Shape 7"/>
+          <p:cNvSpPr/>
+          <p:nvPr/>
+        </p:nvSpPr>
+        <p:spPr>
+          <a:xfrm>
+            <a:off x="502920" y="1726692"/>
+            <a:ext cx="8138160" cy="556260"/>
+          </a:xfrm>
+          <a:prstGeom prst="roundRect">
+            <a:avLst/>
+          </a:prstGeom>
+          <a:solidFill>
+            <a:srgbClr val="F3F4F6"/>
+          </a:solidFill>
+          <a:ln w="6350">
+            <a:solidFill>
+              <a:srgbClr val="D1D5DB"/>
+            </a:solidFill>
+            <a:prstDash val="solid"/>
+          </a:ln>
+        </p:spPr>
+      </p:sp>
+      <p:sp>
+        <p:nvSpPr>
+          <p:cNvPr id="10" name="Shape 8"/>
+          <p:cNvSpPr/>
+          <p:nvPr/>
+        </p:nvSpPr>
+        <p:spPr>
+          <a:xfrm>
+            <a:off x="667512" y="1854708"/>
+            <a:ext cx="256032" cy="256032"/>
+          </a:xfrm>
+          <a:prstGeom prst="ellipse">
+            <a:avLst/>
+          </a:prstGeom>
+          <a:solidFill>
+            <a:srgbClr val="1E2761"/>
+          </a:solidFill>
+          <a:ln/>
+        </p:spPr>
+      </p:sp>
+      <p:sp>
+        <p:nvSpPr>
+          <p:cNvPr id="11" name="Text 9"/>
+          <p:cNvSpPr/>
+          <p:nvPr/>
+        </p:nvSpPr>
+        <p:spPr>
+          <a:xfrm>
+            <a:off x="667512" y="1882140"/>
+            <a:ext cx="256032" cy="137160"/>
+          </a:xfrm>
+          <a:prstGeom prst="rect">
+            <a:avLst/>
+          </a:prstGeom>
+          <a:noFill/>
+          <a:ln/>
+        </p:spPr>
+        <p:txBody>
+          <a:bodyPr wrap="square" lIns="0" tIns="0" rIns="0" bIns="0" rtlCol="0" anchor="ctr"/>
+          <a:lstStyle/>
+          <a:p>
+            <a:pPr algn="ctr" indent="0" marL="0">
+              <a:buNone/>
+            </a:pPr>
+            <a:r>
+              <a:rPr lang="en-US" sz="900" b="1" dirty="0">
+                <a:solidFill>
+                  <a:srgbClr val="FFFFFF"/>
+                </a:solidFill>
+                <a:latin typeface="Calibri" pitchFamily="34" charset="0"/>
+                <a:ea typeface="Calibri" pitchFamily="34" charset="-122"/>
+                <a:cs typeface="Calibri" pitchFamily="34" charset="-120"/>
+              </a:rPr>
+              <a:t>✓</a:t>
+            </a:r>
+            <a:endParaRPr lang="en-US" sz="900" dirty="0"/>
+          </a:p>
+        </p:txBody>
+      </p:sp>
+      <p:sp>
+        <p:nvSpPr>
+          <p:cNvPr id="12" name="Text 10"/>
+          <p:cNvSpPr/>
+          <p:nvPr/>
+        </p:nvSpPr>
+        <p:spPr>
+          <a:xfrm>
+            <a:off x="1042416" y="1836420"/>
+            <a:ext cx="7315200" cy="373380"/>
+          </a:xfrm>
+          <a:prstGeom prst="rect">
+            <a:avLst/>
+          </a:prstGeom>
+          <a:noFill/>
+          <a:ln/>
+        </p:spPr>
+        <p:txBody>
+          <a:bodyPr wrap="square" lIns="0" tIns="0" rIns="0" bIns="0" rtlCol="0" anchor="ctr">
+            <a:normAutofit/>
+          </a:bodyPr>
+          <a:lstStyle/>
+          <a:p>
+            <a:pPr indent="0" marL="0">
+              <a:buNone/>
+            </a:pPr>
+            <a:r>
+              <a:rPr lang="en-US" sz="1300" dirty="0">
+                <a:solidFill>
+                  <a:srgbClr val="212121"/>
+                </a:solidFill>
+                <a:latin typeface="Calibri" pitchFamily="34" charset="0"/>
+                <a:ea typeface="Calibri" pitchFamily="34" charset="-122"/>
+                <a:cs typeface="Calibri" pitchFamily="34" charset="-120"/>
+              </a:rPr>
+              <a:t>Conditional edges are what a revision loop needs — no prebuilt orchestration pattern supports routing back to an earlier agent.</a:t>
+            </a:r>
+            <a:endParaRPr lang="en-US" sz="1300" dirty="0"/>
+          </a:p>
+        </p:txBody>
+      </p:sp>
+      <p:sp>
+        <p:nvSpPr>
+          <p:cNvPr id="13" name="Shape 11"/>
+          <p:cNvSpPr/>
+          <p:nvPr/>
+        </p:nvSpPr>
+        <p:spPr>
+          <a:xfrm>
+            <a:off x="502920" y="2356104"/>
+            <a:ext cx="8138160" cy="556260"/>
+          </a:xfrm>
+          <a:prstGeom prst="roundRect">
+            <a:avLst/>
+          </a:prstGeom>
+          <a:solidFill>
+            <a:srgbClr val="F3F4F6"/>
+          </a:solidFill>
+          <a:ln w="6350">
+            <a:solidFill>
+              <a:srgbClr val="D1D5DB"/>
+            </a:solidFill>
+            <a:prstDash val="solid"/>
+          </a:ln>
+        </p:spPr>
+      </p:sp>
+      <p:sp>
+        <p:nvSpPr>
+          <p:cNvPr id="14" name="Shape 12"/>
+          <p:cNvSpPr/>
+          <p:nvPr/>
+        </p:nvSpPr>
+        <p:spPr>
+          <a:xfrm>
+            <a:off x="667512" y="2484120"/>
+            <a:ext cx="256032" cy="256032"/>
+          </a:xfrm>
+          <a:prstGeom prst="ellipse">
+            <a:avLst/>
+          </a:prstGeom>
+          <a:solidFill>
+            <a:srgbClr val="1E2761"/>
+          </a:solidFill>
+          <a:ln/>
+        </p:spPr>
+      </p:sp>
+      <p:sp>
+        <p:nvSpPr>
+          <p:cNvPr id="15" name="Text 13"/>
+          <p:cNvSpPr/>
+          <p:nvPr/>
+        </p:nvSpPr>
+        <p:spPr>
+          <a:xfrm>
+            <a:off x="667512" y="2511552"/>
+            <a:ext cx="256032" cy="137160"/>
+          </a:xfrm>
+          <a:prstGeom prst="rect">
+            <a:avLst/>
+          </a:prstGeom>
+          <a:noFill/>
+          <a:ln/>
+        </p:spPr>
+        <p:txBody>
+          <a:bodyPr wrap="square" lIns="0" tIns="0" rIns="0" bIns="0" rtlCol="0" anchor="ctr"/>
+          <a:lstStyle/>
+          <a:p>
+            <a:pPr algn="ctr" indent="0" marL="0">
+              <a:buNone/>
+            </a:pPr>
+            <a:r>
+              <a:rPr lang="en-US" sz="900" b="1" dirty="0">
+                <a:solidFill>
+                  <a:srgbClr val="FFFFFF"/>
+                </a:solidFill>
+                <a:latin typeface="Calibri" pitchFamily="34" charset="0"/>
+                <a:ea typeface="Calibri" pitchFamily="34" charset="-122"/>
+                <a:cs typeface="Calibri" pitchFamily="34" charset="-120"/>
+              </a:rPr>
+              <a:t>✓</a:t>
+            </a:r>
+            <a:endParaRPr lang="en-US" sz="900" dirty="0"/>
+          </a:p>
+        </p:txBody>
+      </p:sp>
+      <p:sp>
+        <p:nvSpPr>
+          <p:cNvPr id="16" name="Text 14"/>
+          <p:cNvSpPr/>
+          <p:nvPr/>
+        </p:nvSpPr>
+        <p:spPr>
+          <a:xfrm>
+            <a:off x="1042416" y="2465832"/>
+            <a:ext cx="7315200" cy="373380"/>
+          </a:xfrm>
+          <a:prstGeom prst="rect">
+            <a:avLst/>
+          </a:prstGeom>
+          <a:noFill/>
+          <a:ln/>
+        </p:spPr>
+        <p:txBody>
+          <a:bodyPr wrap="square" lIns="0" tIns="0" rIns="0" bIns="0" rtlCol="0" anchor="ctr">
+            <a:normAutofit/>
+          </a:bodyPr>
+          <a:lstStyle/>
+          <a:p>
+            <a:pPr indent="0" marL="0">
+              <a:buNone/>
+            </a:pPr>
+            <a:r>
+              <a:rPr lang="en-US" sz="1300" dirty="0">
+                <a:solidFill>
+                  <a:srgbClr val="212121"/>
+                </a:solidFill>
+                <a:latin typeface="Calibri" pitchFamily="34" charset="0"/>
+                <a:ea typeface="Calibri" pitchFamily="34" charset="-122"/>
+                <a:cs typeface="Calibri" pitchFamily="34" charset="-120"/>
+              </a:rPr>
+              <a:t>The superstep (Pregel/BSP) model is why parallel execution is real, checkpointing is reliable, and execution is deterministic.</a:t>
+            </a:r>
+            <a:endParaRPr lang="en-US" sz="1300" dirty="0"/>
+          </a:p>
+        </p:txBody>
+      </p:sp>
+      <p:sp>
+        <p:nvSpPr>
+          <p:cNvPr id="17" name="Shape 15"/>
+          <p:cNvSpPr/>
+          <p:nvPr/>
+        </p:nvSpPr>
+        <p:spPr>
+          <a:xfrm>
+            <a:off x="502920" y="2985516"/>
+            <a:ext cx="8138160" cy="556260"/>
+          </a:xfrm>
+          <a:prstGeom prst="roundRect">
+            <a:avLst/>
+          </a:prstGeom>
+          <a:solidFill>
+            <a:srgbClr val="F3F4F6"/>
+          </a:solidFill>
+          <a:ln w="6350">
+            <a:solidFill>
+              <a:srgbClr val="D1D5DB"/>
+            </a:solidFill>
+            <a:prstDash val="solid"/>
+          </a:ln>
+        </p:spPr>
+      </p:sp>
+      <p:sp>
+        <p:nvSpPr>
+          <p:cNvPr id="18" name="Shape 16"/>
+          <p:cNvSpPr/>
+          <p:nvPr/>
+        </p:nvSpPr>
+        <p:spPr>
+          <a:xfrm>
+            <a:off x="667512" y="3113532"/>
+            <a:ext cx="256032" cy="256032"/>
+          </a:xfrm>
+          <a:prstGeom prst="ellipse">
+            <a:avLst/>
+          </a:prstGeom>
+          <a:solidFill>
+            <a:srgbClr val="1E2761"/>
+          </a:solidFill>
+          <a:ln/>
+        </p:spPr>
+      </p:sp>
+      <p:sp>
+        <p:nvSpPr>
+          <p:cNvPr id="19" name="Text 17"/>
+          <p:cNvSpPr/>
+          <p:nvPr/>
+        </p:nvSpPr>
+        <p:spPr>
+          <a:xfrm>
+            <a:off x="667512" y="3140964"/>
+            <a:ext cx="256032" cy="137160"/>
+          </a:xfrm>
+          <a:prstGeom prst="rect">
+            <a:avLst/>
+          </a:prstGeom>
+          <a:noFill/>
+          <a:ln/>
+        </p:spPr>
+        <p:txBody>
+          <a:bodyPr wrap="square" lIns="0" tIns="0" rIns="0" bIns="0" rtlCol="0" anchor="ctr"/>
+          <a:lstStyle/>
+          <a:p>
+            <a:pPr algn="ctr" indent="0" marL="0">
+              <a:buNone/>
+            </a:pPr>
+            <a:r>
+              <a:rPr lang="en-US" sz="900" b="1" dirty="0">
+                <a:solidFill>
+                  <a:srgbClr val="FFFFFF"/>
+                </a:solidFill>
+                <a:latin typeface="Calibri" pitchFamily="34" charset="0"/>
+                <a:ea typeface="Calibri" pitchFamily="34" charset="-122"/>
+                <a:cs typeface="Calibri" pitchFamily="34" charset="-120"/>
+              </a:rPr>
+              <a:t>✓</a:t>
+            </a:r>
+            <a:endParaRPr lang="en-US" sz="900" dirty="0"/>
+          </a:p>
+        </p:txBody>
+      </p:sp>
+      <p:sp>
+        <p:nvSpPr>
+          <p:cNvPr id="20" name="Text 18"/>
+          <p:cNvSpPr/>
+          <p:nvPr/>
+        </p:nvSpPr>
+        <p:spPr>
+          <a:xfrm>
+            <a:off x="1042416" y="3095244"/>
+            <a:ext cx="7315200" cy="373380"/>
+          </a:xfrm>
+          <a:prstGeom prst="rect">
+            <a:avLst/>
+          </a:prstGeom>
+          <a:noFill/>
+          <a:ln/>
+        </p:spPr>
+        <p:txBody>
+          <a:bodyPr wrap="square" lIns="0" tIns="0" rIns="0" bIns="0" rtlCol="0" anchor="ctr">
+            <a:normAutofit/>
+          </a:bodyPr>
+          <a:lstStyle/>
+          <a:p>
+            <a:pPr indent="0" marL="0">
+              <a:buNone/>
+            </a:pPr>
+            <a:r>
+              <a:rPr lang="en-US" sz="1300" dirty="0">
+                <a:solidFill>
+                  <a:srgbClr val="212121"/>
+                </a:solidFill>
+                <a:latin typeface="Calibri" pitchFamily="34" charset="0"/>
+                <a:ea typeface="Calibri" pitchFamily="34" charset="-122"/>
+                <a:cs typeface="Calibri" pitchFamily="34" charset="-120"/>
+              </a:rPr>
+              <a:t>Human-in-the-loop and tool approval share one request/response mechanism; checkpoints preserve pending requests across a restore.</a:t>
+            </a:r>
+            <a:endParaRPr lang="en-US" sz="1300" dirty="0"/>
+          </a:p>
+        </p:txBody>
+      </p:sp>
+      <p:sp>
+        <p:nvSpPr>
+          <p:cNvPr id="21" name="Shape 19"/>
+          <p:cNvSpPr/>
+          <p:nvPr/>
+        </p:nvSpPr>
+        <p:spPr>
+          <a:xfrm>
+            <a:off x="502920" y="3614928"/>
+            <a:ext cx="8138160" cy="556260"/>
+          </a:xfrm>
+          <a:prstGeom prst="roundRect">
+            <a:avLst/>
+          </a:prstGeom>
+          <a:solidFill>
+            <a:srgbClr val="F3F4F6"/>
+          </a:solidFill>
+          <a:ln w="6350">
+            <a:solidFill>
+              <a:srgbClr val="D1D5DB"/>
+            </a:solidFill>
+            <a:prstDash val="solid"/>
+          </a:ln>
+        </p:spPr>
+      </p:sp>
+      <p:sp>
+        <p:nvSpPr>
+          <p:cNvPr id="22" name="Shape 20"/>
+          <p:cNvSpPr/>
+          <p:nvPr/>
+        </p:nvSpPr>
+        <p:spPr>
+          <a:xfrm>
+            <a:off x="667512" y="3742944"/>
+            <a:ext cx="256032" cy="256032"/>
+          </a:xfrm>
+          <a:prstGeom prst="ellipse">
+            <a:avLst/>
+          </a:prstGeom>
+          <a:solidFill>
+            <a:srgbClr val="1E2761"/>
+          </a:solidFill>
+          <a:ln/>
+        </p:spPr>
+      </p:sp>
+      <p:sp>
+        <p:nvSpPr>
+          <p:cNvPr id="23" name="Text 21"/>
+          <p:cNvSpPr/>
+          <p:nvPr/>
+        </p:nvSpPr>
+        <p:spPr>
+          <a:xfrm>
+            <a:off x="667512" y="3770376"/>
+            <a:ext cx="256032" cy="137160"/>
+          </a:xfrm>
+          <a:prstGeom prst="rect">
+            <a:avLst/>
+          </a:prstGeom>
+          <a:noFill/>
+          <a:ln/>
+        </p:spPr>
+        <p:txBody>
+          <a:bodyPr wrap="square" lIns="0" tIns="0" rIns="0" bIns="0" rtlCol="0" anchor="ctr"/>
+          <a:lstStyle/>
+          <a:p>
+            <a:pPr algn="ctr" indent="0" marL="0">
+              <a:buNone/>
+            </a:pPr>
+            <a:r>
+              <a:rPr lang="en-US" sz="900" b="1" dirty="0">
+                <a:solidFill>
+                  <a:srgbClr val="FFFFFF"/>
+                </a:solidFill>
+                <a:latin typeface="Calibri" pitchFamily="34" charset="0"/>
+                <a:ea typeface="Calibri" pitchFamily="34" charset="-122"/>
+                <a:cs typeface="Calibri" pitchFamily="34" charset="-120"/>
+              </a:rPr>
+              <a:t>✓</a:t>
+            </a:r>
+            <a:endParaRPr lang="en-US" sz="900" dirty="0"/>
+          </a:p>
+        </p:txBody>
+      </p:sp>
+      <p:sp>
+        <p:nvSpPr>
+          <p:cNvPr id="24" name="Text 22"/>
+          <p:cNvSpPr/>
+          <p:nvPr/>
+        </p:nvSpPr>
+        <p:spPr>
+          <a:xfrm>
+            <a:off x="1042416" y="3724656"/>
+            <a:ext cx="7315200" cy="373380"/>
+          </a:xfrm>
+          <a:prstGeom prst="rect">
+            <a:avLst/>
+          </a:prstGeom>
+          <a:noFill/>
+          <a:ln/>
+        </p:spPr>
+        <p:txBody>
+          <a:bodyPr wrap="square" lIns="0" tIns="0" rIns="0" bIns="0" rtlCol="0" anchor="ctr">
+            <a:normAutofit/>
+          </a:bodyPr>
+          <a:lstStyle/>
+          <a:p>
+            <a:pPr indent="0" marL="0">
+              <a:buNone/>
+            </a:pPr>
+            <a:r>
+              <a:rPr lang="en-US" sz="1300" dirty="0">
+                <a:solidFill>
+                  <a:srgbClr val="212121"/>
+                </a:solidFill>
+                <a:latin typeface="Calibri" pitchFamily="34" charset="0"/>
+                <a:ea typeface="Calibri" pitchFamily="34" charset="-122"/>
+                <a:cs typeface="Calibri" pitchFamily="34" charset="-120"/>
+              </a:rPr>
+              <a:t>You can render any graph you build with WorkflowViz, and diagnose a silent edge with edge_group.delivery_status — both work on the lab's own conditional edge.</a:t>
+            </a:r>
+            <a:endParaRPr lang="en-US" sz="1300" dirty="0"/>
+          </a:p>
+        </p:txBody>
+      </p:sp>
+      <p:sp>
+        <p:nvSpPr>
+          <p:cNvPr id="25" name="Shape 23"/>
+          <p:cNvSpPr/>
+          <p:nvPr/>
+        </p:nvSpPr>
+        <p:spPr>
+          <a:xfrm>
+            <a:off x="502920" y="4244340"/>
+            <a:ext cx="8138160" cy="556260"/>
+          </a:xfrm>
+          <a:prstGeom prst="roundRect">
+            <a:avLst/>
+          </a:prstGeom>
+          <a:solidFill>
+            <a:srgbClr val="F3F4F6"/>
+          </a:solidFill>
+          <a:ln w="6350">
+            <a:solidFill>
+              <a:srgbClr val="D1D5DB"/>
+            </a:solidFill>
+            <a:prstDash val="solid"/>
+          </a:ln>
+        </p:spPr>
+      </p:sp>
+      <p:sp>
+        <p:nvSpPr>
+          <p:cNvPr id="26" name="Shape 24"/>
+          <p:cNvSpPr/>
+          <p:nvPr/>
+        </p:nvSpPr>
+        <p:spPr>
+          <a:xfrm>
+            <a:off x="667512" y="4372356"/>
+            <a:ext cx="256032" cy="256032"/>
+          </a:xfrm>
+          <a:prstGeom prst="ellipse">
+            <a:avLst/>
+          </a:prstGeom>
+          <a:solidFill>
+            <a:srgbClr val="1E2761"/>
+          </a:solidFill>
+          <a:ln/>
+        </p:spPr>
+      </p:sp>
+      <p:sp>
+        <p:nvSpPr>
+          <p:cNvPr id="27" name="Text 25"/>
+          <p:cNvSpPr/>
+          <p:nvPr/>
+        </p:nvSpPr>
+        <p:spPr>
+          <a:xfrm>
+            <a:off x="667512" y="4399788"/>
+            <a:ext cx="256032" cy="137160"/>
+          </a:xfrm>
+          <a:prstGeom prst="rect">
+            <a:avLst/>
+          </a:prstGeom>
+          <a:noFill/>
+          <a:ln/>
+        </p:spPr>
+        <p:txBody>
+          <a:bodyPr wrap="square" lIns="0" tIns="0" rIns="0" bIns="0" rtlCol="0" anchor="ctr"/>
+          <a:lstStyle/>
+          <a:p>
+            <a:pPr algn="ctr" indent="0" marL="0">
+              <a:buNone/>
+            </a:pPr>
+            <a:r>
+              <a:rPr lang="en-US" sz="900" b="1" dirty="0">
+                <a:solidFill>
+                  <a:srgbClr val="FFFFFF"/>
+                </a:solidFill>
+                <a:latin typeface="Calibri" pitchFamily="34" charset="0"/>
+                <a:ea typeface="Calibri" pitchFamily="34" charset="-122"/>
+                <a:cs typeface="Calibri" pitchFamily="34" charset="-120"/>
+              </a:rPr>
+              <a:t>✓</a:t>
+            </a:r>
+            <a:endParaRPr lang="en-US" sz="900" dirty="0"/>
+          </a:p>
+        </p:txBody>
+      </p:sp>
+      <p:sp>
+        <p:nvSpPr>
+          <p:cNvPr id="28" name="Text 26"/>
+          <p:cNvSpPr/>
+          <p:nvPr/>
+        </p:nvSpPr>
+        <p:spPr>
+          <a:xfrm>
+            <a:off x="1042416" y="4354068"/>
+            <a:ext cx="7315200" cy="373380"/>
+          </a:xfrm>
+          <a:prstGeom prst="rect">
+            <a:avLst/>
+          </a:prstGeom>
+          <a:noFill/>
+          <a:ln/>
+        </p:spPr>
+        <p:txBody>
+          <a:bodyPr wrap="square" lIns="0" tIns="0" rIns="0" bIns="0" rtlCol="0" anchor="ctr">
+            <a:normAutofit/>
+          </a:bodyPr>
+          <a:lstStyle/>
+          <a:p>
+            <a:pPr indent="0" marL="0">
+              <a:buNone/>
+            </a:pPr>
+            <a:r>
+              <a:rPr lang="en-US" sz="1300" dirty="0">
+                <a:solidFill>
+                  <a:srgbClr val="212121"/>
+                </a:solidFill>
+                <a:latin typeface="Calibri" pitchFamily="34" charset="0"/>
+                <a:ea typeface="Calibri" pitchFamily="34" charset="-122"/>
+                <a:cs typeface="Calibri" pitchFamily="34" charset="-120"/>
+              </a:rPr>
+              <a:t>WorkflowBuilder is today's lab tool; the functional @workflow API remains experimental and worth a second look later, while declarative YAML workflows — covered on the previous three slides — are a real production alternative once a graph settles into a standard, frequently-edited pattern.</a:t>
+            </a:r>
+            <a:endParaRPr lang="en-US" sz="1300" dirty="0"/>
+          </a:p>
+        </p:txBody>
+      </p:sp>
+      <p:sp>
+        <p:nvSpPr>
+          <p:cNvPr id="29" name="Shape 27"/>
+          <p:cNvSpPr/>
+          <p:nvPr/>
+        </p:nvSpPr>
+        <p:spPr>
+          <a:xfrm>
+            <a:off x="365760" y="4773168"/>
+            <a:ext cx="8412480" cy="0"/>
+          </a:xfrm>
+          <a:prstGeom prst="line">
+            <a:avLst/>
+          </a:prstGeom>
+          <a:noFill/>
+          <a:ln w="6350">
+            <a:solidFill>
+              <a:srgbClr val="D1D5DB"/>
+            </a:solidFill>
+            <a:prstDash val="solid"/>
+          </a:ln>
+        </p:spPr>
+      </p:sp>
+      <p:sp>
+        <p:nvSpPr>
+          <p:cNvPr id="30" name="Text 28"/>
+          <p:cNvSpPr/>
+          <p:nvPr/>
+        </p:nvSpPr>
+        <p:spPr>
+          <a:xfrm>
+            <a:off x="384048" y="4818888"/>
+            <a:ext cx="8275320" cy="182880"/>
+          </a:xfrm>
+          <a:prstGeom prst="rect">
+            <a:avLst/>
+          </a:prstGeom>
+          <a:noFill/>
+          <a:ln/>
+        </p:spPr>
+        <p:txBody>
+          <a:bodyPr wrap="square" lIns="0" tIns="0" rIns="0" bIns="0" rtlCol="0" anchor="ctr">
+            <a:normAutofit/>
+          </a:bodyPr>
+          <a:lstStyle/>
+          <a:p>
+            <a:pPr indent="0" marL="0">
+              <a:buNone/>
+            </a:pPr>
+            <a:r>
+              <a:rPr lang="en-US" sz="820" dirty="0">
+                <a:solidFill>
+                  <a:srgbClr val="6B7280"/>
+                </a:solidFill>
+                <a:latin typeface="Calibri" pitchFamily="34" charset="0"/>
+                <a:ea typeface="Calibri" pitchFamily="34" charset="-122"/>
+                <a:cs typeface="Calibri" pitchFamily="34" charset="-120"/>
+              </a:rPr>
+              <a:t>Source: https://learn.microsoft.com/en-us/agent-framework/concepts/workflows/  ·  +5 in notes</a:t>
             </a:r>
             <a:endParaRPr lang="en-US" sz="820" dirty="0"/>
           </a:p>

--- a/decks/day4/module-3-workflow-fundamentals.pptx
+++ b/decks/day4/module-3-workflow-fundamentals.pptx
@@ -13784,7 +13784,7 @@
         <p:spPr>
           <a:xfrm>
             <a:off x="896112" y="1335024"/>
-            <a:ext cx="1975104" cy="310896"/>
+            <a:ext cx="1975104" cy="311277"/>
           </a:xfrm>
           <a:prstGeom prst="rect">
             <a:avLst/>
@@ -13793,7 +13793,7 @@
           <a:ln/>
         </p:spPr>
         <p:txBody>
-          <a:bodyPr wrap="square" lIns="0" tIns="0" rIns="0" bIns="0" rtlCol="0" anchor="ctr">
+          <a:bodyPr wrap="square" lIns="0" tIns="0" rIns="0" bIns="0" rtlCol="0" anchor="t">
             <a:normAutofit/>
           </a:bodyPr>
           <a:lstStyle/>
@@ -13824,8 +13824,8 @@
         </p:nvSpPr>
         <p:spPr>
           <a:xfrm>
-            <a:off x="512064" y="1719072"/>
-            <a:ext cx="2340864" cy="950976"/>
+            <a:off x="512064" y="1701165"/>
+            <a:ext cx="2340864" cy="996315"/>
           </a:xfrm>
           <a:prstGeom prst="rect">
             <a:avLst/>
@@ -13972,7 +13972,7 @@
         <p:spPr>
           <a:xfrm>
             <a:off x="3785616" y="1335024"/>
-            <a:ext cx="1975104" cy="310896"/>
+            <a:ext cx="1975104" cy="311277"/>
           </a:xfrm>
           <a:prstGeom prst="rect">
             <a:avLst/>
@@ -13981,7 +13981,7 @@
           <a:ln/>
         </p:spPr>
         <p:txBody>
-          <a:bodyPr wrap="square" lIns="0" tIns="0" rIns="0" bIns="0" rtlCol="0" anchor="ctr">
+          <a:bodyPr wrap="square" lIns="0" tIns="0" rIns="0" bIns="0" rtlCol="0" anchor="t">
             <a:normAutofit/>
           </a:bodyPr>
           <a:lstStyle/>
@@ -14012,8 +14012,8 @@
         </p:nvSpPr>
         <p:spPr>
           <a:xfrm>
-            <a:off x="3401568" y="1719072"/>
-            <a:ext cx="2340864" cy="950976"/>
+            <a:off x="3401568" y="1701165"/>
+            <a:ext cx="2340864" cy="996315"/>
           </a:xfrm>
           <a:prstGeom prst="rect">
             <a:avLst/>
@@ -14160,7 +14160,7 @@
         <p:spPr>
           <a:xfrm>
             <a:off x="6675120" y="1335024"/>
-            <a:ext cx="1975104" cy="310896"/>
+            <a:ext cx="1975104" cy="311277"/>
           </a:xfrm>
           <a:prstGeom prst="rect">
             <a:avLst/>
@@ -14169,7 +14169,7 @@
           <a:ln/>
         </p:spPr>
         <p:txBody>
-          <a:bodyPr wrap="square" lIns="0" tIns="0" rIns="0" bIns="0" rtlCol="0" anchor="ctr">
+          <a:bodyPr wrap="square" lIns="0" tIns="0" rIns="0" bIns="0" rtlCol="0" anchor="t">
             <a:normAutofit/>
           </a:bodyPr>
           <a:lstStyle/>
@@ -14200,8 +14200,8 @@
         </p:nvSpPr>
         <p:spPr>
           <a:xfrm>
-            <a:off x="6291072" y="1719072"/>
-            <a:ext cx="2340864" cy="950976"/>
+            <a:off x="6291072" y="1701165"/>
+            <a:ext cx="2340864" cy="996315"/>
           </a:xfrm>
           <a:prstGeom prst="rect">
             <a:avLst/>
@@ -14328,7 +14328,7 @@
         <p:spPr>
           <a:xfrm>
             <a:off x="896112" y="3163824"/>
-            <a:ext cx="1975104" cy="310896"/>
+            <a:ext cx="1975104" cy="311277"/>
           </a:xfrm>
           <a:prstGeom prst="rect">
             <a:avLst/>
@@ -14337,7 +14337,7 @@
           <a:ln/>
         </p:spPr>
         <p:txBody>
-          <a:bodyPr wrap="square" lIns="0" tIns="0" rIns="0" bIns="0" rtlCol="0" anchor="ctr">
+          <a:bodyPr wrap="square" lIns="0" tIns="0" rIns="0" bIns="0" rtlCol="0" anchor="t">
             <a:normAutofit/>
           </a:bodyPr>
           <a:lstStyle/>
@@ -14368,8 +14368,8 @@
         </p:nvSpPr>
         <p:spPr>
           <a:xfrm>
-            <a:off x="512064" y="3547872"/>
-            <a:ext cx="2340864" cy="950976"/>
+            <a:off x="512064" y="3529965"/>
+            <a:ext cx="2340864" cy="996315"/>
           </a:xfrm>
           <a:prstGeom prst="rect">
             <a:avLst/>
@@ -14516,7 +14516,7 @@
         <p:spPr>
           <a:xfrm>
             <a:off x="3785616" y="3163824"/>
-            <a:ext cx="1975104" cy="310896"/>
+            <a:ext cx="1975104" cy="311277"/>
           </a:xfrm>
           <a:prstGeom prst="rect">
             <a:avLst/>
@@ -14525,7 +14525,7 @@
           <a:ln/>
         </p:spPr>
         <p:txBody>
-          <a:bodyPr wrap="square" lIns="0" tIns="0" rIns="0" bIns="0" rtlCol="0" anchor="ctr">
+          <a:bodyPr wrap="square" lIns="0" tIns="0" rIns="0" bIns="0" rtlCol="0" anchor="t">
             <a:normAutofit/>
           </a:bodyPr>
           <a:lstStyle/>
@@ -14556,8 +14556,8 @@
         </p:nvSpPr>
         <p:spPr>
           <a:xfrm>
-            <a:off x="3401568" y="3547872"/>
-            <a:ext cx="2340864" cy="950976"/>
+            <a:off x="3401568" y="3529965"/>
+            <a:ext cx="2340864" cy="996315"/>
           </a:xfrm>
           <a:prstGeom prst="rect">
             <a:avLst/>

--- a/decks/day4/module-3-workflow-fundamentals.pptx
+++ b/decks/day4/module-3-workflow-fundamentals.pptx
@@ -1233,7 +1233,7 @@
           <a:p>
             <a:r>
               <a:rPr lang="en-US" dirty="0"/>
-              <a:t>• Supersedes this deck's earlier one-slide "mention only, out of scope" stub — the workshop now teaches this content directly rather than just flagging its existence, matching the doc's own Overview section (key-benefit labels are verbatim). Still not built into today's lab, which stays WorkflowBuilder-based.
+              <a:t>• Supersedes this deck's earlier one-slide "mention only, out of scope" stub — the workshop now teaches this content directly rather than just flagging its existence, matching the doc's own Overview section (key-benefit labels are verbatim). The required Parts A-C of today's lab stay WorkflowBuilder-based; an optional, provided-complete Part D was later added that loads a declarative YAML workflow via WorkflowFactory, for direct contrast.
 • GROUNDING SOURCE: https://learn.microsoft.com/en-us/agent-framework/workflows/declarative?pivots=programming-language-python#overview</a:t>
             </a:r>
             <a:endParaRPr lang="en-US" dirty="0"/>
@@ -1322,7 +1322,7 @@
           <a:p>
             <a:r>
               <a:rPr lang="en-US" dirty="0"/>
-              <a:t>• Verbatim table from the doc. Today's lab sits squarely in the Programmatic column ("integration with existing Python code," "complex custom logic") — worth naming explicitly when this table is on screen.
+              <a:t>• Verbatim table from the doc. The required Parts A-C of today's lab sit squarely in the Programmatic column ("integration with existing Python code," "complex custom logic") — worth naming explicitly when this table is on screen. The optional Part D is the Declarative counter-example.
 • GROUNDING SOURCE: https://learn.microsoft.com/en-us/agent-framework/workflows/declarative?pivots=programming-language-python#when-to-use-declarative-vs-programmatic-workflows</a:t>
             </a:r>
             <a:endParaRPr lang="en-US" dirty="0"/>
